--- a/slides/19_ML_intro.pptx
+++ b/slides/19_ML_intro.pptx
@@ -5,10 +5,10 @@
     <p:sldMasterId id="2147483769" r:id="rId1"/>
   </p:sldMasterIdLst>
   <p:notesMasterIdLst>
-    <p:notesMasterId r:id="rId33"/>
+    <p:notesMasterId r:id="rId35"/>
   </p:notesMasterIdLst>
   <p:handoutMasterIdLst>
-    <p:handoutMasterId r:id="rId34"/>
+    <p:handoutMasterId r:id="rId36"/>
   </p:handoutMasterIdLst>
   <p:sldIdLst>
     <p:sldId id="455" r:id="rId2"/>
@@ -35,18 +35,20 @@
     <p:sldId id="413" r:id="rId23"/>
     <p:sldId id="505" r:id="rId24"/>
     <p:sldId id="493" r:id="rId25"/>
-    <p:sldId id="495" r:id="rId26"/>
-    <p:sldId id="489" r:id="rId27"/>
-    <p:sldId id="490" r:id="rId28"/>
-    <p:sldId id="491" r:id="rId29"/>
-    <p:sldId id="506" r:id="rId30"/>
-    <p:sldId id="494" r:id="rId31"/>
-    <p:sldId id="508" r:id="rId32"/>
+    <p:sldId id="514" r:id="rId26"/>
+    <p:sldId id="495" r:id="rId27"/>
+    <p:sldId id="489" r:id="rId28"/>
+    <p:sldId id="490" r:id="rId29"/>
+    <p:sldId id="491" r:id="rId30"/>
+    <p:sldId id="506" r:id="rId31"/>
+    <p:sldId id="494" r:id="rId32"/>
+    <p:sldId id="508" r:id="rId33"/>
+    <p:sldId id="515" r:id="rId34"/>
   </p:sldIdLst>
   <p:sldSz cx="12192000" cy="6858000"/>
   <p:notesSz cx="7099300" cy="10234613"/>
   <p:custDataLst>
-    <p:tags r:id="rId35"/>
+    <p:tags r:id="rId37"/>
   </p:custDataLst>
   <p:defaultTextStyle>
     <a:defPPr>
@@ -188,6 +190,7 @@
           <p14:sldIdLst>
             <p14:sldId id="505"/>
             <p14:sldId id="493"/>
+            <p14:sldId id="514"/>
             <p14:sldId id="495"/>
             <p14:sldId id="489"/>
             <p14:sldId id="490"/>
@@ -199,6 +202,7 @@
         <p14:section name="How are models used in AI" id="{C564B212-4CB4-4076-B86F-55C18B0F30DD}">
           <p14:sldIdLst>
             <p14:sldId id="508"/>
+            <p14:sldId id="515"/>
           </p14:sldIdLst>
         </p14:section>
       </p14:sectionLst>
@@ -18245,7 +18249,7 @@
             </a:ln>
             <a:extLst>
               <a:ext uri="{AF507438-7753-43e0-B8FC-AC1667EBCBE1}">
-                <a14:hiddenEffects xmlns:a14="http://schemas.microsoft.com/office/drawing/2010/main" xmlns="">
+                <a14:hiddenEffects xmlns="" xmlns:a14="http://schemas.microsoft.com/office/drawing/2010/main">
                   <a:effectLst>
                     <a:outerShdw dist="35921" dir="2700000" algn="ctr" rotWithShape="0">
                       <a:schemeClr val="bg2"/>
@@ -18313,7 +18317,7 @@
             <a:effectLst/>
             <a:extLst>
               <a:ext uri="{AF507438-7753-43e0-B8FC-AC1667EBCBE1}">
-                <a14:hiddenEffects xmlns:a14="http://schemas.microsoft.com/office/drawing/2010/main" xmlns="">
+                <a14:hiddenEffects xmlns="" xmlns:a14="http://schemas.microsoft.com/office/drawing/2010/main">
                   <a:effectLst>
                     <a:outerShdw dist="35921" dir="2700000" algn="ctr" rotWithShape="0">
                       <a:schemeClr val="bg2"/>
@@ -18367,7 +18371,7 @@
             <a:effectLst/>
             <a:extLst>
               <a:ext uri="{AF507438-7753-43e0-B8FC-AC1667EBCBE1}">
-                <a14:hiddenEffects xmlns:a14="http://schemas.microsoft.com/office/drawing/2010/main" xmlns="">
+                <a14:hiddenEffects xmlns="" xmlns:a14="http://schemas.microsoft.com/office/drawing/2010/main">
                   <a:effectLst>
                     <a:outerShdw dist="35921" dir="2700000" algn="ctr" rotWithShape="0">
                       <a:schemeClr val="bg2"/>
@@ -18420,12 +18424,12 @@
             <a:effectLst/>
             <a:extLst>
               <a:ext uri="{909E8E84-426E-40dd-AFC4-6F175D3DCCD1}">
-                <a14:hiddenFill xmlns:a14="http://schemas.microsoft.com/office/drawing/2010/main" xmlns="">
+                <a14:hiddenFill xmlns="" xmlns:a14="http://schemas.microsoft.com/office/drawing/2010/main">
                   <a:noFill/>
                 </a14:hiddenFill>
               </a:ext>
               <a:ext uri="{AF507438-7753-43e0-B8FC-AC1667EBCBE1}">
-                <a14:hiddenEffects xmlns:a14="http://schemas.microsoft.com/office/drawing/2010/main" xmlns="">
+                <a14:hiddenEffects xmlns="" xmlns:a14="http://schemas.microsoft.com/office/drawing/2010/main">
                   <a:effectLst>
                     <a:outerShdw dist="35921" dir="2700000" algn="ctr" rotWithShape="0">
                       <a:schemeClr val="bg2"/>
@@ -18499,14 +18503,14 @@
             <a:effectLst/>
             <a:extLst>
               <a:ext uri="{909E8E84-426E-40dd-AFC4-6F175D3DCCD1}">
-                <a14:hiddenFill xmlns:a14="http://schemas.microsoft.com/office/drawing/2010/main" xmlns="">
+                <a14:hiddenFill xmlns="" xmlns:a14="http://schemas.microsoft.com/office/drawing/2010/main">
                   <a:solidFill>
                     <a:schemeClr val="accent1"/>
                   </a:solidFill>
                 </a14:hiddenFill>
               </a:ext>
               <a:ext uri="{91240B29-F687-4f45-9708-019B960494DF}">
-                <a14:hiddenLine xmlns:a14="http://schemas.microsoft.com/office/drawing/2010/main" xmlns="" w="9525">
+                <a14:hiddenLine xmlns="" xmlns:a14="http://schemas.microsoft.com/office/drawing/2010/main" w="9525">
                   <a:solidFill>
                     <a:schemeClr val="tx1"/>
                   </a:solidFill>
@@ -18516,7 +18520,7 @@
                 </a14:hiddenLine>
               </a:ext>
               <a:ext uri="{AF507438-7753-43e0-B8FC-AC1667EBCBE1}">
-                <a14:hiddenEffects xmlns:a14="http://schemas.microsoft.com/office/drawing/2010/main" xmlns="">
+                <a14:hiddenEffects xmlns="" xmlns:a14="http://schemas.microsoft.com/office/drawing/2010/main">
                   <a:effectLst>
                     <a:outerShdw dist="35921" dir="2700000" algn="ctr" rotWithShape="0">
                       <a:schemeClr val="bg2"/>
@@ -23996,93 +24000,93 @@
           <a:custGeom>
             <a:avLst/>
             <a:gdLst>
-              <a:gd name="connsiteX0" fmla="*/ 0 w 4243589"/>
-              <a:gd name="connsiteY0" fmla="*/ 0 h 18288"/>
-              <a:gd name="connsiteX1" fmla="*/ 478919 w 4243589"/>
-              <a:gd name="connsiteY1" fmla="*/ 0 h 18288"/>
-              <a:gd name="connsiteX2" fmla="*/ 957839 w 4243589"/>
-              <a:gd name="connsiteY2" fmla="*/ 0 h 18288"/>
-              <a:gd name="connsiteX3" fmla="*/ 1521630 w 4243589"/>
-              <a:gd name="connsiteY3" fmla="*/ 0 h 18288"/>
-              <a:gd name="connsiteX4" fmla="*/ 2212729 w 4243589"/>
-              <a:gd name="connsiteY4" fmla="*/ 0 h 18288"/>
-              <a:gd name="connsiteX5" fmla="*/ 2734084 w 4243589"/>
-              <a:gd name="connsiteY5" fmla="*/ 0 h 18288"/>
-              <a:gd name="connsiteX6" fmla="*/ 3255439 w 4243589"/>
-              <a:gd name="connsiteY6" fmla="*/ 0 h 18288"/>
-              <a:gd name="connsiteX7" fmla="*/ 4243589 w 4243589"/>
-              <a:gd name="connsiteY7" fmla="*/ 0 h 18288"/>
-              <a:gd name="connsiteX8" fmla="*/ 4243589 w 4243589"/>
-              <a:gd name="connsiteY8" fmla="*/ 18288 h 18288"/>
-              <a:gd name="connsiteX9" fmla="*/ 3594926 w 4243589"/>
-              <a:gd name="connsiteY9" fmla="*/ 18288 h 18288"/>
-              <a:gd name="connsiteX10" fmla="*/ 3073571 w 4243589"/>
-              <a:gd name="connsiteY10" fmla="*/ 18288 h 18288"/>
-              <a:gd name="connsiteX11" fmla="*/ 2552216 w 4243589"/>
-              <a:gd name="connsiteY11" fmla="*/ 18288 h 18288"/>
-              <a:gd name="connsiteX12" fmla="*/ 1903553 w 4243589"/>
-              <a:gd name="connsiteY12" fmla="*/ 18288 h 18288"/>
-              <a:gd name="connsiteX13" fmla="*/ 1212454 w 4243589"/>
-              <a:gd name="connsiteY13" fmla="*/ 18288 h 18288"/>
-              <a:gd name="connsiteX14" fmla="*/ 733535 w 4243589"/>
-              <a:gd name="connsiteY14" fmla="*/ 18288 h 18288"/>
-              <a:gd name="connsiteX15" fmla="*/ 0 w 4243589"/>
-              <a:gd name="connsiteY15" fmla="*/ 18288 h 18288"/>
-              <a:gd name="connsiteX16" fmla="*/ 0 w 4243589"/>
-              <a:gd name="connsiteY16" fmla="*/ 0 h 18288"/>
+              <a:gd name="csX0" fmla="*/ 0 w 4243589"/>
+              <a:gd name="csY0" fmla="*/ 0 h 18288"/>
+              <a:gd name="csX1" fmla="*/ 478919 w 4243589"/>
+              <a:gd name="csY1" fmla="*/ 0 h 18288"/>
+              <a:gd name="csX2" fmla="*/ 957839 w 4243589"/>
+              <a:gd name="csY2" fmla="*/ 0 h 18288"/>
+              <a:gd name="csX3" fmla="*/ 1521630 w 4243589"/>
+              <a:gd name="csY3" fmla="*/ 0 h 18288"/>
+              <a:gd name="csX4" fmla="*/ 2212729 w 4243589"/>
+              <a:gd name="csY4" fmla="*/ 0 h 18288"/>
+              <a:gd name="csX5" fmla="*/ 2734084 w 4243589"/>
+              <a:gd name="csY5" fmla="*/ 0 h 18288"/>
+              <a:gd name="csX6" fmla="*/ 3255439 w 4243589"/>
+              <a:gd name="csY6" fmla="*/ 0 h 18288"/>
+              <a:gd name="csX7" fmla="*/ 4243589 w 4243589"/>
+              <a:gd name="csY7" fmla="*/ 0 h 18288"/>
+              <a:gd name="csX8" fmla="*/ 4243589 w 4243589"/>
+              <a:gd name="csY8" fmla="*/ 18288 h 18288"/>
+              <a:gd name="csX9" fmla="*/ 3594926 w 4243589"/>
+              <a:gd name="csY9" fmla="*/ 18288 h 18288"/>
+              <a:gd name="csX10" fmla="*/ 3073571 w 4243589"/>
+              <a:gd name="csY10" fmla="*/ 18288 h 18288"/>
+              <a:gd name="csX11" fmla="*/ 2552216 w 4243589"/>
+              <a:gd name="csY11" fmla="*/ 18288 h 18288"/>
+              <a:gd name="csX12" fmla="*/ 1903553 w 4243589"/>
+              <a:gd name="csY12" fmla="*/ 18288 h 18288"/>
+              <a:gd name="csX13" fmla="*/ 1212454 w 4243589"/>
+              <a:gd name="csY13" fmla="*/ 18288 h 18288"/>
+              <a:gd name="csX14" fmla="*/ 733535 w 4243589"/>
+              <a:gd name="csY14" fmla="*/ 18288 h 18288"/>
+              <a:gd name="csX15" fmla="*/ 0 w 4243589"/>
+              <a:gd name="csY15" fmla="*/ 18288 h 18288"/>
+              <a:gd name="csX16" fmla="*/ 0 w 4243589"/>
+              <a:gd name="csY16" fmla="*/ 0 h 18288"/>
             </a:gdLst>
             <a:ahLst/>
             <a:cxnLst>
               <a:cxn ang="0">
-                <a:pos x="connsiteX0" y="connsiteY0"/>
+                <a:pos x="csX0" y="csY0"/>
               </a:cxn>
               <a:cxn ang="0">
-                <a:pos x="connsiteX1" y="connsiteY1"/>
+                <a:pos x="csX1" y="csY1"/>
               </a:cxn>
               <a:cxn ang="0">
-                <a:pos x="connsiteX2" y="connsiteY2"/>
+                <a:pos x="csX2" y="csY2"/>
               </a:cxn>
               <a:cxn ang="0">
-                <a:pos x="connsiteX3" y="connsiteY3"/>
+                <a:pos x="csX3" y="csY3"/>
               </a:cxn>
               <a:cxn ang="0">
-                <a:pos x="connsiteX4" y="connsiteY4"/>
+                <a:pos x="csX4" y="csY4"/>
               </a:cxn>
               <a:cxn ang="0">
-                <a:pos x="connsiteX5" y="connsiteY5"/>
+                <a:pos x="csX5" y="csY5"/>
               </a:cxn>
               <a:cxn ang="0">
-                <a:pos x="connsiteX6" y="connsiteY6"/>
+                <a:pos x="csX6" y="csY6"/>
               </a:cxn>
               <a:cxn ang="0">
-                <a:pos x="connsiteX7" y="connsiteY7"/>
+                <a:pos x="csX7" y="csY7"/>
               </a:cxn>
               <a:cxn ang="0">
-                <a:pos x="connsiteX8" y="connsiteY8"/>
+                <a:pos x="csX8" y="csY8"/>
               </a:cxn>
               <a:cxn ang="0">
-                <a:pos x="connsiteX9" y="connsiteY9"/>
+                <a:pos x="csX9" y="csY9"/>
               </a:cxn>
               <a:cxn ang="0">
-                <a:pos x="connsiteX10" y="connsiteY10"/>
+                <a:pos x="csX10" y="csY10"/>
               </a:cxn>
               <a:cxn ang="0">
-                <a:pos x="connsiteX11" y="connsiteY11"/>
+                <a:pos x="csX11" y="csY11"/>
               </a:cxn>
               <a:cxn ang="0">
-                <a:pos x="connsiteX12" y="connsiteY12"/>
+                <a:pos x="csX12" y="csY12"/>
               </a:cxn>
               <a:cxn ang="0">
-                <a:pos x="connsiteX13" y="connsiteY13"/>
+                <a:pos x="csX13" y="csY13"/>
               </a:cxn>
               <a:cxn ang="0">
-                <a:pos x="connsiteX14" y="connsiteY14"/>
+                <a:pos x="csX14" y="csY14"/>
               </a:cxn>
               <a:cxn ang="0">
-                <a:pos x="connsiteX15" y="connsiteY15"/>
+                <a:pos x="csX15" y="csY15"/>
               </a:cxn>
               <a:cxn ang="0">
-                <a:pos x="connsiteX16" y="connsiteY16"/>
+                <a:pos x="csX16" y="csY16"/>
               </a:cxn>
             </a:cxnLst>
             <a:rect l="l" t="t" r="r" b="b"/>
@@ -24914,93 +24918,93 @@
           <a:custGeom>
             <a:avLst/>
             <a:gdLst>
-              <a:gd name="connsiteX0" fmla="*/ 0 w 4243589"/>
-              <a:gd name="connsiteY0" fmla="*/ 0 h 18288"/>
-              <a:gd name="connsiteX1" fmla="*/ 478919 w 4243589"/>
-              <a:gd name="connsiteY1" fmla="*/ 0 h 18288"/>
-              <a:gd name="connsiteX2" fmla="*/ 957839 w 4243589"/>
-              <a:gd name="connsiteY2" fmla="*/ 0 h 18288"/>
-              <a:gd name="connsiteX3" fmla="*/ 1521630 w 4243589"/>
-              <a:gd name="connsiteY3" fmla="*/ 0 h 18288"/>
-              <a:gd name="connsiteX4" fmla="*/ 2212729 w 4243589"/>
-              <a:gd name="connsiteY4" fmla="*/ 0 h 18288"/>
-              <a:gd name="connsiteX5" fmla="*/ 2734084 w 4243589"/>
-              <a:gd name="connsiteY5" fmla="*/ 0 h 18288"/>
-              <a:gd name="connsiteX6" fmla="*/ 3255439 w 4243589"/>
-              <a:gd name="connsiteY6" fmla="*/ 0 h 18288"/>
-              <a:gd name="connsiteX7" fmla="*/ 4243589 w 4243589"/>
-              <a:gd name="connsiteY7" fmla="*/ 0 h 18288"/>
-              <a:gd name="connsiteX8" fmla="*/ 4243589 w 4243589"/>
-              <a:gd name="connsiteY8" fmla="*/ 18288 h 18288"/>
-              <a:gd name="connsiteX9" fmla="*/ 3594926 w 4243589"/>
-              <a:gd name="connsiteY9" fmla="*/ 18288 h 18288"/>
-              <a:gd name="connsiteX10" fmla="*/ 3073571 w 4243589"/>
-              <a:gd name="connsiteY10" fmla="*/ 18288 h 18288"/>
-              <a:gd name="connsiteX11" fmla="*/ 2552216 w 4243589"/>
-              <a:gd name="connsiteY11" fmla="*/ 18288 h 18288"/>
-              <a:gd name="connsiteX12" fmla="*/ 1903553 w 4243589"/>
-              <a:gd name="connsiteY12" fmla="*/ 18288 h 18288"/>
-              <a:gd name="connsiteX13" fmla="*/ 1212454 w 4243589"/>
-              <a:gd name="connsiteY13" fmla="*/ 18288 h 18288"/>
-              <a:gd name="connsiteX14" fmla="*/ 733535 w 4243589"/>
-              <a:gd name="connsiteY14" fmla="*/ 18288 h 18288"/>
-              <a:gd name="connsiteX15" fmla="*/ 0 w 4243589"/>
-              <a:gd name="connsiteY15" fmla="*/ 18288 h 18288"/>
-              <a:gd name="connsiteX16" fmla="*/ 0 w 4243589"/>
-              <a:gd name="connsiteY16" fmla="*/ 0 h 18288"/>
+              <a:gd name="csX0" fmla="*/ 0 w 4243589"/>
+              <a:gd name="csY0" fmla="*/ 0 h 18288"/>
+              <a:gd name="csX1" fmla="*/ 478919 w 4243589"/>
+              <a:gd name="csY1" fmla="*/ 0 h 18288"/>
+              <a:gd name="csX2" fmla="*/ 957839 w 4243589"/>
+              <a:gd name="csY2" fmla="*/ 0 h 18288"/>
+              <a:gd name="csX3" fmla="*/ 1521630 w 4243589"/>
+              <a:gd name="csY3" fmla="*/ 0 h 18288"/>
+              <a:gd name="csX4" fmla="*/ 2212729 w 4243589"/>
+              <a:gd name="csY4" fmla="*/ 0 h 18288"/>
+              <a:gd name="csX5" fmla="*/ 2734084 w 4243589"/>
+              <a:gd name="csY5" fmla="*/ 0 h 18288"/>
+              <a:gd name="csX6" fmla="*/ 3255439 w 4243589"/>
+              <a:gd name="csY6" fmla="*/ 0 h 18288"/>
+              <a:gd name="csX7" fmla="*/ 4243589 w 4243589"/>
+              <a:gd name="csY7" fmla="*/ 0 h 18288"/>
+              <a:gd name="csX8" fmla="*/ 4243589 w 4243589"/>
+              <a:gd name="csY8" fmla="*/ 18288 h 18288"/>
+              <a:gd name="csX9" fmla="*/ 3594926 w 4243589"/>
+              <a:gd name="csY9" fmla="*/ 18288 h 18288"/>
+              <a:gd name="csX10" fmla="*/ 3073571 w 4243589"/>
+              <a:gd name="csY10" fmla="*/ 18288 h 18288"/>
+              <a:gd name="csX11" fmla="*/ 2552216 w 4243589"/>
+              <a:gd name="csY11" fmla="*/ 18288 h 18288"/>
+              <a:gd name="csX12" fmla="*/ 1903553 w 4243589"/>
+              <a:gd name="csY12" fmla="*/ 18288 h 18288"/>
+              <a:gd name="csX13" fmla="*/ 1212454 w 4243589"/>
+              <a:gd name="csY13" fmla="*/ 18288 h 18288"/>
+              <a:gd name="csX14" fmla="*/ 733535 w 4243589"/>
+              <a:gd name="csY14" fmla="*/ 18288 h 18288"/>
+              <a:gd name="csX15" fmla="*/ 0 w 4243589"/>
+              <a:gd name="csY15" fmla="*/ 18288 h 18288"/>
+              <a:gd name="csX16" fmla="*/ 0 w 4243589"/>
+              <a:gd name="csY16" fmla="*/ 0 h 18288"/>
             </a:gdLst>
             <a:ahLst/>
             <a:cxnLst>
               <a:cxn ang="0">
-                <a:pos x="connsiteX0" y="connsiteY0"/>
+                <a:pos x="csX0" y="csY0"/>
               </a:cxn>
               <a:cxn ang="0">
-                <a:pos x="connsiteX1" y="connsiteY1"/>
+                <a:pos x="csX1" y="csY1"/>
               </a:cxn>
               <a:cxn ang="0">
-                <a:pos x="connsiteX2" y="connsiteY2"/>
+                <a:pos x="csX2" y="csY2"/>
               </a:cxn>
               <a:cxn ang="0">
-                <a:pos x="connsiteX3" y="connsiteY3"/>
+                <a:pos x="csX3" y="csY3"/>
               </a:cxn>
               <a:cxn ang="0">
-                <a:pos x="connsiteX4" y="connsiteY4"/>
+                <a:pos x="csX4" y="csY4"/>
               </a:cxn>
               <a:cxn ang="0">
-                <a:pos x="connsiteX5" y="connsiteY5"/>
+                <a:pos x="csX5" y="csY5"/>
               </a:cxn>
               <a:cxn ang="0">
-                <a:pos x="connsiteX6" y="connsiteY6"/>
+                <a:pos x="csX6" y="csY6"/>
               </a:cxn>
               <a:cxn ang="0">
-                <a:pos x="connsiteX7" y="connsiteY7"/>
+                <a:pos x="csX7" y="csY7"/>
               </a:cxn>
               <a:cxn ang="0">
-                <a:pos x="connsiteX8" y="connsiteY8"/>
+                <a:pos x="csX8" y="csY8"/>
               </a:cxn>
               <a:cxn ang="0">
-                <a:pos x="connsiteX9" y="connsiteY9"/>
+                <a:pos x="csX9" y="csY9"/>
               </a:cxn>
               <a:cxn ang="0">
-                <a:pos x="connsiteX10" y="connsiteY10"/>
+                <a:pos x="csX10" y="csY10"/>
               </a:cxn>
               <a:cxn ang="0">
-                <a:pos x="connsiteX11" y="connsiteY11"/>
+                <a:pos x="csX11" y="csY11"/>
               </a:cxn>
               <a:cxn ang="0">
-                <a:pos x="connsiteX12" y="connsiteY12"/>
+                <a:pos x="csX12" y="csY12"/>
               </a:cxn>
               <a:cxn ang="0">
-                <a:pos x="connsiteX13" y="connsiteY13"/>
+                <a:pos x="csX13" y="csY13"/>
               </a:cxn>
               <a:cxn ang="0">
-                <a:pos x="connsiteX14" y="connsiteY14"/>
+                <a:pos x="csX14" y="csY14"/>
               </a:cxn>
               <a:cxn ang="0">
-                <a:pos x="connsiteX15" y="connsiteY15"/>
+                <a:pos x="csX15" y="csY15"/>
               </a:cxn>
               <a:cxn ang="0">
-                <a:pos x="connsiteX16" y="connsiteY16"/>
+                <a:pos x="csX16" y="csY16"/>
               </a:cxn>
             </a:cxnLst>
             <a:rect l="l" t="t" r="r" b="b"/>
@@ -25938,13 +25942,13 @@
             <a:pPr eaLnBrk="1" hangingPunct="1"/>
             <a:r>
               <a:rPr lang="en-US" dirty="0"/>
-              <a:t>Training a Model</a:t>
+              <a:t>Training a ML Model for AI</a:t>
             </a:r>
           </a:p>
         </p:txBody>
       </p:sp>
-      <mc:AlternateContent xmlns:mc="http://schemas.openxmlformats.org/markup-compatibility/2006" xmlns:a14="http://schemas.microsoft.com/office/drawing/2010/main">
-        <mc:Choice Requires="a14">
+      <mc:AlternateContent xmlns:mc="http://schemas.openxmlformats.org/markup-compatibility/2006">
+        <mc:Choice xmlns:a14="http://schemas.microsoft.com/office/drawing/2010/main" Requires="a14">
           <p:sp>
             <p:nvSpPr>
               <p:cNvPr id="1283075" name="Rectangle 3"/>
@@ -25957,85 +25961,109 @@
             </p:nvSpPr>
             <p:spPr>
               <a:xfrm>
-                <a:off x="457200" y="1308745"/>
-                <a:ext cx="8856518" cy="5093316"/>
+                <a:off x="457200" y="1308744"/>
+                <a:ext cx="7239000" cy="4939656"/>
               </a:xfrm>
             </p:spPr>
             <p:txBody>
               <a:bodyPr>
-                <a:normAutofit fontScale="62500" lnSpcReduction="20000"/>
+                <a:normAutofit/>
               </a:bodyPr>
               <a:lstStyle/>
               <a:p>
                 <a:pPr marL="514350" indent="-514350">
                   <a:lnSpc>
-                    <a:spcPct val="120000"/>
+                    <a:spcPct val="100000"/>
                   </a:lnSpc>
                   <a:buFont typeface="+mj-lt"/>
                   <a:buAutoNum type="arabicPeriod"/>
                 </a:pPr>
                 <a:r>
-                  <a:rPr lang="en-US" dirty="0"/>
+                  <a:rPr lang="en-US" sz="1400" dirty="0"/>
                   <a:t>Hold a </a:t>
                 </a:r>
                 <a:r>
-                  <a:rPr lang="en-US" b="1" dirty="0"/>
+                  <a:rPr lang="en-US" sz="1400" b="1" dirty="0"/>
                   <a:t>test set </a:t>
                 </a:r>
                 <a:r>
-                  <a:rPr lang="en-US" dirty="0"/>
-                  <a:t>back to estimate the generalization error (often 20%).</a:t>
+                  <a:rPr lang="en-US" sz="1400" dirty="0"/>
+                  <a:t>back to estimate the </a:t>
+                </a:r>
+                <a:r>
+                  <a:rPr lang="en-US" sz="1400" b="1" dirty="0">
+                    <a:solidFill>
+                      <a:srgbClr val="FF0000"/>
+                    </a:solidFill>
+                  </a:rPr>
+                  <a:t>generalization error </a:t>
+                </a:r>
+                <a:r>
+                  <a:rPr lang="en-US" sz="1400" dirty="0"/>
+                  <a:t>of the final model.</a:t>
                 </a:r>
               </a:p>
               <a:p>
                 <a:pPr marL="514350" indent="-514350">
                   <a:lnSpc>
-                    <a:spcPct val="120000"/>
+                    <a:spcPct val="100000"/>
                   </a:lnSpc>
                   <a:buFont typeface="+mj-lt"/>
                   <a:buAutoNum type="arabicPeriod"/>
                 </a:pPr>
                 <a:r>
-                  <a:rPr lang="en-US" dirty="0"/>
+                  <a:rPr lang="en-US" sz="1400" dirty="0"/>
                   <a:t>Hold a </a:t>
                 </a:r>
                 <a:r>
-                  <a:rPr lang="en-US" b="1" dirty="0"/>
+                  <a:rPr lang="en-US" sz="1400" b="1" dirty="0"/>
                   <a:t>validation data </a:t>
                 </a:r>
                 <a:r>
-                  <a:rPr lang="en-US" dirty="0"/>
-                  <a:t>set back from the training data (often 20%).</a:t>
+                  <a:rPr lang="en-US" sz="1400" dirty="0"/>
+                  <a:t>set back from the training data for </a:t>
+                </a:r>
+                <a:r>
+                  <a:rPr lang="en-US" sz="1400" b="1" dirty="0">
+                    <a:solidFill>
+                      <a:srgbClr val="FF0000"/>
+                    </a:solidFill>
+                  </a:rPr>
+                  <a:t>model selection</a:t>
+                </a:r>
+                <a:r>
+                  <a:rPr lang="en-US" sz="1400" dirty="0"/>
+                  <a:t>.</a:t>
                 </a:r>
               </a:p>
               <a:p>
                 <a:pPr marL="514350" indent="-514350">
                   <a:lnSpc>
-                    <a:spcPct val="120000"/>
+                    <a:spcPct val="100000"/>
                   </a:lnSpc>
                   <a:buFont typeface="+mj-lt"/>
                   <a:buAutoNum type="arabicPeriod"/>
                 </a:pPr>
                 <a:r>
-                  <a:rPr lang="en-US" b="1" dirty="0"/>
+                  <a:rPr lang="en-US" sz="1400" b="1" dirty="0"/>
                   <a:t>Learn different models </a:t>
                 </a:r>
                 <a:r>
-                  <a:rPr lang="en-US" dirty="0"/>
+                  <a:rPr lang="en-US" sz="1400" dirty="0"/>
                   <a:t>using the training set with different </a:t>
                 </a:r>
                 <a:r>
-                  <a:rPr lang="en-US" b="1" dirty="0"/>
+                  <a:rPr lang="en-US" sz="1400" b="1" dirty="0"/>
                   <a:t>hyperparameters</a:t>
                 </a:r>
                 <a:r>
-                  <a:rPr lang="en-US" dirty="0"/>
+                  <a:rPr lang="en-US" sz="1400" dirty="0"/>
                   <a:t> (learning rate, regularization </a:t>
                 </a:r>
                 <a14:m>
                   <m:oMath xmlns:m="http://schemas.openxmlformats.org/officeDocument/2006/math">
                     <m:r>
-                      <a:rPr lang="en-US" b="0" i="1">
+                      <a:rPr lang="en-US" sz="1400" b="0" i="1">
                         <a:latin typeface="Cambria Math" panose="02040503050406030204" pitchFamily="18" charset="0"/>
                       </a:rPr>
                       <m:t>𝜆</m:t>
@@ -26043,97 +26071,117 @@
                   </m:oMath>
                 </a14:m>
                 <a:r>
-                  <a:rPr lang="en-US" dirty="0"/>
-                  <a:t>, maximal decision tree depth, selected features,… ). Often, a grid of possible hyperparameter combinations or some greedy search is used.</a:t>
+                  <a:rPr lang="en-US" sz="1400" dirty="0"/>
+                  <a:t>, maximal decision tree depth, selected features,… ). A grid search over possible hyperparameter combinations, greedy search, or other experimental designs can be used.</a:t>
                 </a:r>
               </a:p>
               <a:p>
                 <a:pPr marL="514350" indent="-514350">
                   <a:lnSpc>
-                    <a:spcPct val="120000"/>
+                    <a:spcPct val="100000"/>
                   </a:lnSpc>
                   <a:buFont typeface="+mj-lt"/>
                   <a:buAutoNum type="arabicPeriod"/>
                 </a:pPr>
                 <a:r>
-                  <a:rPr lang="en-US" b="1" dirty="0"/>
-                  <a:t>Evaluate the models </a:t>
+                  <a:rPr lang="en-US" sz="1400" b="1" dirty="0"/>
+                  <a:t>Evaluate the trained models </a:t>
                 </a:r>
                 <a:r>
-                  <a:rPr lang="en-US" dirty="0"/>
-                  <a:t>using the validation data and choose the model with the best accuracy. Selecting the right type of model, hyperparameters, and features is called </a:t>
+                  <a:rPr lang="en-US" sz="1400" dirty="0"/>
+                  <a:t>using the validation data and choose the model with the </a:t>
                 </a:r>
                 <a:r>
-                  <a:rPr lang="en-US" b="1" dirty="0"/>
-                  <a:t>model selection/hyper parameter tuning</a:t>
+                  <a:rPr lang="en-US" sz="1400" b="1" dirty="0">
+                    <a:solidFill>
+                      <a:srgbClr val="FF0000"/>
+                    </a:solidFill>
+                  </a:rPr>
+                  <a:t>best performance for the AI agent</a:t>
                 </a:r>
                 <a:r>
-                  <a:rPr lang="en-US" dirty="0"/>
+                  <a:rPr lang="en-US" sz="1400" dirty="0"/>
+                  <a:t> (this is not necessarily accuracy). Selecting the right type of model, hyperparameters, and features is called </a:t>
+                </a:r>
+                <a:r>
+                  <a:rPr lang="en-US" sz="1400" b="1" dirty="0"/>
+                  <a:t>model selection/hyperparameter tuning</a:t>
+                </a:r>
+                <a:r>
+                  <a:rPr lang="en-US" sz="1400" dirty="0"/>
                   <a:t>.</a:t>
                 </a:r>
               </a:p>
               <a:p>
                 <a:pPr marL="514350" indent="-514350">
                   <a:lnSpc>
-                    <a:spcPct val="120000"/>
+                    <a:spcPct val="100000"/>
                   </a:lnSpc>
                   <a:buFont typeface="+mj-lt"/>
                   <a:buAutoNum type="arabicPeriod"/>
                 </a:pPr>
                 <a:r>
-                  <a:rPr lang="en-US" b="1" dirty="0"/>
+                  <a:rPr lang="en-US" sz="1400" b="1" dirty="0"/>
                   <a:t>Learn the final model </a:t>
                 </a:r>
                 <a:r>
-                  <a:rPr lang="en-US" dirty="0"/>
-                  <a:t>with the chosen hyperparameters using all training (including validation data).</a:t>
+                  <a:rPr lang="en-US" sz="1400" dirty="0"/>
+                  <a:t>with the chosen hyperparameters using all training data (including the validation data). Use the test data to estimate the </a:t>
+                </a:r>
+                <a:r>
+                  <a:rPr lang="en-US" sz="1400" b="1" dirty="0"/>
+                  <a:t>generalization error. </a:t>
+                </a:r>
+                <a:r>
+                  <a:rPr lang="en-US" sz="1400" dirty="0"/>
+                  <a:t>This will show the agent’s performance on new, unseen data.</a:t>
                 </a:r>
               </a:p>
               <a:p>
                 <a:pPr>
                   <a:lnSpc>
-                    <a:spcPct val="120000"/>
+                    <a:spcPct val="100000"/>
                   </a:lnSpc>
                 </a:pPr>
-                <a:endParaRPr lang="en-US" dirty="0"/>
+                <a:endParaRPr lang="en-US" sz="1400" dirty="0"/>
               </a:p>
               <a:p>
                 <a:pPr>
                   <a:lnSpc>
-                    <a:spcPct val="120000"/>
+                    <a:spcPct val="100000"/>
                   </a:lnSpc>
                 </a:pPr>
                 <a:r>
-                  <a:rPr lang="en-US" dirty="0"/>
+                  <a:rPr lang="en-US" sz="1400" dirty="0"/>
                   <a:t>Notes: </a:t>
                 </a:r>
               </a:p>
               <a:p>
                 <a:pPr lvl="1">
                   <a:lnSpc>
-                    <a:spcPct val="120000"/>
+                    <a:spcPct val="100000"/>
                   </a:lnSpc>
                 </a:pPr>
                 <a:r>
-                  <a:rPr lang="en-US" dirty="0"/>
+                  <a:rPr lang="en-US" sz="1400" dirty="0"/>
                   <a:t>The validation set was not used for training with different hyperparameters, so we get an estimate of the generalization error for comparing different hyperparameter settings.</a:t>
                 </a:r>
               </a:p>
               <a:p>
                 <a:pPr lvl="1">
                   <a:lnSpc>
-                    <a:spcPct val="120000"/>
+                    <a:spcPct val="100000"/>
                   </a:lnSpc>
                 </a:pPr>
                 <a:r>
-                  <a:rPr lang="en-US" dirty="0"/>
-                  <a:t>If no model selection is necessary, then no validation set is used.</a:t>
+                  <a:rPr lang="en-US" sz="1400" dirty="0"/>
+                  <a:t>If no model selection is necessary, then no validation set is necessary.</a:t>
                 </a:r>
               </a:p>
             </p:txBody>
           </p:sp>
         </mc:Choice>
-        <mc:Fallback xmlns="">
+        <mc:Fallback>
           <p:sp>
             <p:nvSpPr>
               <p:cNvPr id="1283075" name="Rectangle 3"/>
@@ -26146,13 +26194,13 @@
             </p:nvSpPr>
             <p:spPr>
               <a:xfrm>
-                <a:off x="457200" y="1308745"/>
-                <a:ext cx="8856518" cy="5093316"/>
+                <a:off x="457200" y="1308744"/>
+                <a:ext cx="7239000" cy="4939656"/>
               </a:xfrm>
               <a:blipFill>
                 <a:blip r:embed="rId3"/>
                 <a:stretch>
-                  <a:fillRect l="-551" t="-719"/>
+                  <a:fillRect l="-253" t="-370" r="-673"/>
                 </a:stretch>
               </a:blipFill>
             </p:spPr>
@@ -26187,7 +26235,7 @@
         </p:nvSpPr>
         <p:spPr bwMode="auto">
           <a:xfrm>
-            <a:off x="9542318" y="1219200"/>
+            <a:off x="8475518" y="1219200"/>
             <a:ext cx="1676400" cy="2590800"/>
           </a:xfrm>
           <a:prstGeom prst="rect">
@@ -26253,7 +26301,7 @@
         </p:nvSpPr>
         <p:spPr bwMode="auto">
           <a:xfrm>
-            <a:off x="9542318" y="4953000"/>
+            <a:off x="8475518" y="4953000"/>
             <a:ext cx="1676400" cy="914400"/>
           </a:xfrm>
           <a:prstGeom prst="rect">
@@ -26320,7 +26368,7 @@
         </p:nvSpPr>
         <p:spPr>
           <a:xfrm>
-            <a:off x="9466118" y="4883150"/>
+            <a:off x="8399318" y="4883150"/>
             <a:ext cx="1828800" cy="1054100"/>
           </a:xfrm>
           <a:prstGeom prst="rect">
@@ -26378,7 +26426,7 @@
         </p:nvSpPr>
         <p:spPr bwMode="auto">
           <a:xfrm>
-            <a:off x="9542318" y="1219200"/>
+            <a:off x="8475518" y="1219200"/>
             <a:ext cx="1676400" cy="3505200"/>
           </a:xfrm>
           <a:prstGeom prst="rect">
@@ -26446,7 +26494,7 @@
         </p:nvSpPr>
         <p:spPr bwMode="auto">
           <a:xfrm>
-            <a:off x="9618518" y="3581400"/>
+            <a:off x="8551718" y="3581400"/>
             <a:ext cx="1524000" cy="1066800"/>
           </a:xfrm>
           <a:prstGeom prst="rect">
@@ -26514,13 +26562,13 @@
           <p:nvPr/>
         </p:nvPicPr>
         <p:blipFill>
-          <a:blip r:embed="rId4">
+          <a:blip>
             <a:extLst>
               <a:ext uri="{28A0092B-C50C-407E-A947-70E740481C1C}">
                 <a14:useLocalDpi xmlns:a14="http://schemas.microsoft.com/office/drawing/2010/main" val="0"/>
               </a:ext>
               <a:ext uri="{96DAC541-7B7A-43D3-8B79-37D633B846F1}">
-                <asvg:svgBlip xmlns:asvg="http://schemas.microsoft.com/office/drawing/2016/SVG/main" r:embed="rId5"/>
+                <asvg:svgBlip xmlns:asvg="http://schemas.microsoft.com/office/drawing/2016/SVG/main" r:embed="rId4"/>
               </a:ext>
             </a:extLst>
           </a:blip>
@@ -26530,7 +26578,7 @@
         </p:blipFill>
         <p:spPr>
           <a:xfrm>
-            <a:off x="10380518" y="4953000"/>
+            <a:off x="9313718" y="4953000"/>
             <a:ext cx="914400" cy="914400"/>
           </a:xfrm>
           <a:prstGeom prst="rect">
@@ -26538,6 +26586,164 @@
           </a:prstGeom>
         </p:spPr>
       </p:pic>
+      <p:sp>
+        <p:nvSpPr>
+          <p:cNvPr id="2" name="Right Brace 1">
+            <a:extLst>
+              <a:ext uri="{FF2B5EF4-FFF2-40B4-BE49-F238E27FC236}">
+                <a16:creationId xmlns:a16="http://schemas.microsoft.com/office/drawing/2014/main" id="{A64F06D4-9CDE-8D5D-F137-9EE47F391DC0}"/>
+              </a:ext>
+            </a:extLst>
+          </p:cNvPr>
+          <p:cNvSpPr/>
+          <p:nvPr/>
+        </p:nvSpPr>
+        <p:spPr>
+          <a:xfrm>
+            <a:off x="10439400" y="4953000"/>
+            <a:ext cx="152400" cy="990600"/>
+          </a:xfrm>
+          <a:prstGeom prst="rightBrace">
+            <a:avLst/>
+          </a:prstGeom>
+        </p:spPr>
+        <p:style>
+          <a:lnRef idx="3">
+            <a:schemeClr val="accent2"/>
+          </a:lnRef>
+          <a:fillRef idx="0">
+            <a:schemeClr val="accent2"/>
+          </a:fillRef>
+          <a:effectRef idx="2">
+            <a:schemeClr val="accent2"/>
+          </a:effectRef>
+          <a:fontRef idx="minor">
+            <a:schemeClr val="tx1"/>
+          </a:fontRef>
+        </p:style>
+        <p:txBody>
+          <a:bodyPr rtlCol="0" anchor="ctr"/>
+          <a:lstStyle/>
+          <a:p>
+            <a:pPr algn="ctr"/>
+            <a:endParaRPr lang="en-US"/>
+          </a:p>
+        </p:txBody>
+      </p:sp>
+      <p:sp>
+        <p:nvSpPr>
+          <p:cNvPr id="5" name="TextBox 4">
+            <a:extLst>
+              <a:ext uri="{FF2B5EF4-FFF2-40B4-BE49-F238E27FC236}">
+                <a16:creationId xmlns:a16="http://schemas.microsoft.com/office/drawing/2014/main" id="{DC3BDC9E-DA0E-2F16-EBCA-C437796886F7}"/>
+              </a:ext>
+            </a:extLst>
+          </p:cNvPr>
+          <p:cNvSpPr txBox="1"/>
+          <p:nvPr/>
+        </p:nvSpPr>
+        <p:spPr>
+          <a:xfrm>
+            <a:off x="10591800" y="5155912"/>
+            <a:ext cx="1165674" cy="584775"/>
+          </a:xfrm>
+          <a:prstGeom prst="rect">
+            <a:avLst/>
+          </a:prstGeom>
+          <a:noFill/>
+        </p:spPr>
+        <p:txBody>
+          <a:bodyPr wrap="square" rtlCol="0">
+            <a:spAutoFit/>
+          </a:bodyPr>
+          <a:lstStyle/>
+          <a:p>
+            <a:r>
+              <a:rPr lang="en-US" sz="1600" dirty="0"/>
+              <a:t>Often 20% of the data</a:t>
+            </a:r>
+          </a:p>
+        </p:txBody>
+      </p:sp>
+      <p:sp>
+        <p:nvSpPr>
+          <p:cNvPr id="6" name="Right Brace 5">
+            <a:extLst>
+              <a:ext uri="{FF2B5EF4-FFF2-40B4-BE49-F238E27FC236}">
+                <a16:creationId xmlns:a16="http://schemas.microsoft.com/office/drawing/2014/main" id="{7A011E6B-73AB-1176-6DA0-F9F6716E3077}"/>
+              </a:ext>
+            </a:extLst>
+          </p:cNvPr>
+          <p:cNvSpPr/>
+          <p:nvPr/>
+        </p:nvSpPr>
+        <p:spPr>
+          <a:xfrm>
+            <a:off x="10409959" y="3657600"/>
+            <a:ext cx="152400" cy="990600"/>
+          </a:xfrm>
+          <a:prstGeom prst="rightBrace">
+            <a:avLst/>
+          </a:prstGeom>
+        </p:spPr>
+        <p:style>
+          <a:lnRef idx="3">
+            <a:schemeClr val="accent3"/>
+          </a:lnRef>
+          <a:fillRef idx="0">
+            <a:schemeClr val="accent3"/>
+          </a:fillRef>
+          <a:effectRef idx="2">
+            <a:schemeClr val="accent3"/>
+          </a:effectRef>
+          <a:fontRef idx="minor">
+            <a:schemeClr val="tx1"/>
+          </a:fontRef>
+        </p:style>
+        <p:txBody>
+          <a:bodyPr rtlCol="0" anchor="ctr"/>
+          <a:lstStyle/>
+          <a:p>
+            <a:pPr algn="ctr"/>
+            <a:endParaRPr lang="en-US"/>
+          </a:p>
+        </p:txBody>
+      </p:sp>
+      <p:sp>
+        <p:nvSpPr>
+          <p:cNvPr id="7" name="TextBox 6">
+            <a:extLst>
+              <a:ext uri="{FF2B5EF4-FFF2-40B4-BE49-F238E27FC236}">
+                <a16:creationId xmlns:a16="http://schemas.microsoft.com/office/drawing/2014/main" id="{87EECCFD-701E-6D37-7DE2-F1498D782FC0}"/>
+              </a:ext>
+            </a:extLst>
+          </p:cNvPr>
+          <p:cNvSpPr txBox="1"/>
+          <p:nvPr/>
+        </p:nvSpPr>
+        <p:spPr>
+          <a:xfrm>
+            <a:off x="10623395" y="3745468"/>
+            <a:ext cx="1515079" cy="738664"/>
+          </a:xfrm>
+          <a:prstGeom prst="rect">
+            <a:avLst/>
+          </a:prstGeom>
+          <a:noFill/>
+        </p:spPr>
+        <p:txBody>
+          <a:bodyPr wrap="square" rtlCol="0">
+            <a:spAutoFit/>
+          </a:bodyPr>
+          <a:lstStyle/>
+          <a:p>
+            <a:r>
+              <a:rPr lang="en-US" sz="1400" dirty="0"/>
+              <a:t>Often 10% of the training data or cross-validation.</a:t>
+            </a:r>
+          </a:p>
+        </p:txBody>
+      </p:sp>
     </p:spTree>
     <p:extLst>
       <p:ext uri="{BB962C8B-B14F-4D97-AF65-F5344CB8AC3E}">
@@ -26570,7 +26776,7 @@
                             </p:stCondLst>
                             <p:childTnLst>
                               <p:par>
-                                <p:cTn id="5" presetID="1" presetClass="entr" presetSubtype="0" fill="hold" nodeType="clickEffect">
+                                <p:cTn id="5" presetID="1" presetClass="entr" presetSubtype="0" fill="hold" grpId="0" nodeType="clickEffect">
                                   <p:stCondLst>
                                     <p:cond delay="0"/>
                                   </p:stCondLst>
@@ -26619,7 +26825,7 @@
                             </p:stCondLst>
                             <p:childTnLst>
                               <p:par>
-                                <p:cTn id="9" presetID="1" presetClass="entr" presetSubtype="0" fill="hold" nodeType="clickEffect">
+                                <p:cTn id="9" presetID="1" presetClass="entr" presetSubtype="0" fill="hold" grpId="0" nodeType="clickEffect">
                                   <p:stCondLst>
                                     <p:cond delay="0"/>
                                   </p:stCondLst>
@@ -26668,7 +26874,7 @@
                             </p:stCondLst>
                             <p:childTnLst>
                               <p:par>
-                                <p:cTn id="13" presetID="1" presetClass="entr" presetSubtype="0" fill="hold" nodeType="clickEffect">
+                                <p:cTn id="13" presetID="1" presetClass="entr" presetSubtype="0" fill="hold" grpId="0" nodeType="clickEffect">
                                   <p:stCondLst>
                                     <p:cond delay="0"/>
                                   </p:stCondLst>
@@ -26717,7 +26923,7 @@
                             </p:stCondLst>
                             <p:childTnLst>
                               <p:par>
-                                <p:cTn id="17" presetID="1" presetClass="entr" presetSubtype="0" fill="hold" nodeType="clickEffect">
+                                <p:cTn id="17" presetID="1" presetClass="entr" presetSubtype="0" fill="hold" grpId="0" nodeType="clickEffect">
                                   <p:stCondLst>
                                     <p:cond delay="0"/>
                                   </p:stCondLst>
@@ -26766,7 +26972,7 @@
                             </p:stCondLst>
                             <p:childTnLst>
                               <p:par>
-                                <p:cTn id="21" presetID="1" presetClass="entr" presetSubtype="0" fill="hold" nodeType="clickEffect">
+                                <p:cTn id="21" presetID="1" presetClass="entr" presetSubtype="0" fill="hold" grpId="0" nodeType="clickEffect">
                                   <p:stCondLst>
                                     <p:cond delay="0"/>
                                   </p:stCondLst>
@@ -26815,7 +27021,7 @@
                             </p:stCondLst>
                             <p:childTnLst>
                               <p:par>
-                                <p:cTn id="25" presetID="1" presetClass="entr" presetSubtype="0" fill="hold" nodeType="clickEffect">
+                                <p:cTn id="25" presetID="1" presetClass="entr" presetSubtype="0" fill="hold" grpId="0" nodeType="clickEffect">
                                   <p:stCondLst>
                                     <p:cond delay="0"/>
                                   </p:stCondLst>
@@ -26846,7 +27052,7 @@
                                 </p:cTn>
                               </p:par>
                               <p:par>
-                                <p:cTn id="27" presetID="1" presetClass="entr" presetSubtype="0" fill="hold" nodeType="withEffect">
+                                <p:cTn id="27" presetID="1" presetClass="entr" presetSubtype="0" fill="hold" grpId="0" nodeType="withEffect">
                                   <p:stCondLst>
                                     <p:cond delay="0"/>
                                   </p:stCondLst>
@@ -26877,7 +27083,7 @@
                                 </p:cTn>
                               </p:par>
                               <p:par>
-                                <p:cTn id="29" presetID="1" presetClass="entr" presetSubtype="0" fill="hold" nodeType="withEffect">
+                                <p:cTn id="29" presetID="1" presetClass="entr" presetSubtype="0" fill="hold" grpId="0" nodeType="withEffect">
                                   <p:stCondLst>
                                     <p:cond delay="0"/>
                                   </p:stCondLst>
@@ -26934,6 +27140,9 @@
         </p:cTn>
       </p:par>
     </p:tnLst>
+    <p:bldLst>
+      <p:bldP spid="1283075" grpId="0" build="p"/>
+    </p:bldLst>
   </p:timing>
 </p:sld>
 </file>
@@ -27075,8 +27284,8 @@
           </a:p>
         </p:txBody>
       </p:sp>
-      <mc:AlternateContent xmlns:mc="http://schemas.openxmlformats.org/markup-compatibility/2006" xmlns:a14="http://schemas.microsoft.com/office/drawing/2010/main">
-        <mc:Choice Requires="a14">
+      <mc:AlternateContent xmlns:mc="http://schemas.openxmlformats.org/markup-compatibility/2006">
+        <mc:Choice xmlns:a14="http://schemas.microsoft.com/office/drawing/2010/main" Requires="a14">
           <p:sp>
             <p:nvSpPr>
               <p:cNvPr id="3" name="Content Placeholder 2">
@@ -27096,12 +27305,12 @@
             <p:spPr>
               <a:xfrm>
                 <a:off x="838200" y="1825625"/>
-                <a:ext cx="8229600" cy="4351338"/>
+                <a:ext cx="8229600" cy="4667250"/>
               </a:xfrm>
             </p:spPr>
             <p:txBody>
               <a:bodyPr>
-                <a:normAutofit fontScale="62500" lnSpcReduction="20000"/>
+                <a:normAutofit fontScale="70000" lnSpcReduction="20000"/>
               </a:bodyPr>
               <a:lstStyle/>
               <a:p>
@@ -27787,11 +27996,15 @@
                   <a:rPr lang="en-US" sz="1800" dirty="0"/>
                   <a:t>and otherwise 0 </a:t>
                 </a:r>
+                <a:br>
+                  <a:rPr lang="en-US" sz="1800" dirty="0"/>
+                </a:br>
+                <a:endParaRPr lang="en-US" sz="1800" dirty="0"/>
               </a:p>
             </p:txBody>
           </p:sp>
         </mc:Choice>
-        <mc:Fallback xmlns="">
+        <mc:Fallback>
           <p:sp>
             <p:nvSpPr>
               <p:cNvPr id="3" name="Content Placeholder 2">
@@ -27811,12 +28024,12 @@
             <p:spPr>
               <a:xfrm>
                 <a:off x="838200" y="1825625"/>
-                <a:ext cx="8229600" cy="4351338"/>
+                <a:ext cx="8229600" cy="4667250"/>
               </a:xfrm>
               <a:blipFill>
                 <a:blip r:embed="rId2"/>
                 <a:stretch>
-                  <a:fillRect l="-667" t="-2241" r="-296" b="-8543"/>
+                  <a:fillRect l="-815" t="-2350" r="-519" b="-11358"/>
                 </a:stretch>
               </a:blipFill>
             </p:spPr>
@@ -28139,13 +28352,13 @@
           <p:nvPr/>
         </p:nvPicPr>
         <p:blipFill>
-          <a:blip r:embed="rId6">
+          <a:blip>
             <a:extLst>
               <a:ext uri="{28A0092B-C50C-407E-A947-70E740481C1C}">
                 <a14:useLocalDpi xmlns:a14="http://schemas.microsoft.com/office/drawing/2010/main" val="0"/>
               </a:ext>
               <a:ext uri="{96DAC541-7B7A-43D3-8B79-37D633B846F1}">
-                <asvg:svgBlip xmlns:asvg="http://schemas.microsoft.com/office/drawing/2016/SVG/main" r:embed="rId7"/>
+                <asvg:svgBlip xmlns:asvg="http://schemas.microsoft.com/office/drawing/2016/SVG/main" r:embed="rId6"/>
               </a:ext>
             </a:extLst>
           </a:blip>
@@ -28743,7 +28956,7 @@
         <p:spPr/>
         <p:txBody>
           <a:bodyPr>
-            <a:normAutofit lnSpcReduction="10000"/>
+            <a:normAutofit fontScale="92500" lnSpcReduction="10000"/>
           </a:bodyPr>
           <a:lstStyle/>
           <a:p>
@@ -28822,18 +29035,40 @@
             </a:r>
             <a:r>
               <a:rPr lang="en-US" sz="2400" dirty="0"/>
-              <a:t>: E.g., the most frequent label classifier</a:t>
+              <a:t>: E.g., </a:t>
             </a:r>
           </a:p>
           <a:p>
-            <a:pPr lvl="1" eaLnBrk="1" hangingPunct="1">
+            <a:pPr lvl="1">
               <a:lnSpc>
                 <a:spcPct val="80000"/>
               </a:lnSpc>
             </a:pPr>
             <a:r>
               <a:rPr lang="en-US" sz="2000" dirty="0"/>
-              <a:t>Gives all test instances the same label which is the most common label in the training set.</a:t>
+              <a:t>Random choice: Choose a random answer.</a:t>
+            </a:r>
+          </a:p>
+          <a:p>
+            <a:pPr lvl="2">
+              <a:lnSpc>
+                <a:spcPct val="80000"/>
+              </a:lnSpc>
+            </a:pPr>
+            <a:r>
+              <a:rPr lang="en-US" sz="1600" dirty="0"/>
+              <a:t>Example: Choose a random valid action for an agent playing Connect-4.</a:t>
+            </a:r>
+          </a:p>
+          <a:p>
+            <a:pPr lvl="1">
+              <a:lnSpc>
+                <a:spcPct val="80000"/>
+              </a:lnSpc>
+            </a:pPr>
+            <a:r>
+              <a:rPr lang="en-US" sz="2000" dirty="0"/>
+              <a:t>Most frequent label classifier: Gives all test instances the same label, which is the most common label in the training set.</a:t>
             </a:r>
           </a:p>
           <a:p>
@@ -28848,22 +29083,18 @@
             </a:r>
           </a:p>
           <a:p>
-            <a:pPr lvl="1" eaLnBrk="1" hangingPunct="1">
+            <a:pPr lvl="2">
               <a:lnSpc>
                 <a:spcPct val="80000"/>
               </a:lnSpc>
             </a:pPr>
             <a:r>
-              <a:rPr lang="en-US" sz="2000" dirty="0"/>
-              <a:t>Accuracy might be very high if the problem is skewed (called class imbalance).</a:t>
+              <a:rPr lang="en-US" sz="1600" dirty="0"/>
+              <a:t>Note: Accuracy might be very high if the problem is skewed. This is called class imbalance.</a:t>
             </a:r>
-          </a:p>
-          <a:p>
-            <a:pPr lvl="2">
-              <a:lnSpc>
-                <a:spcPct val="80000"/>
-              </a:lnSpc>
-            </a:pPr>
+            <a:br>
+              <a:rPr lang="en-US" sz="1600" dirty="0"/>
+            </a:br>
             <a:r>
               <a:rPr lang="en-US" sz="1600" dirty="0"/>
               <a:t>Example: If calling everything “ham” gets already 66% right, then a classifier that gets 68% isn’t a big improvement!</a:t>
@@ -28921,13 +29152,13 @@
           <p:nvPr/>
         </p:nvPicPr>
         <p:blipFill>
-          <a:blip r:embed="rId2">
+          <a:blip>
             <a:extLst>
               <a:ext uri="{28A0092B-C50C-407E-A947-70E740481C1C}">
                 <a14:useLocalDpi xmlns:a14="http://schemas.microsoft.com/office/drawing/2010/main" val="0"/>
               </a:ext>
               <a:ext uri="{96DAC541-7B7A-43D3-8B79-37D633B846F1}">
-                <asvg:svgBlip xmlns:asvg="http://schemas.microsoft.com/office/drawing/2016/SVG/main" r:embed="rId3"/>
+                <asvg:svgBlip xmlns:asvg="http://schemas.microsoft.com/office/drawing/2016/SVG/main" r:embed="rId2"/>
               </a:ext>
             </a:extLst>
           </a:blip>
@@ -29001,15 +29232,33 @@
                                   </p:childTnLst>
                                 </p:cTn>
                               </p:par>
+                            </p:childTnLst>
+                          </p:cTn>
+                        </p:par>
+                      </p:childTnLst>
+                    </p:cTn>
+                  </p:par>
+                  <p:par>
+                    <p:cTn id="7" fill="hold">
+                      <p:stCondLst>
+                        <p:cond delay="indefinite"/>
+                      </p:stCondLst>
+                      <p:childTnLst>
+                        <p:par>
+                          <p:cTn id="8" fill="hold">
+                            <p:stCondLst>
+                              <p:cond delay="0"/>
+                            </p:stCondLst>
+                            <p:childTnLst>
                               <p:par>
-                                <p:cTn id="7" presetID="1" presetClass="entr" presetSubtype="0" fill="hold" nodeType="withEffect">
+                                <p:cTn id="9" presetID="1" presetClass="entr" presetSubtype="0" fill="hold" nodeType="clickEffect">
                                   <p:stCondLst>
                                     <p:cond delay="0"/>
                                   </p:stCondLst>
                                   <p:childTnLst>
                                     <p:set>
                                       <p:cBhvr>
-                                        <p:cTn id="8" dur="1" fill="hold">
+                                        <p:cTn id="10" dur="1" fill="hold">
                                           <p:stCondLst>
                                             <p:cond delay="0"/>
                                           </p:stCondLst>
@@ -29032,70 +29281,26 @@
                                   </p:childTnLst>
                                 </p:cTn>
                               </p:par>
+                            </p:childTnLst>
+                          </p:cTn>
+                        </p:par>
+                      </p:childTnLst>
+                    </p:cTn>
+                  </p:par>
+                  <p:par>
+                    <p:cTn id="11" fill="hold">
+                      <p:stCondLst>
+                        <p:cond delay="indefinite"/>
+                      </p:stCondLst>
+                      <p:childTnLst>
+                        <p:par>
+                          <p:cTn id="12" fill="hold">
+                            <p:stCondLst>
+                              <p:cond delay="0"/>
+                            </p:stCondLst>
+                            <p:childTnLst>
                               <p:par>
-                                <p:cTn id="9" presetID="1" presetClass="entr" presetSubtype="0" fill="hold" nodeType="withEffect">
-                                  <p:stCondLst>
-                                    <p:cond delay="0"/>
-                                  </p:stCondLst>
-                                  <p:childTnLst>
-                                    <p:set>
-                                      <p:cBhvr>
-                                        <p:cTn id="10" dur="1" fill="hold">
-                                          <p:stCondLst>
-                                            <p:cond delay="0"/>
-                                          </p:stCondLst>
-                                        </p:cTn>
-                                        <p:tgtEl>
-                                          <p:spTgt spid="35843">
-                                            <p:txEl>
-                                              <p:pRg st="7" end="7"/>
-                                            </p:txEl>
-                                          </p:spTgt>
-                                        </p:tgtEl>
-                                        <p:attrNameLst>
-                                          <p:attrName>style.visibility</p:attrName>
-                                        </p:attrNameLst>
-                                      </p:cBhvr>
-                                      <p:to>
-                                        <p:strVal val="visible"/>
-                                      </p:to>
-                                    </p:set>
-                                  </p:childTnLst>
-                                </p:cTn>
-                              </p:par>
-                              <p:par>
-                                <p:cTn id="11" presetID="1" presetClass="entr" presetSubtype="0" fill="hold" nodeType="withEffect">
-                                  <p:stCondLst>
-                                    <p:cond delay="0"/>
-                                  </p:stCondLst>
-                                  <p:childTnLst>
-                                    <p:set>
-                                      <p:cBhvr>
-                                        <p:cTn id="12" dur="1" fill="hold">
-                                          <p:stCondLst>
-                                            <p:cond delay="0"/>
-                                          </p:stCondLst>
-                                        </p:cTn>
-                                        <p:tgtEl>
-                                          <p:spTgt spid="35843">
-                                            <p:txEl>
-                                              <p:pRg st="8" end="8"/>
-                                            </p:txEl>
-                                          </p:spTgt>
-                                        </p:tgtEl>
-                                        <p:attrNameLst>
-                                          <p:attrName>style.visibility</p:attrName>
-                                        </p:attrNameLst>
-                                      </p:cBhvr>
-                                      <p:to>
-                                        <p:strVal val="visible"/>
-                                      </p:to>
-                                    </p:set>
-                                  </p:childTnLst>
-                                </p:cTn>
-                              </p:par>
-                              <p:par>
-                                <p:cTn id="13" presetID="1" presetClass="entr" presetSubtype="0" fill="hold" nodeType="withEffect">
+                                <p:cTn id="13" presetID="1" presetClass="entr" presetSubtype="0" fill="hold" nodeType="clickEffect">
                                   <p:stCondLst>
                                     <p:cond delay="0"/>
                                   </p:stCondLst>
@@ -29110,7 +29315,7 @@
                                         <p:tgtEl>
                                           <p:spTgt spid="35843">
                                             <p:txEl>
-                                              <p:pRg st="9" end="9"/>
+                                              <p:pRg st="7" end="7"/>
                                             </p:txEl>
                                           </p:spTgt>
                                         </p:tgtEl>
@@ -29159,7 +29364,118 @@
                                         <p:tgtEl>
                                           <p:spTgt spid="35843">
                                             <p:txEl>
-                                              <p:pRg st="11" end="11"/>
+                                              <p:pRg st="8" end="8"/>
+                                            </p:txEl>
+                                          </p:spTgt>
+                                        </p:tgtEl>
+                                        <p:attrNameLst>
+                                          <p:attrName>style.visibility</p:attrName>
+                                        </p:attrNameLst>
+                                      </p:cBhvr>
+                                      <p:to>
+                                        <p:strVal val="visible"/>
+                                      </p:to>
+                                    </p:set>
+                                  </p:childTnLst>
+                                </p:cTn>
+                              </p:par>
+                              <p:par>
+                                <p:cTn id="19" presetID="1" presetClass="entr" presetSubtype="0" fill="hold" nodeType="withEffect">
+                                  <p:stCondLst>
+                                    <p:cond delay="0"/>
+                                  </p:stCondLst>
+                                  <p:childTnLst>
+                                    <p:set>
+                                      <p:cBhvr>
+                                        <p:cTn id="20" dur="1" fill="hold">
+                                          <p:stCondLst>
+                                            <p:cond delay="0"/>
+                                          </p:stCondLst>
+                                        </p:cTn>
+                                        <p:tgtEl>
+                                          <p:spTgt spid="35843">
+                                            <p:txEl>
+                                              <p:pRg st="9" end="9"/>
+                                            </p:txEl>
+                                          </p:spTgt>
+                                        </p:tgtEl>
+                                        <p:attrNameLst>
+                                          <p:attrName>style.visibility</p:attrName>
+                                        </p:attrNameLst>
+                                      </p:cBhvr>
+                                      <p:to>
+                                        <p:strVal val="visible"/>
+                                      </p:to>
+                                    </p:set>
+                                  </p:childTnLst>
+                                </p:cTn>
+                              </p:par>
+                              <p:par>
+                                <p:cTn id="21" presetID="1" presetClass="entr" presetSubtype="0" fill="hold" nodeType="withEffect">
+                                  <p:stCondLst>
+                                    <p:cond delay="0"/>
+                                  </p:stCondLst>
+                                  <p:childTnLst>
+                                    <p:set>
+                                      <p:cBhvr>
+                                        <p:cTn id="22" dur="1" fill="hold">
+                                          <p:stCondLst>
+                                            <p:cond delay="0"/>
+                                          </p:stCondLst>
+                                        </p:cTn>
+                                        <p:tgtEl>
+                                          <p:spTgt spid="35843">
+                                            <p:txEl>
+                                              <p:pRg st="10" end="10"/>
+                                            </p:txEl>
+                                          </p:spTgt>
+                                        </p:tgtEl>
+                                        <p:attrNameLst>
+                                          <p:attrName>style.visibility</p:attrName>
+                                        </p:attrNameLst>
+                                      </p:cBhvr>
+                                      <p:to>
+                                        <p:strVal val="visible"/>
+                                      </p:to>
+                                    </p:set>
+                                  </p:childTnLst>
+                                </p:cTn>
+                              </p:par>
+                            </p:childTnLst>
+                          </p:cTn>
+                        </p:par>
+                      </p:childTnLst>
+                    </p:cTn>
+                  </p:par>
+                  <p:par>
+                    <p:cTn id="23" fill="hold">
+                      <p:stCondLst>
+                        <p:cond delay="indefinite"/>
+                      </p:stCondLst>
+                      <p:childTnLst>
+                        <p:par>
+                          <p:cTn id="24" fill="hold">
+                            <p:stCondLst>
+                              <p:cond delay="0"/>
+                            </p:stCondLst>
+                            <p:childTnLst>
+                              <p:par>
+                                <p:cTn id="25" presetID="1" presetClass="entr" presetSubtype="0" fill="hold" nodeType="clickEffect">
+                                  <p:stCondLst>
+                                    <p:cond delay="0"/>
+                                  </p:stCondLst>
+                                  <p:childTnLst>
+                                    <p:set>
+                                      <p:cBhvr>
+                                        <p:cTn id="26" dur="1" fill="hold">
+                                          <p:stCondLst>
+                                            <p:cond delay="0"/>
+                                          </p:stCondLst>
+                                        </p:cTn>
+                                        <p:tgtEl>
+                                          <p:spTgt spid="35843">
+                                            <p:txEl>
+                                              <p:pRg st="12" end="12"/>
                                             </p:txEl>
                                           </p:spTgt>
                                         </p:tgtEl>
@@ -29896,8 +30212,8 @@
           </a:p>
         </p:txBody>
       </p:sp>
-      <mc:AlternateContent xmlns:mc="http://schemas.openxmlformats.org/markup-compatibility/2006" xmlns:a14="http://schemas.microsoft.com/office/drawing/2010/main">
-        <mc:Choice Requires="a14">
+      <mc:AlternateContent xmlns:mc="http://schemas.openxmlformats.org/markup-compatibility/2006">
+        <mc:Choice xmlns:a14="http://schemas.microsoft.com/office/drawing/2010/main" Requires="a14">
           <p:sp>
             <p:nvSpPr>
               <p:cNvPr id="10" name="Content Placeholder 9">
@@ -29960,37 +30276,18 @@
                     <m:d>
                       <m:dPr>
                         <m:ctrlPr>
-                          <a:rPr lang="en-US" i="1">
+                          <a:rPr lang="en-US" b="1" i="1">
                             <a:latin typeface="Cambria Math" panose="02040503050406030204" pitchFamily="18" charset="0"/>
                           </a:rPr>
                         </m:ctrlPr>
                       </m:dPr>
                       <m:e>
-                        <m:sSub>
-                          <m:sSubPr>
-                            <m:ctrlPr>
-                              <a:rPr lang="en-US" i="1">
-                                <a:latin typeface="Cambria Math" panose="02040503050406030204" pitchFamily="18" charset="0"/>
-                              </a:rPr>
-                            </m:ctrlPr>
-                          </m:sSubPr>
-                          <m:e>
-                            <m:r>
-                              <a:rPr lang="en-US" b="1" i="1">
-                                <a:latin typeface="Cambria Math" panose="02040503050406030204" pitchFamily="18" charset="0"/>
-                              </a:rPr>
-                              <m:t>𝒙</m:t>
-                            </m:r>
-                          </m:e>
-                          <m:sub>
-                            <m:r>
-                              <a:rPr lang="en-US" i="1">
-                                <a:latin typeface="Cambria Math" panose="02040503050406030204" pitchFamily="18" charset="0"/>
-                              </a:rPr>
-                              <m:t>𝑗</m:t>
-                            </m:r>
-                          </m:sub>
-                        </m:sSub>
+                        <m:r>
+                          <a:rPr lang="en-US" b="1" i="1" smtClean="0">
+                            <a:latin typeface="Cambria Math" panose="02040503050406030204" pitchFamily="18" charset="0"/>
+                          </a:rPr>
+                          <m:t>𝒙</m:t>
+                        </m:r>
                       </m:e>
                     </m:d>
                     <m:r>
@@ -30076,13 +30373,7 @@
                           <a:rPr lang="en-US" i="1">
                             <a:latin typeface="Cambria Math" panose="02040503050406030204" pitchFamily="18" charset="0"/>
                           </a:rPr>
-                          <m:t>𝑗</m:t>
-                        </m:r>
-                        <m:r>
-                          <a:rPr lang="en-US" i="1">
-                            <a:latin typeface="Cambria Math" panose="02040503050406030204" pitchFamily="18" charset="0"/>
-                          </a:rPr>
-                          <m:t>,1</m:t>
+                          <m:t>1</m:t>
                         </m:r>
                       </m:sub>
                     </m:sSub>
@@ -30134,18 +30425,6 @@
                         </m:r>
                       </m:e>
                       <m:sub>
-                        <m:r>
-                          <a:rPr lang="en-US" i="1">
-                            <a:latin typeface="Cambria Math" panose="02040503050406030204" pitchFamily="18" charset="0"/>
-                          </a:rPr>
-                          <m:t>𝑗</m:t>
-                        </m:r>
-                        <m:r>
-                          <a:rPr lang="en-US" i="1">
-                            <a:latin typeface="Cambria Math" panose="02040503050406030204" pitchFamily="18" charset="0"/>
-                          </a:rPr>
-                          <m:t>,</m:t>
-                        </m:r>
                         <m:r>
                           <a:rPr lang="en-US" i="1">
                             <a:latin typeface="Cambria Math" panose="02040503050406030204" pitchFamily="18" charset="0"/>
@@ -30229,18 +30508,6 @@
                               <a:rPr lang="en-US" i="1">
                                 <a:latin typeface="Cambria Math" panose="02040503050406030204" pitchFamily="18" charset="0"/>
                               </a:rPr>
-                              <m:t>𝑗</m:t>
-                            </m:r>
-                            <m:r>
-                              <a:rPr lang="en-US" i="1">
-                                <a:latin typeface="Cambria Math" panose="02040503050406030204" pitchFamily="18" charset="0"/>
-                              </a:rPr>
-                              <m:t>,</m:t>
-                            </m:r>
-                            <m:r>
-                              <a:rPr lang="en-US" i="1">
-                                <a:latin typeface="Cambria Math" panose="02040503050406030204" pitchFamily="18" charset="0"/>
-                              </a:rPr>
                               <m:t>𝑖</m:t>
                             </m:r>
                           </m:sub>
@@ -30271,38 +30538,19 @@
                       </m:e>
                       <m:sup>
                         <m:r>
-                          <a:rPr lang="en-US" i="1">
+                          <a:rPr lang="en-US" b="0" i="1" smtClean="0">
                             <a:latin typeface="Cambria Math" panose="02040503050406030204" pitchFamily="18" charset="0"/>
                           </a:rPr>
-                          <m:t>𝑇</m:t>
+                          <m:t>⊤</m:t>
                         </m:r>
                       </m:sup>
                     </m:sSup>
-                    <m:sSub>
-                      <m:sSubPr>
-                        <m:ctrlPr>
-                          <a:rPr lang="en-US" i="1">
-                            <a:latin typeface="Cambria Math" panose="02040503050406030204" pitchFamily="18" charset="0"/>
-                          </a:rPr>
-                        </m:ctrlPr>
-                      </m:sSubPr>
-                      <m:e>
-                        <m:r>
-                          <a:rPr lang="en-US" b="1" i="1">
-                            <a:latin typeface="Cambria Math" panose="02040503050406030204" pitchFamily="18" charset="0"/>
-                          </a:rPr>
-                          <m:t>𝒙</m:t>
-                        </m:r>
-                      </m:e>
-                      <m:sub>
-                        <m:r>
-                          <a:rPr lang="en-US" i="1">
-                            <a:latin typeface="Cambria Math" panose="02040503050406030204" pitchFamily="18" charset="0"/>
-                          </a:rPr>
-                          <m:t>𝑗</m:t>
-                        </m:r>
-                      </m:sub>
-                    </m:sSub>
+                    <m:r>
+                      <a:rPr lang="en-US" b="1" i="1" smtClean="0">
+                        <a:latin typeface="Cambria Math" panose="02040503050406030204" pitchFamily="18" charset="0"/>
+                      </a:rPr>
+                      <m:t>𝒙</m:t>
+                    </m:r>
                     <m:r>
                       <a:rPr lang="en-US" i="1">
                         <a:latin typeface="Cambria Math" panose="02040503050406030204" pitchFamily="18" charset="0"/>
@@ -30467,10 +30715,10 @@
                       </m:e>
                       <m:sup>
                         <m:r>
-                          <a:rPr lang="en-US" i="1">
+                          <a:rPr lang="en-US" b="1" i="1" smtClean="0">
                             <a:latin typeface="Cambria Math" panose="02040503050406030204" pitchFamily="18" charset="0"/>
                           </a:rPr>
-                          <m:t>𝑇</m:t>
+                          <m:t>⊤</m:t>
                         </m:r>
                       </m:sup>
                     </m:sSup>
@@ -30570,7 +30818,7 @@
                 </a:r>
                 <a:r>
                   <a:rPr lang="en-US" dirty="0"/>
-                  <a:t>: Gradient descent</a:t>
+                  <a:t>: Gradient descent (local search)</a:t>
                 </a:r>
                 <a:br>
                   <a:rPr lang="en-US" dirty="0"/>
@@ -30657,6 +30905,7 @@
                 <a:endParaRPr lang="en-US" dirty="0"/>
               </a:p>
               <a:p>
+                <a:pPr/>
                 <a:r>
                   <a:rPr lang="en-US" b="1" dirty="0"/>
                   <a:t>Alternative</a:t>
@@ -30697,10 +30946,10 @@
                       </m:e>
                       <m:sup>
                         <m:r>
-                          <a:rPr lang="en-US" i="1">
+                          <a:rPr lang="en-US" b="1" i="1" smtClean="0">
                             <a:latin typeface="Cambria Math" panose="02040503050406030204" pitchFamily="18" charset="0"/>
                           </a:rPr>
-                          <m:t>𝑇</m:t>
+                          <m:t>⊤</m:t>
                         </m:r>
                       </m:sup>
                     </m:sSup>
@@ -30840,10 +31089,10 @@
                               </m:e>
                               <m:sup>
                                 <m:r>
-                                  <a:rPr lang="en-US" i="1">
+                                  <a:rPr lang="en-US" b="1" i="1" smtClean="0">
                                     <a:latin typeface="Cambria Math" panose="02040503050406030204" pitchFamily="18" charset="0"/>
                                   </a:rPr>
-                                  <m:t>𝑇</m:t>
+                                  <m:t>⊤</m:t>
                                 </m:r>
                               </m:sup>
                             </m:sSup>
@@ -30883,10 +31132,10 @@
                       </m:e>
                       <m:sup>
                         <m:r>
-                          <a:rPr lang="en-US" i="1">
+                          <a:rPr lang="en-US" b="1" i="1" smtClean="0">
                             <a:latin typeface="Cambria Math" panose="02040503050406030204" pitchFamily="18" charset="0"/>
                           </a:rPr>
-                          <m:t>𝑇</m:t>
+                          <m:t>⊤</m:t>
                         </m:r>
                       </m:sup>
                     </m:sSup>
@@ -30906,7 +31155,7 @@
             </p:txBody>
           </p:sp>
         </mc:Choice>
-        <mc:Fallback xmlns="">
+        <mc:Fallback>
           <p:sp>
             <p:nvSpPr>
               <p:cNvPr id="10" name="Content Placeholder 9">
@@ -30931,7 +31180,7 @@
               <a:blipFill>
                 <a:blip r:embed="rId2"/>
                 <a:stretch>
-                  <a:fillRect l="-525" t="-12839"/>
+                  <a:fillRect l="-525" t="-13267"/>
                 </a:stretch>
               </a:blipFill>
             </p:spPr>
@@ -31063,8 +31312,8 @@
           </p:sp>
         </mc:Fallback>
       </mc:AlternateContent>
-      <mc:AlternateContent xmlns:mc="http://schemas.openxmlformats.org/markup-compatibility/2006" xmlns:a14="http://schemas.microsoft.com/office/drawing/2010/main">
-        <mc:Choice Requires="a14">
+      <mc:AlternateContent xmlns:mc="http://schemas.openxmlformats.org/markup-compatibility/2006">
+        <mc:Choice xmlns:a14="http://schemas.microsoft.com/office/drawing/2010/main" Requires="a14">
           <p:sp>
             <p:nvSpPr>
               <p:cNvPr id="17" name="Speech Bubble: Rectangle 16">
@@ -31461,20 +31710,27 @@
                           <m:r>
                             <a:rPr lang="en-US" b="0" i="1" smtClean="0">
                               <a:latin typeface="Cambria Math" panose="02040503050406030204" pitchFamily="18" charset="0"/>
+                              <a:ea typeface="Cambria Math" panose="02040503050406030204" pitchFamily="18" charset="0"/>
                             </a:rPr>
-                            <m:t>𝑇</m:t>
+                            <m:t>⊤</m:t>
                           </m:r>
                         </m:sup>
                       </m:sSup>
                     </m:oMath>
                   </m:oMathPara>
                 </a14:m>
-                <a:endParaRPr lang="en-US" dirty="0"/>
+                <a:br>
+                  <a:rPr lang="en-US" dirty="0"/>
+                </a:br>
+                <a:r>
+                  <a:rPr lang="en-US" dirty="0"/>
+                  <a:t>estimated from training data.</a:t>
+                </a:r>
               </a:p>
             </p:txBody>
           </p:sp>
         </mc:Choice>
-        <mc:Fallback xmlns="">
+        <mc:Fallback>
           <p:sp>
             <p:nvSpPr>
               <p:cNvPr id="17" name="Speech Bubble: Rectangle 16">
@@ -31503,7 +31759,7 @@
               <a:blipFill>
                 <a:blip r:embed="rId4"/>
                 <a:stretch>
-                  <a:fillRect/>
+                  <a:fillRect b="-11792"/>
                 </a:stretch>
               </a:blipFill>
             </p:spPr>
@@ -32130,11 +32386,7 @@
                                           </p:stCondLst>
                                         </p:cTn>
                                         <p:tgtEl>
-                                          <p:spTgt spid="10">
-                                            <p:txEl>
-                                              <p:pRg st="2" end="2"/>
-                                            </p:txEl>
-                                          </p:spTgt>
+                                          <p:spTgt spid="16"/>
                                         </p:tgtEl>
                                         <p:attrNameLst>
                                           <p:attrName>style.visibility</p:attrName>
@@ -32147,15 +32399,33 @@
                                   </p:childTnLst>
                                 </p:cTn>
                               </p:par>
+                            </p:childTnLst>
+                          </p:cTn>
+                        </p:par>
+                      </p:childTnLst>
+                    </p:cTn>
+                  </p:par>
+                  <p:par>
+                    <p:cTn id="7" fill="hold">
+                      <p:stCondLst>
+                        <p:cond delay="indefinite"/>
+                      </p:stCondLst>
+                      <p:childTnLst>
+                        <p:par>
+                          <p:cTn id="8" fill="hold">
+                            <p:stCondLst>
+                              <p:cond delay="0"/>
+                            </p:stCondLst>
+                            <p:childTnLst>
                               <p:par>
-                                <p:cTn id="7" presetID="1" presetClass="entr" presetSubtype="0" fill="hold" grpId="0" nodeType="withEffect">
+                                <p:cTn id="9" presetID="1" presetClass="entr" presetSubtype="0" fill="hold" grpId="0" nodeType="clickEffect">
                                   <p:stCondLst>
                                     <p:cond delay="0"/>
                                   </p:stCondLst>
                                   <p:childTnLst>
                                     <p:set>
                                       <p:cBhvr>
-                                        <p:cTn id="8" dur="1" fill="hold">
+                                        <p:cTn id="10" dur="1" fill="hold">
                                           <p:stCondLst>
                                             <p:cond delay="0"/>
                                           </p:stCondLst>
@@ -32181,120 +32451,26 @@
                     </p:cTn>
                   </p:par>
                   <p:par>
-                    <p:cTn id="9" fill="hold">
+                    <p:cTn id="11" fill="hold">
                       <p:stCondLst>
                         <p:cond delay="indefinite"/>
                       </p:stCondLst>
                       <p:childTnLst>
                         <p:par>
-                          <p:cTn id="10" fill="hold">
+                          <p:cTn id="12" fill="hold">
                             <p:stCondLst>
                               <p:cond delay="0"/>
                             </p:stCondLst>
                             <p:childTnLst>
                               <p:par>
-                                <p:cTn id="11" presetID="1" presetClass="entr" presetSubtype="0" fill="hold" nodeType="clickEffect">
+                                <p:cTn id="13" presetID="1" presetClass="entr" presetSubtype="0" fill="hold" nodeType="clickEffect">
                                   <p:stCondLst>
                                     <p:cond delay="0"/>
                                   </p:stCondLst>
                                   <p:childTnLst>
                                     <p:set>
                                       <p:cBhvr>
-                                        <p:cTn id="12" dur="1" fill="hold">
-                                          <p:stCondLst>
-                                            <p:cond delay="0"/>
-                                          </p:stCondLst>
-                                        </p:cTn>
-                                        <p:tgtEl>
-                                          <p:spTgt spid="25"/>
-                                        </p:tgtEl>
-                                        <p:attrNameLst>
-                                          <p:attrName>style.visibility</p:attrName>
-                                        </p:attrNameLst>
-                                      </p:cBhvr>
-                                      <p:to>
-                                        <p:strVal val="visible"/>
-                                      </p:to>
-                                    </p:set>
-                                  </p:childTnLst>
-                                </p:cTn>
-                              </p:par>
-                            </p:childTnLst>
-                          </p:cTn>
-                        </p:par>
-                      </p:childTnLst>
-                    </p:cTn>
-                  </p:par>
-                  <p:par>
-                    <p:cTn id="13" fill="hold">
-                      <p:stCondLst>
-                        <p:cond delay="indefinite"/>
-                      </p:stCondLst>
-                      <p:childTnLst>
-                        <p:par>
-                          <p:cTn id="14" fill="hold">
-                            <p:stCondLst>
-                              <p:cond delay="0"/>
-                            </p:stCondLst>
-                            <p:childTnLst>
-                              <p:par>
-                                <p:cTn id="15" presetID="1" presetClass="entr" presetSubtype="0" fill="hold" grpId="0" nodeType="clickEffect">
-                                  <p:stCondLst>
-                                    <p:cond delay="0"/>
-                                  </p:stCondLst>
-                                  <p:childTnLst>
-                                    <p:set>
-                                      <p:cBhvr>
-                                        <p:cTn id="16" dur="1" fill="hold">
-                                          <p:stCondLst>
-                                            <p:cond delay="0"/>
-                                          </p:stCondLst>
-                                        </p:cTn>
-                                        <p:tgtEl>
-                                          <p:spTgt spid="10">
-                                            <p:txEl>
-                                              <p:pRg st="3" end="3"/>
-                                            </p:txEl>
-                                          </p:spTgt>
-                                        </p:tgtEl>
-                                        <p:attrNameLst>
-                                          <p:attrName>style.visibility</p:attrName>
-                                        </p:attrNameLst>
-                                      </p:cBhvr>
-                                      <p:to>
-                                        <p:strVal val="visible"/>
-                                      </p:to>
-                                    </p:set>
-                                  </p:childTnLst>
-                                </p:cTn>
-                              </p:par>
-                            </p:childTnLst>
-                          </p:cTn>
-                        </p:par>
-                      </p:childTnLst>
-                    </p:cTn>
-                  </p:par>
-                  <p:par>
-                    <p:cTn id="17" fill="hold">
-                      <p:stCondLst>
-                        <p:cond delay="indefinite"/>
-                      </p:stCondLst>
-                      <p:childTnLst>
-                        <p:par>
-                          <p:cTn id="18" fill="hold">
-                            <p:stCondLst>
-                              <p:cond delay="0"/>
-                            </p:stCondLst>
-                            <p:childTnLst>
-                              <p:par>
-                                <p:cTn id="19" presetID="1" presetClass="entr" presetSubtype="0" fill="hold" grpId="0" nodeType="clickEffect">
-                                  <p:stCondLst>
-                                    <p:cond delay="0"/>
-                                  </p:stCondLst>
-                                  <p:childTnLst>
-                                    <p:set>
-                                      <p:cBhvr>
-                                        <p:cTn id="20" dur="1" fill="hold">
+                                        <p:cTn id="14" dur="1" fill="hold">
                                           <p:stCondLst>
                                             <p:cond delay="0"/>
                                           </p:stCondLst>
@@ -32324,26 +32500,71 @@
                     </p:cTn>
                   </p:par>
                   <p:par>
-                    <p:cTn id="21" fill="hold">
+                    <p:cTn id="15" fill="hold">
                       <p:stCondLst>
                         <p:cond delay="indefinite"/>
                       </p:stCondLst>
                       <p:childTnLst>
                         <p:par>
-                          <p:cTn id="22" fill="hold">
+                          <p:cTn id="16" fill="hold">
                             <p:stCondLst>
                               <p:cond delay="0"/>
                             </p:stCondLst>
                             <p:childTnLst>
                               <p:par>
-                                <p:cTn id="23" presetID="1" presetClass="entr" presetSubtype="0" fill="hold" grpId="0" nodeType="clickEffect">
+                                <p:cTn id="17" presetID="1" presetClass="entr" presetSubtype="0" fill="hold" nodeType="clickEffect">
                                   <p:stCondLst>
                                     <p:cond delay="0"/>
                                   </p:stCondLst>
                                   <p:childTnLst>
                                     <p:set>
                                       <p:cBhvr>
-                                        <p:cTn id="24" dur="1" fill="hold">
+                                        <p:cTn id="18" dur="1" fill="hold">
+                                          <p:stCondLst>
+                                            <p:cond delay="0"/>
+                                          </p:stCondLst>
+                                        </p:cTn>
+                                        <p:tgtEl>
+                                          <p:spTgt spid="25"/>
+                                        </p:tgtEl>
+                                        <p:attrNameLst>
+                                          <p:attrName>style.visibility</p:attrName>
+                                        </p:attrNameLst>
+                                      </p:cBhvr>
+                                      <p:to>
+                                        <p:strVal val="visible"/>
+                                      </p:to>
+                                    </p:set>
+                                  </p:childTnLst>
+                                </p:cTn>
+                              </p:par>
+                            </p:childTnLst>
+                          </p:cTn>
+                        </p:par>
+                      </p:childTnLst>
+                    </p:cTn>
+                  </p:par>
+                  <p:par>
+                    <p:cTn id="19" fill="hold">
+                      <p:stCondLst>
+                        <p:cond delay="indefinite"/>
+                      </p:stCondLst>
+                      <p:childTnLst>
+                        <p:par>
+                          <p:cTn id="20" fill="hold">
+                            <p:stCondLst>
+                              <p:cond delay="0"/>
+                            </p:stCondLst>
+                            <p:childTnLst>
+                              <p:par>
+                                <p:cTn id="21" presetID="1" presetClass="entr" presetSubtype="0" fill="hold" nodeType="clickEffect">
+                                  <p:stCondLst>
+                                    <p:cond delay="0"/>
+                                  </p:stCondLst>
+                                  <p:childTnLst>
+                                    <p:set>
+                                      <p:cBhvr>
+                                        <p:cTn id="22" dur="1" fill="hold">
                                           <p:stCondLst>
                                             <p:cond delay="0"/>
                                           </p:stCondLst>
@@ -32367,14 +32588,14 @@
                                 </p:cTn>
                               </p:par>
                               <p:par>
-                                <p:cTn id="25" presetID="1" presetClass="entr" presetSubtype="0" fill="hold" nodeType="withEffect">
+                                <p:cTn id="23" presetID="1" presetClass="entr" presetSubtype="0" fill="hold" nodeType="withEffect">
                                   <p:stCondLst>
                                     <p:cond delay="0"/>
                                   </p:stCondLst>
                                   <p:childTnLst>
                                     <p:set>
                                       <p:cBhvr>
-                                        <p:cTn id="26" dur="1" fill="hold">
+                                        <p:cTn id="24" dur="1" fill="hold">
                                           <p:stCondLst>
                                             <p:cond delay="0"/>
                                           </p:stCondLst>
@@ -32421,7 +32642,7 @@
       </p:par>
     </p:tnLst>
     <p:bldLst>
-      <p:bldP spid="10" grpId="0" uiExpand="1" build="p"/>
+      <p:bldP spid="16" grpId="0" animBg="1"/>
       <p:bldP spid="17" grpId="0" animBg="1"/>
     </p:bldLst>
   </p:timing>
@@ -32429,6 +32650,92 @@
 </file>
 
 <file path=ppt/slides/slide25.xml><?xml version="1.0" encoding="utf-8"?>
+<p:sld xmlns:a="http://schemas.openxmlformats.org/drawingml/2006/main" xmlns:r="http://schemas.openxmlformats.org/officeDocument/2006/relationships" xmlns:p="http://schemas.openxmlformats.org/presentationml/2006/main">
+  <p:cSld>
+    <p:spTree>
+      <p:nvGrpSpPr>
+        <p:cNvPr id="1" name=""/>
+        <p:cNvGrpSpPr/>
+        <p:nvPr/>
+      </p:nvGrpSpPr>
+      <p:grpSpPr>
+        <a:xfrm>
+          <a:off x="0" y="0"/>
+          <a:ext cx="0" cy="0"/>
+          <a:chOff x="0" y="0"/>
+          <a:chExt cx="0" cy="0"/>
+        </a:xfrm>
+      </p:grpSpPr>
+      <p:sp>
+        <p:nvSpPr>
+          <p:cNvPr id="4" name="Title 3">
+            <a:extLst>
+              <a:ext uri="{FF2B5EF4-FFF2-40B4-BE49-F238E27FC236}">
+                <a16:creationId xmlns:a16="http://schemas.microsoft.com/office/drawing/2014/main" id="{3CD65ADD-3424-5CC4-FB20-9034C29801A9}"/>
+              </a:ext>
+            </a:extLst>
+          </p:cNvPr>
+          <p:cNvSpPr>
+            <a:spLocks noGrp="1"/>
+          </p:cNvSpPr>
+          <p:nvPr>
+            <p:ph type="title"/>
+          </p:nvPr>
+        </p:nvSpPr>
+        <p:spPr/>
+        <p:txBody>
+          <a:bodyPr/>
+          <a:lstStyle/>
+          <a:p>
+            <a:r>
+              <a:rPr lang="en-US" dirty="0"/>
+              <a:t>Classification</a:t>
+            </a:r>
+          </a:p>
+        </p:txBody>
+      </p:sp>
+      <p:sp>
+        <p:nvSpPr>
+          <p:cNvPr id="5" name="Text Placeholder 4">
+            <a:extLst>
+              <a:ext uri="{FF2B5EF4-FFF2-40B4-BE49-F238E27FC236}">
+                <a16:creationId xmlns:a16="http://schemas.microsoft.com/office/drawing/2014/main" id="{5F7C4E77-71BE-E7C9-B3B5-0C639BC8241A}"/>
+              </a:ext>
+            </a:extLst>
+          </p:cNvPr>
+          <p:cNvSpPr>
+            <a:spLocks noGrp="1"/>
+          </p:cNvSpPr>
+          <p:nvPr>
+            <p:ph type="body" idx="1"/>
+          </p:nvPr>
+        </p:nvSpPr>
+        <p:spPr/>
+        <p:txBody>
+          <a:bodyPr/>
+          <a:lstStyle/>
+          <a:p>
+            <a:r>
+              <a:rPr lang="en-US" dirty="0"/>
+              <a:t>Predicting a label</a:t>
+            </a:r>
+          </a:p>
+        </p:txBody>
+      </p:sp>
+    </p:spTree>
+    <p:extLst>
+      <p:ext uri="{BB962C8B-B14F-4D97-AF65-F5344CB8AC3E}">
+        <p14:creationId xmlns:p14="http://schemas.microsoft.com/office/powerpoint/2010/main" val="460958510"/>
+      </p:ext>
+    </p:extLst>
+  </p:cSld>
+  <p:clrMapOvr>
+    <a:masterClrMapping/>
+  </p:clrMapOvr>
+</p:sld>
+</file>
+
+<file path=ppt/slides/slide26.xml><?xml version="1.0" encoding="utf-8"?>
 <p:sld xmlns:a="http://schemas.openxmlformats.org/drawingml/2006/main" xmlns:r="http://schemas.openxmlformats.org/officeDocument/2006/relationships" xmlns:p="http://schemas.openxmlformats.org/presentationml/2006/main">
   <p:cSld>
     <p:spTree>
@@ -32473,8 +32780,8 @@
           </a:p>
         </p:txBody>
       </p:sp>
-      <mc:AlternateContent xmlns:mc="http://schemas.openxmlformats.org/markup-compatibility/2006" xmlns:a14="http://schemas.microsoft.com/office/drawing/2010/main">
-        <mc:Choice Requires="a14">
+      <mc:AlternateContent xmlns:mc="http://schemas.openxmlformats.org/markup-compatibility/2006">
+        <mc:Choice xmlns:a14="http://schemas.microsoft.com/office/drawing/2010/main" Requires="a14">
           <p:sp>
             <p:nvSpPr>
               <p:cNvPr id="3" name="Content Placeholder 2">
@@ -32491,10 +32798,15 @@
                 <p:ph idx="1"/>
               </p:nvPr>
             </p:nvSpPr>
-            <p:spPr/>
+            <p:spPr>
+              <a:xfrm>
+                <a:off x="838200" y="1825625"/>
+                <a:ext cx="8763000" cy="4351338"/>
+              </a:xfrm>
+            </p:spPr>
             <p:txBody>
               <a:bodyPr>
-                <a:normAutofit fontScale="77500" lnSpcReduction="20000"/>
+                <a:normAutofit fontScale="70000" lnSpcReduction="20000"/>
               </a:bodyPr>
               <a:lstStyle/>
               <a:p>
@@ -33148,7 +33460,7 @@
             </p:txBody>
           </p:sp>
         </mc:Choice>
-        <mc:Fallback xmlns="">
+        <mc:Fallback>
           <p:sp>
             <p:nvSpPr>
               <p:cNvPr id="3" name="Content Placeholder 2">
@@ -33166,10 +33478,14 @@
               </p:nvPr>
             </p:nvSpPr>
             <p:spPr>
+              <a:xfrm>
+                <a:off x="838200" y="1825625"/>
+                <a:ext cx="8763000" cy="4351338"/>
+              </a:xfrm>
               <a:blipFill>
                 <a:blip r:embed="rId2"/>
                 <a:stretch>
-                  <a:fillRect l="-696" t="-13725"/>
+                  <a:fillRect l="-626" t="-12465" r="-974"/>
                 </a:stretch>
               </a:blipFill>
             </p:spPr>
@@ -33572,7 +33888,7 @@
 </p:sld>
 </file>
 
-<file path=ppt/slides/slide26.xml><?xml version="1.0" encoding="utf-8"?>
+<file path=ppt/slides/slide27.xml><?xml version="1.0" encoding="utf-8"?>
 <p:sld xmlns:a="http://schemas.openxmlformats.org/drawingml/2006/main" xmlns:r="http://schemas.openxmlformats.org/officeDocument/2006/relationships" xmlns:p="http://schemas.openxmlformats.org/presentationml/2006/main">
   <p:cSld>
     <p:spTree>
@@ -34670,7 +34986,7 @@
 </p:sld>
 </file>
 
-<file path=ppt/slides/slide27.xml><?xml version="1.0" encoding="utf-8"?>
+<file path=ppt/slides/slide28.xml><?xml version="1.0" encoding="utf-8"?>
 <p:sld xmlns:a="http://schemas.openxmlformats.org/drawingml/2006/main" xmlns:r="http://schemas.openxmlformats.org/officeDocument/2006/relationships" xmlns:p="http://schemas.openxmlformats.org/presentationml/2006/main">
   <p:cSld>
     <p:spTree>
@@ -35436,7 +35752,7 @@
 </p:sld>
 </file>
 
-<file path=ppt/slides/slide28.xml><?xml version="1.0" encoding="utf-8"?>
+<file path=ppt/slides/slide29.xml><?xml version="1.0" encoding="utf-8"?>
 <p:sld xmlns:a="http://schemas.openxmlformats.org/drawingml/2006/main" xmlns:r="http://schemas.openxmlformats.org/officeDocument/2006/relationships" xmlns:p="http://schemas.openxmlformats.org/presentationml/2006/main" show="0">
   <p:cSld>
     <p:spTree>
@@ -35788,7 +36104,171 @@
 </p:sld>
 </file>
 
-<file path=ppt/slides/slide29.xml><?xml version="1.0" encoding="utf-8"?>
+<file path=ppt/slides/slide3.xml><?xml version="1.0" encoding="utf-8"?>
+<p:sld xmlns:a="http://schemas.openxmlformats.org/drawingml/2006/main" xmlns:r="http://schemas.openxmlformats.org/officeDocument/2006/relationships" xmlns:p="http://schemas.openxmlformats.org/presentationml/2006/main">
+  <p:cSld>
+    <p:spTree>
+      <p:nvGrpSpPr>
+        <p:cNvPr id="1" name="">
+          <a:extLst>
+            <a:ext uri="{FF2B5EF4-FFF2-40B4-BE49-F238E27FC236}">
+              <a16:creationId xmlns:a16="http://schemas.microsoft.com/office/drawing/2014/main" id="{BB24A43D-93C1-ABD3-A2E5-40B73B6ECC06}"/>
+            </a:ext>
+          </a:extLst>
+        </p:cNvPr>
+        <p:cNvGrpSpPr/>
+        <p:nvPr/>
+      </p:nvGrpSpPr>
+      <p:grpSpPr>
+        <a:xfrm>
+          <a:off x="0" y="0"/>
+          <a:ext cx="0" cy="0"/>
+          <a:chOff x="0" y="0"/>
+          <a:chExt cx="0" cy="0"/>
+        </a:xfrm>
+      </p:grpSpPr>
+      <p:sp>
+        <p:nvSpPr>
+          <p:cNvPr id="2" name="Title 1">
+            <a:extLst>
+              <a:ext uri="{FF2B5EF4-FFF2-40B4-BE49-F238E27FC236}">
+                <a16:creationId xmlns:a16="http://schemas.microsoft.com/office/drawing/2014/main" id="{EB85A4B6-D7DC-5913-84F9-79DC02BD043E}"/>
+              </a:ext>
+            </a:extLst>
+          </p:cNvPr>
+          <p:cNvSpPr>
+            <a:spLocks noGrp="1"/>
+          </p:cNvSpPr>
+          <p:nvPr>
+            <p:ph type="title"/>
+          </p:nvPr>
+        </p:nvSpPr>
+        <p:spPr>
+          <a:xfrm>
+            <a:off x="477981" y="1122363"/>
+            <a:ext cx="4023360" cy="3204134"/>
+          </a:xfrm>
+        </p:spPr>
+        <p:txBody>
+          <a:bodyPr vert="horz" lIns="91440" tIns="45720" rIns="91440" bIns="45720" rtlCol="0" anchor="b">
+            <a:normAutofit/>
+          </a:bodyPr>
+          <a:lstStyle/>
+          <a:p>
+            <a:r>
+              <a:rPr lang="en-US" sz="4800" kern="1200" dirty="0">
+                <a:solidFill>
+                  <a:schemeClr val="tx1"/>
+                </a:solidFill>
+                <a:latin typeface="+mj-lt"/>
+                <a:ea typeface="+mj-ea"/>
+                <a:cs typeface="+mj-cs"/>
+              </a:rPr>
+              <a:t>Agents and ML</a:t>
+            </a:r>
+          </a:p>
+        </p:txBody>
+      </p:sp>
+      <p:sp>
+        <p:nvSpPr>
+          <p:cNvPr id="7" name="TextBox 6">
+            <a:extLst>
+              <a:ext uri="{FF2B5EF4-FFF2-40B4-BE49-F238E27FC236}">
+                <a16:creationId xmlns:a16="http://schemas.microsoft.com/office/drawing/2014/main" id="{192FDFC1-1E91-863C-60E8-089AC78538B5}"/>
+              </a:ext>
+            </a:extLst>
+          </p:cNvPr>
+          <p:cNvSpPr txBox="1"/>
+          <p:nvPr/>
+        </p:nvSpPr>
+        <p:spPr>
+          <a:xfrm>
+            <a:off x="5715000" y="6081063"/>
+            <a:ext cx="5562600" cy="523220"/>
+          </a:xfrm>
+          <a:prstGeom prst="rect">
+            <a:avLst/>
+          </a:prstGeom>
+          <a:noFill/>
+        </p:spPr>
+        <p:txBody>
+          <a:bodyPr wrap="square" rtlCol="0">
+            <a:spAutoFit/>
+          </a:bodyPr>
+          <a:lstStyle/>
+          <a:p>
+            <a:pPr algn="ctr"/>
+            <a:r>
+              <a:rPr lang="en-US" sz="1400" dirty="0"/>
+              <a:t>DeepAi.org with prompt: “A happy cartoon robot with an artificial neural network for a brain on white background learning to play chess”</a:t>
+            </a:r>
+          </a:p>
+        </p:txBody>
+      </p:sp>
+      <p:pic>
+        <p:nvPicPr>
+          <p:cNvPr id="1034" name="Picture 10">
+            <a:extLst>
+              <a:ext uri="{FF2B5EF4-FFF2-40B4-BE49-F238E27FC236}">
+                <a16:creationId xmlns:a16="http://schemas.microsoft.com/office/drawing/2014/main" id="{0B3B5D91-7A9D-DC31-1696-410760A5AF47}"/>
+              </a:ext>
+              <a:ext uri="{C183D7F6-B498-43B3-948B-1728B52AA6E4}">
+                <adec:decorative xmlns:adec="http://schemas.microsoft.com/office/drawing/2017/decorative" val="1"/>
+              </a:ext>
+            </a:extLst>
+          </p:cNvPr>
+          <p:cNvPicPr>
+            <a:picLocks noChangeAspect="1" noChangeArrowheads="1"/>
+          </p:cNvPicPr>
+          <p:nvPr/>
+        </p:nvPicPr>
+        <p:blipFill>
+          <a:blip r:embed="rId2">
+            <a:extLst>
+              <a:ext uri="{28A0092B-C50C-407E-A947-70E740481C1C}">
+                <a14:useLocalDpi xmlns:a14="http://schemas.microsoft.com/office/drawing/2010/main" val="0"/>
+              </a:ext>
+            </a:extLst>
+          </a:blip>
+          <a:srcRect/>
+          <a:stretch>
+            <a:fillRect/>
+          </a:stretch>
+        </p:blipFill>
+        <p:spPr bwMode="auto">
+          <a:xfrm>
+            <a:off x="5524500" y="172099"/>
+            <a:ext cx="5943600" cy="5943600"/>
+          </a:xfrm>
+          <a:prstGeom prst="rect">
+            <a:avLst/>
+          </a:prstGeom>
+          <a:noFill/>
+          <a:extLst>
+            <a:ext uri="{909E8E84-426E-40DD-AFC4-6F175D3DCCD1}">
+              <a14:hiddenFill xmlns:a14="http://schemas.microsoft.com/office/drawing/2010/main">
+                <a:solidFill>
+                  <a:srgbClr val="FFFFFF"/>
+                </a:solidFill>
+              </a14:hiddenFill>
+            </a:ext>
+          </a:extLst>
+        </p:spPr>
+      </p:pic>
+    </p:spTree>
+    <p:extLst>
+      <p:ext uri="{BB962C8B-B14F-4D97-AF65-F5344CB8AC3E}">
+        <p14:creationId xmlns:p14="http://schemas.microsoft.com/office/powerpoint/2010/main" val="2256691729"/>
+      </p:ext>
+    </p:extLst>
+  </p:cSld>
+  <p:clrMapOvr>
+    <a:masterClrMapping/>
+  </p:clrMapOvr>
+</p:sld>
+</file>
+
+<file path=ppt/slides/slide30.xml><?xml version="1.0" encoding="utf-8"?>
 <p:sld xmlns:a="http://schemas.openxmlformats.org/drawingml/2006/main" xmlns:r="http://schemas.openxmlformats.org/officeDocument/2006/relationships" xmlns:p="http://schemas.openxmlformats.org/presentationml/2006/main">
   <p:cSld>
     <p:spTree>
@@ -35855,9 +36335,9 @@
         <p:grpSpPr>
           <a:xfrm>
             <a:off x="45672" y="1164852"/>
-            <a:ext cx="7802930" cy="5509792"/>
+            <a:ext cx="8115300" cy="5509792"/>
             <a:chOff x="45672" y="1164852"/>
-            <a:chExt cx="7802930" cy="5509792"/>
+            <a:chExt cx="8115300" cy="5509792"/>
           </a:xfrm>
         </p:grpSpPr>
         <p:pic>
@@ -35955,13 +36435,13 @@
           </p:nvSpPr>
           <p:spPr>
             <a:xfrm>
-              <a:off x="4405570" y="6113461"/>
-              <a:ext cx="2425700" cy="482600"/>
+              <a:off x="4405570" y="5867400"/>
+              <a:ext cx="1690430" cy="728661"/>
             </a:xfrm>
             <a:prstGeom prst="wedgeRectCallout">
               <a:avLst>
-                <a:gd name="adj1" fmla="val -15845"/>
-                <a:gd name="adj2" fmla="val -257736"/>
+                <a:gd name="adj1" fmla="val -6010"/>
+                <a:gd name="adj2" fmla="val -152527"/>
               </a:avLst>
             </a:prstGeom>
           </p:spPr>
@@ -35988,8 +36468,13 @@
               <a:pPr algn="ctr"/>
               <a:r>
                 <a:rPr lang="en-US" sz="1400" dirty="0"/>
-                <a:t>Non-linear activation function</a:t>
+                <a:t>Non-linear activation function. E.g., </a:t>
               </a:r>
+              <a:r>
+                <a:rPr lang="en-US" sz="1400" dirty="0" err="1"/>
+                <a:t>ReLU</a:t>
+              </a:r>
+              <a:endParaRPr lang="en-US" sz="1400" dirty="0"/>
             </a:p>
           </p:txBody>
         </p:sp>
@@ -36040,7 +36525,7 @@
               <a:pPr algn="ctr"/>
               <a:r>
                 <a:rPr lang="en-US" sz="1400" dirty="0"/>
-                <a:t>Hidden Layer</a:t>
+                <a:t>One or more hidden layers</a:t>
               </a:r>
             </a:p>
           </p:txBody>
@@ -36136,8 +36621,8 @@
             </a:p>
           </p:txBody>
         </p:sp>
-        <mc:AlternateContent xmlns:mc="http://schemas.openxmlformats.org/markup-compatibility/2006" xmlns:a14="http://schemas.microsoft.com/office/drawing/2010/main">
-          <mc:Choice Requires="a14">
+        <mc:AlternateContent xmlns:mc="http://schemas.openxmlformats.org/markup-compatibility/2006">
+          <mc:Choice xmlns:a14="http://schemas.microsoft.com/office/drawing/2010/main" Requires="a14">
             <p:sp>
               <p:nvSpPr>
                 <p:cNvPr id="4" name="Speech Bubble: Rectangle 3">
@@ -36152,13 +36637,13 @@
               </p:nvSpPr>
               <p:spPr>
                 <a:xfrm>
-                  <a:off x="6144988" y="1524000"/>
-                  <a:ext cx="1703613" cy="1090108"/>
+                  <a:off x="6424870" y="4843564"/>
+                  <a:ext cx="1736102" cy="1828771"/>
                 </a:xfrm>
                 <a:prstGeom prst="wedgeRectCallout">
                   <a:avLst>
-                    <a:gd name="adj1" fmla="val 12589"/>
-                    <a:gd name="adj2" fmla="val 157912"/>
+                    <a:gd name="adj1" fmla="val -7742"/>
+                    <a:gd name="adj2" fmla="val -87181"/>
                   </a:avLst>
                 </a:prstGeom>
               </p:spPr>
@@ -36182,10 +36667,32 @@
                 <a:bodyPr rtlCol="0" anchor="ctr"/>
                 <a:lstStyle/>
                 <a:p>
-                  <a:pPr algn="ctr"/>
                   <a:r>
                     <a:rPr lang="en-US" sz="1400" dirty="0"/>
-                    <a:t>For classification, a </a:t>
+                    <a:t>Regression: </a:t>
+                  </a:r>
+                  <a:br>
+                    <a:rPr lang="en-US" sz="1400" dirty="0"/>
+                  </a:br>
+                  <a:r>
+                    <a:rPr lang="en-US" sz="1400" dirty="0"/>
+                    <a:t>Linear activation.</a:t>
+                  </a:r>
+                </a:p>
+                <a:p>
+                  <a:br>
+                    <a:rPr lang="en-US" sz="1400" dirty="0"/>
+                  </a:br>
+                  <a:r>
+                    <a:rPr lang="en-US" sz="1400" dirty="0"/>
+                    <a:t>Classification:</a:t>
+                  </a:r>
+                  <a:br>
+                    <a:rPr lang="en-US" sz="1400" dirty="0"/>
+                  </a:br>
+                  <a:r>
+                    <a:rPr lang="en-US" sz="1400" dirty="0"/>
+                    <a:t>Multiple output nodes with a </a:t>
                   </a:r>
                   <a:r>
                     <a:rPr lang="en-US" sz="1400" dirty="0" err="1"/>
@@ -36235,15 +36742,12 @@
                       </m:r>
                     </m:oMath>
                   </a14:m>
-                  <a:r>
-                    <a:rPr lang="en-US" sz="1400" dirty="0"/>
-                    <a:t> is used.</a:t>
-                  </a:r>
+                  <a:endParaRPr lang="en-US" sz="1400" dirty="0"/>
                 </a:p>
               </p:txBody>
             </p:sp>
           </mc:Choice>
-          <mc:Fallback xmlns="">
+          <mc:Fallback>
             <p:sp>
               <p:nvSpPr>
                 <p:cNvPr id="4" name="Speech Bubble: Rectangle 3">
@@ -36260,19 +36764,19 @@
               </p:nvSpPr>
               <p:spPr>
                 <a:xfrm>
-                  <a:off x="6144988" y="1524000"/>
-                  <a:ext cx="1703613" cy="1090108"/>
+                  <a:off x="6424870" y="4843564"/>
+                  <a:ext cx="1736102" cy="1828771"/>
                 </a:xfrm>
                 <a:prstGeom prst="wedgeRectCallout">
                   <a:avLst>
-                    <a:gd name="adj1" fmla="val 12589"/>
-                    <a:gd name="adj2" fmla="val 157912"/>
+                    <a:gd name="adj1" fmla="val -7742"/>
+                    <a:gd name="adj2" fmla="val -87181"/>
                   </a:avLst>
                 </a:prstGeom>
                 <a:blipFill>
                   <a:blip r:embed="rId3"/>
                   <a:stretch>
-                    <a:fillRect/>
+                    <a:fillRect l="-697" r="-348" b="-1683"/>
                   </a:stretch>
                 </a:blipFill>
               </p:spPr>
@@ -36498,8 +37002,8 @@
           </p:style>
         </p:cxnSp>
       </p:grpSp>
-      <mc:AlternateContent xmlns:mc="http://schemas.openxmlformats.org/markup-compatibility/2006" xmlns:a14="http://schemas.microsoft.com/office/drawing/2010/main">
-        <mc:Choice Requires="a14">
+      <mc:AlternateContent xmlns:mc="http://schemas.openxmlformats.org/markup-compatibility/2006">
+        <mc:Choice xmlns:a14="http://schemas.microsoft.com/office/drawing/2010/main" Requires="a14">
           <p:sp>
             <p:nvSpPr>
               <p:cNvPr id="3" name="Content Placeholder 2">
@@ -36518,8 +37022,8 @@
             </p:nvSpPr>
             <p:spPr>
               <a:xfrm>
-                <a:off x="8035974" y="1452988"/>
-                <a:ext cx="3657600" cy="5143073"/>
+                <a:off x="8229600" y="1452988"/>
+                <a:ext cx="3463974" cy="5143073"/>
               </a:xfrm>
             </p:spPr>
             <p:txBody>
@@ -36529,14 +37033,14 @@
               <a:lstStyle/>
               <a:p>
                 <a:r>
-                  <a:rPr lang="en-US" sz="1600" dirty="0"/>
+                  <a:rPr lang="en-US" sz="1500" dirty="0"/>
                   <a:t>Represent </a:t>
                 </a:r>
                 <a:br>
-                  <a:rPr lang="en-US" sz="1600" dirty="0"/>
+                  <a:rPr lang="en-US" sz="1500" dirty="0"/>
                 </a:br>
                 <a:r>
-                  <a:rPr lang="en-US" sz="1600" dirty="0"/>
+                  <a:rPr lang="en-US" sz="1500" dirty="0"/>
                   <a:t>   </a:t>
                 </a:r>
                 <a14:m>
@@ -36545,14 +37049,14 @@
                       <m:accPr>
                         <m:chr m:val="̂"/>
                         <m:ctrlPr>
-                          <a:rPr lang="en-US" sz="1600" b="0" i="1" dirty="0" smtClean="0">
+                          <a:rPr lang="en-US" sz="1500" b="0" i="1" dirty="0" smtClean="0">
                             <a:latin typeface="Cambria Math" panose="02040503050406030204" pitchFamily="18" charset="0"/>
                           </a:rPr>
                         </m:ctrlPr>
                       </m:accPr>
                       <m:e>
                         <m:r>
-                          <a:rPr lang="en-US" sz="1600" b="0" i="1" dirty="0" smtClean="0">
+                          <a:rPr lang="en-US" sz="1500" b="0" i="1" dirty="0" smtClean="0">
                             <a:latin typeface="Cambria Math" panose="02040503050406030204" pitchFamily="18" charset="0"/>
                           </a:rPr>
                           <m:t>𝑦</m:t>
@@ -36560,13 +37064,13 @@
                       </m:e>
                     </m:acc>
                     <m:r>
-                      <a:rPr lang="en-US" sz="1600" b="0" i="1" dirty="0" smtClean="0">
+                      <a:rPr lang="en-US" sz="1500" b="0" i="1" dirty="0" smtClean="0">
                         <a:latin typeface="Cambria Math" panose="02040503050406030204" pitchFamily="18" charset="0"/>
                       </a:rPr>
                       <m:t>=</m:t>
                     </m:r>
                     <m:r>
-                      <a:rPr lang="en-US" sz="1600" b="0" i="1" dirty="0" smtClean="0">
+                      <a:rPr lang="en-US" sz="1500" b="0" i="1" dirty="0" smtClean="0">
                         <a:latin typeface="Cambria Math" panose="02040503050406030204" pitchFamily="18" charset="0"/>
                       </a:rPr>
                       <m:t>h</m:t>
@@ -36574,14 +37078,14 @@
                     <m:d>
                       <m:dPr>
                         <m:ctrlPr>
-                          <a:rPr lang="en-US" sz="1600" b="0" i="1" dirty="0" smtClean="0">
+                          <a:rPr lang="en-US" sz="1500" b="0" i="1" dirty="0" smtClean="0">
                             <a:latin typeface="Cambria Math" panose="02040503050406030204" pitchFamily="18" charset="0"/>
                           </a:rPr>
                         </m:ctrlPr>
                       </m:dPr>
                       <m:e>
                         <m:r>
-                          <a:rPr lang="en-US" sz="1600" b="1" i="1" dirty="0" smtClean="0">
+                          <a:rPr lang="en-US" sz="1500" b="1" i="1" dirty="0" smtClean="0">
                             <a:latin typeface="Cambria Math" panose="02040503050406030204" pitchFamily="18" charset="0"/>
                           </a:rPr>
                           <m:t>𝒙</m:t>
@@ -36589,7 +37093,7 @@
                       </m:e>
                     </m:d>
                     <m:r>
-                      <a:rPr lang="en-US" sz="1600" i="1">
+                      <a:rPr lang="en-US" sz="1500" i="1">
                         <a:latin typeface="Cambria Math" panose="02040503050406030204" pitchFamily="18" charset="0"/>
                       </a:rPr>
                       <m:t>=</m:t>
@@ -36597,14 +37101,14 @@
                     <m:sSup>
                       <m:sSupPr>
                         <m:ctrlPr>
-                          <a:rPr lang="en-US" sz="1600" b="0" i="1" smtClean="0">
+                          <a:rPr lang="en-US" sz="1500" b="0" i="1" smtClean="0">
                             <a:latin typeface="Cambria Math" panose="02040503050406030204" pitchFamily="18" charset="0"/>
                           </a:rPr>
                         </m:ctrlPr>
                       </m:sSupPr>
                       <m:e>
                         <m:r>
-                          <a:rPr lang="en-US" sz="1600" b="0" i="1" smtClean="0">
+                          <a:rPr lang="en-US" sz="1500" b="0" i="1" smtClean="0">
                             <a:latin typeface="Cambria Math" panose="02040503050406030204" pitchFamily="18" charset="0"/>
                           </a:rPr>
                           <m:t>𝑔</m:t>
@@ -36612,7 +37116,7 @@
                       </m:e>
                       <m:sup>
                         <m:r>
-                          <a:rPr lang="en-US" sz="1600" b="0" i="1" smtClean="0">
+                          <a:rPr lang="en-US" sz="1500" b="0" i="1" smtClean="0">
                             <a:latin typeface="Cambria Math" panose="02040503050406030204" pitchFamily="18" charset="0"/>
                           </a:rPr>
                           <m:t>[2]</m:t>
@@ -36622,7 +37126,7 @@
                     <m:d>
                       <m:dPr>
                         <m:ctrlPr>
-                          <a:rPr lang="en-US" sz="1600" i="1">
+                          <a:rPr lang="en-US" sz="1500" i="1">
                             <a:latin typeface="Cambria Math" panose="02040503050406030204" pitchFamily="18" charset="0"/>
                           </a:rPr>
                         </m:ctrlPr>
@@ -36631,14 +37135,14 @@
                         <m:sSup>
                           <m:sSupPr>
                             <m:ctrlPr>
-                              <a:rPr lang="en-US" sz="1600" b="0" i="1" smtClean="0">
+                              <a:rPr lang="en-US" sz="1500" b="0" i="1" smtClean="0">
                                 <a:latin typeface="Cambria Math" panose="02040503050406030204" pitchFamily="18" charset="0"/>
                               </a:rPr>
                             </m:ctrlPr>
                           </m:sSupPr>
                           <m:e>
                             <m:r>
-                              <a:rPr lang="en-US" sz="1600" b="1" i="1" smtClean="0">
+                              <a:rPr lang="en-US" sz="1500" b="1" i="1" smtClean="0">
                                 <a:latin typeface="Cambria Math" panose="02040503050406030204" pitchFamily="18" charset="0"/>
                               </a:rPr>
                               <m:t>𝑾</m:t>
@@ -36646,7 +37150,7 @@
                           </m:e>
                           <m:sup>
                             <m:r>
-                              <a:rPr lang="en-US" sz="1600" b="0" i="1" smtClean="0">
+                              <a:rPr lang="en-US" sz="1500" b="0" i="1" smtClean="0">
                                 <a:latin typeface="Cambria Math" panose="02040503050406030204" pitchFamily="18" charset="0"/>
                               </a:rPr>
                               <m:t>[2]</m:t>
@@ -36654,7 +37158,7 @@
                           </m:sup>
                         </m:sSup>
                         <m:r>
-                          <a:rPr lang="en-US" sz="1600" i="1">
+                          <a:rPr lang="en-US" sz="1500" i="1">
                             <a:latin typeface="Cambria Math" panose="02040503050406030204" pitchFamily="18" charset="0"/>
                           </a:rPr>
                           <m:t> </m:t>
@@ -36662,14 +37166,14 @@
                         <m:sSup>
                           <m:sSupPr>
                             <m:ctrlPr>
-                              <a:rPr lang="en-US" sz="1600" b="0" i="1" smtClean="0">
+                              <a:rPr lang="en-US" sz="1500" b="0" i="1" smtClean="0">
                                 <a:latin typeface="Cambria Math" panose="02040503050406030204" pitchFamily="18" charset="0"/>
                               </a:rPr>
                             </m:ctrlPr>
                           </m:sSupPr>
                           <m:e>
                             <m:r>
-                              <a:rPr lang="en-US" sz="1600" b="0" i="1" smtClean="0">
+                              <a:rPr lang="en-US" sz="1500" b="0" i="1" smtClean="0">
                                 <a:latin typeface="Cambria Math" panose="02040503050406030204" pitchFamily="18" charset="0"/>
                               </a:rPr>
                               <m:t>𝑔</m:t>
@@ -36681,14 +37185,14 @@
                                 <m:begChr m:val="["/>
                                 <m:endChr m:val="]"/>
                                 <m:ctrlPr>
-                                  <a:rPr lang="en-US" sz="1600" b="0" i="1" smtClean="0">
+                                  <a:rPr lang="en-US" sz="1500" b="0" i="1" smtClean="0">
                                     <a:latin typeface="Cambria Math" panose="02040503050406030204" pitchFamily="18" charset="0"/>
                                   </a:rPr>
                                 </m:ctrlPr>
                               </m:dPr>
                               <m:e>
                                 <m:r>
-                                  <a:rPr lang="en-US" sz="1600" b="0" i="1" smtClean="0">
+                                  <a:rPr lang="en-US" sz="1500" b="0" i="1" smtClean="0">
                                     <a:latin typeface="Cambria Math" panose="02040503050406030204" pitchFamily="18" charset="0"/>
                                   </a:rPr>
                                   <m:t>1</m:t>
@@ -36700,7 +37204,7 @@
                         <m:d>
                           <m:dPr>
                             <m:ctrlPr>
-                              <a:rPr lang="en-US" sz="1600" b="1" i="1">
+                              <a:rPr lang="en-US" sz="1500" b="1" i="1">
                                 <a:latin typeface="Cambria Math" panose="02040503050406030204" pitchFamily="18" charset="0"/>
                               </a:rPr>
                             </m:ctrlPr>
@@ -36709,14 +37213,14 @@
                             <m:sSup>
                               <m:sSupPr>
                                 <m:ctrlPr>
-                                  <a:rPr lang="en-US" sz="1600" b="1" i="1" smtClean="0">
+                                  <a:rPr lang="en-US" sz="1500" b="1" i="1" smtClean="0">
                                     <a:latin typeface="Cambria Math" panose="02040503050406030204" pitchFamily="18" charset="0"/>
                                   </a:rPr>
                                 </m:ctrlPr>
                               </m:sSupPr>
                               <m:e>
                                 <m:r>
-                                  <a:rPr lang="en-US" sz="1600" b="1" i="1" smtClean="0">
+                                  <a:rPr lang="en-US" sz="1500" b="1" i="1" smtClean="0">
                                     <a:latin typeface="Cambria Math" panose="02040503050406030204" pitchFamily="18" charset="0"/>
                                   </a:rPr>
                                   <m:t>𝑾</m:t>
@@ -36724,13 +37228,13 @@
                               </m:e>
                               <m:sup>
                                 <m:r>
-                                  <a:rPr lang="en-US" sz="1600" b="1" i="1" smtClean="0">
+                                  <a:rPr lang="en-US" sz="1500" b="1" i="1" smtClean="0">
                                     <a:latin typeface="Cambria Math" panose="02040503050406030204" pitchFamily="18" charset="0"/>
                                   </a:rPr>
                                   <m:t>[</m:t>
                                 </m:r>
                                 <m:r>
-                                  <a:rPr lang="en-US" sz="1600" b="0" i="1" smtClean="0">
+                                  <a:rPr lang="en-US" sz="1500" b="0" i="1" smtClean="0">
                                     <a:latin typeface="Cambria Math" panose="02040503050406030204" pitchFamily="18" charset="0"/>
                                   </a:rPr>
                                   <m:t>1</m:t>
@@ -36739,7 +37243,7 @@
                                   <m:rPr>
                                     <m:lit/>
                                   </m:rPr>
-                                  <a:rPr lang="en-US" sz="1600" b="0" i="1" smtClean="0">
+                                  <a:rPr lang="en-US" sz="1500" b="0" i="1" smtClean="0">
                                     <a:latin typeface="Cambria Math" panose="02040503050406030204" pitchFamily="18" charset="0"/>
                                   </a:rPr>
                                   <m:t>]</m:t>
@@ -36747,7 +37251,7 @@
                               </m:sup>
                             </m:sSup>
                             <m:r>
-                              <a:rPr lang="en-US" sz="1600" b="1" i="1">
+                              <a:rPr lang="en-US" sz="1500" b="1" i="1">
                                 <a:latin typeface="Cambria Math" panose="02040503050406030204" pitchFamily="18" charset="0"/>
                               </a:rPr>
                               <m:t>𝒙</m:t>
@@ -36759,26 +37263,26 @@
                   </m:oMath>
                 </a14:m>
                 <a:br>
-                  <a:rPr lang="en-US" sz="1600" dirty="0"/>
+                  <a:rPr lang="en-US" sz="1500" dirty="0"/>
                 </a:br>
                 <a:r>
-                  <a:rPr lang="en-US" sz="1600" dirty="0"/>
+                  <a:rPr lang="en-US" sz="1500" dirty="0"/>
                   <a:t>as a network of weighted sums with non-linear </a:t>
                 </a:r>
                 <a:r>
-                  <a:rPr lang="en-US" sz="1600" b="1" dirty="0"/>
+                  <a:rPr lang="en-US" sz="1500" b="1" dirty="0"/>
                   <a:t>activation functions </a:t>
                 </a:r>
                 <a14:m>
                   <m:oMath xmlns:m="http://schemas.openxmlformats.org/officeDocument/2006/math">
                     <m:r>
-                      <a:rPr lang="en-US" sz="1600" i="1" dirty="0" smtClean="0">
+                      <a:rPr lang="en-US" sz="1500" i="1" dirty="0" smtClean="0">
                         <a:latin typeface="Cambria Math" panose="02040503050406030204" pitchFamily="18" charset="0"/>
                       </a:rPr>
                       <m:t>𝑔</m:t>
                     </m:r>
                     <m:r>
-                      <a:rPr lang="en-US" sz="1600" b="0" i="1" dirty="0" smtClean="0">
+                      <a:rPr lang="en-US" sz="1500" b="0" i="1" dirty="0" smtClean="0">
                         <a:latin typeface="Cambria Math" panose="02040503050406030204" pitchFamily="18" charset="0"/>
                       </a:rPr>
                       <m:t>(⋅)</m:t>
@@ -36786,27 +37290,27 @@
                   </m:oMath>
                 </a14:m>
                 <a:r>
-                  <a:rPr lang="en-US" sz="1600" dirty="0"/>
+                  <a:rPr lang="en-US" sz="1500" dirty="0"/>
                   <a:t> (e.g., sigmoid, </a:t>
                 </a:r>
                 <a:r>
-                  <a:rPr lang="en-US" sz="1600" dirty="0" err="1"/>
+                  <a:rPr lang="en-US" sz="1500" dirty="0" err="1"/>
                   <a:t>ReLU</a:t>
                 </a:r>
                 <a:r>
-                  <a:rPr lang="en-US" sz="1600" dirty="0"/>
+                  <a:rPr lang="en-US" sz="1500" dirty="0"/>
                   <a:t>).</a:t>
                 </a:r>
               </a:p>
               <a:p>
                 <a:r>
-                  <a:rPr lang="en-US" sz="1600" dirty="0"/>
+                  <a:rPr lang="en-US" sz="1500" dirty="0"/>
                   <a:t>Learn weight matrices </a:t>
                 </a:r>
                 <a14:m>
                   <m:oMath xmlns:m="http://schemas.openxmlformats.org/officeDocument/2006/math">
                     <m:r>
-                      <a:rPr lang="en-US" sz="1600" b="1" i="1" dirty="0" smtClean="0">
+                      <a:rPr lang="en-US" sz="1500" b="1" i="1" dirty="0" smtClean="0">
                         <a:latin typeface="Cambria Math" panose="02040503050406030204" pitchFamily="18" charset="0"/>
                       </a:rPr>
                       <m:t>𝑾</m:t>
@@ -36814,27 +37318,27 @@
                   </m:oMath>
                 </a14:m>
                 <a:r>
-                  <a:rPr lang="en-US" sz="1600" dirty="0"/>
-                  <a:t> from examples using gradient descent with </a:t>
+                  <a:rPr lang="en-US" sz="1500" dirty="0"/>
+                  <a:t> from examples using gradient descent. The gradient is calculated with </a:t>
                 </a:r>
                 <a:r>
-                  <a:rPr lang="en-US" sz="1600" b="1" dirty="0"/>
+                  <a:rPr lang="en-US" sz="1500" b="1" dirty="0"/>
                   <a:t>backpropagation</a:t>
                 </a:r>
                 <a:r>
-                  <a:rPr lang="en-US" sz="1600" dirty="0"/>
+                  <a:rPr lang="en-US" sz="1500" dirty="0"/>
                   <a:t> of prediction errors </a:t>
                 </a:r>
                 <a14:m>
                   <m:oMath xmlns:m="http://schemas.openxmlformats.org/officeDocument/2006/math">
                     <m:r>
-                      <a:rPr lang="en-US" sz="1600" i="1" dirty="0">
+                      <a:rPr lang="en-US" sz="1500" i="1" dirty="0">
                         <a:latin typeface="Cambria Math" panose="02040503050406030204" pitchFamily="18" charset="0"/>
                       </a:rPr>
                       <m:t>𝐿</m:t>
                     </m:r>
                     <m:r>
-                      <a:rPr lang="en-US" sz="1600" b="0" i="0" dirty="0" smtClean="0">
+                      <a:rPr lang="en-US" sz="1500" b="0" i="0" dirty="0" smtClean="0">
                         <a:latin typeface="Cambria Math" panose="02040503050406030204" pitchFamily="18" charset="0"/>
                       </a:rPr>
                       <m:t>(</m:t>
@@ -36843,14 +37347,14 @@
                       <m:accPr>
                         <m:chr m:val="̂"/>
                         <m:ctrlPr>
-                          <a:rPr lang="en-US" sz="1600" b="0" i="1" dirty="0" smtClean="0">
+                          <a:rPr lang="en-US" sz="1500" b="0" i="1" dirty="0" smtClean="0">
                             <a:latin typeface="Cambria Math" panose="02040503050406030204" pitchFamily="18" charset="0"/>
                           </a:rPr>
                         </m:ctrlPr>
                       </m:accPr>
                       <m:e>
                         <m:r>
-                          <a:rPr lang="en-US" sz="1600" b="0" i="1" dirty="0" smtClean="0">
+                          <a:rPr lang="en-US" sz="1500" b="0" i="1" dirty="0" smtClean="0">
                             <a:latin typeface="Cambria Math" panose="02040503050406030204" pitchFamily="18" charset="0"/>
                           </a:rPr>
                           <m:t>𝑦</m:t>
@@ -36858,19 +37362,19 @@
                       </m:e>
                     </m:acc>
                     <m:r>
-                      <a:rPr lang="en-US" sz="1600" b="0" i="1" dirty="0" smtClean="0">
+                      <a:rPr lang="en-US" sz="1500" b="0" i="1" dirty="0" smtClean="0">
                         <a:latin typeface="Cambria Math" panose="02040503050406030204" pitchFamily="18" charset="0"/>
                       </a:rPr>
                       <m:t>, </m:t>
                     </m:r>
                     <m:r>
-                      <a:rPr lang="en-US" sz="1600" b="0" i="1" dirty="0" smtClean="0">
+                      <a:rPr lang="en-US" sz="1500" b="0" i="1" dirty="0" smtClean="0">
                         <a:latin typeface="Cambria Math" panose="02040503050406030204" pitchFamily="18" charset="0"/>
                       </a:rPr>
                       <m:t>𝑦</m:t>
                     </m:r>
                     <m:r>
-                      <a:rPr lang="en-US" sz="1600" b="0" i="1" dirty="0" smtClean="0">
+                      <a:rPr lang="en-US" sz="1500" b="0" i="1" dirty="0" smtClean="0">
                         <a:latin typeface="Cambria Math" panose="02040503050406030204" pitchFamily="18" charset="0"/>
                       </a:rPr>
                       <m:t>)</m:t>
@@ -36878,56 +37382,56 @@
                   </m:oMath>
                 </a14:m>
                 <a:r>
-                  <a:rPr lang="en-US" sz="1600" dirty="0"/>
+                  <a:rPr lang="en-US" sz="1500" dirty="0"/>
                   <a:t>.</a:t>
                 </a:r>
               </a:p>
               <a:p>
                 <a:r>
-                  <a:rPr lang="en-US" sz="1600" dirty="0"/>
+                  <a:rPr lang="en-US" sz="1500" dirty="0"/>
                   <a:t>ANNs are </a:t>
                 </a:r>
                 <a:r>
-                  <a:rPr lang="en-US" sz="1600" b="1" dirty="0"/>
+                  <a:rPr lang="en-US" sz="1500" b="1" dirty="0"/>
                   <a:t>universal approximators</a:t>
                 </a:r>
                 <a:r>
-                  <a:rPr lang="en-US" sz="1600" dirty="0"/>
-                  <a:t>. Large networks can approximate any function (has no bias). </a:t>
+                  <a:rPr lang="en-US" sz="1500" dirty="0"/>
+                  <a:t>. Large networks can approximate any function (have no bias). </a:t>
                 </a:r>
                 <a:r>
-                  <a:rPr lang="en-US" sz="1600" b="1" dirty="0"/>
+                  <a:rPr lang="en-US" sz="1500" b="1" dirty="0"/>
                   <a:t>Regularization</a:t>
                 </a:r>
                 <a:r>
-                  <a:rPr lang="en-US" sz="1600" dirty="0"/>
+                  <a:rPr lang="en-US" sz="1500" dirty="0"/>
                   <a:t> is typically needed to avoid overfitting.</a:t>
                 </a:r>
               </a:p>
               <a:p>
                 <a:r>
-                  <a:rPr lang="en-US" sz="1600" b="1" dirty="0"/>
+                  <a:rPr lang="en-US" sz="1500" b="1" dirty="0"/>
                   <a:t>End-to-end learning</a:t>
                 </a:r>
                 <a:r>
-                  <a:rPr lang="en-US" sz="1600" dirty="0"/>
-                  <a:t>: The hidden layer performs “automatic feature engineering</a:t>
+                  <a:rPr lang="en-US" sz="1500" dirty="0"/>
+                  <a:t>: The hidden layer performs “automatic feature engineering.”</a:t>
                 </a:r>
               </a:p>
               <a:p>
                 <a:r>
-                  <a:rPr lang="en-US" sz="1600" b="1" dirty="0"/>
+                  <a:rPr lang="en-US" sz="1500" b="1" dirty="0"/>
                   <a:t>Deep learning </a:t>
                 </a:r>
                 <a:r>
-                  <a:rPr lang="en-US" sz="1600" dirty="0"/>
+                  <a:rPr lang="en-US" sz="1500" dirty="0"/>
                   <a:t>adds more hidden layers and layer types (e.g., convolution layers) for more efficient learning and transfer learning.</a:t>
                 </a:r>
               </a:p>
             </p:txBody>
           </p:sp>
         </mc:Choice>
-        <mc:Fallback xmlns="">
+        <mc:Fallback>
           <p:sp>
             <p:nvSpPr>
               <p:cNvPr id="3" name="Content Placeholder 2">
@@ -36946,13 +37450,13 @@
             </p:nvSpPr>
             <p:spPr>
               <a:xfrm>
-                <a:off x="8035974" y="1452988"/>
-                <a:ext cx="3657600" cy="5143073"/>
+                <a:off x="8229600" y="1452988"/>
+                <a:ext cx="3463974" cy="5143073"/>
               </a:xfrm>
               <a:blipFill>
                 <a:blip r:embed="rId4"/>
                 <a:stretch>
-                  <a:fillRect l="-667" t="-829" r="-2167" b="-592"/>
+                  <a:fillRect l="-528" t="-592" r="-1585"/>
                 </a:stretch>
               </a:blipFill>
             </p:spPr>
@@ -37455,171 +37959,7 @@
 </p:sld>
 </file>
 
-<file path=ppt/slides/slide3.xml><?xml version="1.0" encoding="utf-8"?>
-<p:sld xmlns:a="http://schemas.openxmlformats.org/drawingml/2006/main" xmlns:r="http://schemas.openxmlformats.org/officeDocument/2006/relationships" xmlns:p="http://schemas.openxmlformats.org/presentationml/2006/main">
-  <p:cSld>
-    <p:spTree>
-      <p:nvGrpSpPr>
-        <p:cNvPr id="1" name="">
-          <a:extLst>
-            <a:ext uri="{FF2B5EF4-FFF2-40B4-BE49-F238E27FC236}">
-              <a16:creationId xmlns:a16="http://schemas.microsoft.com/office/drawing/2014/main" id="{BB24A43D-93C1-ABD3-A2E5-40B73B6ECC06}"/>
-            </a:ext>
-          </a:extLst>
-        </p:cNvPr>
-        <p:cNvGrpSpPr/>
-        <p:nvPr/>
-      </p:nvGrpSpPr>
-      <p:grpSpPr>
-        <a:xfrm>
-          <a:off x="0" y="0"/>
-          <a:ext cx="0" cy="0"/>
-          <a:chOff x="0" y="0"/>
-          <a:chExt cx="0" cy="0"/>
-        </a:xfrm>
-      </p:grpSpPr>
-      <p:sp>
-        <p:nvSpPr>
-          <p:cNvPr id="2" name="Title 1">
-            <a:extLst>
-              <a:ext uri="{FF2B5EF4-FFF2-40B4-BE49-F238E27FC236}">
-                <a16:creationId xmlns:a16="http://schemas.microsoft.com/office/drawing/2014/main" id="{EB85A4B6-D7DC-5913-84F9-79DC02BD043E}"/>
-              </a:ext>
-            </a:extLst>
-          </p:cNvPr>
-          <p:cNvSpPr>
-            <a:spLocks noGrp="1"/>
-          </p:cNvSpPr>
-          <p:nvPr>
-            <p:ph type="title"/>
-          </p:nvPr>
-        </p:nvSpPr>
-        <p:spPr>
-          <a:xfrm>
-            <a:off x="477981" y="1122363"/>
-            <a:ext cx="4023360" cy="3204134"/>
-          </a:xfrm>
-        </p:spPr>
-        <p:txBody>
-          <a:bodyPr vert="horz" lIns="91440" tIns="45720" rIns="91440" bIns="45720" rtlCol="0" anchor="b">
-            <a:normAutofit/>
-          </a:bodyPr>
-          <a:lstStyle/>
-          <a:p>
-            <a:r>
-              <a:rPr lang="en-US" sz="4800" kern="1200" dirty="0">
-                <a:solidFill>
-                  <a:schemeClr val="tx1"/>
-                </a:solidFill>
-                <a:latin typeface="+mj-lt"/>
-                <a:ea typeface="+mj-ea"/>
-                <a:cs typeface="+mj-cs"/>
-              </a:rPr>
-              <a:t>Agents and ML</a:t>
-            </a:r>
-          </a:p>
-        </p:txBody>
-      </p:sp>
-      <p:sp>
-        <p:nvSpPr>
-          <p:cNvPr id="7" name="TextBox 6">
-            <a:extLst>
-              <a:ext uri="{FF2B5EF4-FFF2-40B4-BE49-F238E27FC236}">
-                <a16:creationId xmlns:a16="http://schemas.microsoft.com/office/drawing/2014/main" id="{192FDFC1-1E91-863C-60E8-089AC78538B5}"/>
-              </a:ext>
-            </a:extLst>
-          </p:cNvPr>
-          <p:cNvSpPr txBox="1"/>
-          <p:nvPr/>
-        </p:nvSpPr>
-        <p:spPr>
-          <a:xfrm>
-            <a:off x="5715000" y="6081063"/>
-            <a:ext cx="5562600" cy="523220"/>
-          </a:xfrm>
-          <a:prstGeom prst="rect">
-            <a:avLst/>
-          </a:prstGeom>
-          <a:noFill/>
-        </p:spPr>
-        <p:txBody>
-          <a:bodyPr wrap="square" rtlCol="0">
-            <a:spAutoFit/>
-          </a:bodyPr>
-          <a:lstStyle/>
-          <a:p>
-            <a:pPr algn="ctr"/>
-            <a:r>
-              <a:rPr lang="en-US" sz="1400" dirty="0"/>
-              <a:t>DeepAi.org with prompt: “A happy cartoon robot with an artificial neural network for a brain on white background learning to play chess”</a:t>
-            </a:r>
-          </a:p>
-        </p:txBody>
-      </p:sp>
-      <p:pic>
-        <p:nvPicPr>
-          <p:cNvPr id="1034" name="Picture 10">
-            <a:extLst>
-              <a:ext uri="{FF2B5EF4-FFF2-40B4-BE49-F238E27FC236}">
-                <a16:creationId xmlns:a16="http://schemas.microsoft.com/office/drawing/2014/main" id="{0B3B5D91-7A9D-DC31-1696-410760A5AF47}"/>
-              </a:ext>
-              <a:ext uri="{C183D7F6-B498-43B3-948B-1728B52AA6E4}">
-                <adec:decorative xmlns:adec="http://schemas.microsoft.com/office/drawing/2017/decorative" val="1"/>
-              </a:ext>
-            </a:extLst>
-          </p:cNvPr>
-          <p:cNvPicPr>
-            <a:picLocks noChangeAspect="1" noChangeArrowheads="1"/>
-          </p:cNvPicPr>
-          <p:nvPr/>
-        </p:nvPicPr>
-        <p:blipFill>
-          <a:blip r:embed="rId2">
-            <a:extLst>
-              <a:ext uri="{28A0092B-C50C-407E-A947-70E740481C1C}">
-                <a14:useLocalDpi xmlns:a14="http://schemas.microsoft.com/office/drawing/2010/main" val="0"/>
-              </a:ext>
-            </a:extLst>
-          </a:blip>
-          <a:srcRect/>
-          <a:stretch>
-            <a:fillRect/>
-          </a:stretch>
-        </p:blipFill>
-        <p:spPr bwMode="auto">
-          <a:xfrm>
-            <a:off x="5524500" y="172099"/>
-            <a:ext cx="5943600" cy="5943600"/>
-          </a:xfrm>
-          <a:prstGeom prst="rect">
-            <a:avLst/>
-          </a:prstGeom>
-          <a:noFill/>
-          <a:extLst>
-            <a:ext uri="{909E8E84-426E-40DD-AFC4-6F175D3DCCD1}">
-              <a14:hiddenFill xmlns:a14="http://schemas.microsoft.com/office/drawing/2010/main">
-                <a:solidFill>
-                  <a:srgbClr val="FFFFFF"/>
-                </a:solidFill>
-              </a14:hiddenFill>
-            </a:ext>
-          </a:extLst>
-        </p:spPr>
-      </p:pic>
-    </p:spTree>
-    <p:extLst>
-      <p:ext uri="{BB962C8B-B14F-4D97-AF65-F5344CB8AC3E}">
-        <p14:creationId xmlns:p14="http://schemas.microsoft.com/office/powerpoint/2010/main" val="2256691729"/>
-      </p:ext>
-    </p:extLst>
-  </p:cSld>
-  <p:clrMapOvr>
-    <a:masterClrMapping/>
-  </p:clrMapOvr>
-</p:sld>
-</file>
-
-<file path=ppt/slides/slide30.xml><?xml version="1.0" encoding="utf-8"?>
+<file path=ppt/slides/slide31.xml><?xml version="1.0" encoding="utf-8"?>
 <p:sld xmlns:a="http://schemas.openxmlformats.org/drawingml/2006/main" xmlns:r="http://schemas.openxmlformats.org/officeDocument/2006/relationships" xmlns:p="http://schemas.openxmlformats.org/presentationml/2006/main" show="0">
   <p:cSld>
     <p:bg>
@@ -37790,7 +38130,7 @@
 </p:sld>
 </file>
 
-<file path=ppt/slides/slide31.xml><?xml version="1.0" encoding="utf-8"?>
+<file path=ppt/slides/slide32.xml><?xml version="1.0" encoding="utf-8"?>
 <p:sld xmlns:a="http://schemas.openxmlformats.org/drawingml/2006/main" xmlns:r="http://schemas.openxmlformats.org/officeDocument/2006/relationships" xmlns:p="http://schemas.openxmlformats.org/presentationml/2006/main">
   <p:cSld>
     <p:spTree>
@@ -37833,55 +38173,6 @@
             <a:r>
               <a:rPr lang="en-US" sz="4000" dirty="0"/>
               <a:t>Typical Use of Supervised ML for Intelligent Agents</a:t>
-            </a:r>
-          </a:p>
-        </p:txBody>
-      </p:sp>
-      <p:sp>
-        <p:nvSpPr>
-          <p:cNvPr id="3" name="Content Placeholder 2">
-            <a:extLst>
-              <a:ext uri="{FF2B5EF4-FFF2-40B4-BE49-F238E27FC236}">
-                <a16:creationId xmlns:a16="http://schemas.microsoft.com/office/drawing/2014/main" id="{78A33CD8-6DB6-F8AA-0C14-2EE3075AFB5C}"/>
-              </a:ext>
-            </a:extLst>
-          </p:cNvPr>
-          <p:cNvSpPr>
-            <a:spLocks noGrp="1"/>
-          </p:cNvSpPr>
-          <p:nvPr>
-            <p:ph idx="1"/>
-          </p:nvPr>
-        </p:nvSpPr>
-        <p:spPr>
-          <a:xfrm>
-            <a:off x="838200" y="5892367"/>
-            <a:ext cx="10515600" cy="614363"/>
-          </a:xfrm>
-        </p:spPr>
-        <p:txBody>
-          <a:bodyPr>
-            <a:normAutofit fontScale="77500" lnSpcReduction="20000"/>
-          </a:bodyPr>
-          <a:lstStyle/>
-          <a:p>
-            <a:pPr marL="0" indent="0" algn="ctr">
-              <a:buNone/>
-            </a:pPr>
-            <a:r>
-              <a:rPr lang="en-US" b="1" dirty="0"/>
-              <a:t>Bottom line</a:t>
-            </a:r>
-            <a:r>
-              <a:rPr lang="en-US" dirty="0"/>
-              <a:t>: Learning a function is often more effective than hard-coding it.</a:t>
-            </a:r>
-            <a:br>
-              <a:rPr lang="en-US" dirty="0"/>
-            </a:br>
-            <a:r>
-              <a:rPr lang="en-US" dirty="0"/>
-              <a:t>However, we do not always know how it performs for rare and edge cases!</a:t>
             </a:r>
           </a:p>
         </p:txBody>
@@ -39879,35 +40170,803 @@
                       </p:childTnLst>
                     </p:cTn>
                   </p:par>
+                </p:childTnLst>
+              </p:cTn>
+              <p:prevCondLst>
+                <p:cond evt="onPrev" delay="0">
+                  <p:tgtEl>
+                    <p:sldTgt/>
+                  </p:tgtEl>
+                </p:cond>
+              </p:prevCondLst>
+              <p:nextCondLst>
+                <p:cond evt="onNext" delay="0">
+                  <p:tgtEl>
+                    <p:sldTgt/>
+                  </p:tgtEl>
+                </p:cond>
+              </p:nextCondLst>
+            </p:seq>
+          </p:childTnLst>
+        </p:cTn>
+      </p:par>
+    </p:tnLst>
+  </p:timing>
+</p:sld>
+</file>
+
+<file path=ppt/slides/slide33.xml><?xml version="1.0" encoding="utf-8"?>
+<p:sld xmlns:a="http://schemas.openxmlformats.org/drawingml/2006/main" xmlns:r="http://schemas.openxmlformats.org/officeDocument/2006/relationships" xmlns:p="http://schemas.openxmlformats.org/presentationml/2006/main">
+  <p:cSld>
+    <p:bg>
+      <p:bgPr>
+        <a:solidFill>
+          <a:schemeClr val="bg1"/>
+        </a:solidFill>
+        <a:effectLst/>
+      </p:bgPr>
+    </p:bg>
+    <p:spTree>
+      <p:nvGrpSpPr>
+        <p:cNvPr id="1" name=""/>
+        <p:cNvGrpSpPr/>
+        <p:nvPr/>
+      </p:nvGrpSpPr>
+      <p:grpSpPr>
+        <a:xfrm>
+          <a:off x="0" y="0"/>
+          <a:ext cx="0" cy="0"/>
+          <a:chOff x="0" y="0"/>
+          <a:chExt cx="0" cy="0"/>
+        </a:xfrm>
+      </p:grpSpPr>
+      <p:sp useBgFill="1">
+        <p:nvSpPr>
+          <p:cNvPr id="48" name="Rectangle 47">
+            <a:extLst>
+              <a:ext uri="{FF2B5EF4-FFF2-40B4-BE49-F238E27FC236}">
+                <a16:creationId xmlns:a16="http://schemas.microsoft.com/office/drawing/2014/main" id="{0B9EE3F3-89B7-43C3-8651-C4C96830993D}"/>
+              </a:ext>
+              <a:ext uri="{C183D7F6-B498-43B3-948B-1728B52AA6E4}">
+                <adec:decorative xmlns:adec="http://schemas.microsoft.com/office/drawing/2017/decorative" val="1"/>
+              </a:ext>
+            </a:extLst>
+          </p:cNvPr>
+          <p:cNvSpPr>
+            <a:spLocks noGrp="1" noRot="1" noChangeAspect="1" noMove="1" noResize="1" noEditPoints="1" noAdjustHandles="1" noChangeArrowheads="1" noChangeShapeType="1" noTextEdit="1"/>
+          </p:cNvSpPr>
+          <p:nvPr>
+            <p:extLst>
+              <p:ext uri="{386F3935-93C4-4BCD-93E2-E3B085C9AB24}">
+                <p16:designElem xmlns:p16="http://schemas.microsoft.com/office/powerpoint/2015/main" val="1"/>
+              </p:ext>
+            </p:extLst>
+          </p:nvPr>
+        </p:nvSpPr>
+        <p:spPr>
+          <a:xfrm>
+            <a:off x="0" y="0"/>
+            <a:ext cx="12192000" cy="6858000"/>
+          </a:xfrm>
+          <a:prstGeom prst="rect">
+            <a:avLst/>
+          </a:prstGeom>
+          <a:ln>
+            <a:noFill/>
+          </a:ln>
+        </p:spPr>
+        <p:style>
+          <a:lnRef idx="2">
+            <a:schemeClr val="accent1">
+              <a:shade val="50000"/>
+            </a:schemeClr>
+          </a:lnRef>
+          <a:fillRef idx="1">
+            <a:schemeClr val="accent1"/>
+          </a:fillRef>
+          <a:effectRef idx="0">
+            <a:schemeClr val="accent1"/>
+          </a:effectRef>
+          <a:fontRef idx="minor">
+            <a:schemeClr val="lt1"/>
+          </a:fontRef>
+        </p:style>
+        <p:txBody>
+          <a:bodyPr rtlCol="0" anchor="ctr"/>
+          <a:lstStyle/>
+          <a:p>
+            <a:pPr algn="ctr"/>
+            <a:endParaRPr lang="en-US"/>
+          </a:p>
+        </p:txBody>
+      </p:sp>
+      <p:sp>
+        <p:nvSpPr>
+          <p:cNvPr id="2" name="Title 1">
+            <a:extLst>
+              <a:ext uri="{FF2B5EF4-FFF2-40B4-BE49-F238E27FC236}">
+                <a16:creationId xmlns:a16="http://schemas.microsoft.com/office/drawing/2014/main" id="{4ED558EF-35A4-DDFC-52C1-994856200BC2}"/>
+              </a:ext>
+            </a:extLst>
+          </p:cNvPr>
+          <p:cNvSpPr>
+            <a:spLocks noGrp="1"/>
+          </p:cNvSpPr>
+          <p:nvPr>
+            <p:ph type="title"/>
+          </p:nvPr>
+        </p:nvSpPr>
+        <p:spPr>
+          <a:xfrm>
+            <a:off x="411480" y="991443"/>
+            <a:ext cx="4443154" cy="1087819"/>
+          </a:xfrm>
+        </p:spPr>
+        <p:txBody>
+          <a:bodyPr anchor="b">
+            <a:normAutofit/>
+          </a:bodyPr>
+          <a:lstStyle/>
+          <a:p>
+            <a:r>
+              <a:rPr lang="en-US" sz="3400"/>
+              <a:t>What You Should Know</a:t>
+            </a:r>
+          </a:p>
+        </p:txBody>
+      </p:sp>
+      <p:sp>
+        <p:nvSpPr>
+          <p:cNvPr id="50" name="Rectangle 49">
+            <a:extLst>
+              <a:ext uri="{FF2B5EF4-FFF2-40B4-BE49-F238E27FC236}">
+                <a16:creationId xmlns:a16="http://schemas.microsoft.com/office/drawing/2014/main" id="{33AE4636-AEEC-45D6-84D4-7AC2DA48ECF8}"/>
+              </a:ext>
+              <a:ext uri="{C183D7F6-B498-43B3-948B-1728B52AA6E4}">
+                <adec:decorative xmlns:adec="http://schemas.microsoft.com/office/drawing/2017/decorative" val="1"/>
+              </a:ext>
+            </a:extLst>
+          </p:cNvPr>
+          <p:cNvSpPr>
+            <a:spLocks noGrp="1" noRot="1" noChangeAspect="1" noMove="1" noResize="1" noEditPoints="1" noAdjustHandles="1" noChangeArrowheads="1" noChangeShapeType="1" noTextEdit="1"/>
+          </p:cNvSpPr>
+          <p:nvPr>
+            <p:extLst>
+              <p:ext uri="{386F3935-93C4-4BCD-93E2-E3B085C9AB24}">
+                <p16:designElem xmlns:p16="http://schemas.microsoft.com/office/powerpoint/2015/main" val="1"/>
+              </p:ext>
+            </p:extLst>
+          </p:nvPr>
+        </p:nvSpPr>
+        <p:spPr>
+          <a:xfrm rot="5400000">
+            <a:off x="649223" y="387939"/>
+            <a:ext cx="73152" cy="548640"/>
+          </a:xfrm>
+          <a:prstGeom prst="rect">
+            <a:avLst/>
+          </a:prstGeom>
+          <a:solidFill>
+            <a:schemeClr val="accent2"/>
+          </a:solidFill>
+          <a:ln>
+            <a:noFill/>
+          </a:ln>
+        </p:spPr>
+        <p:style>
+          <a:lnRef idx="2">
+            <a:schemeClr val="accent1">
+              <a:shade val="50000"/>
+            </a:schemeClr>
+          </a:lnRef>
+          <a:fillRef idx="1">
+            <a:schemeClr val="accent1"/>
+          </a:fillRef>
+          <a:effectRef idx="0">
+            <a:schemeClr val="accent1"/>
+          </a:effectRef>
+          <a:fontRef idx="minor">
+            <a:schemeClr val="lt1"/>
+          </a:fontRef>
+        </p:style>
+        <p:txBody>
+          <a:bodyPr rtlCol="0" anchor="ctr"/>
+          <a:lstStyle/>
+          <a:p>
+            <a:pPr algn="ctr"/>
+            <a:endParaRPr lang="en-US">
+              <a:solidFill>
+                <a:prstClr val="white"/>
+              </a:solidFill>
+              <a:latin typeface="Calibri" panose="020F0502020204030204"/>
+            </a:endParaRPr>
+          </a:p>
+        </p:txBody>
+      </p:sp>
+      <p:sp>
+        <p:nvSpPr>
+          <p:cNvPr id="52" name="Rectangle 51">
+            <a:extLst>
+              <a:ext uri="{FF2B5EF4-FFF2-40B4-BE49-F238E27FC236}">
+                <a16:creationId xmlns:a16="http://schemas.microsoft.com/office/drawing/2014/main" id="{8D9CE0F4-2EB2-4F1F-8AAC-DB3571D9FE10}"/>
+              </a:ext>
+              <a:ext uri="{C183D7F6-B498-43B3-948B-1728B52AA6E4}">
+                <adec:decorative xmlns:adec="http://schemas.microsoft.com/office/drawing/2017/decorative" val="1"/>
+              </a:ext>
+            </a:extLst>
+          </p:cNvPr>
+          <p:cNvSpPr>
+            <a:spLocks noGrp="1" noRot="1" noChangeAspect="1" noMove="1" noResize="1" noEditPoints="1" noAdjustHandles="1" noChangeArrowheads="1" noChangeShapeType="1" noTextEdit="1"/>
+          </p:cNvSpPr>
+          <p:nvPr>
+            <p:extLst>
+              <p:ext uri="{386F3935-93C4-4BCD-93E2-E3B085C9AB24}">
+                <p16:designElem xmlns:p16="http://schemas.microsoft.com/office/powerpoint/2015/main" val="1"/>
+              </p:ext>
+            </p:extLst>
+          </p:nvPr>
+        </p:nvSpPr>
+        <p:spPr>
+          <a:xfrm>
+            <a:off x="411480" y="2285541"/>
+            <a:ext cx="4389120" cy="18288"/>
+          </a:xfrm>
+          <a:prstGeom prst="rect">
+            <a:avLst/>
+          </a:prstGeom>
+          <a:solidFill>
+            <a:srgbClr val="D5D5D5"/>
+          </a:solidFill>
+          <a:ln w="3175">
+            <a:noFill/>
+          </a:ln>
+          <a:effectLst/>
+        </p:spPr>
+        <p:style>
+          <a:lnRef idx="2">
+            <a:schemeClr val="accent1">
+              <a:shade val="50000"/>
+            </a:schemeClr>
+          </a:lnRef>
+          <a:fillRef idx="1">
+            <a:schemeClr val="accent1"/>
+          </a:fillRef>
+          <a:effectRef idx="0">
+            <a:schemeClr val="accent1"/>
+          </a:effectRef>
+          <a:fontRef idx="minor">
+            <a:schemeClr val="lt1"/>
+          </a:fontRef>
+        </p:style>
+        <p:txBody>
+          <a:bodyPr rtlCol="0" anchor="ctr"/>
+          <a:lstStyle/>
+          <a:p>
+            <a:pPr algn="ctr"/>
+            <a:endParaRPr lang="en-US">
+              <a:solidFill>
+                <a:prstClr val="white"/>
+              </a:solidFill>
+              <a:latin typeface="Calibri" panose="020F0502020204030204"/>
+            </a:endParaRPr>
+          </a:p>
+        </p:txBody>
+      </p:sp>
+      <p:sp>
+        <p:nvSpPr>
+          <p:cNvPr id="4" name="Content Placeholder 2">
+            <a:extLst>
+              <a:ext uri="{FF2B5EF4-FFF2-40B4-BE49-F238E27FC236}">
+                <a16:creationId xmlns:a16="http://schemas.microsoft.com/office/drawing/2014/main" id="{78A33CD8-6DB6-F8AA-0C14-2EE3075AFB5C}"/>
+              </a:ext>
+            </a:extLst>
+          </p:cNvPr>
+          <p:cNvSpPr>
+            <a:spLocks noGrp="1"/>
+          </p:cNvSpPr>
+          <p:nvPr>
+            <p:ph idx="1"/>
+          </p:nvPr>
+        </p:nvSpPr>
+        <p:spPr>
+          <a:xfrm>
+            <a:off x="411480" y="2408446"/>
+            <a:ext cx="5455920" cy="3916154"/>
+          </a:xfrm>
+        </p:spPr>
+        <p:txBody>
+          <a:bodyPr>
+            <a:noAutofit/>
+          </a:bodyPr>
+          <a:lstStyle/>
+          <a:p>
+            <a:r>
+              <a:rPr lang="en-US" sz="1600" dirty="0"/>
+              <a:t>For agent design, we can replace hard-coded functions with </a:t>
+            </a:r>
+            <a:r>
+              <a:rPr lang="en-US" sz="1600" b="1" dirty="0"/>
+              <a:t>functions learned from data </a:t>
+            </a:r>
+            <a:r>
+              <a:rPr lang="en-US" sz="1600" dirty="0"/>
+              <a:t>to tell the agent:</a:t>
+            </a:r>
+          </a:p>
+          <a:p>
+            <a:pPr lvl="1"/>
+            <a:r>
+              <a:rPr lang="en-US" sz="1600" dirty="0"/>
+              <a:t>How to act: Learn a policy</a:t>
+            </a:r>
+          </a:p>
+          <a:p>
+            <a:pPr lvl="1"/>
+            <a:r>
+              <a:rPr lang="en-US" sz="1600" dirty="0"/>
+              <a:t>How to evaluate a situation: Learn an evaluation function</a:t>
+            </a:r>
+          </a:p>
+          <a:p>
+            <a:pPr lvl="1"/>
+            <a:r>
+              <a:rPr lang="en-US" sz="1600" dirty="0"/>
+              <a:t>How to interpret sensors and how to use actuators. </a:t>
+            </a:r>
+          </a:p>
+          <a:p>
+            <a:endParaRPr lang="en-US" sz="1600" dirty="0"/>
+          </a:p>
+          <a:p>
+            <a:r>
+              <a:rPr lang="en-US" sz="1600" dirty="0"/>
+              <a:t>Learned functions often outperform hard-coded functions.</a:t>
+            </a:r>
+          </a:p>
+          <a:p>
+            <a:r>
+              <a:rPr lang="en-US" sz="1600" b="1" dirty="0"/>
+              <a:t>Issue</a:t>
+            </a:r>
+            <a:r>
+              <a:rPr lang="en-US" sz="1600" dirty="0"/>
+              <a:t>: </a:t>
+            </a:r>
+            <a:r>
+              <a:rPr lang="en-US" sz="1600" b="1" dirty="0"/>
+              <a:t>Hard-coded functions react predictably</a:t>
+            </a:r>
+            <a:r>
+              <a:rPr lang="en-US" sz="1600" dirty="0"/>
+              <a:t>, but for learned functions, we do not always know how they will perform for rare and edge cases!</a:t>
+            </a:r>
+          </a:p>
+          <a:p>
+            <a:r>
+              <a:rPr lang="en-US" sz="1600" dirty="0"/>
+              <a:t>Learning agents that learn directly from the environment use related methods called </a:t>
+            </a:r>
+            <a:r>
+              <a:rPr lang="en-US" sz="1600" b="1" dirty="0"/>
+              <a:t>Reinforcement Learning</a:t>
+            </a:r>
+            <a:r>
+              <a:rPr lang="en-US" sz="1600" dirty="0"/>
+              <a:t>.</a:t>
+            </a:r>
+          </a:p>
+        </p:txBody>
+      </p:sp>
+      <p:grpSp>
+        <p:nvGrpSpPr>
+          <p:cNvPr id="5" name="Group 4">
+            <a:extLst>
+              <a:ext uri="{FF2B5EF4-FFF2-40B4-BE49-F238E27FC236}">
+                <a16:creationId xmlns:a16="http://schemas.microsoft.com/office/drawing/2014/main" id="{BA9EA9A9-B237-ACC4-9214-98AD4E47BDFD}"/>
+              </a:ext>
+              <a:ext uri="{C183D7F6-B498-43B3-948B-1728B52AA6E4}">
+                <adec:decorative xmlns:adec="http://schemas.microsoft.com/office/drawing/2017/decorative" val="1"/>
+              </a:ext>
+            </a:extLst>
+          </p:cNvPr>
+          <p:cNvGrpSpPr/>
+          <p:nvPr/>
+        </p:nvGrpSpPr>
+        <p:grpSpPr>
+          <a:xfrm>
+            <a:off x="6248400" y="1143000"/>
+            <a:ext cx="5425440" cy="4305224"/>
+            <a:chOff x="4914414" y="625683"/>
+            <a:chExt cx="6746750" cy="5455380"/>
+          </a:xfrm>
+        </p:grpSpPr>
+        <p:pic>
+          <p:nvPicPr>
+            <p:cNvPr id="6" name="Picture 2" descr="Presentation Learning icon PNG and SVG Vector Free Download">
+              <a:extLst>
+                <a:ext uri="{FF2B5EF4-FFF2-40B4-BE49-F238E27FC236}">
+                  <a16:creationId xmlns:a16="http://schemas.microsoft.com/office/drawing/2014/main" id="{8C2AF023-DC46-31D0-F255-6F55C2B269E2}"/>
+                </a:ext>
+              </a:extLst>
+            </p:cNvPr>
+            <p:cNvPicPr>
+              <a:picLocks noChangeAspect="1" noChangeArrowheads="1"/>
+            </p:cNvPicPr>
+            <p:nvPr/>
+          </p:nvPicPr>
+          <p:blipFill>
+            <a:blip r:embed="rId2">
+              <a:extLst>
+                <a:ext uri="{28A0092B-C50C-407E-A947-70E740481C1C}">
+                  <a14:useLocalDpi xmlns:a14="http://schemas.microsoft.com/office/drawing/2010/main" val="0"/>
+                </a:ext>
+              </a:extLst>
+            </a:blip>
+            <a:stretch>
+              <a:fillRect/>
+            </a:stretch>
+          </p:blipFill>
+          <p:spPr bwMode="auto">
+            <a:xfrm>
+              <a:off x="4914414" y="625683"/>
+              <a:ext cx="6746750" cy="5455380"/>
+            </a:xfrm>
+            <a:prstGeom prst="rect">
+              <a:avLst/>
+            </a:prstGeom>
+            <a:noFill/>
+            <a:extLst>
+              <a:ext uri="{909E8E84-426E-40DD-AFC4-6F175D3DCCD1}">
+                <a14:hiddenFill xmlns:a14="http://schemas.microsoft.com/office/drawing/2010/main">
+                  <a:solidFill>
+                    <a:srgbClr val="FFFFFF"/>
+                  </a:solidFill>
+                </a14:hiddenFill>
+              </a:ext>
+            </a:extLst>
+          </p:spPr>
+        </p:pic>
+        <p:sp>
+          <p:nvSpPr>
+            <p:cNvPr id="7" name="TextBox 6">
+              <a:extLst>
+                <a:ext uri="{FF2B5EF4-FFF2-40B4-BE49-F238E27FC236}">
+                  <a16:creationId xmlns:a16="http://schemas.microsoft.com/office/drawing/2014/main" id="{F0D7467F-33D3-50F9-EA85-4E0636184535}"/>
+                </a:ext>
+              </a:extLst>
+            </p:cNvPr>
+            <p:cNvSpPr txBox="1"/>
+            <p:nvPr/>
+          </p:nvSpPr>
+          <p:spPr>
+            <a:xfrm>
+              <a:off x="8497874" y="2370486"/>
+              <a:ext cx="1865324" cy="819001"/>
+            </a:xfrm>
+            <a:prstGeom prst="rect">
+              <a:avLst/>
+            </a:prstGeom>
+            <a:noFill/>
+          </p:spPr>
+          <p:txBody>
+            <a:bodyPr wrap="square" rtlCol="0">
+              <a:spAutoFit/>
+            </a:bodyPr>
+            <a:lstStyle/>
+            <a:p>
+              <a:pPr defTabSz="1116778">
+                <a:spcAft>
+                  <a:spcPts val="719"/>
+                </a:spcAft>
+              </a:pPr>
+              <a:r>
+                <a:rPr lang="en-US" sz="3600" b="1" kern="1200">
+                  <a:solidFill>
+                    <a:srgbClr val="FF0000"/>
+                  </a:solidFill>
+                  <a:latin typeface="Calibri" panose="020F0502020204030204" pitchFamily="34" charset="0"/>
+                  <a:ea typeface="+mn-ea"/>
+                  <a:cs typeface="+mn-cs"/>
+                </a:rPr>
+                <a:t>1+1=2</a:t>
+              </a:r>
+              <a:endParaRPr lang="en-US" sz="2800" b="1">
+                <a:solidFill>
+                  <a:srgbClr val="FF0000"/>
+                </a:solidFill>
+                <a:latin typeface="Calibri" panose="020F0502020204030204" pitchFamily="34" charset="0"/>
+              </a:endParaRPr>
+            </a:p>
+          </p:txBody>
+        </p:sp>
+      </p:grpSp>
+    </p:spTree>
+    <p:extLst>
+      <p:ext uri="{BB962C8B-B14F-4D97-AF65-F5344CB8AC3E}">
+        <p14:creationId xmlns:p14="http://schemas.microsoft.com/office/powerpoint/2010/main" val="2456461030"/>
+      </p:ext>
+    </p:extLst>
+  </p:cSld>
+  <p:clrMapOvr>
+    <a:masterClrMapping/>
+  </p:clrMapOvr>
+  <p:timing>
+    <p:tnLst>
+      <p:par>
+        <p:cTn id="1" dur="indefinite" restart="never" nodeType="tmRoot">
+          <p:childTnLst>
+            <p:seq concurrent="1" nextAc="seek">
+              <p:cTn id="2" dur="indefinite" nodeType="mainSeq">
+                <p:childTnLst>
                   <p:par>
-                    <p:cTn id="19" fill="hold">
+                    <p:cTn id="3" fill="hold">
                       <p:stCondLst>
                         <p:cond delay="indefinite"/>
                       </p:stCondLst>
                       <p:childTnLst>
                         <p:par>
-                          <p:cTn id="20" fill="hold">
+                          <p:cTn id="4" fill="hold">
                             <p:stCondLst>
                               <p:cond delay="0"/>
                             </p:stCondLst>
                             <p:childTnLst>
                               <p:par>
-                                <p:cTn id="21" presetID="1" presetClass="entr" presetSubtype="0" fill="hold" grpId="0" nodeType="clickEffect">
+                                <p:cTn id="5" presetID="1" presetClass="entr" presetSubtype="0" fill="hold" grpId="0" nodeType="clickEffect">
                                   <p:stCondLst>
                                     <p:cond delay="0"/>
                                   </p:stCondLst>
                                   <p:childTnLst>
                                     <p:set>
                                       <p:cBhvr>
-                                        <p:cTn id="22" dur="1" fill="hold">
+                                        <p:cTn id="6" dur="1" fill="hold">
                                           <p:stCondLst>
                                             <p:cond delay="0"/>
                                           </p:stCondLst>
                                         </p:cTn>
                                         <p:tgtEl>
-                                          <p:spTgt spid="3">
+                                          <p:spTgt spid="4">
                                             <p:txEl>
                                               <p:pRg st="0" end="0"/>
+                                            </p:txEl>
+                                          </p:spTgt>
+                                        </p:tgtEl>
+                                        <p:attrNameLst>
+                                          <p:attrName>style.visibility</p:attrName>
+                                        </p:attrNameLst>
+                                      </p:cBhvr>
+                                      <p:to>
+                                        <p:strVal val="visible"/>
+                                      </p:to>
+                                    </p:set>
+                                  </p:childTnLst>
+                                </p:cTn>
+                              </p:par>
+                              <p:par>
+                                <p:cTn id="7" presetID="1" presetClass="entr" presetSubtype="0" fill="hold" grpId="0" nodeType="withEffect">
+                                  <p:stCondLst>
+                                    <p:cond delay="0"/>
+                                  </p:stCondLst>
+                                  <p:childTnLst>
+                                    <p:set>
+                                      <p:cBhvr>
+                                        <p:cTn id="8" dur="1" fill="hold">
+                                          <p:stCondLst>
+                                            <p:cond delay="0"/>
+                                          </p:stCondLst>
+                                        </p:cTn>
+                                        <p:tgtEl>
+                                          <p:spTgt spid="4">
+                                            <p:txEl>
+                                              <p:pRg st="1" end="1"/>
+                                            </p:txEl>
+                                          </p:spTgt>
+                                        </p:tgtEl>
+                                        <p:attrNameLst>
+                                          <p:attrName>style.visibility</p:attrName>
+                                        </p:attrNameLst>
+                                      </p:cBhvr>
+                                      <p:to>
+                                        <p:strVal val="visible"/>
+                                      </p:to>
+                                    </p:set>
+                                  </p:childTnLst>
+                                </p:cTn>
+                              </p:par>
+                              <p:par>
+                                <p:cTn id="9" presetID="1" presetClass="entr" presetSubtype="0" fill="hold" grpId="0" nodeType="withEffect">
+                                  <p:stCondLst>
+                                    <p:cond delay="0"/>
+                                  </p:stCondLst>
+                                  <p:childTnLst>
+                                    <p:set>
+                                      <p:cBhvr>
+                                        <p:cTn id="10" dur="1" fill="hold">
+                                          <p:stCondLst>
+                                            <p:cond delay="0"/>
+                                          </p:stCondLst>
+                                        </p:cTn>
+                                        <p:tgtEl>
+                                          <p:spTgt spid="4">
+                                            <p:txEl>
+                                              <p:pRg st="2" end="2"/>
+                                            </p:txEl>
+                                          </p:spTgt>
+                                        </p:tgtEl>
+                                        <p:attrNameLst>
+                                          <p:attrName>style.visibility</p:attrName>
+                                        </p:attrNameLst>
+                                      </p:cBhvr>
+                                      <p:to>
+                                        <p:strVal val="visible"/>
+                                      </p:to>
+                                    </p:set>
+                                  </p:childTnLst>
+                                </p:cTn>
+                              </p:par>
+                              <p:par>
+                                <p:cTn id="11" presetID="1" presetClass="entr" presetSubtype="0" fill="hold" grpId="0" nodeType="withEffect">
+                                  <p:stCondLst>
+                                    <p:cond delay="0"/>
+                                  </p:stCondLst>
+                                  <p:childTnLst>
+                                    <p:set>
+                                      <p:cBhvr>
+                                        <p:cTn id="12" dur="1" fill="hold">
+                                          <p:stCondLst>
+                                            <p:cond delay="0"/>
+                                          </p:stCondLst>
+                                        </p:cTn>
+                                        <p:tgtEl>
+                                          <p:spTgt spid="4">
+                                            <p:txEl>
+                                              <p:pRg st="3" end="3"/>
+                                            </p:txEl>
+                                          </p:spTgt>
+                                        </p:tgtEl>
+                                        <p:attrNameLst>
+                                          <p:attrName>style.visibility</p:attrName>
+                                        </p:attrNameLst>
+                                      </p:cBhvr>
+                                      <p:to>
+                                        <p:strVal val="visible"/>
+                                      </p:to>
+                                    </p:set>
+                                  </p:childTnLst>
+                                </p:cTn>
+                              </p:par>
+                            </p:childTnLst>
+                          </p:cTn>
+                        </p:par>
+                      </p:childTnLst>
+                    </p:cTn>
+                  </p:par>
+                  <p:par>
+                    <p:cTn id="13" fill="hold">
+                      <p:stCondLst>
+                        <p:cond delay="indefinite"/>
+                      </p:stCondLst>
+                      <p:childTnLst>
+                        <p:par>
+                          <p:cTn id="14" fill="hold">
+                            <p:stCondLst>
+                              <p:cond delay="0"/>
+                            </p:stCondLst>
+                            <p:childTnLst>
+                              <p:par>
+                                <p:cTn id="15" presetID="1" presetClass="entr" presetSubtype="0" fill="hold" grpId="0" nodeType="clickEffect">
+                                  <p:stCondLst>
+                                    <p:cond delay="0"/>
+                                  </p:stCondLst>
+                                  <p:childTnLst>
+                                    <p:set>
+                                      <p:cBhvr>
+                                        <p:cTn id="16" dur="1" fill="hold">
+                                          <p:stCondLst>
+                                            <p:cond delay="0"/>
+                                          </p:stCondLst>
+                                        </p:cTn>
+                                        <p:tgtEl>
+                                          <p:spTgt spid="4">
+                                            <p:txEl>
+                                              <p:pRg st="5" end="5"/>
+                                            </p:txEl>
+                                          </p:spTgt>
+                                        </p:tgtEl>
+                                        <p:attrNameLst>
+                                          <p:attrName>style.visibility</p:attrName>
+                                        </p:attrNameLst>
+                                      </p:cBhvr>
+                                      <p:to>
+                                        <p:strVal val="visible"/>
+                                      </p:to>
+                                    </p:set>
+                                  </p:childTnLst>
+                                </p:cTn>
+                              </p:par>
+                            </p:childTnLst>
+                          </p:cTn>
+                        </p:par>
+                      </p:childTnLst>
+                    </p:cTn>
+                  </p:par>
+                  <p:par>
+                    <p:cTn id="17" fill="hold">
+                      <p:stCondLst>
+                        <p:cond delay="indefinite"/>
+                      </p:stCondLst>
+                      <p:childTnLst>
+                        <p:par>
+                          <p:cTn id="18" fill="hold">
+                            <p:stCondLst>
+                              <p:cond delay="0"/>
+                            </p:stCondLst>
+                            <p:childTnLst>
+                              <p:par>
+                                <p:cTn id="19" presetID="1" presetClass="entr" presetSubtype="0" fill="hold" grpId="0" nodeType="clickEffect">
+                                  <p:stCondLst>
+                                    <p:cond delay="0"/>
+                                  </p:stCondLst>
+                                  <p:childTnLst>
+                                    <p:set>
+                                      <p:cBhvr>
+                                        <p:cTn id="20" dur="1" fill="hold">
+                                          <p:stCondLst>
+                                            <p:cond delay="0"/>
+                                          </p:stCondLst>
+                                        </p:cTn>
+                                        <p:tgtEl>
+                                          <p:spTgt spid="4">
+                                            <p:txEl>
+                                              <p:pRg st="6" end="6"/>
+                                            </p:txEl>
+                                          </p:spTgt>
+                                        </p:tgtEl>
+                                        <p:attrNameLst>
+                                          <p:attrName>style.visibility</p:attrName>
+                                        </p:attrNameLst>
+                                      </p:cBhvr>
+                                      <p:to>
+                                        <p:strVal val="visible"/>
+                                      </p:to>
+                                    </p:set>
+                                  </p:childTnLst>
+                                </p:cTn>
+                              </p:par>
+                            </p:childTnLst>
+                          </p:cTn>
+                        </p:par>
+                      </p:childTnLst>
+                    </p:cTn>
+                  </p:par>
+                  <p:par>
+                    <p:cTn id="21" fill="hold">
+                      <p:stCondLst>
+                        <p:cond delay="indefinite"/>
+                      </p:stCondLst>
+                      <p:childTnLst>
+                        <p:par>
+                          <p:cTn id="22" fill="hold">
+                            <p:stCondLst>
+                              <p:cond delay="0"/>
+                            </p:stCondLst>
+                            <p:childTnLst>
+                              <p:par>
+                                <p:cTn id="23" presetID="1" presetClass="entr" presetSubtype="0" fill="hold" grpId="0" nodeType="clickEffect">
+                                  <p:stCondLst>
+                                    <p:cond delay="0"/>
+                                  </p:stCondLst>
+                                  <p:childTnLst>
+                                    <p:set>
+                                      <p:cBhvr>
+                                        <p:cTn id="24" dur="1" fill="hold">
+                                          <p:stCondLst>
+                                            <p:cond delay="0"/>
+                                          </p:stCondLst>
+                                        </p:cTn>
+                                        <p:tgtEl>
+                                          <p:spTgt spid="4">
+                                            <p:txEl>
+                                              <p:pRg st="7" end="7"/>
                                             </p:txEl>
                                           </p:spTgt>
                                         </p:tgtEl>
@@ -39950,7 +41009,7 @@
       </p:par>
     </p:tnLst>
     <p:bldLst>
-      <p:bldP spid="3" grpId="0" build="p"/>
+      <p:bldP spid="4" grpId="0" build="p"/>
     </p:bldLst>
   </p:timing>
 </p:sld>
@@ -40533,10 +41592,10 @@
             <p:nvPr/>
           </p:nvPicPr>
           <p:blipFill>
-            <a:blip r:embed="rId2">
+            <a:blip>
               <a:extLst>
                 <a:ext uri="{96DAC541-7B7A-43D3-8B79-37D633B846F1}">
-                  <asvg:svgBlip xmlns:asvg="http://schemas.microsoft.com/office/drawing/2016/SVG/main" r:embed="rId3"/>
+                  <asvg:svgBlip xmlns:asvg="http://schemas.microsoft.com/office/drawing/2016/SVG/main" r:embed="rId2"/>
                 </a:ext>
               </a:extLst>
             </a:blip>
@@ -40569,8 +41628,8 @@
         </p:nvSpPr>
         <p:spPr>
           <a:xfrm>
-            <a:off x="685800" y="4267200"/>
-            <a:ext cx="11125200" cy="1905000"/>
+            <a:off x="685800" y="4343400"/>
+            <a:ext cx="11125200" cy="1828800"/>
           </a:xfrm>
           <a:prstGeom prst="rect">
             <a:avLst/>
@@ -43739,7 +44798,7 @@
               </a:ln>
               <a:extLst>
                 <a:ext uri="{AF507438-7753-43e0-B8FC-AC1667EBCBE1}">
-                  <a14:hiddenEffects xmlns:a14="http://schemas.microsoft.com/office/drawing/2010/main" xmlns="">
+                  <a14:hiddenEffects xmlns="" xmlns:a14="http://schemas.microsoft.com/office/drawing/2010/main">
                     <a:effectLst>
                       <a:outerShdw dist="35921" dir="2700000" algn="ctr" rotWithShape="0">
                         <a:schemeClr val="bg2"/>
@@ -43821,14 +44880,14 @@
               <a:effectLst/>
               <a:extLst>
                 <a:ext uri="{909E8E84-426E-40dd-AFC4-6F175D3DCCD1}">
-                  <a14:hiddenFill xmlns:a14="http://schemas.microsoft.com/office/drawing/2010/main" xmlns="">
+                  <a14:hiddenFill xmlns="" xmlns:a14="http://schemas.microsoft.com/office/drawing/2010/main">
                     <a:solidFill>
                       <a:schemeClr val="accent1"/>
                     </a:solidFill>
                   </a14:hiddenFill>
                 </a:ext>
                 <a:ext uri="{91240B29-F687-4f45-9708-019B960494DF}">
-                  <a14:hiddenLine xmlns:a14="http://schemas.microsoft.com/office/drawing/2010/main" xmlns="" w="9525">
+                  <a14:hiddenLine xmlns="" xmlns:a14="http://schemas.microsoft.com/office/drawing/2010/main" w="9525">
                     <a:solidFill>
                       <a:schemeClr val="tx1"/>
                     </a:solidFill>
@@ -43838,7 +44897,7 @@
                   </a14:hiddenLine>
                 </a:ext>
                 <a:ext uri="{AF507438-7753-43e0-B8FC-AC1667EBCBE1}">
-                  <a14:hiddenEffects xmlns:a14="http://schemas.microsoft.com/office/drawing/2010/main" xmlns="">
+                  <a14:hiddenEffects xmlns="" xmlns:a14="http://schemas.microsoft.com/office/drawing/2010/main">
                     <a:effectLst>
                       <a:outerShdw dist="35921" dir="2700000" algn="ctr" rotWithShape="0">
                         <a:schemeClr val="bg2"/>
@@ -43879,7 +44938,7 @@
               <a:effectLst/>
               <a:extLst>
                 <a:ext uri="{AF507438-7753-43e0-B8FC-AC1667EBCBE1}">
-                  <a14:hiddenEffects xmlns:a14="http://schemas.microsoft.com/office/drawing/2010/main" xmlns="">
+                  <a14:hiddenEffects xmlns="" xmlns:a14="http://schemas.microsoft.com/office/drawing/2010/main">
                     <a:effectLst>
                       <a:outerShdw dist="35921" dir="2700000" algn="ctr" rotWithShape="0">
                         <a:schemeClr val="bg2"/>
@@ -43927,7 +44986,7 @@
               <a:effectLst/>
               <a:extLst>
                 <a:ext uri="{AF507438-7753-43e0-B8FC-AC1667EBCBE1}">
-                  <a14:hiddenEffects xmlns:a14="http://schemas.microsoft.com/office/drawing/2010/main" xmlns="">
+                  <a14:hiddenEffects xmlns="" xmlns:a14="http://schemas.microsoft.com/office/drawing/2010/main">
                     <a:effectLst>
                       <a:outerShdw dist="35921" dir="2700000" algn="ctr" rotWithShape="0">
                         <a:schemeClr val="bg2"/>
@@ -43995,14 +45054,14 @@
               <a:effectLst/>
               <a:extLst>
                 <a:ext uri="{909E8E84-426E-40dd-AFC4-6F175D3DCCD1}">
-                  <a14:hiddenFill xmlns:a14="http://schemas.microsoft.com/office/drawing/2010/main" xmlns="">
+                  <a14:hiddenFill xmlns="" xmlns:a14="http://schemas.microsoft.com/office/drawing/2010/main">
                     <a:solidFill>
                       <a:schemeClr val="accent1"/>
                     </a:solidFill>
                   </a14:hiddenFill>
                 </a:ext>
                 <a:ext uri="{91240B29-F687-4f45-9708-019B960494DF}">
-                  <a14:hiddenLine xmlns:a14="http://schemas.microsoft.com/office/drawing/2010/main" xmlns="" w="9525">
+                  <a14:hiddenLine xmlns="" xmlns:a14="http://schemas.microsoft.com/office/drawing/2010/main" w="9525">
                     <a:solidFill>
                       <a:schemeClr val="tx1"/>
                     </a:solidFill>
@@ -44012,7 +45071,7 @@
                   </a14:hiddenLine>
                 </a:ext>
                 <a:ext uri="{AF507438-7753-43e0-B8FC-AC1667EBCBE1}">
-                  <a14:hiddenEffects xmlns:a14="http://schemas.microsoft.com/office/drawing/2010/main" xmlns="">
+                  <a14:hiddenEffects xmlns="" xmlns:a14="http://schemas.microsoft.com/office/drawing/2010/main">
                     <a:effectLst>
                       <a:outerShdw dist="35921" dir="2700000" algn="ctr" rotWithShape="0">
                         <a:schemeClr val="bg2"/>
@@ -47002,7 +48061,7 @@
             </a:ln>
             <a:extLst>
               <a:ext uri="{AF507438-7753-43e0-B8FC-AC1667EBCBE1}">
-                <a14:hiddenEffects xmlns:a14="http://schemas.microsoft.com/office/drawing/2010/main" xmlns="">
+                <a14:hiddenEffects xmlns="" xmlns:a14="http://schemas.microsoft.com/office/drawing/2010/main">
                   <a:effectLst>
                     <a:outerShdw dist="35921" dir="2700000" algn="ctr" rotWithShape="0">
                       <a:schemeClr val="bg2"/>
@@ -47070,7 +48129,7 @@
             <a:effectLst/>
             <a:extLst>
               <a:ext uri="{AF507438-7753-43e0-B8FC-AC1667EBCBE1}">
-                <a14:hiddenEffects xmlns:a14="http://schemas.microsoft.com/office/drawing/2010/main" xmlns="">
+                <a14:hiddenEffects xmlns="" xmlns:a14="http://schemas.microsoft.com/office/drawing/2010/main">
                   <a:effectLst>
                     <a:outerShdw dist="35921" dir="2700000" algn="ctr" rotWithShape="0">
                       <a:schemeClr val="bg2"/>
@@ -47124,7 +48183,7 @@
             <a:effectLst/>
             <a:extLst>
               <a:ext uri="{AF507438-7753-43e0-B8FC-AC1667EBCBE1}">
-                <a14:hiddenEffects xmlns:a14="http://schemas.microsoft.com/office/drawing/2010/main" xmlns="">
+                <a14:hiddenEffects xmlns="" xmlns:a14="http://schemas.microsoft.com/office/drawing/2010/main">
                   <a:effectLst>
                     <a:outerShdw dist="35921" dir="2700000" algn="ctr" rotWithShape="0">
                       <a:schemeClr val="bg2"/>
@@ -47177,12 +48236,12 @@
             <a:effectLst/>
             <a:extLst>
               <a:ext uri="{909E8E84-426E-40dd-AFC4-6F175D3DCCD1}">
-                <a14:hiddenFill xmlns:a14="http://schemas.microsoft.com/office/drawing/2010/main" xmlns="">
+                <a14:hiddenFill xmlns="" xmlns:a14="http://schemas.microsoft.com/office/drawing/2010/main">
                   <a:noFill/>
                 </a14:hiddenFill>
               </a:ext>
               <a:ext uri="{AF507438-7753-43e0-B8FC-AC1667EBCBE1}">
-                <a14:hiddenEffects xmlns:a14="http://schemas.microsoft.com/office/drawing/2010/main" xmlns="">
+                <a14:hiddenEffects xmlns="" xmlns:a14="http://schemas.microsoft.com/office/drawing/2010/main">
                   <a:effectLst>
                     <a:outerShdw dist="35921" dir="2700000" algn="ctr" rotWithShape="0">
                       <a:schemeClr val="bg2"/>
@@ -47256,14 +48315,14 @@
             <a:effectLst/>
             <a:extLst>
               <a:ext uri="{909E8E84-426E-40dd-AFC4-6F175D3DCCD1}">
-                <a14:hiddenFill xmlns:a14="http://schemas.microsoft.com/office/drawing/2010/main" xmlns="">
+                <a14:hiddenFill xmlns="" xmlns:a14="http://schemas.microsoft.com/office/drawing/2010/main">
                   <a:solidFill>
                     <a:schemeClr val="accent1"/>
                   </a:solidFill>
                 </a14:hiddenFill>
               </a:ext>
               <a:ext uri="{91240B29-F687-4f45-9708-019B960494DF}">
-                <a14:hiddenLine xmlns:a14="http://schemas.microsoft.com/office/drawing/2010/main" xmlns="" w="9525">
+                <a14:hiddenLine xmlns="" xmlns:a14="http://schemas.microsoft.com/office/drawing/2010/main" w="9525">
                   <a:solidFill>
                     <a:schemeClr val="tx1"/>
                   </a:solidFill>
@@ -47273,7 +48332,7 @@
                 </a14:hiddenLine>
               </a:ext>
               <a:ext uri="{AF507438-7753-43e0-B8FC-AC1667EBCBE1}">
-                <a14:hiddenEffects xmlns:a14="http://schemas.microsoft.com/office/drawing/2010/main" xmlns="">
+                <a14:hiddenEffects xmlns="" xmlns:a14="http://schemas.microsoft.com/office/drawing/2010/main">
                   <a:effectLst>
                     <a:outerShdw dist="35921" dir="2700000" algn="ctr" rotWithShape="0">
                       <a:schemeClr val="bg2"/>

--- a/slides/19_ML_intro.pptx
+++ b/slides/19_ML_intro.pptx
@@ -18249,7 +18249,7 @@
             </a:ln>
             <a:extLst>
               <a:ext uri="{AF507438-7753-43e0-B8FC-AC1667EBCBE1}">
-                <a14:hiddenEffects xmlns="" xmlns:a14="http://schemas.microsoft.com/office/drawing/2010/main">
+                <a14:hiddenEffects xmlns:a14="http://schemas.microsoft.com/office/drawing/2010/main" xmlns="">
                   <a:effectLst>
                     <a:outerShdw dist="35921" dir="2700000" algn="ctr" rotWithShape="0">
                       <a:schemeClr val="bg2"/>
@@ -18317,7 +18317,7 @@
             <a:effectLst/>
             <a:extLst>
               <a:ext uri="{AF507438-7753-43e0-B8FC-AC1667EBCBE1}">
-                <a14:hiddenEffects xmlns="" xmlns:a14="http://schemas.microsoft.com/office/drawing/2010/main">
+                <a14:hiddenEffects xmlns:a14="http://schemas.microsoft.com/office/drawing/2010/main" xmlns="">
                   <a:effectLst>
                     <a:outerShdw dist="35921" dir="2700000" algn="ctr" rotWithShape="0">
                       <a:schemeClr val="bg2"/>
@@ -18371,7 +18371,7 @@
             <a:effectLst/>
             <a:extLst>
               <a:ext uri="{AF507438-7753-43e0-B8FC-AC1667EBCBE1}">
-                <a14:hiddenEffects xmlns="" xmlns:a14="http://schemas.microsoft.com/office/drawing/2010/main">
+                <a14:hiddenEffects xmlns:a14="http://schemas.microsoft.com/office/drawing/2010/main" xmlns="">
                   <a:effectLst>
                     <a:outerShdw dist="35921" dir="2700000" algn="ctr" rotWithShape="0">
                       <a:schemeClr val="bg2"/>
@@ -18424,12 +18424,12 @@
             <a:effectLst/>
             <a:extLst>
               <a:ext uri="{909E8E84-426E-40dd-AFC4-6F175D3DCCD1}">
-                <a14:hiddenFill xmlns="" xmlns:a14="http://schemas.microsoft.com/office/drawing/2010/main">
+                <a14:hiddenFill xmlns:a14="http://schemas.microsoft.com/office/drawing/2010/main" xmlns="">
                   <a:noFill/>
                 </a14:hiddenFill>
               </a:ext>
               <a:ext uri="{AF507438-7753-43e0-B8FC-AC1667EBCBE1}">
-                <a14:hiddenEffects xmlns="" xmlns:a14="http://schemas.microsoft.com/office/drawing/2010/main">
+                <a14:hiddenEffects xmlns:a14="http://schemas.microsoft.com/office/drawing/2010/main" xmlns="">
                   <a:effectLst>
                     <a:outerShdw dist="35921" dir="2700000" algn="ctr" rotWithShape="0">
                       <a:schemeClr val="bg2"/>
@@ -18503,14 +18503,14 @@
             <a:effectLst/>
             <a:extLst>
               <a:ext uri="{909E8E84-426E-40dd-AFC4-6F175D3DCCD1}">
-                <a14:hiddenFill xmlns="" xmlns:a14="http://schemas.microsoft.com/office/drawing/2010/main">
+                <a14:hiddenFill xmlns:a14="http://schemas.microsoft.com/office/drawing/2010/main" xmlns="">
                   <a:solidFill>
                     <a:schemeClr val="accent1"/>
                   </a:solidFill>
                 </a14:hiddenFill>
               </a:ext>
               <a:ext uri="{91240B29-F687-4f45-9708-019B960494DF}">
-                <a14:hiddenLine xmlns="" xmlns:a14="http://schemas.microsoft.com/office/drawing/2010/main" w="9525">
+                <a14:hiddenLine xmlns:a14="http://schemas.microsoft.com/office/drawing/2010/main" xmlns="" w="9525">
                   <a:solidFill>
                     <a:schemeClr val="tx1"/>
                   </a:solidFill>
@@ -18520,7 +18520,7 @@
                 </a14:hiddenLine>
               </a:ext>
               <a:ext uri="{AF507438-7753-43e0-B8FC-AC1667EBCBE1}">
-                <a14:hiddenEffects xmlns="" xmlns:a14="http://schemas.microsoft.com/office/drawing/2010/main">
+                <a14:hiddenEffects xmlns:a14="http://schemas.microsoft.com/office/drawing/2010/main" xmlns="">
                   <a:effectLst>
                     <a:outerShdw dist="35921" dir="2700000" algn="ctr" rotWithShape="0">
                       <a:schemeClr val="bg2"/>
@@ -24312,8 +24312,8 @@
           </a:p>
         </p:txBody>
       </p:sp>
-      <mc:AlternateContent xmlns:mc="http://schemas.openxmlformats.org/markup-compatibility/2006" xmlns:a14="http://schemas.microsoft.com/office/drawing/2010/main">
-        <mc:Choice Requires="a14">
+      <mc:AlternateContent xmlns:mc="http://schemas.openxmlformats.org/markup-compatibility/2006">
+        <mc:Choice xmlns:a14="http://schemas.microsoft.com/office/drawing/2010/main" Requires="a14">
           <p:sp>
             <p:nvSpPr>
               <p:cNvPr id="33795" name="Rectangle 3"/>
@@ -24332,27 +24332,27 @@
             </p:spPr>
             <p:txBody>
               <a:bodyPr>
-                <a:normAutofit fontScale="92500" lnSpcReduction="10000"/>
+                <a:normAutofit fontScale="85000" lnSpcReduction="10000"/>
               </a:bodyPr>
               <a:lstStyle/>
               <a:p>
                 <a:r>
+                  <a:rPr lang="en-US" sz="1800" b="1" dirty="0"/>
+                  <a:t>Information fusion</a:t>
+                </a:r>
+                <a:r>
                   <a:rPr lang="en-US" sz="1800" dirty="0"/>
-                  <a:t>Add more information sources as new variables to the model.</a:t>
+                  <a:t>: Combine information sources to add new variables to the model.</a:t>
                 </a:r>
               </a:p>
               <a:p>
                 <a:r>
-                  <a:rPr lang="en-US" sz="1800" dirty="0"/>
-                  <a:t>Add </a:t>
-                </a:r>
-                <a:r>
                   <a:rPr lang="en-US" sz="1800" b="1" dirty="0"/>
-                  <a:t>derived features </a:t>
+                  <a:t>Derived features</a:t>
                 </a:r>
                 <a:r>
                   <a:rPr lang="en-US" sz="1800" dirty="0"/>
-                  <a:t>that help the classifier (e.g., </a:t>
+                  <a:t>: Manipulate the features to help the model learn (e.g., </a:t>
                 </a:r>
                 <a14:m>
                   <m:oMath xmlns:m="http://schemas.openxmlformats.org/officeDocument/2006/math">
@@ -24513,7 +24513,7 @@
                 </a:r>
                 <a:r>
                   <a:rPr lang="en-US" sz="1800" dirty="0"/>
-                  <a:t>: E.g., convert words to vectors where vector similarity between vectors reflects semantic similarity. </a:t>
+                  <a:t>: Unsupervised/self-supervised learning of features. E.g., convert words to vectors where vector similarity between vectors reflects semantic similarity. </a:t>
                 </a:r>
                 <a:endParaRPr lang="en-US" sz="1800" b="1" dirty="0"/>
               </a:p>
@@ -24529,22 +24529,16 @@
                 </a:r>
               </a:p>
               <a:p>
-                <a:pPr eaLnBrk="1" hangingPunct="1"/>
-                <a:r>
-                  <a:rPr lang="en-US" sz="1800" dirty="0"/>
-                  <a:t>(Deep) neural networks can perform “automatic” feature engineering called </a:t>
-                </a:r>
                 <a:r>
                   <a:rPr lang="en-US" sz="1800" b="1" dirty="0"/>
-                  <a:t>end-to-end machine learning</a:t>
+                  <a:t>End-to-end machine learning: </a:t>
                 </a:r>
                 <a:r>
                   <a:rPr lang="en-US" sz="1800" dirty="0"/>
-                  <a:t>.</a:t>
+                  <a:t>Deep learning with neural networks can perform “automatic” feature engineering.</a:t>
                 </a:r>
               </a:p>
               <a:p>
-                <a:pPr eaLnBrk="1" hangingPunct="1"/>
                 <a:endParaRPr lang="en-US" sz="1800" dirty="0"/>
               </a:p>
               <a:p>
@@ -24577,7 +24571,7 @@
             </p:txBody>
           </p:sp>
         </mc:Choice>
-        <mc:Fallback xmlns="">
+        <mc:Fallback>
           <p:sp>
             <p:nvSpPr>
               <p:cNvPr id="33795" name="Rectangle 3"/>
@@ -24596,7 +24590,7 @@
               <a:blipFill>
                 <a:blip r:embed="rId3"/>
                 <a:stretch>
-                  <a:fillRect l="-442" t="-1695" r="-884"/>
+                  <a:fillRect l="-265" t="-1387" r="-354"/>
                 </a:stretch>
               </a:blipFill>
             </p:spPr>
@@ -25947,8 +25941,8 @@
           </a:p>
         </p:txBody>
       </p:sp>
-      <mc:AlternateContent xmlns:mc="http://schemas.openxmlformats.org/markup-compatibility/2006">
-        <mc:Choice xmlns:a14="http://schemas.microsoft.com/office/drawing/2010/main" Requires="a14">
+      <mc:AlternateContent xmlns:mc="http://schemas.openxmlformats.org/markup-compatibility/2006" xmlns:a14="http://schemas.microsoft.com/office/drawing/2010/main">
+        <mc:Choice Requires="a14">
           <p:sp>
             <p:nvSpPr>
               <p:cNvPr id="1283075" name="Rectangle 3"/>
@@ -26181,7 +26175,7 @@
             </p:txBody>
           </p:sp>
         </mc:Choice>
-        <mc:Fallback>
+        <mc:Fallback xmlns="">
           <p:sp>
             <p:nvSpPr>
               <p:cNvPr id="1283075" name="Rectangle 3"/>
@@ -27284,8 +27278,8 @@
           </a:p>
         </p:txBody>
       </p:sp>
-      <mc:AlternateContent xmlns:mc="http://schemas.openxmlformats.org/markup-compatibility/2006">
-        <mc:Choice xmlns:a14="http://schemas.microsoft.com/office/drawing/2010/main" Requires="a14">
+      <mc:AlternateContent xmlns:mc="http://schemas.openxmlformats.org/markup-compatibility/2006" xmlns:a14="http://schemas.microsoft.com/office/drawing/2010/main">
+        <mc:Choice Requires="a14">
           <p:sp>
             <p:nvSpPr>
               <p:cNvPr id="3" name="Content Placeholder 2">
@@ -28004,7 +27998,7 @@
             </p:txBody>
           </p:sp>
         </mc:Choice>
-        <mc:Fallback>
+        <mc:Fallback xmlns="">
           <p:sp>
             <p:nvSpPr>
               <p:cNvPr id="3" name="Content Placeholder 2">
@@ -31312,8 +31306,8 @@
           </p:sp>
         </mc:Fallback>
       </mc:AlternateContent>
-      <mc:AlternateContent xmlns:mc="http://schemas.openxmlformats.org/markup-compatibility/2006">
-        <mc:Choice xmlns:a14="http://schemas.microsoft.com/office/drawing/2010/main" Requires="a14">
+      <mc:AlternateContent xmlns:mc="http://schemas.openxmlformats.org/markup-compatibility/2006" xmlns:a14="http://schemas.microsoft.com/office/drawing/2010/main">
+        <mc:Choice Requires="a14">
           <p:sp>
             <p:nvSpPr>
               <p:cNvPr id="17" name="Speech Bubble: Rectangle 16">
@@ -31730,7 +31724,7 @@
             </p:txBody>
           </p:sp>
         </mc:Choice>
-        <mc:Fallback>
+        <mc:Fallback xmlns="">
           <p:sp>
             <p:nvSpPr>
               <p:cNvPr id="17" name="Speech Bubble: Rectangle 16">
@@ -32780,8 +32774,8 @@
           </a:p>
         </p:txBody>
       </p:sp>
-      <mc:AlternateContent xmlns:mc="http://schemas.openxmlformats.org/markup-compatibility/2006">
-        <mc:Choice xmlns:a14="http://schemas.microsoft.com/office/drawing/2010/main" Requires="a14">
+      <mc:AlternateContent xmlns:mc="http://schemas.openxmlformats.org/markup-compatibility/2006" xmlns:a14="http://schemas.microsoft.com/office/drawing/2010/main">
+        <mc:Choice Requires="a14">
           <p:sp>
             <p:nvSpPr>
               <p:cNvPr id="3" name="Content Placeholder 2">
@@ -33460,7 +33454,7 @@
             </p:txBody>
           </p:sp>
         </mc:Choice>
-        <mc:Fallback>
+        <mc:Fallback xmlns="">
           <p:sp>
             <p:nvSpPr>
               <p:cNvPr id="3" name="Content Placeholder 2">
@@ -36621,8 +36615,8 @@
             </a:p>
           </p:txBody>
         </p:sp>
-        <mc:AlternateContent xmlns:mc="http://schemas.openxmlformats.org/markup-compatibility/2006">
-          <mc:Choice xmlns:a14="http://schemas.microsoft.com/office/drawing/2010/main" Requires="a14">
+        <mc:AlternateContent xmlns:mc="http://schemas.openxmlformats.org/markup-compatibility/2006" xmlns:a14="http://schemas.microsoft.com/office/drawing/2010/main">
+          <mc:Choice Requires="a14">
             <p:sp>
               <p:nvSpPr>
                 <p:cNvPr id="4" name="Speech Bubble: Rectangle 3">
@@ -36747,7 +36741,7 @@
               </p:txBody>
             </p:sp>
           </mc:Choice>
-          <mc:Fallback>
+          <mc:Fallback xmlns="">
             <p:sp>
               <p:nvSpPr>
                 <p:cNvPr id="4" name="Speech Bubble: Rectangle 3">
@@ -37002,8 +36996,8 @@
           </p:style>
         </p:cxnSp>
       </p:grpSp>
-      <mc:AlternateContent xmlns:mc="http://schemas.openxmlformats.org/markup-compatibility/2006">
-        <mc:Choice xmlns:a14="http://schemas.microsoft.com/office/drawing/2010/main" Requires="a14">
+      <mc:AlternateContent xmlns:mc="http://schemas.openxmlformats.org/markup-compatibility/2006" xmlns:a14="http://schemas.microsoft.com/office/drawing/2010/main">
+        <mc:Choice Requires="a14">
           <p:sp>
             <p:nvSpPr>
               <p:cNvPr id="3" name="Content Placeholder 2">
@@ -37431,7 +37425,7 @@
             </p:txBody>
           </p:sp>
         </mc:Choice>
-        <mc:Fallback>
+        <mc:Fallback xmlns="">
           <p:sp>
             <p:nvSpPr>
               <p:cNvPr id="3" name="Content Placeholder 2">
@@ -40309,7 +40303,7 @@
           <a:lstStyle/>
           <a:p>
             <a:r>
-              <a:rPr lang="en-US" sz="3400"/>
+              <a:rPr lang="en-US" sz="3400" dirty="0"/>
               <a:t>What You Should Know</a:t>
             </a:r>
           </a:p>
@@ -40476,17 +40470,21 @@
         </p:spPr>
         <p:txBody>
           <a:bodyPr>
-            <a:noAutofit/>
+            <a:normAutofit fontScale="92500" lnSpcReduction="10000"/>
           </a:bodyPr>
           <a:lstStyle/>
           <a:p>
             <a:r>
+              <a:rPr lang="en-US" sz="1600" b="1" dirty="0"/>
+              <a:t>Agent design</a:t>
+            </a:r>
+            <a:r>
               <a:rPr lang="en-US" sz="1600" dirty="0"/>
-              <a:t>For agent design, we can replace hard-coded functions with </a:t>
+              <a:t>: Replace hard-coded functions with </a:t>
             </a:r>
             <a:r>
               <a:rPr lang="en-US" sz="1600" b="1" dirty="0"/>
-              <a:t>functions learned from data </a:t>
+              <a:t>functions learned from training data </a:t>
             </a:r>
             <a:r>
               <a:rPr lang="en-US" sz="1600" dirty="0"/>
@@ -40497,21 +40495,28 @@
             <a:pPr lvl="1"/>
             <a:r>
               <a:rPr lang="en-US" sz="1600" dirty="0"/>
-              <a:t>How to act: Learn a policy</a:t>
+              <a:t>How to act: Learn a policy.</a:t>
             </a:r>
           </a:p>
           <a:p>
             <a:pPr lvl="1"/>
             <a:r>
               <a:rPr lang="en-US" sz="1600" dirty="0"/>
-              <a:t>How to evaluate a situation: Learn an evaluation function</a:t>
+              <a:t>How to evaluate a situation: Learn an evaluation function.</a:t>
             </a:r>
           </a:p>
           <a:p>
             <a:pPr lvl="1"/>
             <a:r>
               <a:rPr lang="en-US" sz="1600" dirty="0"/>
-              <a:t>How to interpret sensors and how to use actuators. </a:t>
+              <a:t>How to interpret sensors and how to use actuators.</a:t>
+            </a:r>
+          </a:p>
+          <a:p>
+            <a:pPr lvl="1"/>
+            <a:r>
+              <a:rPr lang="en-US" sz="1600" dirty="0"/>
+              <a:t>How to store information in an efficient way (compression). </a:t>
             </a:r>
           </a:p>
           <a:p>
@@ -40519,8 +40524,12 @@
           </a:p>
           <a:p>
             <a:r>
+              <a:rPr lang="en-US" sz="1600" b="1" dirty="0"/>
+              <a:t>Performance</a:t>
+            </a:r>
+            <a:r>
               <a:rPr lang="en-US" sz="1600" dirty="0"/>
-              <a:t>Learned functions often outperform hard-coded functions.</a:t>
+              <a:t>: Learned functions often outperform hard-coded functions.</a:t>
             </a:r>
           </a:p>
           <a:p>
@@ -40530,29 +40539,31 @@
             </a:r>
             <a:r>
               <a:rPr lang="en-US" sz="1600" dirty="0"/>
-              <a:t>: </a:t>
+              <a:t>: Predictability and robustness</a:t>
             </a:r>
+          </a:p>
+          <a:p>
+            <a:pPr lvl="1"/>
             <a:r>
-              <a:rPr lang="en-US" sz="1600" b="1" dirty="0"/>
-              <a:t>Hard-coded functions react predictably</a:t>
+              <a:rPr lang="en-US" sz="1200" dirty="0"/>
+              <a:t>Hard-coded functions react predictably.  </a:t>
             </a:r>
+          </a:p>
+          <a:p>
+            <a:pPr lvl="1"/>
             <a:r>
-              <a:rPr lang="en-US" sz="1600" dirty="0"/>
-              <a:t>, but for learned functions, we do not always know how they will perform for rare and edge cases!</a:t>
+              <a:rPr lang="en-US" sz="1200" dirty="0"/>
+              <a:t>For learned functions, we do not always know how they will perform for rare and edge cases!</a:t>
             </a:r>
           </a:p>
           <a:p>
             <a:r>
-              <a:rPr lang="en-US" sz="1600" dirty="0"/>
-              <a:t>Learning agents that learn directly from the environment use related methods called </a:t>
-            </a:r>
-            <a:r>
               <a:rPr lang="en-US" sz="1600" b="1" dirty="0"/>
-              <a:t>Reinforcement Learning</a:t>
+              <a:t>Reinforcement Learning: </a:t>
             </a:r>
             <a:r>
               <a:rPr lang="en-US" sz="1600" dirty="0"/>
-              <a:t>.</a:t>
+              <a:t>Online learning methods where agents learn directly from interactions with the environment.</a:t>
             </a:r>
           </a:p>
         </p:txBody>
@@ -40834,33 +40845,15 @@
                                   </p:childTnLst>
                                 </p:cTn>
                               </p:par>
-                            </p:childTnLst>
-                          </p:cTn>
-                        </p:par>
-                      </p:childTnLst>
-                    </p:cTn>
-                  </p:par>
-                  <p:par>
-                    <p:cTn id="13" fill="hold">
-                      <p:stCondLst>
-                        <p:cond delay="indefinite"/>
-                      </p:stCondLst>
-                      <p:childTnLst>
-                        <p:par>
-                          <p:cTn id="14" fill="hold">
-                            <p:stCondLst>
-                              <p:cond delay="0"/>
-                            </p:stCondLst>
-                            <p:childTnLst>
                               <p:par>
-                                <p:cTn id="15" presetID="1" presetClass="entr" presetSubtype="0" fill="hold" grpId="0" nodeType="clickEffect">
+                                <p:cTn id="13" presetID="1" presetClass="entr" presetSubtype="0" fill="hold" grpId="0" nodeType="withEffect">
                                   <p:stCondLst>
                                     <p:cond delay="0"/>
                                   </p:stCondLst>
                                   <p:childTnLst>
                                     <p:set>
                                       <p:cBhvr>
-                                        <p:cTn id="16" dur="1" fill="hold">
+                                        <p:cTn id="14" dur="1" fill="hold">
                                           <p:stCondLst>
                                             <p:cond delay="0"/>
                                           </p:stCondLst>
@@ -40868,7 +40861,7 @@
                                         <p:tgtEl>
                                           <p:spTgt spid="4">
                                             <p:txEl>
-                                              <p:pRg st="5" end="5"/>
+                                              <p:pRg st="4" end="4"/>
                                             </p:txEl>
                                           </p:spTgt>
                                         </p:tgtEl>
@@ -40890,26 +40883,26 @@
                     </p:cTn>
                   </p:par>
                   <p:par>
-                    <p:cTn id="17" fill="hold">
+                    <p:cTn id="15" fill="hold">
                       <p:stCondLst>
                         <p:cond delay="indefinite"/>
                       </p:stCondLst>
                       <p:childTnLst>
                         <p:par>
-                          <p:cTn id="18" fill="hold">
+                          <p:cTn id="16" fill="hold">
                             <p:stCondLst>
                               <p:cond delay="0"/>
                             </p:stCondLst>
                             <p:childTnLst>
                               <p:par>
-                                <p:cTn id="19" presetID="1" presetClass="entr" presetSubtype="0" fill="hold" grpId="0" nodeType="clickEffect">
+                                <p:cTn id="17" presetID="1" presetClass="entr" presetSubtype="0" fill="hold" grpId="0" nodeType="clickEffect">
                                   <p:stCondLst>
                                     <p:cond delay="0"/>
                                   </p:stCondLst>
                                   <p:childTnLst>
                                     <p:set>
                                       <p:cBhvr>
-                                        <p:cTn id="20" dur="1" fill="hold">
+                                        <p:cTn id="18" dur="1" fill="hold">
                                           <p:stCondLst>
                                             <p:cond delay="0"/>
                                           </p:stCondLst>
@@ -40939,19 +40932,50 @@
                     </p:cTn>
                   </p:par>
                   <p:par>
-                    <p:cTn id="21" fill="hold">
+                    <p:cTn id="19" fill="hold">
                       <p:stCondLst>
                         <p:cond delay="indefinite"/>
                       </p:stCondLst>
                       <p:childTnLst>
                         <p:par>
-                          <p:cTn id="22" fill="hold">
+                          <p:cTn id="20" fill="hold">
                             <p:stCondLst>
                               <p:cond delay="0"/>
                             </p:stCondLst>
                             <p:childTnLst>
                               <p:par>
-                                <p:cTn id="23" presetID="1" presetClass="entr" presetSubtype="0" fill="hold" grpId="0" nodeType="clickEffect">
+                                <p:cTn id="21" presetID="1" presetClass="entr" presetSubtype="0" fill="hold" grpId="0" nodeType="clickEffect">
+                                  <p:stCondLst>
+                                    <p:cond delay="0"/>
+                                  </p:stCondLst>
+                                  <p:childTnLst>
+                                    <p:set>
+                                      <p:cBhvr>
+                                        <p:cTn id="22" dur="1" fill="hold">
+                                          <p:stCondLst>
+                                            <p:cond delay="0"/>
+                                          </p:stCondLst>
+                                        </p:cTn>
+                                        <p:tgtEl>
+                                          <p:spTgt spid="4">
+                                            <p:txEl>
+                                              <p:pRg st="7" end="7"/>
+                                            </p:txEl>
+                                          </p:spTgt>
+                                        </p:tgtEl>
+                                        <p:attrNameLst>
+                                          <p:attrName>style.visibility</p:attrName>
+                                        </p:attrNameLst>
+                                      </p:cBhvr>
+                                      <p:to>
+                                        <p:strVal val="visible"/>
+                                      </p:to>
+                                    </p:set>
+                                  </p:childTnLst>
+                                </p:cTn>
+                              </p:par>
+                              <p:par>
+                                <p:cTn id="23" presetID="1" presetClass="entr" presetSubtype="0" fill="hold" grpId="0" nodeType="withEffect">
                                   <p:stCondLst>
                                     <p:cond delay="0"/>
                                   </p:stCondLst>
@@ -40966,7 +40990,87 @@
                                         <p:tgtEl>
                                           <p:spTgt spid="4">
                                             <p:txEl>
-                                              <p:pRg st="7" end="7"/>
+                                              <p:pRg st="8" end="8"/>
+                                            </p:txEl>
+                                          </p:spTgt>
+                                        </p:tgtEl>
+                                        <p:attrNameLst>
+                                          <p:attrName>style.visibility</p:attrName>
+                                        </p:attrNameLst>
+                                      </p:cBhvr>
+                                      <p:to>
+                                        <p:strVal val="visible"/>
+                                      </p:to>
+                                    </p:set>
+                                  </p:childTnLst>
+                                </p:cTn>
+                              </p:par>
+                              <p:par>
+                                <p:cTn id="25" presetID="1" presetClass="entr" presetSubtype="0" fill="hold" grpId="0" nodeType="withEffect">
+                                  <p:stCondLst>
+                                    <p:cond delay="0"/>
+                                  </p:stCondLst>
+                                  <p:childTnLst>
+                                    <p:set>
+                                      <p:cBhvr>
+                                        <p:cTn id="26" dur="1" fill="hold">
+                                          <p:stCondLst>
+                                            <p:cond delay="0"/>
+                                          </p:stCondLst>
+                                        </p:cTn>
+                                        <p:tgtEl>
+                                          <p:spTgt spid="4">
+                                            <p:txEl>
+                                              <p:pRg st="9" end="9"/>
+                                            </p:txEl>
+                                          </p:spTgt>
+                                        </p:tgtEl>
+                                        <p:attrNameLst>
+                                          <p:attrName>style.visibility</p:attrName>
+                                        </p:attrNameLst>
+                                      </p:cBhvr>
+                                      <p:to>
+                                        <p:strVal val="visible"/>
+                                      </p:to>
+                                    </p:set>
+                                  </p:childTnLst>
+                                </p:cTn>
+                              </p:par>
+                            </p:childTnLst>
+                          </p:cTn>
+                        </p:par>
+                      </p:childTnLst>
+                    </p:cTn>
+                  </p:par>
+                  <p:par>
+                    <p:cTn id="27" fill="hold">
+                      <p:stCondLst>
+                        <p:cond delay="indefinite"/>
+                      </p:stCondLst>
+                      <p:childTnLst>
+                        <p:par>
+                          <p:cTn id="28" fill="hold">
+                            <p:stCondLst>
+                              <p:cond delay="0"/>
+                            </p:stCondLst>
+                            <p:childTnLst>
+                              <p:par>
+                                <p:cTn id="29" presetID="1" presetClass="entr" presetSubtype="0" fill="hold" grpId="0" nodeType="clickEffect">
+                                  <p:stCondLst>
+                                    <p:cond delay="0"/>
+                                  </p:stCondLst>
+                                  <p:childTnLst>
+                                    <p:set>
+                                      <p:cBhvr>
+                                        <p:cTn id="30" dur="1" fill="hold">
+                                          <p:stCondLst>
+                                            <p:cond delay="0"/>
+                                          </p:stCondLst>
+                                        </p:cTn>
+                                        <p:tgtEl>
+                                          <p:spTgt spid="4">
+                                            <p:txEl>
+                                              <p:pRg st="10" end="10"/>
                                             </p:txEl>
                                           </p:spTgt>
                                         </p:tgtEl>
@@ -44798,7 +44902,7 @@
               </a:ln>
               <a:extLst>
                 <a:ext uri="{AF507438-7753-43e0-B8FC-AC1667EBCBE1}">
-                  <a14:hiddenEffects xmlns="" xmlns:a14="http://schemas.microsoft.com/office/drawing/2010/main">
+                  <a14:hiddenEffects xmlns:a14="http://schemas.microsoft.com/office/drawing/2010/main" xmlns="">
                     <a:effectLst>
                       <a:outerShdw dist="35921" dir="2700000" algn="ctr" rotWithShape="0">
                         <a:schemeClr val="bg2"/>
@@ -44880,14 +44984,14 @@
               <a:effectLst/>
               <a:extLst>
                 <a:ext uri="{909E8E84-426E-40dd-AFC4-6F175D3DCCD1}">
-                  <a14:hiddenFill xmlns="" xmlns:a14="http://schemas.microsoft.com/office/drawing/2010/main">
+                  <a14:hiddenFill xmlns:a14="http://schemas.microsoft.com/office/drawing/2010/main" xmlns="">
                     <a:solidFill>
                       <a:schemeClr val="accent1"/>
                     </a:solidFill>
                   </a14:hiddenFill>
                 </a:ext>
                 <a:ext uri="{91240B29-F687-4f45-9708-019B960494DF}">
-                  <a14:hiddenLine xmlns="" xmlns:a14="http://schemas.microsoft.com/office/drawing/2010/main" w="9525">
+                  <a14:hiddenLine xmlns:a14="http://schemas.microsoft.com/office/drawing/2010/main" xmlns="" w="9525">
                     <a:solidFill>
                       <a:schemeClr val="tx1"/>
                     </a:solidFill>
@@ -44897,7 +45001,7 @@
                   </a14:hiddenLine>
                 </a:ext>
                 <a:ext uri="{AF507438-7753-43e0-B8FC-AC1667EBCBE1}">
-                  <a14:hiddenEffects xmlns="" xmlns:a14="http://schemas.microsoft.com/office/drawing/2010/main">
+                  <a14:hiddenEffects xmlns:a14="http://schemas.microsoft.com/office/drawing/2010/main" xmlns="">
                     <a:effectLst>
                       <a:outerShdw dist="35921" dir="2700000" algn="ctr" rotWithShape="0">
                         <a:schemeClr val="bg2"/>
@@ -44938,7 +45042,7 @@
               <a:effectLst/>
               <a:extLst>
                 <a:ext uri="{AF507438-7753-43e0-B8FC-AC1667EBCBE1}">
-                  <a14:hiddenEffects xmlns="" xmlns:a14="http://schemas.microsoft.com/office/drawing/2010/main">
+                  <a14:hiddenEffects xmlns:a14="http://schemas.microsoft.com/office/drawing/2010/main" xmlns="">
                     <a:effectLst>
                       <a:outerShdw dist="35921" dir="2700000" algn="ctr" rotWithShape="0">
                         <a:schemeClr val="bg2"/>
@@ -44986,7 +45090,7 @@
               <a:effectLst/>
               <a:extLst>
                 <a:ext uri="{AF507438-7753-43e0-B8FC-AC1667EBCBE1}">
-                  <a14:hiddenEffects xmlns="" xmlns:a14="http://schemas.microsoft.com/office/drawing/2010/main">
+                  <a14:hiddenEffects xmlns:a14="http://schemas.microsoft.com/office/drawing/2010/main" xmlns="">
                     <a:effectLst>
                       <a:outerShdw dist="35921" dir="2700000" algn="ctr" rotWithShape="0">
                         <a:schemeClr val="bg2"/>
@@ -45054,14 +45158,14 @@
               <a:effectLst/>
               <a:extLst>
                 <a:ext uri="{909E8E84-426E-40dd-AFC4-6F175D3DCCD1}">
-                  <a14:hiddenFill xmlns="" xmlns:a14="http://schemas.microsoft.com/office/drawing/2010/main">
+                  <a14:hiddenFill xmlns:a14="http://schemas.microsoft.com/office/drawing/2010/main" xmlns="">
                     <a:solidFill>
                       <a:schemeClr val="accent1"/>
                     </a:solidFill>
                   </a14:hiddenFill>
                 </a:ext>
                 <a:ext uri="{91240B29-F687-4f45-9708-019B960494DF}">
-                  <a14:hiddenLine xmlns="" xmlns:a14="http://schemas.microsoft.com/office/drawing/2010/main" w="9525">
+                  <a14:hiddenLine xmlns:a14="http://schemas.microsoft.com/office/drawing/2010/main" xmlns="" w="9525">
                     <a:solidFill>
                       <a:schemeClr val="tx1"/>
                     </a:solidFill>
@@ -45071,7 +45175,7 @@
                   </a14:hiddenLine>
                 </a:ext>
                 <a:ext uri="{AF507438-7753-43e0-B8FC-AC1667EBCBE1}">
-                  <a14:hiddenEffects xmlns="" xmlns:a14="http://schemas.microsoft.com/office/drawing/2010/main">
+                  <a14:hiddenEffects xmlns:a14="http://schemas.microsoft.com/office/drawing/2010/main" xmlns="">
                     <a:effectLst>
                       <a:outerShdw dist="35921" dir="2700000" algn="ctr" rotWithShape="0">
                         <a:schemeClr val="bg2"/>
@@ -48061,7 +48165,7 @@
             </a:ln>
             <a:extLst>
               <a:ext uri="{AF507438-7753-43e0-B8FC-AC1667EBCBE1}">
-                <a14:hiddenEffects xmlns="" xmlns:a14="http://schemas.microsoft.com/office/drawing/2010/main">
+                <a14:hiddenEffects xmlns:a14="http://schemas.microsoft.com/office/drawing/2010/main" xmlns="">
                   <a:effectLst>
                     <a:outerShdw dist="35921" dir="2700000" algn="ctr" rotWithShape="0">
                       <a:schemeClr val="bg2"/>
@@ -48129,7 +48233,7 @@
             <a:effectLst/>
             <a:extLst>
               <a:ext uri="{AF507438-7753-43e0-B8FC-AC1667EBCBE1}">
-                <a14:hiddenEffects xmlns="" xmlns:a14="http://schemas.microsoft.com/office/drawing/2010/main">
+                <a14:hiddenEffects xmlns:a14="http://schemas.microsoft.com/office/drawing/2010/main" xmlns="">
                   <a:effectLst>
                     <a:outerShdw dist="35921" dir="2700000" algn="ctr" rotWithShape="0">
                       <a:schemeClr val="bg2"/>
@@ -48183,7 +48287,7 @@
             <a:effectLst/>
             <a:extLst>
               <a:ext uri="{AF507438-7753-43e0-B8FC-AC1667EBCBE1}">
-                <a14:hiddenEffects xmlns="" xmlns:a14="http://schemas.microsoft.com/office/drawing/2010/main">
+                <a14:hiddenEffects xmlns:a14="http://schemas.microsoft.com/office/drawing/2010/main" xmlns="">
                   <a:effectLst>
                     <a:outerShdw dist="35921" dir="2700000" algn="ctr" rotWithShape="0">
                       <a:schemeClr val="bg2"/>
@@ -48236,12 +48340,12 @@
             <a:effectLst/>
             <a:extLst>
               <a:ext uri="{909E8E84-426E-40dd-AFC4-6F175D3DCCD1}">
-                <a14:hiddenFill xmlns="" xmlns:a14="http://schemas.microsoft.com/office/drawing/2010/main">
+                <a14:hiddenFill xmlns:a14="http://schemas.microsoft.com/office/drawing/2010/main" xmlns="">
                   <a:noFill/>
                 </a14:hiddenFill>
               </a:ext>
               <a:ext uri="{AF507438-7753-43e0-B8FC-AC1667EBCBE1}">
-                <a14:hiddenEffects xmlns="" xmlns:a14="http://schemas.microsoft.com/office/drawing/2010/main">
+                <a14:hiddenEffects xmlns:a14="http://schemas.microsoft.com/office/drawing/2010/main" xmlns="">
                   <a:effectLst>
                     <a:outerShdw dist="35921" dir="2700000" algn="ctr" rotWithShape="0">
                       <a:schemeClr val="bg2"/>
@@ -48315,14 +48419,14 @@
             <a:effectLst/>
             <a:extLst>
               <a:ext uri="{909E8E84-426E-40dd-AFC4-6F175D3DCCD1}">
-                <a14:hiddenFill xmlns="" xmlns:a14="http://schemas.microsoft.com/office/drawing/2010/main">
+                <a14:hiddenFill xmlns:a14="http://schemas.microsoft.com/office/drawing/2010/main" xmlns="">
                   <a:solidFill>
                     <a:schemeClr val="accent1"/>
                   </a:solidFill>
                 </a14:hiddenFill>
               </a:ext>
               <a:ext uri="{91240B29-F687-4f45-9708-019B960494DF}">
-                <a14:hiddenLine xmlns="" xmlns:a14="http://schemas.microsoft.com/office/drawing/2010/main" w="9525">
+                <a14:hiddenLine xmlns:a14="http://schemas.microsoft.com/office/drawing/2010/main" xmlns="" w="9525">
                   <a:solidFill>
                     <a:schemeClr val="tx1"/>
                   </a:solidFill>
@@ -48332,7 +48436,7 @@
                 </a14:hiddenLine>
               </a:ext>
               <a:ext uri="{AF507438-7753-43e0-B8FC-AC1667EBCBE1}">
-                <a14:hiddenEffects xmlns="" xmlns:a14="http://schemas.microsoft.com/office/drawing/2010/main">
+                <a14:hiddenEffects xmlns:a14="http://schemas.microsoft.com/office/drawing/2010/main" xmlns="">
                   <a:effectLst>
                     <a:outerShdw dist="35921" dir="2700000" algn="ctr" rotWithShape="0">
                       <a:schemeClr val="bg2"/>

--- a/slides/19_ML_intro.pptx
+++ b/slides/19_ML_intro.pptx
@@ -41,7 +41,7 @@
     <p:sldId id="490" r:id="rId29"/>
     <p:sldId id="491" r:id="rId30"/>
     <p:sldId id="506" r:id="rId31"/>
-    <p:sldId id="494" r:id="rId32"/>
+    <p:sldId id="516" r:id="rId32"/>
     <p:sldId id="508" r:id="rId33"/>
     <p:sldId id="515" r:id="rId34"/>
   </p:sldIdLst>
@@ -196,7 +196,7 @@
             <p14:sldId id="490"/>
             <p14:sldId id="491"/>
             <p14:sldId id="506"/>
-            <p14:sldId id="494"/>
+            <p14:sldId id="516"/>
           </p14:sldIdLst>
         </p14:section>
         <p14:section name="How are models used in AI" id="{C564B212-4CB4-4076-B86F-55C18B0F30DD}">
@@ -6163,788 +6163,6 @@
 </dgm:colorsDef>
 </file>
 
-<file path=ppt/diagrams/colors2.xml><?xml version="1.0" encoding="utf-8"?>
-<dgm:colorsDef xmlns:dgm="http://schemas.openxmlformats.org/drawingml/2006/diagram" xmlns:a="http://schemas.openxmlformats.org/drawingml/2006/main" uniqueId="urn:microsoft.com/office/officeart/2005/8/colors/colorful5">
-  <dgm:title val=""/>
-  <dgm:desc val=""/>
-  <dgm:catLst>
-    <dgm:cat type="colorful" pri="10500"/>
-  </dgm:catLst>
-  <dgm:styleLbl name="node0">
-    <dgm:fillClrLst meth="repeat">
-      <a:schemeClr val="accent4"/>
-    </dgm:fillClrLst>
-    <dgm:linClrLst meth="repeat">
-      <a:schemeClr val="lt1"/>
-    </dgm:linClrLst>
-    <dgm:effectClrLst/>
-    <dgm:txLinClrLst/>
-    <dgm:txFillClrLst/>
-    <dgm:txEffectClrLst/>
-  </dgm:styleLbl>
-  <dgm:styleLbl name="node1">
-    <dgm:fillClrLst>
-      <a:schemeClr val="accent5"/>
-      <a:schemeClr val="accent6"/>
-    </dgm:fillClrLst>
-    <dgm:linClrLst meth="repeat">
-      <a:schemeClr val="lt1"/>
-    </dgm:linClrLst>
-    <dgm:effectClrLst/>
-    <dgm:txLinClrLst/>
-    <dgm:txFillClrLst/>
-    <dgm:txEffectClrLst/>
-  </dgm:styleLbl>
-  <dgm:styleLbl name="alignNode1">
-    <dgm:fillClrLst>
-      <a:schemeClr val="accent5"/>
-      <a:schemeClr val="accent6"/>
-    </dgm:fillClrLst>
-    <dgm:linClrLst>
-      <a:schemeClr val="accent5"/>
-      <a:schemeClr val="accent6"/>
-    </dgm:linClrLst>
-    <dgm:effectClrLst/>
-    <dgm:txLinClrLst/>
-    <dgm:txFillClrLst/>
-    <dgm:txEffectClrLst/>
-  </dgm:styleLbl>
-  <dgm:styleLbl name="lnNode1">
-    <dgm:fillClrLst>
-      <a:schemeClr val="accent5"/>
-      <a:schemeClr val="accent6"/>
-    </dgm:fillClrLst>
-    <dgm:linClrLst meth="repeat">
-      <a:schemeClr val="lt1"/>
-    </dgm:linClrLst>
-    <dgm:effectClrLst/>
-    <dgm:txLinClrLst/>
-    <dgm:txFillClrLst/>
-    <dgm:txEffectClrLst/>
-  </dgm:styleLbl>
-  <dgm:styleLbl name="vennNode1">
-    <dgm:fillClrLst>
-      <a:schemeClr val="accent5">
-        <a:alpha val="50000"/>
-      </a:schemeClr>
-      <a:schemeClr val="accent6">
-        <a:alpha val="50000"/>
-      </a:schemeClr>
-    </dgm:fillClrLst>
-    <dgm:linClrLst meth="repeat">
-      <a:schemeClr val="lt1"/>
-    </dgm:linClrLst>
-    <dgm:effectClrLst/>
-    <dgm:txLinClrLst/>
-    <dgm:txFillClrLst/>
-    <dgm:txEffectClrLst/>
-  </dgm:styleLbl>
-  <dgm:styleLbl name="node2">
-    <dgm:fillClrLst>
-      <a:schemeClr val="accent6"/>
-    </dgm:fillClrLst>
-    <dgm:linClrLst meth="repeat">
-      <a:schemeClr val="lt1"/>
-    </dgm:linClrLst>
-    <dgm:effectClrLst/>
-    <dgm:txLinClrLst/>
-    <dgm:txFillClrLst/>
-    <dgm:txEffectClrLst/>
-  </dgm:styleLbl>
-  <dgm:styleLbl name="node3">
-    <dgm:fillClrLst>
-      <a:schemeClr val="accent1"/>
-    </dgm:fillClrLst>
-    <dgm:linClrLst meth="repeat">
-      <a:schemeClr val="lt1"/>
-    </dgm:linClrLst>
-    <dgm:effectClrLst/>
-    <dgm:txLinClrLst/>
-    <dgm:txFillClrLst/>
-    <dgm:txEffectClrLst/>
-  </dgm:styleLbl>
-  <dgm:styleLbl name="node4">
-    <dgm:fillClrLst>
-      <a:schemeClr val="accent2"/>
-    </dgm:fillClrLst>
-    <dgm:linClrLst meth="repeat">
-      <a:schemeClr val="lt1"/>
-    </dgm:linClrLst>
-    <dgm:effectClrLst/>
-    <dgm:txLinClrLst/>
-    <dgm:txFillClrLst/>
-    <dgm:txEffectClrLst/>
-  </dgm:styleLbl>
-  <dgm:styleLbl name="fgImgPlace1">
-    <dgm:fillClrLst>
-      <a:schemeClr val="accent5">
-        <a:tint val="50000"/>
-      </a:schemeClr>
-      <a:schemeClr val="accent6">
-        <a:tint val="50000"/>
-      </a:schemeClr>
-    </dgm:fillClrLst>
-    <dgm:linClrLst meth="repeat">
-      <a:schemeClr val="lt1"/>
-    </dgm:linClrLst>
-    <dgm:effectClrLst/>
-    <dgm:txLinClrLst/>
-    <dgm:txFillClrLst meth="repeat">
-      <a:schemeClr val="lt1"/>
-    </dgm:txFillClrLst>
-    <dgm:txEffectClrLst/>
-  </dgm:styleLbl>
-  <dgm:styleLbl name="alignImgPlace1">
-    <dgm:fillClrLst>
-      <a:schemeClr val="accent5">
-        <a:tint val="50000"/>
-      </a:schemeClr>
-      <a:schemeClr val="accent6">
-        <a:tint val="20000"/>
-      </a:schemeClr>
-    </dgm:fillClrLst>
-    <dgm:linClrLst meth="repeat">
-      <a:schemeClr val="lt1"/>
-    </dgm:linClrLst>
-    <dgm:effectClrLst/>
-    <dgm:txLinClrLst/>
-    <dgm:txFillClrLst meth="repeat">
-      <a:schemeClr val="lt1"/>
-    </dgm:txFillClrLst>
-    <dgm:txEffectClrLst/>
-  </dgm:styleLbl>
-  <dgm:styleLbl name="bgImgPlace1">
-    <dgm:fillClrLst>
-      <a:schemeClr val="accent5">
-        <a:tint val="50000"/>
-      </a:schemeClr>
-      <a:schemeClr val="accent6">
-        <a:tint val="20000"/>
-      </a:schemeClr>
-    </dgm:fillClrLst>
-    <dgm:linClrLst meth="repeat">
-      <a:schemeClr val="lt1"/>
-    </dgm:linClrLst>
-    <dgm:effectClrLst/>
-    <dgm:txLinClrLst/>
-    <dgm:txFillClrLst meth="repeat">
-      <a:schemeClr val="lt1"/>
-    </dgm:txFillClrLst>
-    <dgm:txEffectClrLst/>
-  </dgm:styleLbl>
-  <dgm:styleLbl name="sibTrans2D1">
-    <dgm:fillClrLst>
-      <a:schemeClr val="accent5"/>
-      <a:schemeClr val="accent6"/>
-    </dgm:fillClrLst>
-    <dgm:linClrLst meth="repeat">
-      <a:schemeClr val="lt1"/>
-    </dgm:linClrLst>
-    <dgm:effectClrLst/>
-    <dgm:txLinClrLst/>
-    <dgm:txFillClrLst/>
-    <dgm:txEffectClrLst/>
-  </dgm:styleLbl>
-  <dgm:styleLbl name="fgSibTrans2D1">
-    <dgm:fillClrLst>
-      <a:schemeClr val="accent5"/>
-      <a:schemeClr val="accent6"/>
-    </dgm:fillClrLst>
-    <dgm:linClrLst meth="repeat">
-      <a:schemeClr val="lt1"/>
-    </dgm:linClrLst>
-    <dgm:effectClrLst/>
-    <dgm:txLinClrLst/>
-    <dgm:txFillClrLst meth="repeat">
-      <a:schemeClr val="lt1"/>
-    </dgm:txFillClrLst>
-    <dgm:txEffectClrLst/>
-  </dgm:styleLbl>
-  <dgm:styleLbl name="bgSibTrans2D1">
-    <dgm:fillClrLst>
-      <a:schemeClr val="accent5"/>
-      <a:schemeClr val="accent6"/>
-    </dgm:fillClrLst>
-    <dgm:linClrLst meth="repeat">
-      <a:schemeClr val="lt1"/>
-    </dgm:linClrLst>
-    <dgm:effectClrLst/>
-    <dgm:txLinClrLst/>
-    <dgm:txFillClrLst meth="repeat">
-      <a:schemeClr val="lt1"/>
-    </dgm:txFillClrLst>
-    <dgm:txEffectClrLst/>
-  </dgm:styleLbl>
-  <dgm:styleLbl name="sibTrans1D1">
-    <dgm:fillClrLst/>
-    <dgm:linClrLst>
-      <a:schemeClr val="accent5"/>
-      <a:schemeClr val="accent6"/>
-    </dgm:linClrLst>
-    <dgm:effectClrLst/>
-    <dgm:txLinClrLst/>
-    <dgm:txFillClrLst meth="repeat">
-      <a:schemeClr val="tx1"/>
-    </dgm:txFillClrLst>
-    <dgm:txEffectClrLst/>
-  </dgm:styleLbl>
-  <dgm:styleLbl name="callout">
-    <dgm:fillClrLst meth="repeat">
-      <a:schemeClr val="accent5"/>
-    </dgm:fillClrLst>
-    <dgm:linClrLst meth="repeat">
-      <a:schemeClr val="accent5">
-        <a:tint val="50000"/>
-      </a:schemeClr>
-    </dgm:linClrLst>
-    <dgm:effectClrLst/>
-    <dgm:txLinClrLst/>
-    <dgm:txFillClrLst meth="repeat">
-      <a:schemeClr val="tx1"/>
-    </dgm:txFillClrLst>
-    <dgm:txEffectClrLst/>
-  </dgm:styleLbl>
-  <dgm:styleLbl name="asst0">
-    <dgm:fillClrLst meth="repeat">
-      <a:schemeClr val="accent5"/>
-    </dgm:fillClrLst>
-    <dgm:linClrLst meth="repeat">
-      <a:schemeClr val="lt1">
-        <a:shade val="80000"/>
-      </a:schemeClr>
-    </dgm:linClrLst>
-    <dgm:effectClrLst/>
-    <dgm:txLinClrLst/>
-    <dgm:txFillClrLst/>
-    <dgm:txEffectClrLst/>
-  </dgm:styleLbl>
-  <dgm:styleLbl name="asst1">
-    <dgm:fillClrLst meth="repeat">
-      <a:schemeClr val="accent6"/>
-    </dgm:fillClrLst>
-    <dgm:linClrLst meth="repeat">
-      <a:schemeClr val="lt1">
-        <a:shade val="80000"/>
-      </a:schemeClr>
-    </dgm:linClrLst>
-    <dgm:effectClrLst/>
-    <dgm:txLinClrLst/>
-    <dgm:txFillClrLst/>
-    <dgm:txEffectClrLst/>
-  </dgm:styleLbl>
-  <dgm:styleLbl name="asst2">
-    <dgm:fillClrLst>
-      <a:schemeClr val="accent1"/>
-    </dgm:fillClrLst>
-    <dgm:linClrLst meth="repeat">
-      <a:schemeClr val="lt1"/>
-    </dgm:linClrLst>
-    <dgm:effectClrLst/>
-    <dgm:txLinClrLst/>
-    <dgm:txFillClrLst/>
-    <dgm:txEffectClrLst/>
-  </dgm:styleLbl>
-  <dgm:styleLbl name="asst3">
-    <dgm:fillClrLst>
-      <a:schemeClr val="accent2"/>
-    </dgm:fillClrLst>
-    <dgm:linClrLst meth="repeat">
-      <a:schemeClr val="lt1"/>
-    </dgm:linClrLst>
-    <dgm:effectClrLst/>
-    <dgm:txLinClrLst/>
-    <dgm:txFillClrLst/>
-    <dgm:txEffectClrLst/>
-  </dgm:styleLbl>
-  <dgm:styleLbl name="asst4">
-    <dgm:fillClrLst>
-      <a:schemeClr val="accent3"/>
-    </dgm:fillClrLst>
-    <dgm:linClrLst meth="repeat">
-      <a:schemeClr val="lt1"/>
-    </dgm:linClrLst>
-    <dgm:effectClrLst/>
-    <dgm:txLinClrLst/>
-    <dgm:txFillClrLst/>
-    <dgm:txEffectClrLst/>
-  </dgm:styleLbl>
-  <dgm:styleLbl name="parChTrans2D1">
-    <dgm:fillClrLst meth="repeat">
-      <a:schemeClr val="accent5"/>
-    </dgm:fillClrLst>
-    <dgm:linClrLst meth="repeat">
-      <a:schemeClr val="lt1"/>
-    </dgm:linClrLst>
-    <dgm:effectClrLst/>
-    <dgm:txLinClrLst/>
-    <dgm:txFillClrLst meth="repeat">
-      <a:schemeClr val="lt1"/>
-    </dgm:txFillClrLst>
-    <dgm:txEffectClrLst/>
-  </dgm:styleLbl>
-  <dgm:styleLbl name="parChTrans2D2">
-    <dgm:fillClrLst meth="repeat">
-      <a:schemeClr val="accent6"/>
-    </dgm:fillClrLst>
-    <dgm:linClrLst meth="repeat">
-      <a:schemeClr val="lt1"/>
-    </dgm:linClrLst>
-    <dgm:effectClrLst/>
-    <dgm:txLinClrLst/>
-    <dgm:txFillClrLst/>
-    <dgm:txEffectClrLst/>
-  </dgm:styleLbl>
-  <dgm:styleLbl name="parChTrans2D3">
-    <dgm:fillClrLst meth="repeat">
-      <a:schemeClr val="accent6"/>
-    </dgm:fillClrLst>
-    <dgm:linClrLst meth="repeat">
-      <a:schemeClr val="lt1"/>
-    </dgm:linClrLst>
-    <dgm:effectClrLst/>
-    <dgm:txLinClrLst/>
-    <dgm:txFillClrLst/>
-    <dgm:txEffectClrLst/>
-  </dgm:styleLbl>
-  <dgm:styleLbl name="parChTrans2D4">
-    <dgm:fillClrLst meth="repeat">
-      <a:schemeClr val="accent1"/>
-    </dgm:fillClrLst>
-    <dgm:linClrLst meth="repeat">
-      <a:schemeClr val="lt1"/>
-    </dgm:linClrLst>
-    <dgm:effectClrLst/>
-    <dgm:txLinClrLst/>
-    <dgm:txFillClrLst meth="repeat">
-      <a:schemeClr val="lt1"/>
-    </dgm:txFillClrLst>
-    <dgm:txEffectClrLst/>
-  </dgm:styleLbl>
-  <dgm:styleLbl name="parChTrans1D1">
-    <dgm:fillClrLst meth="repeat">
-      <a:schemeClr val="accent5"/>
-    </dgm:fillClrLst>
-    <dgm:linClrLst meth="repeat">
-      <a:schemeClr val="accent5"/>
-    </dgm:linClrLst>
-    <dgm:effectClrLst/>
-    <dgm:txLinClrLst/>
-    <dgm:txFillClrLst meth="repeat">
-      <a:schemeClr val="tx1"/>
-    </dgm:txFillClrLst>
-    <dgm:txEffectClrLst/>
-  </dgm:styleLbl>
-  <dgm:styleLbl name="parChTrans1D2">
-    <dgm:fillClrLst meth="repeat">
-      <a:schemeClr val="accent6">
-        <a:tint val="90000"/>
-      </a:schemeClr>
-    </dgm:fillClrLst>
-    <dgm:linClrLst meth="repeat">
-      <a:schemeClr val="accent6"/>
-    </dgm:linClrLst>
-    <dgm:effectClrLst/>
-    <dgm:txLinClrLst/>
-    <dgm:txFillClrLst meth="repeat">
-      <a:schemeClr val="tx1"/>
-    </dgm:txFillClrLst>
-    <dgm:txEffectClrLst/>
-  </dgm:styleLbl>
-  <dgm:styleLbl name="parChTrans1D3">
-    <dgm:fillClrLst meth="repeat">
-      <a:schemeClr val="accent6">
-        <a:tint val="70000"/>
-      </a:schemeClr>
-    </dgm:fillClrLst>
-    <dgm:linClrLst meth="repeat">
-      <a:schemeClr val="accent1"/>
-    </dgm:linClrLst>
-    <dgm:effectClrLst/>
-    <dgm:txLinClrLst/>
-    <dgm:txFillClrLst meth="repeat">
-      <a:schemeClr val="tx1"/>
-    </dgm:txFillClrLst>
-    <dgm:txEffectClrLst/>
-  </dgm:styleLbl>
-  <dgm:styleLbl name="parChTrans1D4">
-    <dgm:fillClrLst meth="repeat">
-      <a:schemeClr val="accent6">
-        <a:tint val="50000"/>
-      </a:schemeClr>
-    </dgm:fillClrLst>
-    <dgm:linClrLst meth="repeat">
-      <a:schemeClr val="accent2"/>
-    </dgm:linClrLst>
-    <dgm:effectClrLst/>
-    <dgm:txLinClrLst/>
-    <dgm:txFillClrLst meth="repeat">
-      <a:schemeClr val="tx1"/>
-    </dgm:txFillClrLst>
-    <dgm:txEffectClrLst/>
-  </dgm:styleLbl>
-  <dgm:styleLbl name="fgAcc1">
-    <dgm:fillClrLst meth="repeat">
-      <a:schemeClr val="lt1">
-        <a:alpha val="90000"/>
-      </a:schemeClr>
-    </dgm:fillClrLst>
-    <dgm:linClrLst>
-      <a:schemeClr val="accent5"/>
-      <a:schemeClr val="accent6"/>
-    </dgm:linClrLst>
-    <dgm:effectClrLst/>
-    <dgm:txLinClrLst/>
-    <dgm:txFillClrLst meth="repeat">
-      <a:schemeClr val="dk1"/>
-    </dgm:txFillClrLst>
-    <dgm:txEffectClrLst/>
-  </dgm:styleLbl>
-  <dgm:styleLbl name="conFgAcc1">
-    <dgm:fillClrLst meth="repeat">
-      <a:schemeClr val="lt1">
-        <a:alpha val="90000"/>
-      </a:schemeClr>
-    </dgm:fillClrLst>
-    <dgm:linClrLst>
-      <a:schemeClr val="accent5"/>
-      <a:schemeClr val="accent6"/>
-    </dgm:linClrLst>
-    <dgm:effectClrLst/>
-    <dgm:txLinClrLst/>
-    <dgm:txFillClrLst meth="repeat">
-      <a:schemeClr val="dk1"/>
-    </dgm:txFillClrLst>
-    <dgm:txEffectClrLst/>
-  </dgm:styleLbl>
-  <dgm:styleLbl name="alignAcc1">
-    <dgm:fillClrLst meth="repeat">
-      <a:schemeClr val="lt1">
-        <a:alpha val="90000"/>
-      </a:schemeClr>
-    </dgm:fillClrLst>
-    <dgm:linClrLst>
-      <a:schemeClr val="accent5"/>
-      <a:schemeClr val="accent6"/>
-    </dgm:linClrLst>
-    <dgm:effectClrLst/>
-    <dgm:txLinClrLst/>
-    <dgm:txFillClrLst meth="repeat">
-      <a:schemeClr val="dk1"/>
-    </dgm:txFillClrLst>
-    <dgm:txEffectClrLst/>
-  </dgm:styleLbl>
-  <dgm:styleLbl name="trAlignAcc1">
-    <dgm:fillClrLst meth="repeat">
-      <a:schemeClr val="lt1">
-        <a:alpha val="40000"/>
-      </a:schemeClr>
-    </dgm:fillClrLst>
-    <dgm:linClrLst meth="repeat">
-      <a:schemeClr val="accent5"/>
-    </dgm:linClrLst>
-    <dgm:effectClrLst/>
-    <dgm:txLinClrLst/>
-    <dgm:txFillClrLst meth="repeat">
-      <a:schemeClr val="dk1"/>
-    </dgm:txFillClrLst>
-    <dgm:txEffectClrLst/>
-  </dgm:styleLbl>
-  <dgm:styleLbl name="bgAcc1">
-    <dgm:fillClrLst meth="repeat">
-      <a:schemeClr val="lt1">
-        <a:alpha val="90000"/>
-      </a:schemeClr>
-    </dgm:fillClrLst>
-    <dgm:linClrLst>
-      <a:schemeClr val="accent5"/>
-      <a:schemeClr val="accent6"/>
-    </dgm:linClrLst>
-    <dgm:effectClrLst/>
-    <dgm:txLinClrLst/>
-    <dgm:txFillClrLst meth="repeat">
-      <a:schemeClr val="dk1"/>
-    </dgm:txFillClrLst>
-    <dgm:txEffectClrLst/>
-  </dgm:styleLbl>
-  <dgm:styleLbl name="solidFgAcc1">
-    <dgm:fillClrLst meth="repeat">
-      <a:schemeClr val="lt1"/>
-    </dgm:fillClrLst>
-    <dgm:linClrLst>
-      <a:schemeClr val="accent5"/>
-      <a:schemeClr val="accent6"/>
-    </dgm:linClrLst>
-    <dgm:effectClrLst/>
-    <dgm:txLinClrLst/>
-    <dgm:txFillClrLst meth="repeat">
-      <a:schemeClr val="dk1"/>
-    </dgm:txFillClrLst>
-    <dgm:txEffectClrLst/>
-  </dgm:styleLbl>
-  <dgm:styleLbl name="solidAlignAcc1">
-    <dgm:fillClrLst meth="repeat">
-      <a:schemeClr val="lt1"/>
-    </dgm:fillClrLst>
-    <dgm:linClrLst>
-      <a:schemeClr val="accent5"/>
-      <a:schemeClr val="accent6"/>
-    </dgm:linClrLst>
-    <dgm:effectClrLst/>
-    <dgm:txLinClrLst/>
-    <dgm:txFillClrLst meth="repeat">
-      <a:schemeClr val="dk1"/>
-    </dgm:txFillClrLst>
-    <dgm:txEffectClrLst/>
-  </dgm:styleLbl>
-  <dgm:styleLbl name="solidBgAcc1">
-    <dgm:fillClrLst meth="repeat">
-      <a:schemeClr val="lt1"/>
-    </dgm:fillClrLst>
-    <dgm:linClrLst>
-      <a:schemeClr val="accent5"/>
-      <a:schemeClr val="accent6"/>
-    </dgm:linClrLst>
-    <dgm:effectClrLst/>
-    <dgm:txLinClrLst/>
-    <dgm:txFillClrLst meth="repeat">
-      <a:schemeClr val="dk1"/>
-    </dgm:txFillClrLst>
-    <dgm:txEffectClrLst/>
-  </dgm:styleLbl>
-  <dgm:styleLbl name="fgAccFollowNode1">
-    <dgm:fillClrLst>
-      <a:schemeClr val="accent5">
-        <a:tint val="40000"/>
-        <a:alpha val="90000"/>
-      </a:schemeClr>
-      <a:schemeClr val="accent6">
-        <a:tint val="40000"/>
-        <a:alpha val="90000"/>
-      </a:schemeClr>
-    </dgm:fillClrLst>
-    <dgm:linClrLst>
-      <a:schemeClr val="accent5">
-        <a:tint val="40000"/>
-        <a:alpha val="90000"/>
-      </a:schemeClr>
-      <a:schemeClr val="accent5">
-        <a:tint val="40000"/>
-        <a:alpha val="90000"/>
-      </a:schemeClr>
-    </dgm:linClrLst>
-    <dgm:effectClrLst/>
-    <dgm:txLinClrLst/>
-    <dgm:txFillClrLst meth="repeat">
-      <a:schemeClr val="dk1"/>
-    </dgm:txFillClrLst>
-    <dgm:txEffectClrLst/>
-  </dgm:styleLbl>
-  <dgm:styleLbl name="alignAccFollowNode1">
-    <dgm:fillClrLst>
-      <a:schemeClr val="accent5">
-        <a:tint val="40000"/>
-        <a:alpha val="90000"/>
-      </a:schemeClr>
-      <a:schemeClr val="accent6">
-        <a:tint val="40000"/>
-        <a:alpha val="90000"/>
-      </a:schemeClr>
-    </dgm:fillClrLst>
-    <dgm:linClrLst>
-      <a:schemeClr val="accent5">
-        <a:tint val="40000"/>
-        <a:alpha val="90000"/>
-      </a:schemeClr>
-      <a:schemeClr val="accent6">
-        <a:tint val="40000"/>
-        <a:alpha val="90000"/>
-      </a:schemeClr>
-    </dgm:linClrLst>
-    <dgm:effectClrLst/>
-    <dgm:txLinClrLst/>
-    <dgm:txFillClrLst meth="repeat">
-      <a:schemeClr val="dk1"/>
-    </dgm:txFillClrLst>
-    <dgm:txEffectClrLst/>
-  </dgm:styleLbl>
-  <dgm:styleLbl name="bgAccFollowNode1">
-    <dgm:fillClrLst>
-      <a:schemeClr val="accent5">
-        <a:tint val="40000"/>
-        <a:alpha val="90000"/>
-      </a:schemeClr>
-      <a:schemeClr val="accent6">
-        <a:tint val="40000"/>
-        <a:alpha val="90000"/>
-      </a:schemeClr>
-    </dgm:fillClrLst>
-    <dgm:linClrLst>
-      <a:schemeClr val="accent5">
-        <a:tint val="40000"/>
-        <a:alpha val="90000"/>
-      </a:schemeClr>
-      <a:schemeClr val="accent6">
-        <a:tint val="40000"/>
-        <a:alpha val="90000"/>
-      </a:schemeClr>
-    </dgm:linClrLst>
-    <dgm:effectClrLst/>
-    <dgm:txLinClrLst/>
-    <dgm:txFillClrLst meth="repeat">
-      <a:schemeClr val="dk1"/>
-    </dgm:txFillClrLst>
-    <dgm:txEffectClrLst/>
-  </dgm:styleLbl>
-  <dgm:styleLbl name="fgAcc0">
-    <dgm:fillClrLst meth="repeat">
-      <a:schemeClr val="lt1">
-        <a:alpha val="90000"/>
-      </a:schemeClr>
-    </dgm:fillClrLst>
-    <dgm:linClrLst>
-      <a:schemeClr val="accent4"/>
-    </dgm:linClrLst>
-    <dgm:effectClrLst/>
-    <dgm:txLinClrLst/>
-    <dgm:txFillClrLst meth="repeat">
-      <a:schemeClr val="dk1"/>
-    </dgm:txFillClrLst>
-    <dgm:txEffectClrLst/>
-  </dgm:styleLbl>
-  <dgm:styleLbl name="fgAcc2">
-    <dgm:fillClrLst meth="repeat">
-      <a:schemeClr val="lt1">
-        <a:alpha val="90000"/>
-      </a:schemeClr>
-    </dgm:fillClrLst>
-    <dgm:linClrLst>
-      <a:schemeClr val="accent6"/>
-    </dgm:linClrLst>
-    <dgm:effectClrLst/>
-    <dgm:txLinClrLst/>
-    <dgm:txFillClrLst meth="repeat">
-      <a:schemeClr val="dk1"/>
-    </dgm:txFillClrLst>
-    <dgm:txEffectClrLst/>
-  </dgm:styleLbl>
-  <dgm:styleLbl name="fgAcc3">
-    <dgm:fillClrLst meth="repeat">
-      <a:schemeClr val="lt1">
-        <a:alpha val="90000"/>
-      </a:schemeClr>
-    </dgm:fillClrLst>
-    <dgm:linClrLst>
-      <a:schemeClr val="accent1"/>
-    </dgm:linClrLst>
-    <dgm:effectClrLst/>
-    <dgm:txLinClrLst/>
-    <dgm:txFillClrLst meth="repeat">
-      <a:schemeClr val="dk1"/>
-    </dgm:txFillClrLst>
-    <dgm:txEffectClrLst/>
-  </dgm:styleLbl>
-  <dgm:styleLbl name="fgAcc4">
-    <dgm:fillClrLst meth="repeat">
-      <a:schemeClr val="lt1">
-        <a:alpha val="90000"/>
-      </a:schemeClr>
-    </dgm:fillClrLst>
-    <dgm:linClrLst>
-      <a:schemeClr val="accent2"/>
-    </dgm:linClrLst>
-    <dgm:effectClrLst/>
-    <dgm:txLinClrLst/>
-    <dgm:txFillClrLst meth="repeat">
-      <a:schemeClr val="dk1"/>
-    </dgm:txFillClrLst>
-    <dgm:txEffectClrLst/>
-  </dgm:styleLbl>
-  <dgm:styleLbl name="bgShp">
-    <dgm:fillClrLst meth="repeat">
-      <a:schemeClr val="accent5">
-        <a:tint val="40000"/>
-      </a:schemeClr>
-    </dgm:fillClrLst>
-    <dgm:linClrLst meth="repeat">
-      <a:schemeClr val="dk1"/>
-    </dgm:linClrLst>
-    <dgm:effectClrLst/>
-    <dgm:txLinClrLst/>
-    <dgm:txFillClrLst meth="repeat">
-      <a:schemeClr val="dk1"/>
-    </dgm:txFillClrLst>
-    <dgm:txEffectClrLst/>
-  </dgm:styleLbl>
-  <dgm:styleLbl name="dkBgShp">
-    <dgm:fillClrLst meth="repeat">
-      <a:schemeClr val="accent5">
-        <a:shade val="90000"/>
-      </a:schemeClr>
-    </dgm:fillClrLst>
-    <dgm:linClrLst meth="repeat">
-      <a:schemeClr val="dk1"/>
-    </dgm:linClrLst>
-    <dgm:effectClrLst/>
-    <dgm:txLinClrLst/>
-    <dgm:txFillClrLst meth="repeat">
-      <a:schemeClr val="lt1"/>
-    </dgm:txFillClrLst>
-    <dgm:txEffectClrLst/>
-  </dgm:styleLbl>
-  <dgm:styleLbl name="trBgShp">
-    <dgm:fillClrLst meth="repeat">
-      <a:schemeClr val="accent5">
-        <a:tint val="50000"/>
-        <a:alpha val="40000"/>
-      </a:schemeClr>
-    </dgm:fillClrLst>
-    <dgm:linClrLst meth="repeat">
-      <a:schemeClr val="accent5"/>
-    </dgm:linClrLst>
-    <dgm:effectClrLst/>
-    <dgm:txLinClrLst/>
-    <dgm:txFillClrLst meth="repeat">
-      <a:schemeClr val="lt1"/>
-    </dgm:txFillClrLst>
-    <dgm:txEffectClrLst/>
-  </dgm:styleLbl>
-  <dgm:styleLbl name="fgShp">
-    <dgm:fillClrLst meth="repeat">
-      <a:schemeClr val="accent5">
-        <a:tint val="40000"/>
-      </a:schemeClr>
-    </dgm:fillClrLst>
-    <dgm:linClrLst meth="repeat">
-      <a:schemeClr val="lt1"/>
-    </dgm:linClrLst>
-    <dgm:effectClrLst/>
-    <dgm:txLinClrLst/>
-    <dgm:txFillClrLst meth="repeat">
-      <a:schemeClr val="dk1"/>
-    </dgm:txFillClrLst>
-    <dgm:txEffectClrLst/>
-  </dgm:styleLbl>
-  <dgm:styleLbl name="revTx">
-    <dgm:fillClrLst meth="repeat">
-      <a:schemeClr val="lt1">
-        <a:alpha val="0"/>
-      </a:schemeClr>
-    </dgm:fillClrLst>
-    <dgm:linClrLst meth="repeat">
-      <a:schemeClr val="dk1">
-        <a:alpha val="0"/>
-      </a:schemeClr>
-    </dgm:linClrLst>
-    <dgm:effectClrLst/>
-    <dgm:txLinClrLst/>
-    <dgm:txFillClrLst meth="repeat">
-      <a:schemeClr val="tx1"/>
-    </dgm:txFillClrLst>
-    <dgm:txEffectClrLst/>
-  </dgm:styleLbl>
-</dgm:colorsDef>
-</file>
-
 <file path=ppt/diagrams/data1.xml><?xml version="1.0" encoding="utf-8"?>
 <dgm:dataModel xmlns:dgm="http://schemas.openxmlformats.org/drawingml/2006/diagram" xmlns:a="http://schemas.openxmlformats.org/drawingml/2006/main">
   <dgm:ptLst>
@@ -7281,418 +6499,6 @@
     <dgm:cxn modelId="{D6050178-2CF6-4FD5-867B-252793DDCBD2}" type="presParOf" srcId="{A74280AD-9FFD-4AA9-9C0B-AE915AECE173}" destId="{98799300-0DD4-4960-A025-4ADACB2CE7BB}" srcOrd="8" destOrd="0" presId="urn:microsoft.com/office/officeart/2005/8/layout/hProcess9"/>
     <dgm:cxn modelId="{228BD13C-2EF4-4593-AFA1-48A1C51F001F}" type="presParOf" srcId="{A74280AD-9FFD-4AA9-9C0B-AE915AECE173}" destId="{A37AB7AD-E927-409A-97DA-5DD8DF66D021}" srcOrd="9" destOrd="0" presId="urn:microsoft.com/office/officeart/2005/8/layout/hProcess9"/>
     <dgm:cxn modelId="{C420B259-13E5-4F4E-BA63-F21CB6DCA6D6}" type="presParOf" srcId="{A74280AD-9FFD-4AA9-9C0B-AE915AECE173}" destId="{054AE80D-D322-4C7E-8CAE-447DBCBB2AA6}" srcOrd="10" destOrd="0" presId="urn:microsoft.com/office/officeart/2005/8/layout/hProcess9"/>
-  </dgm:cxnLst>
-  <dgm:bg/>
-  <dgm:whole/>
-  <dgm:extLst>
-    <a:ext uri="http://schemas.microsoft.com/office/drawing/2008/diagram">
-      <dsp:dataModelExt xmlns:dsp="http://schemas.microsoft.com/office/drawing/2008/diagram" relId="rId6" minVer="http://schemas.openxmlformats.org/drawingml/2006/diagram"/>
-    </a:ext>
-  </dgm:extLst>
-</dgm:dataModel>
-</file>
-
-<file path=ppt/diagrams/data2.xml><?xml version="1.0" encoding="utf-8"?>
-<dgm:dataModel xmlns:dgm="http://schemas.openxmlformats.org/drawingml/2006/diagram" xmlns:a="http://schemas.openxmlformats.org/drawingml/2006/main">
-  <dgm:ptLst>
-    <dgm:pt modelId="{E0635A93-AE11-4328-8065-FAF9C37D9905}" type="doc">
-      <dgm:prSet loTypeId="urn:microsoft.com/office/officeart/2005/8/layout/list1" loCatId="list" qsTypeId="urn:microsoft.com/office/officeart/2005/8/quickstyle/simple1" qsCatId="simple" csTypeId="urn:microsoft.com/office/officeart/2005/8/colors/colorful5" csCatId="colorful" phldr="1"/>
-      <dgm:spPr/>
-      <dgm:t>
-        <a:bodyPr/>
-        <a:lstStyle/>
-        <a:p>
-          <a:endParaRPr lang="en-US"/>
-        </a:p>
-      </dgm:t>
-    </dgm:pt>
-    <dgm:pt modelId="{DB5E95F5-B2F1-4821-9D54-DC9AD43F9E7A}">
-      <dgm:prSet/>
-      <dgm:spPr/>
-      <dgm:t>
-        <a:bodyPr/>
-        <a:lstStyle/>
-        <a:p>
-          <a:r>
-            <a:rPr lang="en-US"/>
-            <a:t>Many other models exist</a:t>
-          </a:r>
-        </a:p>
-      </dgm:t>
-    </dgm:pt>
-    <dgm:pt modelId="{CE83A929-FCE0-4D34-A265-C9FF2C54779F}" type="parTrans" cxnId="{6E5EEBF9-54A0-4C1C-B47C-ECF6E5894F9C}">
-      <dgm:prSet/>
-      <dgm:spPr/>
-      <dgm:t>
-        <a:bodyPr/>
-        <a:lstStyle/>
-        <a:p>
-          <a:endParaRPr lang="en-US"/>
-        </a:p>
-      </dgm:t>
-    </dgm:pt>
-    <dgm:pt modelId="{B2723B72-E11B-42F7-866B-483EBDD54CBC}" type="sibTrans" cxnId="{6E5EEBF9-54A0-4C1C-B47C-ECF6E5894F9C}">
-      <dgm:prSet/>
-      <dgm:spPr/>
-      <dgm:t>
-        <a:bodyPr/>
-        <a:lstStyle/>
-        <a:p>
-          <a:endParaRPr lang="en-US"/>
-        </a:p>
-      </dgm:t>
-    </dgm:pt>
-    <dgm:pt modelId="{1ED475E8-E0EC-4711-B4FB-E75F7477CAAA}">
-      <dgm:prSet/>
-      <dgm:spPr/>
-      <dgm:t>
-        <a:bodyPr/>
-        <a:lstStyle/>
-        <a:p>
-          <a:r>
-            <a:rPr lang="en-US" b="1" dirty="0"/>
-            <a:t>Generalized linear model (GLM): </a:t>
-          </a:r>
-          <a:r>
-            <a:rPr lang="en-US" dirty="0"/>
-            <a:t>This important model family includes </a:t>
-          </a:r>
-          <a:r>
-            <a:rPr lang="en-US" b="1" dirty="0"/>
-            <a:t>linear regression, Poisson regression </a:t>
-          </a:r>
-          <a:r>
-            <a:rPr lang="en-US" dirty="0"/>
-            <a:t>and the classification method </a:t>
-          </a:r>
-          <a:r>
-            <a:rPr lang="en-US" b="1" dirty="0"/>
-            <a:t>logistic regression. </a:t>
-          </a:r>
-          <a:endParaRPr lang="en-US" dirty="0"/>
-        </a:p>
-      </dgm:t>
-    </dgm:pt>
-    <dgm:pt modelId="{236BEB09-5B70-49D3-867A-4105FE3894F9}" type="parTrans" cxnId="{E8F319D2-5FAD-4834-A83C-7D096D439476}">
-      <dgm:prSet/>
-      <dgm:spPr/>
-      <dgm:t>
-        <a:bodyPr/>
-        <a:lstStyle/>
-        <a:p>
-          <a:endParaRPr lang="en-US"/>
-        </a:p>
-      </dgm:t>
-    </dgm:pt>
-    <dgm:pt modelId="{E41B67BC-CBCA-466C-8232-7B155C3E702C}" type="sibTrans" cxnId="{E8F319D2-5FAD-4834-A83C-7D096D439476}">
-      <dgm:prSet/>
-      <dgm:spPr/>
-      <dgm:t>
-        <a:bodyPr/>
-        <a:lstStyle/>
-        <a:p>
-          <a:endParaRPr lang="en-US"/>
-        </a:p>
-      </dgm:t>
-    </dgm:pt>
-    <dgm:pt modelId="{40585307-9758-4CB4-BF58-076BC1745A6A}">
-      <dgm:prSet/>
-      <dgm:spPr/>
-      <dgm:t>
-        <a:bodyPr/>
-        <a:lstStyle/>
-        <a:p>
-          <a:r>
-            <a:rPr lang="en-US"/>
-            <a:t>Often used methods</a:t>
-          </a:r>
-        </a:p>
-      </dgm:t>
-    </dgm:pt>
-    <dgm:pt modelId="{D8FDF1E4-9B66-441C-9785-F4830EABC37D}" type="parTrans" cxnId="{7DC56D74-B858-411A-AB34-7AD6094F8BCE}">
-      <dgm:prSet/>
-      <dgm:spPr/>
-      <dgm:t>
-        <a:bodyPr/>
-        <a:lstStyle/>
-        <a:p>
-          <a:endParaRPr lang="en-US"/>
-        </a:p>
-      </dgm:t>
-    </dgm:pt>
-    <dgm:pt modelId="{11746D72-579A-498E-852B-8BEE617DD097}" type="sibTrans" cxnId="{7DC56D74-B858-411A-AB34-7AD6094F8BCE}">
-      <dgm:prSet/>
-      <dgm:spPr/>
-      <dgm:t>
-        <a:bodyPr/>
-        <a:lstStyle/>
-        <a:p>
-          <a:endParaRPr lang="en-US"/>
-        </a:p>
-      </dgm:t>
-    </dgm:pt>
-    <dgm:pt modelId="{5F00ADBC-B568-4242-97BA-94CD45AB333E}">
-      <dgm:prSet/>
-      <dgm:spPr/>
-      <dgm:t>
-        <a:bodyPr/>
-        <a:lstStyle/>
-        <a:p>
-          <a:r>
-            <a:rPr lang="en-US" b="1" dirty="0"/>
-            <a:t>Regularization: </a:t>
-          </a:r>
-          <a:r>
-            <a:rPr lang="en-US" dirty="0"/>
-            <a:t>Enforce simplicity and reduce overfitting by using a penalty for complexity.</a:t>
-          </a:r>
-        </a:p>
-      </dgm:t>
-    </dgm:pt>
-    <dgm:pt modelId="{7AF04798-FD68-4F6B-87A2-A52C6F973446}" type="parTrans" cxnId="{2AA82FB5-1E60-4FA3-8241-EB851911C1DA}">
-      <dgm:prSet/>
-      <dgm:spPr/>
-      <dgm:t>
-        <a:bodyPr/>
-        <a:lstStyle/>
-        <a:p>
-          <a:endParaRPr lang="en-US"/>
-        </a:p>
-      </dgm:t>
-    </dgm:pt>
-    <dgm:pt modelId="{EB1CF6BA-5482-4A2B-9542-22BBD65B0A0D}" type="sibTrans" cxnId="{2AA82FB5-1E60-4FA3-8241-EB851911C1DA}">
-      <dgm:prSet/>
-      <dgm:spPr/>
-      <dgm:t>
-        <a:bodyPr/>
-        <a:lstStyle/>
-        <a:p>
-          <a:endParaRPr lang="en-US"/>
-        </a:p>
-      </dgm:t>
-    </dgm:pt>
-    <dgm:pt modelId="{5D695B2C-1523-4190-BB96-EA1E42AD2FAC}">
-      <dgm:prSet/>
-      <dgm:spPr/>
-      <dgm:t>
-        <a:bodyPr/>
-        <a:lstStyle/>
-        <a:p>
-          <a:r>
-            <a:rPr lang="en-US" b="1" dirty="0"/>
-            <a:t>Kernel trick: </a:t>
-          </a:r>
-          <a:r>
-            <a:rPr lang="en-US" dirty="0"/>
-            <a:t>Lets a linear classifier learn non-linear decision boundaries.</a:t>
-          </a:r>
-        </a:p>
-      </dgm:t>
-    </dgm:pt>
-    <dgm:pt modelId="{C9A82CFF-E498-4AF4-BB06-985F23FE45AA}" type="parTrans" cxnId="{64BCFF14-A8A7-49A5-9F46-1A4FE24AB927}">
-      <dgm:prSet/>
-      <dgm:spPr/>
-      <dgm:t>
-        <a:bodyPr/>
-        <a:lstStyle/>
-        <a:p>
-          <a:endParaRPr lang="en-US"/>
-        </a:p>
-      </dgm:t>
-    </dgm:pt>
-    <dgm:pt modelId="{1E90E51C-E657-4416-A5AC-07309E49D108}" type="sibTrans" cxnId="{64BCFF14-A8A7-49A5-9F46-1A4FE24AB927}">
-      <dgm:prSet/>
-      <dgm:spPr/>
-      <dgm:t>
-        <a:bodyPr/>
-        <a:lstStyle/>
-        <a:p>
-          <a:endParaRPr lang="en-US"/>
-        </a:p>
-      </dgm:t>
-    </dgm:pt>
-    <dgm:pt modelId="{540E4FCF-D100-461B-AEA3-55B9A2AC7A9D}">
-      <dgm:prSet/>
-      <dgm:spPr/>
-      <dgm:t>
-        <a:bodyPr/>
-        <a:lstStyle/>
-        <a:p>
-          <a:r>
-            <a:rPr lang="en-US" b="1" dirty="0"/>
-            <a:t>Ensemble Learning: </a:t>
-          </a:r>
-          <a:r>
-            <a:rPr lang="en-US" dirty="0"/>
-            <a:t>Use many models and combine the results (e.g., random forest, boosting).</a:t>
-          </a:r>
-        </a:p>
-      </dgm:t>
-    </dgm:pt>
-    <dgm:pt modelId="{64D13E1B-88EC-4EB2-987F-C0F9481E2CE9}" type="parTrans" cxnId="{F4F628F2-5EDD-4BFF-83E7-EF6DDB4CD7BC}">
-      <dgm:prSet/>
-      <dgm:spPr/>
-      <dgm:t>
-        <a:bodyPr/>
-        <a:lstStyle/>
-        <a:p>
-          <a:endParaRPr lang="en-US"/>
-        </a:p>
-      </dgm:t>
-    </dgm:pt>
-    <dgm:pt modelId="{FF7B8661-0B4E-4941-ADB2-7BAE0844A58C}" type="sibTrans" cxnId="{F4F628F2-5EDD-4BFF-83E7-EF6DDB4CD7BC}">
-      <dgm:prSet/>
-      <dgm:spPr/>
-      <dgm:t>
-        <a:bodyPr/>
-        <a:lstStyle/>
-        <a:p>
-          <a:endParaRPr lang="en-US"/>
-        </a:p>
-      </dgm:t>
-    </dgm:pt>
-    <dgm:pt modelId="{C3CA89AC-F4C6-46FD-B0E9-61BD509DA3AB}">
-      <dgm:prSet/>
-      <dgm:spPr/>
-      <dgm:t>
-        <a:bodyPr/>
-        <a:lstStyle/>
-        <a:p>
-          <a:r>
-            <a:rPr lang="en-US" b="1" dirty="0"/>
-            <a:t>Embedding and Dimensionality Reduction: </a:t>
-          </a:r>
-          <a:r>
-            <a:rPr lang="en-US" dirty="0"/>
-            <a:t>Learn how to represent data in a simpler way. E.g., principal components analysis (PCA), variational autoencoders, text embeddings.</a:t>
-          </a:r>
-        </a:p>
-      </dgm:t>
-    </dgm:pt>
-    <dgm:pt modelId="{8DB2500D-776E-4F4F-B91F-62CCC0E3AD0A}" type="parTrans" cxnId="{7145D416-5044-449E-AF9F-93AA3846825E}">
-      <dgm:prSet/>
-      <dgm:spPr/>
-      <dgm:t>
-        <a:bodyPr/>
-        <a:lstStyle/>
-        <a:p>
-          <a:endParaRPr lang="en-US"/>
-        </a:p>
-      </dgm:t>
-    </dgm:pt>
-    <dgm:pt modelId="{2485EA27-5696-4623-8B9A-705E18564C54}" type="sibTrans" cxnId="{7145D416-5044-449E-AF9F-93AA3846825E}">
-      <dgm:prSet/>
-      <dgm:spPr/>
-      <dgm:t>
-        <a:bodyPr/>
-        <a:lstStyle/>
-        <a:p>
-          <a:endParaRPr lang="en-US"/>
-        </a:p>
-      </dgm:t>
-    </dgm:pt>
-    <dgm:pt modelId="{6A1890CE-FB14-4465-A97D-A8D0C6F14E9C}" type="pres">
-      <dgm:prSet presAssocID="{E0635A93-AE11-4328-8065-FAF9C37D9905}" presName="linear" presStyleCnt="0">
-        <dgm:presLayoutVars>
-          <dgm:dir/>
-          <dgm:animLvl val="lvl"/>
-          <dgm:resizeHandles val="exact"/>
-        </dgm:presLayoutVars>
-      </dgm:prSet>
-      <dgm:spPr/>
-    </dgm:pt>
-    <dgm:pt modelId="{E835D97E-99FA-4FE2-94E7-59450AE5FDB7}" type="pres">
-      <dgm:prSet presAssocID="{DB5E95F5-B2F1-4821-9D54-DC9AD43F9E7A}" presName="parentLin" presStyleCnt="0"/>
-      <dgm:spPr/>
-    </dgm:pt>
-    <dgm:pt modelId="{68739E00-13B3-45DC-907F-4AA92DEEEA6D}" type="pres">
-      <dgm:prSet presAssocID="{DB5E95F5-B2F1-4821-9D54-DC9AD43F9E7A}" presName="parentLeftMargin" presStyleLbl="node1" presStyleIdx="0" presStyleCnt="2"/>
-      <dgm:spPr/>
-    </dgm:pt>
-    <dgm:pt modelId="{728725E1-C028-4CFF-B3D7-ECB8D28021DB}" type="pres">
-      <dgm:prSet presAssocID="{DB5E95F5-B2F1-4821-9D54-DC9AD43F9E7A}" presName="parentText" presStyleLbl="node1" presStyleIdx="0" presStyleCnt="2">
-        <dgm:presLayoutVars>
-          <dgm:chMax val="0"/>
-          <dgm:bulletEnabled val="1"/>
-        </dgm:presLayoutVars>
-      </dgm:prSet>
-      <dgm:spPr/>
-    </dgm:pt>
-    <dgm:pt modelId="{FF4E73E0-5960-4E54-B7CC-F40AFFACB724}" type="pres">
-      <dgm:prSet presAssocID="{DB5E95F5-B2F1-4821-9D54-DC9AD43F9E7A}" presName="negativeSpace" presStyleCnt="0"/>
-      <dgm:spPr/>
-    </dgm:pt>
-    <dgm:pt modelId="{E878BA4F-48C0-44F7-B49B-2544E59430F6}" type="pres">
-      <dgm:prSet presAssocID="{DB5E95F5-B2F1-4821-9D54-DC9AD43F9E7A}" presName="childText" presStyleLbl="conFgAcc1" presStyleIdx="0" presStyleCnt="2">
-        <dgm:presLayoutVars>
-          <dgm:bulletEnabled val="1"/>
-        </dgm:presLayoutVars>
-      </dgm:prSet>
-      <dgm:spPr/>
-    </dgm:pt>
-    <dgm:pt modelId="{DF3B02ED-3641-4E1C-A0E3-80C49093F7FF}" type="pres">
-      <dgm:prSet presAssocID="{B2723B72-E11B-42F7-866B-483EBDD54CBC}" presName="spaceBetweenRectangles" presStyleCnt="0"/>
-      <dgm:spPr/>
-    </dgm:pt>
-    <dgm:pt modelId="{45E99E50-0FBF-478A-BA8B-A4280BCF2E37}" type="pres">
-      <dgm:prSet presAssocID="{40585307-9758-4CB4-BF58-076BC1745A6A}" presName="parentLin" presStyleCnt="0"/>
-      <dgm:spPr/>
-    </dgm:pt>
-    <dgm:pt modelId="{67A26B9C-FEA4-49A0-A2A6-D596F117EE18}" type="pres">
-      <dgm:prSet presAssocID="{40585307-9758-4CB4-BF58-076BC1745A6A}" presName="parentLeftMargin" presStyleLbl="node1" presStyleIdx="0" presStyleCnt="2"/>
-      <dgm:spPr/>
-    </dgm:pt>
-    <dgm:pt modelId="{D2714134-93F0-48C2-9EAF-C80D0AD218DE}" type="pres">
-      <dgm:prSet presAssocID="{40585307-9758-4CB4-BF58-076BC1745A6A}" presName="parentText" presStyleLbl="node1" presStyleIdx="1" presStyleCnt="2">
-        <dgm:presLayoutVars>
-          <dgm:chMax val="0"/>
-          <dgm:bulletEnabled val="1"/>
-        </dgm:presLayoutVars>
-      </dgm:prSet>
-      <dgm:spPr/>
-    </dgm:pt>
-    <dgm:pt modelId="{2FA0DC3B-D2D9-4E10-A5F0-F6DCF002121A}" type="pres">
-      <dgm:prSet presAssocID="{40585307-9758-4CB4-BF58-076BC1745A6A}" presName="negativeSpace" presStyleCnt="0"/>
-      <dgm:spPr/>
-    </dgm:pt>
-    <dgm:pt modelId="{8BD60244-BD09-48B5-A6BD-A5920B49269F}" type="pres">
-      <dgm:prSet presAssocID="{40585307-9758-4CB4-BF58-076BC1745A6A}" presName="childText" presStyleLbl="conFgAcc1" presStyleIdx="1" presStyleCnt="2">
-        <dgm:presLayoutVars>
-          <dgm:bulletEnabled val="1"/>
-        </dgm:presLayoutVars>
-      </dgm:prSet>
-      <dgm:spPr/>
-    </dgm:pt>
-  </dgm:ptLst>
-  <dgm:cxnLst>
-    <dgm:cxn modelId="{64BCFF14-A8A7-49A5-9F46-1A4FE24AB927}" srcId="{40585307-9758-4CB4-BF58-076BC1745A6A}" destId="{5D695B2C-1523-4190-BB96-EA1E42AD2FAC}" srcOrd="1" destOrd="0" parTransId="{C9A82CFF-E498-4AF4-BB06-985F23FE45AA}" sibTransId="{1E90E51C-E657-4416-A5AC-07309E49D108}"/>
-    <dgm:cxn modelId="{7145D416-5044-449E-AF9F-93AA3846825E}" srcId="{40585307-9758-4CB4-BF58-076BC1745A6A}" destId="{C3CA89AC-F4C6-46FD-B0E9-61BD509DA3AB}" srcOrd="3" destOrd="0" parTransId="{8DB2500D-776E-4F4F-B91F-62CCC0E3AD0A}" sibTransId="{2485EA27-5696-4623-8B9A-705E18564C54}"/>
-    <dgm:cxn modelId="{44786C39-1398-43AC-A942-0B7F1EA30DDA}" type="presOf" srcId="{5D695B2C-1523-4190-BB96-EA1E42AD2FAC}" destId="{8BD60244-BD09-48B5-A6BD-A5920B49269F}" srcOrd="0" destOrd="1" presId="urn:microsoft.com/office/officeart/2005/8/layout/list1"/>
-    <dgm:cxn modelId="{2908AE40-3EB6-4934-BED4-47236A0AB6A3}" type="presOf" srcId="{1ED475E8-E0EC-4711-B4FB-E75F7477CAAA}" destId="{E878BA4F-48C0-44F7-B49B-2544E59430F6}" srcOrd="0" destOrd="0" presId="urn:microsoft.com/office/officeart/2005/8/layout/list1"/>
-    <dgm:cxn modelId="{F6C20B5C-46E0-4327-8CF9-B1E440D159B4}" type="presOf" srcId="{40585307-9758-4CB4-BF58-076BC1745A6A}" destId="{67A26B9C-FEA4-49A0-A2A6-D596F117EE18}" srcOrd="0" destOrd="0" presId="urn:microsoft.com/office/officeart/2005/8/layout/list1"/>
-    <dgm:cxn modelId="{22D6D25E-C4E9-4F19-86B1-25C03874BAAB}" type="presOf" srcId="{40585307-9758-4CB4-BF58-076BC1745A6A}" destId="{D2714134-93F0-48C2-9EAF-C80D0AD218DE}" srcOrd="1" destOrd="0" presId="urn:microsoft.com/office/officeart/2005/8/layout/list1"/>
-    <dgm:cxn modelId="{928A9563-3671-4CA3-8265-76E71A85FC85}" type="presOf" srcId="{5F00ADBC-B568-4242-97BA-94CD45AB333E}" destId="{8BD60244-BD09-48B5-A6BD-A5920B49269F}" srcOrd="0" destOrd="0" presId="urn:microsoft.com/office/officeart/2005/8/layout/list1"/>
-    <dgm:cxn modelId="{D02BBE48-0970-479F-9003-FCD68A563521}" type="presOf" srcId="{540E4FCF-D100-461B-AEA3-55B9A2AC7A9D}" destId="{8BD60244-BD09-48B5-A6BD-A5920B49269F}" srcOrd="0" destOrd="2" presId="urn:microsoft.com/office/officeart/2005/8/layout/list1"/>
-    <dgm:cxn modelId="{7DC56D74-B858-411A-AB34-7AD6094F8BCE}" srcId="{E0635A93-AE11-4328-8065-FAF9C37D9905}" destId="{40585307-9758-4CB4-BF58-076BC1745A6A}" srcOrd="1" destOrd="0" parTransId="{D8FDF1E4-9B66-441C-9785-F4830EABC37D}" sibTransId="{11746D72-579A-498E-852B-8BEE617DD097}"/>
-    <dgm:cxn modelId="{D104E1A4-26F3-430A-AB12-B1DC1A3251B7}" type="presOf" srcId="{C3CA89AC-F4C6-46FD-B0E9-61BD509DA3AB}" destId="{8BD60244-BD09-48B5-A6BD-A5920B49269F}" srcOrd="0" destOrd="3" presId="urn:microsoft.com/office/officeart/2005/8/layout/list1"/>
-    <dgm:cxn modelId="{8B1363AA-5E44-43B2-AF6C-D6626AEDEFAA}" type="presOf" srcId="{DB5E95F5-B2F1-4821-9D54-DC9AD43F9E7A}" destId="{68739E00-13B3-45DC-907F-4AA92DEEEA6D}" srcOrd="0" destOrd="0" presId="urn:microsoft.com/office/officeart/2005/8/layout/list1"/>
-    <dgm:cxn modelId="{2AA82FB5-1E60-4FA3-8241-EB851911C1DA}" srcId="{40585307-9758-4CB4-BF58-076BC1745A6A}" destId="{5F00ADBC-B568-4242-97BA-94CD45AB333E}" srcOrd="0" destOrd="0" parTransId="{7AF04798-FD68-4F6B-87A2-A52C6F973446}" sibTransId="{EB1CF6BA-5482-4A2B-9542-22BBD65B0A0D}"/>
-    <dgm:cxn modelId="{E8F319D2-5FAD-4834-A83C-7D096D439476}" srcId="{DB5E95F5-B2F1-4821-9D54-DC9AD43F9E7A}" destId="{1ED475E8-E0EC-4711-B4FB-E75F7477CAAA}" srcOrd="0" destOrd="0" parTransId="{236BEB09-5B70-49D3-867A-4105FE3894F9}" sibTransId="{E41B67BC-CBCA-466C-8232-7B155C3E702C}"/>
-    <dgm:cxn modelId="{7C2C0DD6-12B3-4DA9-9ABA-49406A488311}" type="presOf" srcId="{E0635A93-AE11-4328-8065-FAF9C37D9905}" destId="{6A1890CE-FB14-4465-A97D-A8D0C6F14E9C}" srcOrd="0" destOrd="0" presId="urn:microsoft.com/office/officeart/2005/8/layout/list1"/>
-    <dgm:cxn modelId="{F4F628F2-5EDD-4BFF-83E7-EF6DDB4CD7BC}" srcId="{40585307-9758-4CB4-BF58-076BC1745A6A}" destId="{540E4FCF-D100-461B-AEA3-55B9A2AC7A9D}" srcOrd="2" destOrd="0" parTransId="{64D13E1B-88EC-4EB2-987F-C0F9481E2CE9}" sibTransId="{FF7B8661-0B4E-4941-ADB2-7BAE0844A58C}"/>
-    <dgm:cxn modelId="{12B212F5-173E-47B4-AED0-A1379AB7F9D5}" type="presOf" srcId="{DB5E95F5-B2F1-4821-9D54-DC9AD43F9E7A}" destId="{728725E1-C028-4CFF-B3D7-ECB8D28021DB}" srcOrd="1" destOrd="0" presId="urn:microsoft.com/office/officeart/2005/8/layout/list1"/>
-    <dgm:cxn modelId="{6E5EEBF9-54A0-4C1C-B47C-ECF6E5894F9C}" srcId="{E0635A93-AE11-4328-8065-FAF9C37D9905}" destId="{DB5E95F5-B2F1-4821-9D54-DC9AD43F9E7A}" srcOrd="0" destOrd="0" parTransId="{CE83A929-FCE0-4D34-A265-C9FF2C54779F}" sibTransId="{B2723B72-E11B-42F7-866B-483EBDD54CBC}"/>
-    <dgm:cxn modelId="{98C5AFAE-AB26-42E5-8B63-B71F0D32718F}" type="presParOf" srcId="{6A1890CE-FB14-4465-A97D-A8D0C6F14E9C}" destId="{E835D97E-99FA-4FE2-94E7-59450AE5FDB7}" srcOrd="0" destOrd="0" presId="urn:microsoft.com/office/officeart/2005/8/layout/list1"/>
-    <dgm:cxn modelId="{17DD88B0-3D29-4077-A7C5-F7EB23F98DEC}" type="presParOf" srcId="{E835D97E-99FA-4FE2-94E7-59450AE5FDB7}" destId="{68739E00-13B3-45DC-907F-4AA92DEEEA6D}" srcOrd="0" destOrd="0" presId="urn:microsoft.com/office/officeart/2005/8/layout/list1"/>
-    <dgm:cxn modelId="{94DE51C0-69B9-4658-85B0-83EB32704971}" type="presParOf" srcId="{E835D97E-99FA-4FE2-94E7-59450AE5FDB7}" destId="{728725E1-C028-4CFF-B3D7-ECB8D28021DB}" srcOrd="1" destOrd="0" presId="urn:microsoft.com/office/officeart/2005/8/layout/list1"/>
-    <dgm:cxn modelId="{7FDCF880-B4BA-4E10-9BC8-F6BF6365F812}" type="presParOf" srcId="{6A1890CE-FB14-4465-A97D-A8D0C6F14E9C}" destId="{FF4E73E0-5960-4E54-B7CC-F40AFFACB724}" srcOrd="1" destOrd="0" presId="urn:microsoft.com/office/officeart/2005/8/layout/list1"/>
-    <dgm:cxn modelId="{C57AD68A-218A-4758-9FFE-1512211122F4}" type="presParOf" srcId="{6A1890CE-FB14-4465-A97D-A8D0C6F14E9C}" destId="{E878BA4F-48C0-44F7-B49B-2544E59430F6}" srcOrd="2" destOrd="0" presId="urn:microsoft.com/office/officeart/2005/8/layout/list1"/>
-    <dgm:cxn modelId="{C3CA5018-C9C5-4CA7-8D88-B90DFCD38DF6}" type="presParOf" srcId="{6A1890CE-FB14-4465-A97D-A8D0C6F14E9C}" destId="{DF3B02ED-3641-4E1C-A0E3-80C49093F7FF}" srcOrd="3" destOrd="0" presId="urn:microsoft.com/office/officeart/2005/8/layout/list1"/>
-    <dgm:cxn modelId="{147D7661-93E8-4D9B-9955-41402472042B}" type="presParOf" srcId="{6A1890CE-FB14-4465-A97D-A8D0C6F14E9C}" destId="{45E99E50-0FBF-478A-BA8B-A4280BCF2E37}" srcOrd="4" destOrd="0" presId="urn:microsoft.com/office/officeart/2005/8/layout/list1"/>
-    <dgm:cxn modelId="{2033511D-8D8C-4343-8060-2214EDC00E22}" type="presParOf" srcId="{45E99E50-0FBF-478A-BA8B-A4280BCF2E37}" destId="{67A26B9C-FEA4-49A0-A2A6-D596F117EE18}" srcOrd="0" destOrd="0" presId="urn:microsoft.com/office/officeart/2005/8/layout/list1"/>
-    <dgm:cxn modelId="{929189FF-33B0-4012-AF15-07E254F99105}" type="presParOf" srcId="{45E99E50-0FBF-478A-BA8B-A4280BCF2E37}" destId="{D2714134-93F0-48C2-9EAF-C80D0AD218DE}" srcOrd="1" destOrd="0" presId="urn:microsoft.com/office/officeart/2005/8/layout/list1"/>
-    <dgm:cxn modelId="{022D06D8-D70D-4E3E-A29F-2714524D7014}" type="presParOf" srcId="{6A1890CE-FB14-4465-A97D-A8D0C6F14E9C}" destId="{2FA0DC3B-D2D9-4E10-A5F0-F6DCF002121A}" srcOrd="5" destOrd="0" presId="urn:microsoft.com/office/officeart/2005/8/layout/list1"/>
-    <dgm:cxn modelId="{EFA88D12-D271-4106-B10F-7758B3211460}" type="presParOf" srcId="{6A1890CE-FB14-4465-A97D-A8D0C6F14E9C}" destId="{8BD60244-BD09-48B5-A6BD-A5920B49269F}" srcOrd="6" destOrd="0" presId="urn:microsoft.com/office/officeart/2005/8/layout/list1"/>
   </dgm:cxnLst>
   <dgm:bg/>
   <dgm:whole/>
@@ -8224,415 +7030,6 @@
 </dsp:drawing>
 </file>
 
-<file path=ppt/diagrams/drawing2.xml><?xml version="1.0" encoding="utf-8"?>
-<dsp:drawing xmlns:dgm="http://schemas.openxmlformats.org/drawingml/2006/diagram" xmlns:dsp="http://schemas.microsoft.com/office/drawing/2008/diagram" xmlns:a="http://schemas.openxmlformats.org/drawingml/2006/main">
-  <dsp:spTree>
-    <dsp:nvGrpSpPr>
-      <dsp:cNvPr id="0" name=""/>
-      <dsp:cNvGrpSpPr/>
-    </dsp:nvGrpSpPr>
-    <dsp:grpSpPr/>
-    <dsp:sp modelId="{E878BA4F-48C0-44F7-B49B-2544E59430F6}">
-      <dsp:nvSpPr>
-        <dsp:cNvPr id="0" name=""/>
-        <dsp:cNvSpPr/>
-      </dsp:nvSpPr>
-      <dsp:spPr>
-        <a:xfrm>
-          <a:off x="0" y="350693"/>
-          <a:ext cx="6263640" cy="1530900"/>
-        </a:xfrm>
-        <a:prstGeom prst="rect">
-          <a:avLst/>
-        </a:prstGeom>
-        <a:solidFill>
-          <a:schemeClr val="lt1">
-            <a:alpha val="90000"/>
-            <a:hueOff val="0"/>
-            <a:satOff val="0"/>
-            <a:lumOff val="0"/>
-            <a:alphaOff val="0"/>
-          </a:schemeClr>
-        </a:solidFill>
-        <a:ln w="12700" cap="flat" cmpd="sng" algn="ctr">
-          <a:solidFill>
-            <a:schemeClr val="accent5">
-              <a:hueOff val="0"/>
-              <a:satOff val="0"/>
-              <a:lumOff val="0"/>
-              <a:alphaOff val="0"/>
-            </a:schemeClr>
-          </a:solidFill>
-          <a:prstDash val="solid"/>
-          <a:miter lim="800000"/>
-        </a:ln>
-        <a:effectLst/>
-      </dsp:spPr>
-      <dsp:style>
-        <a:lnRef idx="2">
-          <a:scrgbClr r="0" g="0" b="0"/>
-        </a:lnRef>
-        <a:fillRef idx="1">
-          <a:scrgbClr r="0" g="0" b="0"/>
-        </a:fillRef>
-        <a:effectRef idx="0">
-          <a:scrgbClr r="0" g="0" b="0"/>
-        </a:effectRef>
-        <a:fontRef idx="minor"/>
-      </dsp:style>
-      <dsp:txBody>
-        <a:bodyPr spcFirstLastPara="0" vert="horz" wrap="square" lIns="486128" tIns="374904" rIns="486128" bIns="128016" numCol="1" spcCol="1270" anchor="t" anchorCtr="0">
-          <a:noAutofit/>
-        </a:bodyPr>
-        <a:lstStyle/>
-        <a:p>
-          <a:pPr marL="171450" lvl="1" indent="-171450" algn="l" defTabSz="800100">
-            <a:lnSpc>
-              <a:spcPct val="90000"/>
-            </a:lnSpc>
-            <a:spcBef>
-              <a:spcPct val="0"/>
-            </a:spcBef>
-            <a:spcAft>
-              <a:spcPct val="15000"/>
-            </a:spcAft>
-            <a:buChar char="•"/>
-          </a:pPr>
-          <a:r>
-            <a:rPr lang="en-US" sz="1800" b="1" kern="1200" dirty="0"/>
-            <a:t>Generalized linear model (GLM): </a:t>
-          </a:r>
-          <a:r>
-            <a:rPr lang="en-US" sz="1800" kern="1200" dirty="0"/>
-            <a:t>This important model family includes </a:t>
-          </a:r>
-          <a:r>
-            <a:rPr lang="en-US" sz="1800" b="1" kern="1200" dirty="0"/>
-            <a:t>linear regression, Poisson regression </a:t>
-          </a:r>
-          <a:r>
-            <a:rPr lang="en-US" sz="1800" kern="1200" dirty="0"/>
-            <a:t>and the classification method </a:t>
-          </a:r>
-          <a:r>
-            <a:rPr lang="en-US" sz="1800" b="1" kern="1200" dirty="0"/>
-            <a:t>logistic regression. </a:t>
-          </a:r>
-          <a:endParaRPr lang="en-US" sz="1800" kern="1200" dirty="0"/>
-        </a:p>
-      </dsp:txBody>
-      <dsp:txXfrm>
-        <a:off x="0" y="350693"/>
-        <a:ext cx="6263640" cy="1530900"/>
-      </dsp:txXfrm>
-    </dsp:sp>
-    <dsp:sp modelId="{728725E1-C028-4CFF-B3D7-ECB8D28021DB}">
-      <dsp:nvSpPr>
-        <dsp:cNvPr id="0" name=""/>
-        <dsp:cNvSpPr/>
-      </dsp:nvSpPr>
-      <dsp:spPr>
-        <a:xfrm>
-          <a:off x="313182" y="85013"/>
-          <a:ext cx="4384548" cy="531360"/>
-        </a:xfrm>
-        <a:prstGeom prst="roundRect">
-          <a:avLst/>
-        </a:prstGeom>
-        <a:solidFill>
-          <a:schemeClr val="accent5">
-            <a:hueOff val="0"/>
-            <a:satOff val="0"/>
-            <a:lumOff val="0"/>
-            <a:alphaOff val="0"/>
-          </a:schemeClr>
-        </a:solidFill>
-        <a:ln w="12700" cap="flat" cmpd="sng" algn="ctr">
-          <a:solidFill>
-            <a:schemeClr val="lt1">
-              <a:hueOff val="0"/>
-              <a:satOff val="0"/>
-              <a:lumOff val="0"/>
-              <a:alphaOff val="0"/>
-            </a:schemeClr>
-          </a:solidFill>
-          <a:prstDash val="solid"/>
-          <a:miter lim="800000"/>
-        </a:ln>
-        <a:effectLst/>
-      </dsp:spPr>
-      <dsp:style>
-        <a:lnRef idx="2">
-          <a:scrgbClr r="0" g="0" b="0"/>
-        </a:lnRef>
-        <a:fillRef idx="1">
-          <a:scrgbClr r="0" g="0" b="0"/>
-        </a:fillRef>
-        <a:effectRef idx="0">
-          <a:scrgbClr r="0" g="0" b="0"/>
-        </a:effectRef>
-        <a:fontRef idx="minor">
-          <a:schemeClr val="lt1"/>
-        </a:fontRef>
-      </dsp:style>
-      <dsp:txBody>
-        <a:bodyPr spcFirstLastPara="0" vert="horz" wrap="square" lIns="165725" tIns="0" rIns="165725" bIns="0" numCol="1" spcCol="1270" anchor="ctr" anchorCtr="0">
-          <a:noAutofit/>
-        </a:bodyPr>
-        <a:lstStyle/>
-        <a:p>
-          <a:pPr marL="0" lvl="0" indent="0" algn="l" defTabSz="800100">
-            <a:lnSpc>
-              <a:spcPct val="90000"/>
-            </a:lnSpc>
-            <a:spcBef>
-              <a:spcPct val="0"/>
-            </a:spcBef>
-            <a:spcAft>
-              <a:spcPct val="35000"/>
-            </a:spcAft>
-            <a:buNone/>
-          </a:pPr>
-          <a:r>
-            <a:rPr lang="en-US" sz="1800" kern="1200"/>
-            <a:t>Many other models exist</a:t>
-          </a:r>
-        </a:p>
-      </dsp:txBody>
-      <dsp:txXfrm>
-        <a:off x="339121" y="110952"/>
-        <a:ext cx="4332670" cy="479482"/>
-      </dsp:txXfrm>
-    </dsp:sp>
-    <dsp:sp modelId="{8BD60244-BD09-48B5-A6BD-A5920B49269F}">
-      <dsp:nvSpPr>
-        <dsp:cNvPr id="0" name=""/>
-        <dsp:cNvSpPr/>
-      </dsp:nvSpPr>
-      <dsp:spPr>
-        <a:xfrm>
-          <a:off x="0" y="2244474"/>
-          <a:ext cx="6263640" cy="3175200"/>
-        </a:xfrm>
-        <a:prstGeom prst="rect">
-          <a:avLst/>
-        </a:prstGeom>
-        <a:solidFill>
-          <a:schemeClr val="lt1">
-            <a:alpha val="90000"/>
-            <a:hueOff val="0"/>
-            <a:satOff val="0"/>
-            <a:lumOff val="0"/>
-            <a:alphaOff val="0"/>
-          </a:schemeClr>
-        </a:solidFill>
-        <a:ln w="12700" cap="flat" cmpd="sng" algn="ctr">
-          <a:solidFill>
-            <a:schemeClr val="accent5">
-              <a:hueOff val="-12162821"/>
-              <a:satOff val="-296"/>
-              <a:lumOff val="-10393"/>
-              <a:alphaOff val="0"/>
-            </a:schemeClr>
-          </a:solidFill>
-          <a:prstDash val="solid"/>
-          <a:miter lim="800000"/>
-        </a:ln>
-        <a:effectLst/>
-      </dsp:spPr>
-      <dsp:style>
-        <a:lnRef idx="2">
-          <a:scrgbClr r="0" g="0" b="0"/>
-        </a:lnRef>
-        <a:fillRef idx="1">
-          <a:scrgbClr r="0" g="0" b="0"/>
-        </a:fillRef>
-        <a:effectRef idx="0">
-          <a:scrgbClr r="0" g="0" b="0"/>
-        </a:effectRef>
-        <a:fontRef idx="minor"/>
-      </dsp:style>
-      <dsp:txBody>
-        <a:bodyPr spcFirstLastPara="0" vert="horz" wrap="square" lIns="486128" tIns="374904" rIns="486128" bIns="128016" numCol="1" spcCol="1270" anchor="t" anchorCtr="0">
-          <a:noAutofit/>
-        </a:bodyPr>
-        <a:lstStyle/>
-        <a:p>
-          <a:pPr marL="171450" lvl="1" indent="-171450" algn="l" defTabSz="800100">
-            <a:lnSpc>
-              <a:spcPct val="90000"/>
-            </a:lnSpc>
-            <a:spcBef>
-              <a:spcPct val="0"/>
-            </a:spcBef>
-            <a:spcAft>
-              <a:spcPct val="15000"/>
-            </a:spcAft>
-            <a:buChar char="•"/>
-          </a:pPr>
-          <a:r>
-            <a:rPr lang="en-US" sz="1800" b="1" kern="1200" dirty="0"/>
-            <a:t>Regularization: </a:t>
-          </a:r>
-          <a:r>
-            <a:rPr lang="en-US" sz="1800" kern="1200" dirty="0"/>
-            <a:t>Enforce simplicity and reduce overfitting by using a penalty for complexity.</a:t>
-          </a:r>
-        </a:p>
-        <a:p>
-          <a:pPr marL="171450" lvl="1" indent="-171450" algn="l" defTabSz="800100">
-            <a:lnSpc>
-              <a:spcPct val="90000"/>
-            </a:lnSpc>
-            <a:spcBef>
-              <a:spcPct val="0"/>
-            </a:spcBef>
-            <a:spcAft>
-              <a:spcPct val="15000"/>
-            </a:spcAft>
-            <a:buChar char="•"/>
-          </a:pPr>
-          <a:r>
-            <a:rPr lang="en-US" sz="1800" b="1" kern="1200" dirty="0"/>
-            <a:t>Kernel trick: </a:t>
-          </a:r>
-          <a:r>
-            <a:rPr lang="en-US" sz="1800" kern="1200" dirty="0"/>
-            <a:t>Lets a linear classifier learn non-linear decision boundaries.</a:t>
-          </a:r>
-        </a:p>
-        <a:p>
-          <a:pPr marL="171450" lvl="1" indent="-171450" algn="l" defTabSz="800100">
-            <a:lnSpc>
-              <a:spcPct val="90000"/>
-            </a:lnSpc>
-            <a:spcBef>
-              <a:spcPct val="0"/>
-            </a:spcBef>
-            <a:spcAft>
-              <a:spcPct val="15000"/>
-            </a:spcAft>
-            <a:buChar char="•"/>
-          </a:pPr>
-          <a:r>
-            <a:rPr lang="en-US" sz="1800" b="1" kern="1200" dirty="0"/>
-            <a:t>Ensemble Learning: </a:t>
-          </a:r>
-          <a:r>
-            <a:rPr lang="en-US" sz="1800" kern="1200" dirty="0"/>
-            <a:t>Use many models and combine the results (e.g., random forest, boosting).</a:t>
-          </a:r>
-        </a:p>
-        <a:p>
-          <a:pPr marL="171450" lvl="1" indent="-171450" algn="l" defTabSz="800100">
-            <a:lnSpc>
-              <a:spcPct val="90000"/>
-            </a:lnSpc>
-            <a:spcBef>
-              <a:spcPct val="0"/>
-            </a:spcBef>
-            <a:spcAft>
-              <a:spcPct val="15000"/>
-            </a:spcAft>
-            <a:buChar char="•"/>
-          </a:pPr>
-          <a:r>
-            <a:rPr lang="en-US" sz="1800" b="1" kern="1200" dirty="0"/>
-            <a:t>Embedding and Dimensionality Reduction: </a:t>
-          </a:r>
-          <a:r>
-            <a:rPr lang="en-US" sz="1800" kern="1200" dirty="0"/>
-            <a:t>Learn how to represent data in a simpler way. E.g., principal components analysis (PCA), variational autoencoders, text embeddings.</a:t>
-          </a:r>
-        </a:p>
-      </dsp:txBody>
-      <dsp:txXfrm>
-        <a:off x="0" y="2244474"/>
-        <a:ext cx="6263640" cy="3175200"/>
-      </dsp:txXfrm>
-    </dsp:sp>
-    <dsp:sp modelId="{D2714134-93F0-48C2-9EAF-C80D0AD218DE}">
-      <dsp:nvSpPr>
-        <dsp:cNvPr id="0" name=""/>
-        <dsp:cNvSpPr/>
-      </dsp:nvSpPr>
-      <dsp:spPr>
-        <a:xfrm>
-          <a:off x="313182" y="1978794"/>
-          <a:ext cx="4384548" cy="531360"/>
-        </a:xfrm>
-        <a:prstGeom prst="roundRect">
-          <a:avLst/>
-        </a:prstGeom>
-        <a:solidFill>
-          <a:schemeClr val="accent5">
-            <a:hueOff val="-12162821"/>
-            <a:satOff val="-296"/>
-            <a:lumOff val="-10393"/>
-            <a:alphaOff val="0"/>
-          </a:schemeClr>
-        </a:solidFill>
-        <a:ln w="12700" cap="flat" cmpd="sng" algn="ctr">
-          <a:solidFill>
-            <a:schemeClr val="lt1">
-              <a:hueOff val="0"/>
-              <a:satOff val="0"/>
-              <a:lumOff val="0"/>
-              <a:alphaOff val="0"/>
-            </a:schemeClr>
-          </a:solidFill>
-          <a:prstDash val="solid"/>
-          <a:miter lim="800000"/>
-        </a:ln>
-        <a:effectLst/>
-      </dsp:spPr>
-      <dsp:style>
-        <a:lnRef idx="2">
-          <a:scrgbClr r="0" g="0" b="0"/>
-        </a:lnRef>
-        <a:fillRef idx="1">
-          <a:scrgbClr r="0" g="0" b="0"/>
-        </a:fillRef>
-        <a:effectRef idx="0">
-          <a:scrgbClr r="0" g="0" b="0"/>
-        </a:effectRef>
-        <a:fontRef idx="minor">
-          <a:schemeClr val="lt1"/>
-        </a:fontRef>
-      </dsp:style>
-      <dsp:txBody>
-        <a:bodyPr spcFirstLastPara="0" vert="horz" wrap="square" lIns="165725" tIns="0" rIns="165725" bIns="0" numCol="1" spcCol="1270" anchor="ctr" anchorCtr="0">
-          <a:noAutofit/>
-        </a:bodyPr>
-        <a:lstStyle/>
-        <a:p>
-          <a:pPr marL="0" lvl="0" indent="0" algn="l" defTabSz="800100">
-            <a:lnSpc>
-              <a:spcPct val="90000"/>
-            </a:lnSpc>
-            <a:spcBef>
-              <a:spcPct val="0"/>
-            </a:spcBef>
-            <a:spcAft>
-              <a:spcPct val="35000"/>
-            </a:spcAft>
-            <a:buNone/>
-          </a:pPr>
-          <a:r>
-            <a:rPr lang="en-US" sz="1800" kern="1200"/>
-            <a:t>Often used methods</a:t>
-          </a:r>
-        </a:p>
-      </dsp:txBody>
-      <dsp:txXfrm>
-        <a:off x="339121" y="2004733"/>
-        <a:ext cx="4332670" cy="479482"/>
-      </dsp:txXfrm>
-    </dsp:sp>
-  </dsp:spTree>
-</dsp:drawing>
-</file>
-
 <file path=ppt/diagrams/layout1.xml><?xml version="1.0" encoding="utf-8"?>
 <dgm:layoutDef xmlns:dgm="http://schemas.openxmlformats.org/drawingml/2006/diagram" xmlns:a="http://schemas.openxmlformats.org/drawingml/2006/main" uniqueId="urn:microsoft.com/office/officeart/2005/8/layout/hProcess9">
   <dgm:title val=""/>
@@ -8787,1266 +7184,7 @@
 </dgm:layoutDef>
 </file>
 
-<file path=ppt/diagrams/layout2.xml><?xml version="1.0" encoding="utf-8"?>
-<dgm:layoutDef xmlns:dgm="http://schemas.openxmlformats.org/drawingml/2006/diagram" xmlns:a="http://schemas.openxmlformats.org/drawingml/2006/main" uniqueId="urn:microsoft.com/office/officeart/2005/8/layout/list1">
-  <dgm:title val=""/>
-  <dgm:desc val=""/>
-  <dgm:catLst>
-    <dgm:cat type="list" pri="4000"/>
-  </dgm:catLst>
-  <dgm:sampData>
-    <dgm:dataModel>
-      <dgm:ptLst>
-        <dgm:pt modelId="0" type="doc"/>
-        <dgm:pt modelId="1">
-          <dgm:prSet phldr="1"/>
-        </dgm:pt>
-        <dgm:pt modelId="2">
-          <dgm:prSet phldr="1"/>
-        </dgm:pt>
-        <dgm:pt modelId="3">
-          <dgm:prSet phldr="1"/>
-        </dgm:pt>
-      </dgm:ptLst>
-      <dgm:cxnLst>
-        <dgm:cxn modelId="4" srcId="0" destId="1" srcOrd="0" destOrd="0"/>
-        <dgm:cxn modelId="5" srcId="0" destId="2" srcOrd="1" destOrd="0"/>
-        <dgm:cxn modelId="6" srcId="0" destId="3" srcOrd="2" destOrd="0"/>
-      </dgm:cxnLst>
-      <dgm:bg/>
-      <dgm:whole/>
-    </dgm:dataModel>
-  </dgm:sampData>
-  <dgm:styleData>
-    <dgm:dataModel>
-      <dgm:ptLst>
-        <dgm:pt modelId="0" type="doc"/>
-        <dgm:pt modelId="1"/>
-        <dgm:pt modelId="2"/>
-      </dgm:ptLst>
-      <dgm:cxnLst>
-        <dgm:cxn modelId="4" srcId="0" destId="1" srcOrd="0" destOrd="0"/>
-        <dgm:cxn modelId="5" srcId="0" destId="2" srcOrd="1" destOrd="0"/>
-      </dgm:cxnLst>
-      <dgm:bg/>
-      <dgm:whole/>
-    </dgm:dataModel>
-  </dgm:styleData>
-  <dgm:clrData>
-    <dgm:dataModel>
-      <dgm:ptLst>
-        <dgm:pt modelId="0" type="doc"/>
-        <dgm:pt modelId="1"/>
-        <dgm:pt modelId="2"/>
-        <dgm:pt modelId="3"/>
-        <dgm:pt modelId="4"/>
-      </dgm:ptLst>
-      <dgm:cxnLst>
-        <dgm:cxn modelId="5" srcId="0" destId="1" srcOrd="0" destOrd="0"/>
-        <dgm:cxn modelId="6" srcId="0" destId="2" srcOrd="1" destOrd="0"/>
-        <dgm:cxn modelId="7" srcId="0" destId="3" srcOrd="2" destOrd="0"/>
-        <dgm:cxn modelId="8" srcId="0" destId="4" srcOrd="3" destOrd="0"/>
-      </dgm:cxnLst>
-      <dgm:bg/>
-      <dgm:whole/>
-    </dgm:dataModel>
-  </dgm:clrData>
-  <dgm:layoutNode name="linear">
-    <dgm:varLst>
-      <dgm:dir/>
-      <dgm:animLvl val="lvl"/>
-      <dgm:resizeHandles val="exact"/>
-    </dgm:varLst>
-    <dgm:choose name="Name0">
-      <dgm:if name="Name1" func="var" arg="dir" op="equ" val="norm">
-        <dgm:alg type="lin">
-          <dgm:param type="linDir" val="fromT"/>
-          <dgm:param type="vertAlign" val="mid"/>
-          <dgm:param type="horzAlign" val="l"/>
-          <dgm:param type="nodeHorzAlign" val="l"/>
-        </dgm:alg>
-      </dgm:if>
-      <dgm:else name="Name2">
-        <dgm:alg type="lin">
-          <dgm:param type="linDir" val="fromT"/>
-          <dgm:param type="vertAlign" val="mid"/>
-          <dgm:param type="horzAlign" val="r"/>
-          <dgm:param type="nodeHorzAlign" val="r"/>
-        </dgm:alg>
-      </dgm:else>
-    </dgm:choose>
-    <dgm:shape xmlns:r="http://schemas.openxmlformats.org/officeDocument/2006/relationships" r:blip="">
-      <dgm:adjLst/>
-    </dgm:shape>
-    <dgm:presOf/>
-    <dgm:constrLst>
-      <dgm:constr type="w" for="ch" forName="parentLin" refType="w"/>
-      <dgm:constr type="h" for="ch" forName="parentLin" val="INF"/>
-      <dgm:constr type="w" for="des" forName="parentLeftMargin" refType="w" fact="0.05"/>
-      <dgm:constr type="w" for="des" forName="parentText" refType="w" fact="0.7"/>
-      <dgm:constr type="h" for="des" forName="parentText" refType="primFontSz" refFor="des" refForName="parentText" fact="0.82"/>
-      <dgm:constr type="h" for="ch" forName="negativeSpace" refType="primFontSz" refFor="des" refForName="parentText" fact="-0.41"/>
-      <dgm:constr type="h" for="ch" forName="negativeSpace" refType="h" refFor="des" refForName="parentText" op="lte" fact="-0.82"/>
-      <dgm:constr type="h" for="ch" forName="negativeSpace" refType="h" refFor="des" refForName="parentText" op="gte" fact="-0.82"/>
-      <dgm:constr type="w" for="ch" forName="childText" refType="w"/>
-      <dgm:constr type="h" for="ch" forName="childText" refType="primFontSz" refFor="des" refForName="parentText" fact="0.7"/>
-      <dgm:constr type="primFontSz" for="des" forName="parentText" val="65"/>
-      <dgm:constr type="primFontSz" for="ch" forName="childText" refType="primFontSz" refFor="des" refForName="parentText"/>
-      <dgm:constr type="tMarg" for="ch" forName="childText" refType="primFontSz" refFor="des" refForName="parentText" fact="1.64"/>
-      <dgm:constr type="tMarg" for="ch" forName="childText" refType="h" refFor="des" refForName="parentText" op="lte" fact="3.28"/>
-      <dgm:constr type="tMarg" for="ch" forName="childText" refType="h" refFor="des" refForName="parentText" op="gte" fact="3.28"/>
-      <dgm:constr type="lMarg" for="ch" forName="childText" refType="w" fact="0.22"/>
-      <dgm:constr type="rMarg" for="ch" forName="childText" refType="lMarg" refFor="ch" refForName="childText"/>
-      <dgm:constr type="lMarg" for="des" forName="parentText" refType="w" fact="0.075"/>
-      <dgm:constr type="rMarg" for="des" forName="parentText" refType="lMarg" refFor="des" refForName="parentText"/>
-      <dgm:constr type="h" for="ch" forName="spaceBetweenRectangles" refType="primFontSz" refFor="des" refForName="parentText" fact="0.15"/>
-    </dgm:constrLst>
-    <dgm:ruleLst>
-      <dgm:rule type="primFontSz" for="des" forName="parentText" val="5" fact="NaN" max="NaN"/>
-    </dgm:ruleLst>
-    <dgm:forEach name="Name3" axis="ch" ptType="node">
-      <dgm:layoutNode name="parentLin">
-        <dgm:choose name="Name4">
-          <dgm:if name="Name5" func="var" arg="dir" op="equ" val="norm">
-            <dgm:alg type="lin">
-              <dgm:param type="linDir" val="fromL"/>
-              <dgm:param type="horzAlign" val="l"/>
-              <dgm:param type="nodeHorzAlign" val="l"/>
-            </dgm:alg>
-          </dgm:if>
-          <dgm:else name="Name6">
-            <dgm:alg type="lin">
-              <dgm:param type="linDir" val="fromR"/>
-              <dgm:param type="horzAlign" val="r"/>
-              <dgm:param type="nodeHorzAlign" val="r"/>
-            </dgm:alg>
-          </dgm:else>
-        </dgm:choose>
-        <dgm:shape xmlns:r="http://schemas.openxmlformats.org/officeDocument/2006/relationships" r:blip="">
-          <dgm:adjLst/>
-        </dgm:shape>
-        <dgm:presOf/>
-        <dgm:constrLst/>
-        <dgm:ruleLst/>
-        <dgm:layoutNode name="parentLeftMargin">
-          <dgm:alg type="sp"/>
-          <dgm:shape xmlns:r="http://schemas.openxmlformats.org/officeDocument/2006/relationships" type="rect" r:blip="" hideGeom="1">
-            <dgm:adjLst/>
-          </dgm:shape>
-          <dgm:presOf axis="self"/>
-          <dgm:constrLst>
-            <dgm:constr type="h"/>
-          </dgm:constrLst>
-          <dgm:ruleLst/>
-        </dgm:layoutNode>
-        <dgm:layoutNode name="parentText" styleLbl="node1">
-          <dgm:varLst>
-            <dgm:chMax val="0"/>
-            <dgm:bulletEnabled val="1"/>
-          </dgm:varLst>
-          <dgm:choose name="Name7">
-            <dgm:if name="Name8" func="var" arg="dir" op="equ" val="norm">
-              <dgm:alg type="tx">
-                <dgm:param type="parTxLTRAlign" val="l"/>
-                <dgm:param type="parTxRTLAlign" val="l"/>
-              </dgm:alg>
-            </dgm:if>
-            <dgm:else name="Name9">
-              <dgm:alg type="tx">
-                <dgm:param type="parTxLTRAlign" val="r"/>
-                <dgm:param type="parTxRTLAlign" val="r"/>
-              </dgm:alg>
-            </dgm:else>
-          </dgm:choose>
-          <dgm:shape xmlns:r="http://schemas.openxmlformats.org/officeDocument/2006/relationships" type="roundRect" r:blip="">
-            <dgm:adjLst/>
-          </dgm:shape>
-          <dgm:presOf axis="self" ptType="node"/>
-          <dgm:constrLst>
-            <dgm:constr type="tMarg"/>
-            <dgm:constr type="bMarg"/>
-          </dgm:constrLst>
-          <dgm:ruleLst/>
-        </dgm:layoutNode>
-      </dgm:layoutNode>
-      <dgm:layoutNode name="negativeSpace">
-        <dgm:alg type="sp"/>
-        <dgm:shape xmlns:r="http://schemas.openxmlformats.org/officeDocument/2006/relationships" r:blip="">
-          <dgm:adjLst/>
-        </dgm:shape>
-        <dgm:presOf/>
-        <dgm:constrLst/>
-        <dgm:ruleLst/>
-      </dgm:layoutNode>
-      <dgm:layoutNode name="childText" styleLbl="conFgAcc1">
-        <dgm:varLst>
-          <dgm:bulletEnabled val="1"/>
-        </dgm:varLst>
-        <dgm:alg type="tx">
-          <dgm:param type="stBulletLvl" val="1"/>
-        </dgm:alg>
-        <dgm:shape xmlns:r="http://schemas.openxmlformats.org/officeDocument/2006/relationships" type="rect" r:blip="" zOrderOff="-2">
-          <dgm:adjLst/>
-        </dgm:shape>
-        <dgm:presOf axis="des" ptType="node"/>
-        <dgm:constrLst>
-          <dgm:constr type="secFontSz" refType="primFontSz"/>
-        </dgm:constrLst>
-        <dgm:ruleLst>
-          <dgm:rule type="h" val="INF" fact="NaN" max="NaN"/>
-        </dgm:ruleLst>
-      </dgm:layoutNode>
-      <dgm:forEach name="Name10" axis="followSib" ptType="sibTrans" cnt="1">
-        <dgm:layoutNode name="spaceBetweenRectangles">
-          <dgm:alg type="sp"/>
-          <dgm:shape xmlns:r="http://schemas.openxmlformats.org/officeDocument/2006/relationships" r:blip="">
-            <dgm:adjLst/>
-          </dgm:shape>
-          <dgm:presOf/>
-          <dgm:constrLst/>
-          <dgm:ruleLst/>
-        </dgm:layoutNode>
-      </dgm:forEach>
-    </dgm:forEach>
-  </dgm:layoutNode>
-</dgm:layoutDef>
-</file>
-
 <file path=ppt/diagrams/quickStyle1.xml><?xml version="1.0" encoding="utf-8"?>
-<dgm:styleDef xmlns:dgm="http://schemas.openxmlformats.org/drawingml/2006/diagram" xmlns:a="http://schemas.openxmlformats.org/drawingml/2006/main" uniqueId="urn:microsoft.com/office/officeart/2005/8/quickstyle/simple1">
-  <dgm:title val=""/>
-  <dgm:desc val=""/>
-  <dgm:catLst>
-    <dgm:cat type="simple" pri="10100"/>
-  </dgm:catLst>
-  <dgm:scene3d>
-    <a:camera prst="orthographicFront"/>
-    <a:lightRig rig="threePt" dir="t"/>
-  </dgm:scene3d>
-  <dgm:styleLbl name="node0">
-    <dgm:scene3d>
-      <a:camera prst="orthographicFront"/>
-      <a:lightRig rig="threePt" dir="t"/>
-    </dgm:scene3d>
-    <dgm:sp3d/>
-    <dgm:txPr/>
-    <dgm:style>
-      <a:lnRef idx="2">
-        <a:scrgbClr r="0" g="0" b="0"/>
-      </a:lnRef>
-      <a:fillRef idx="1">
-        <a:scrgbClr r="0" g="0" b="0"/>
-      </a:fillRef>
-      <a:effectRef idx="0">
-        <a:scrgbClr r="0" g="0" b="0"/>
-      </a:effectRef>
-      <a:fontRef idx="minor">
-        <a:schemeClr val="lt1"/>
-      </a:fontRef>
-    </dgm:style>
-  </dgm:styleLbl>
-  <dgm:styleLbl name="lnNode1">
-    <dgm:scene3d>
-      <a:camera prst="orthographicFront"/>
-      <a:lightRig rig="threePt" dir="t"/>
-    </dgm:scene3d>
-    <dgm:sp3d/>
-    <dgm:txPr/>
-    <dgm:style>
-      <a:lnRef idx="2">
-        <a:scrgbClr r="0" g="0" b="0"/>
-      </a:lnRef>
-      <a:fillRef idx="1">
-        <a:scrgbClr r="0" g="0" b="0"/>
-      </a:fillRef>
-      <a:effectRef idx="0">
-        <a:scrgbClr r="0" g="0" b="0"/>
-      </a:effectRef>
-      <a:fontRef idx="minor">
-        <a:schemeClr val="lt1"/>
-      </a:fontRef>
-    </dgm:style>
-  </dgm:styleLbl>
-  <dgm:styleLbl name="vennNode1">
-    <dgm:scene3d>
-      <a:camera prst="orthographicFront"/>
-      <a:lightRig rig="threePt" dir="t"/>
-    </dgm:scene3d>
-    <dgm:sp3d/>
-    <dgm:txPr/>
-    <dgm:style>
-      <a:lnRef idx="2">
-        <a:scrgbClr r="0" g="0" b="0"/>
-      </a:lnRef>
-      <a:fillRef idx="1">
-        <a:scrgbClr r="0" g="0" b="0"/>
-      </a:fillRef>
-      <a:effectRef idx="0">
-        <a:scrgbClr r="0" g="0" b="0"/>
-      </a:effectRef>
-      <a:fontRef idx="minor">
-        <a:schemeClr val="tx1"/>
-      </a:fontRef>
-    </dgm:style>
-  </dgm:styleLbl>
-  <dgm:styleLbl name="alignNode1">
-    <dgm:scene3d>
-      <a:camera prst="orthographicFront"/>
-      <a:lightRig rig="threePt" dir="t"/>
-    </dgm:scene3d>
-    <dgm:sp3d/>
-    <dgm:txPr/>
-    <dgm:style>
-      <a:lnRef idx="2">
-        <a:scrgbClr r="0" g="0" b="0"/>
-      </a:lnRef>
-      <a:fillRef idx="1">
-        <a:scrgbClr r="0" g="0" b="0"/>
-      </a:fillRef>
-      <a:effectRef idx="0">
-        <a:scrgbClr r="0" g="0" b="0"/>
-      </a:effectRef>
-      <a:fontRef idx="minor">
-        <a:schemeClr val="lt1"/>
-      </a:fontRef>
-    </dgm:style>
-  </dgm:styleLbl>
-  <dgm:styleLbl name="node1">
-    <dgm:scene3d>
-      <a:camera prst="orthographicFront"/>
-      <a:lightRig rig="threePt" dir="t"/>
-    </dgm:scene3d>
-    <dgm:sp3d/>
-    <dgm:txPr/>
-    <dgm:style>
-      <a:lnRef idx="2">
-        <a:scrgbClr r="0" g="0" b="0"/>
-      </a:lnRef>
-      <a:fillRef idx="1">
-        <a:scrgbClr r="0" g="0" b="0"/>
-      </a:fillRef>
-      <a:effectRef idx="0">
-        <a:scrgbClr r="0" g="0" b="0"/>
-      </a:effectRef>
-      <a:fontRef idx="minor">
-        <a:schemeClr val="lt1"/>
-      </a:fontRef>
-    </dgm:style>
-  </dgm:styleLbl>
-  <dgm:styleLbl name="node2">
-    <dgm:scene3d>
-      <a:camera prst="orthographicFront"/>
-      <a:lightRig rig="threePt" dir="t"/>
-    </dgm:scene3d>
-    <dgm:sp3d/>
-    <dgm:txPr/>
-    <dgm:style>
-      <a:lnRef idx="2">
-        <a:scrgbClr r="0" g="0" b="0"/>
-      </a:lnRef>
-      <a:fillRef idx="1">
-        <a:scrgbClr r="0" g="0" b="0"/>
-      </a:fillRef>
-      <a:effectRef idx="0">
-        <a:scrgbClr r="0" g="0" b="0"/>
-      </a:effectRef>
-      <a:fontRef idx="minor">
-        <a:schemeClr val="lt1"/>
-      </a:fontRef>
-    </dgm:style>
-  </dgm:styleLbl>
-  <dgm:styleLbl name="node3">
-    <dgm:scene3d>
-      <a:camera prst="orthographicFront"/>
-      <a:lightRig rig="threePt" dir="t"/>
-    </dgm:scene3d>
-    <dgm:sp3d/>
-    <dgm:txPr/>
-    <dgm:style>
-      <a:lnRef idx="2">
-        <a:scrgbClr r="0" g="0" b="0"/>
-      </a:lnRef>
-      <a:fillRef idx="1">
-        <a:scrgbClr r="0" g="0" b="0"/>
-      </a:fillRef>
-      <a:effectRef idx="0">
-        <a:scrgbClr r="0" g="0" b="0"/>
-      </a:effectRef>
-      <a:fontRef idx="minor">
-        <a:schemeClr val="lt1"/>
-      </a:fontRef>
-    </dgm:style>
-  </dgm:styleLbl>
-  <dgm:styleLbl name="node4">
-    <dgm:scene3d>
-      <a:camera prst="orthographicFront"/>
-      <a:lightRig rig="threePt" dir="t"/>
-    </dgm:scene3d>
-    <dgm:sp3d/>
-    <dgm:txPr/>
-    <dgm:style>
-      <a:lnRef idx="2">
-        <a:scrgbClr r="0" g="0" b="0"/>
-      </a:lnRef>
-      <a:fillRef idx="1">
-        <a:scrgbClr r="0" g="0" b="0"/>
-      </a:fillRef>
-      <a:effectRef idx="0">
-        <a:scrgbClr r="0" g="0" b="0"/>
-      </a:effectRef>
-      <a:fontRef idx="minor">
-        <a:schemeClr val="lt1"/>
-      </a:fontRef>
-    </dgm:style>
-  </dgm:styleLbl>
-  <dgm:styleLbl name="fgImgPlace1">
-    <dgm:scene3d>
-      <a:camera prst="orthographicFront"/>
-      <a:lightRig rig="threePt" dir="t"/>
-    </dgm:scene3d>
-    <dgm:sp3d/>
-    <dgm:txPr/>
-    <dgm:style>
-      <a:lnRef idx="2">
-        <a:scrgbClr r="0" g="0" b="0"/>
-      </a:lnRef>
-      <a:fillRef idx="1">
-        <a:scrgbClr r="0" g="0" b="0"/>
-      </a:fillRef>
-      <a:effectRef idx="0">
-        <a:scrgbClr r="0" g="0" b="0"/>
-      </a:effectRef>
-      <a:fontRef idx="minor"/>
-    </dgm:style>
-  </dgm:styleLbl>
-  <dgm:styleLbl name="alignImgPlace1">
-    <dgm:scene3d>
-      <a:camera prst="orthographicFront"/>
-      <a:lightRig rig="threePt" dir="t"/>
-    </dgm:scene3d>
-    <dgm:sp3d/>
-    <dgm:txPr/>
-    <dgm:style>
-      <a:lnRef idx="2">
-        <a:scrgbClr r="0" g="0" b="0"/>
-      </a:lnRef>
-      <a:fillRef idx="1">
-        <a:scrgbClr r="0" g="0" b="0"/>
-      </a:fillRef>
-      <a:effectRef idx="0">
-        <a:scrgbClr r="0" g="0" b="0"/>
-      </a:effectRef>
-      <a:fontRef idx="minor"/>
-    </dgm:style>
-  </dgm:styleLbl>
-  <dgm:styleLbl name="bgImgPlace1">
-    <dgm:scene3d>
-      <a:camera prst="orthographicFront"/>
-      <a:lightRig rig="threePt" dir="t"/>
-    </dgm:scene3d>
-    <dgm:sp3d/>
-    <dgm:txPr/>
-    <dgm:style>
-      <a:lnRef idx="2">
-        <a:scrgbClr r="0" g="0" b="0"/>
-      </a:lnRef>
-      <a:fillRef idx="1">
-        <a:scrgbClr r="0" g="0" b="0"/>
-      </a:fillRef>
-      <a:effectRef idx="0">
-        <a:scrgbClr r="0" g="0" b="0"/>
-      </a:effectRef>
-      <a:fontRef idx="minor"/>
-    </dgm:style>
-  </dgm:styleLbl>
-  <dgm:styleLbl name="sibTrans2D1">
-    <dgm:scene3d>
-      <a:camera prst="orthographicFront"/>
-      <a:lightRig rig="threePt" dir="t"/>
-    </dgm:scene3d>
-    <dgm:sp3d/>
-    <dgm:txPr/>
-    <dgm:style>
-      <a:lnRef idx="0">
-        <a:scrgbClr r="0" g="0" b="0"/>
-      </a:lnRef>
-      <a:fillRef idx="1">
-        <a:scrgbClr r="0" g="0" b="0"/>
-      </a:fillRef>
-      <a:effectRef idx="0">
-        <a:scrgbClr r="0" g="0" b="0"/>
-      </a:effectRef>
-      <a:fontRef idx="minor">
-        <a:schemeClr val="lt1"/>
-      </a:fontRef>
-    </dgm:style>
-  </dgm:styleLbl>
-  <dgm:styleLbl name="fgSibTrans2D1">
-    <dgm:scene3d>
-      <a:camera prst="orthographicFront"/>
-      <a:lightRig rig="threePt" dir="t"/>
-    </dgm:scene3d>
-    <dgm:sp3d/>
-    <dgm:txPr/>
-    <dgm:style>
-      <a:lnRef idx="0">
-        <a:scrgbClr r="0" g="0" b="0"/>
-      </a:lnRef>
-      <a:fillRef idx="1">
-        <a:scrgbClr r="0" g="0" b="0"/>
-      </a:fillRef>
-      <a:effectRef idx="0">
-        <a:scrgbClr r="0" g="0" b="0"/>
-      </a:effectRef>
-      <a:fontRef idx="minor">
-        <a:schemeClr val="lt1"/>
-      </a:fontRef>
-    </dgm:style>
-  </dgm:styleLbl>
-  <dgm:styleLbl name="bgSibTrans2D1">
-    <dgm:scene3d>
-      <a:camera prst="orthographicFront"/>
-      <a:lightRig rig="threePt" dir="t"/>
-    </dgm:scene3d>
-    <dgm:sp3d/>
-    <dgm:txPr/>
-    <dgm:style>
-      <a:lnRef idx="0">
-        <a:scrgbClr r="0" g="0" b="0"/>
-      </a:lnRef>
-      <a:fillRef idx="1">
-        <a:scrgbClr r="0" g="0" b="0"/>
-      </a:fillRef>
-      <a:effectRef idx="0">
-        <a:scrgbClr r="0" g="0" b="0"/>
-      </a:effectRef>
-      <a:fontRef idx="minor">
-        <a:schemeClr val="lt1"/>
-      </a:fontRef>
-    </dgm:style>
-  </dgm:styleLbl>
-  <dgm:styleLbl name="sibTrans1D1">
-    <dgm:scene3d>
-      <a:camera prst="orthographicFront"/>
-      <a:lightRig rig="threePt" dir="t"/>
-    </dgm:scene3d>
-    <dgm:sp3d/>
-    <dgm:txPr/>
-    <dgm:style>
-      <a:lnRef idx="1">
-        <a:scrgbClr r="0" g="0" b="0"/>
-      </a:lnRef>
-      <a:fillRef idx="0">
-        <a:scrgbClr r="0" g="0" b="0"/>
-      </a:fillRef>
-      <a:effectRef idx="0">
-        <a:scrgbClr r="0" g="0" b="0"/>
-      </a:effectRef>
-      <a:fontRef idx="minor"/>
-    </dgm:style>
-  </dgm:styleLbl>
-  <dgm:styleLbl name="callout">
-    <dgm:scene3d>
-      <a:camera prst="orthographicFront"/>
-      <a:lightRig rig="threePt" dir="t"/>
-    </dgm:scene3d>
-    <dgm:sp3d/>
-    <dgm:txPr/>
-    <dgm:style>
-      <a:lnRef idx="2">
-        <a:scrgbClr r="0" g="0" b="0"/>
-      </a:lnRef>
-      <a:fillRef idx="1">
-        <a:scrgbClr r="0" g="0" b="0"/>
-      </a:fillRef>
-      <a:effectRef idx="0">
-        <a:scrgbClr r="0" g="0" b="0"/>
-      </a:effectRef>
-      <a:fontRef idx="minor"/>
-    </dgm:style>
-  </dgm:styleLbl>
-  <dgm:styleLbl name="asst0">
-    <dgm:scene3d>
-      <a:camera prst="orthographicFront"/>
-      <a:lightRig rig="threePt" dir="t"/>
-    </dgm:scene3d>
-    <dgm:sp3d/>
-    <dgm:txPr/>
-    <dgm:style>
-      <a:lnRef idx="2">
-        <a:scrgbClr r="0" g="0" b="0"/>
-      </a:lnRef>
-      <a:fillRef idx="1">
-        <a:scrgbClr r="0" g="0" b="0"/>
-      </a:fillRef>
-      <a:effectRef idx="0">
-        <a:scrgbClr r="0" g="0" b="0"/>
-      </a:effectRef>
-      <a:fontRef idx="minor">
-        <a:schemeClr val="lt1"/>
-      </a:fontRef>
-    </dgm:style>
-  </dgm:styleLbl>
-  <dgm:styleLbl name="asst1">
-    <dgm:scene3d>
-      <a:camera prst="orthographicFront"/>
-      <a:lightRig rig="threePt" dir="t"/>
-    </dgm:scene3d>
-    <dgm:sp3d/>
-    <dgm:txPr/>
-    <dgm:style>
-      <a:lnRef idx="2">
-        <a:scrgbClr r="0" g="0" b="0"/>
-      </a:lnRef>
-      <a:fillRef idx="1">
-        <a:scrgbClr r="0" g="0" b="0"/>
-      </a:fillRef>
-      <a:effectRef idx="0">
-        <a:scrgbClr r="0" g="0" b="0"/>
-      </a:effectRef>
-      <a:fontRef idx="minor">
-        <a:schemeClr val="lt1"/>
-      </a:fontRef>
-    </dgm:style>
-  </dgm:styleLbl>
-  <dgm:styleLbl name="asst2">
-    <dgm:scene3d>
-      <a:camera prst="orthographicFront"/>
-      <a:lightRig rig="threePt" dir="t"/>
-    </dgm:scene3d>
-    <dgm:sp3d/>
-    <dgm:txPr/>
-    <dgm:style>
-      <a:lnRef idx="2">
-        <a:scrgbClr r="0" g="0" b="0"/>
-      </a:lnRef>
-      <a:fillRef idx="1">
-        <a:scrgbClr r="0" g="0" b="0"/>
-      </a:fillRef>
-      <a:effectRef idx="0">
-        <a:scrgbClr r="0" g="0" b="0"/>
-      </a:effectRef>
-      <a:fontRef idx="minor">
-        <a:schemeClr val="lt1"/>
-      </a:fontRef>
-    </dgm:style>
-  </dgm:styleLbl>
-  <dgm:styleLbl name="asst3">
-    <dgm:scene3d>
-      <a:camera prst="orthographicFront"/>
-      <a:lightRig rig="threePt" dir="t"/>
-    </dgm:scene3d>
-    <dgm:sp3d/>
-    <dgm:txPr/>
-    <dgm:style>
-      <a:lnRef idx="2">
-        <a:scrgbClr r="0" g="0" b="0"/>
-      </a:lnRef>
-      <a:fillRef idx="1">
-        <a:scrgbClr r="0" g="0" b="0"/>
-      </a:fillRef>
-      <a:effectRef idx="0">
-        <a:scrgbClr r="0" g="0" b="0"/>
-      </a:effectRef>
-      <a:fontRef idx="minor">
-        <a:schemeClr val="lt1"/>
-      </a:fontRef>
-    </dgm:style>
-  </dgm:styleLbl>
-  <dgm:styleLbl name="asst4">
-    <dgm:scene3d>
-      <a:camera prst="orthographicFront"/>
-      <a:lightRig rig="threePt" dir="t"/>
-    </dgm:scene3d>
-    <dgm:sp3d/>
-    <dgm:txPr/>
-    <dgm:style>
-      <a:lnRef idx="2">
-        <a:scrgbClr r="0" g="0" b="0"/>
-      </a:lnRef>
-      <a:fillRef idx="1">
-        <a:scrgbClr r="0" g="0" b="0"/>
-      </a:fillRef>
-      <a:effectRef idx="0">
-        <a:scrgbClr r="0" g="0" b="0"/>
-      </a:effectRef>
-      <a:fontRef idx="minor">
-        <a:schemeClr val="lt1"/>
-      </a:fontRef>
-    </dgm:style>
-  </dgm:styleLbl>
-  <dgm:styleLbl name="parChTrans2D1">
-    <dgm:scene3d>
-      <a:camera prst="orthographicFront"/>
-      <a:lightRig rig="threePt" dir="t"/>
-    </dgm:scene3d>
-    <dgm:sp3d/>
-    <dgm:txPr/>
-    <dgm:style>
-      <a:lnRef idx="2">
-        <a:scrgbClr r="0" g="0" b="0"/>
-      </a:lnRef>
-      <a:fillRef idx="1">
-        <a:scrgbClr r="0" g="0" b="0"/>
-      </a:fillRef>
-      <a:effectRef idx="0">
-        <a:scrgbClr r="0" g="0" b="0"/>
-      </a:effectRef>
-      <a:fontRef idx="minor">
-        <a:schemeClr val="lt1"/>
-      </a:fontRef>
-    </dgm:style>
-  </dgm:styleLbl>
-  <dgm:styleLbl name="parChTrans2D2">
-    <dgm:scene3d>
-      <a:camera prst="orthographicFront"/>
-      <a:lightRig rig="threePt" dir="t"/>
-    </dgm:scene3d>
-    <dgm:sp3d/>
-    <dgm:txPr/>
-    <dgm:style>
-      <a:lnRef idx="2">
-        <a:scrgbClr r="0" g="0" b="0"/>
-      </a:lnRef>
-      <a:fillRef idx="1">
-        <a:scrgbClr r="0" g="0" b="0"/>
-      </a:fillRef>
-      <a:effectRef idx="0">
-        <a:scrgbClr r="0" g="0" b="0"/>
-      </a:effectRef>
-      <a:fontRef idx="minor">
-        <a:schemeClr val="lt1"/>
-      </a:fontRef>
-    </dgm:style>
-  </dgm:styleLbl>
-  <dgm:styleLbl name="parChTrans2D3">
-    <dgm:scene3d>
-      <a:camera prst="orthographicFront"/>
-      <a:lightRig rig="threePt" dir="t"/>
-    </dgm:scene3d>
-    <dgm:sp3d/>
-    <dgm:txPr/>
-    <dgm:style>
-      <a:lnRef idx="2">
-        <a:scrgbClr r="0" g="0" b="0"/>
-      </a:lnRef>
-      <a:fillRef idx="1">
-        <a:scrgbClr r="0" g="0" b="0"/>
-      </a:fillRef>
-      <a:effectRef idx="0">
-        <a:scrgbClr r="0" g="0" b="0"/>
-      </a:effectRef>
-      <a:fontRef idx="minor">
-        <a:schemeClr val="lt1"/>
-      </a:fontRef>
-    </dgm:style>
-  </dgm:styleLbl>
-  <dgm:styleLbl name="parChTrans2D4">
-    <dgm:scene3d>
-      <a:camera prst="orthographicFront"/>
-      <a:lightRig rig="threePt" dir="t"/>
-    </dgm:scene3d>
-    <dgm:sp3d/>
-    <dgm:txPr/>
-    <dgm:style>
-      <a:lnRef idx="2">
-        <a:scrgbClr r="0" g="0" b="0"/>
-      </a:lnRef>
-      <a:fillRef idx="1">
-        <a:scrgbClr r="0" g="0" b="0"/>
-      </a:fillRef>
-      <a:effectRef idx="0">
-        <a:scrgbClr r="0" g="0" b="0"/>
-      </a:effectRef>
-      <a:fontRef idx="minor">
-        <a:schemeClr val="lt1"/>
-      </a:fontRef>
-    </dgm:style>
-  </dgm:styleLbl>
-  <dgm:styleLbl name="parChTrans1D1">
-    <dgm:scene3d>
-      <a:camera prst="orthographicFront"/>
-      <a:lightRig rig="threePt" dir="t"/>
-    </dgm:scene3d>
-    <dgm:sp3d/>
-    <dgm:txPr/>
-    <dgm:style>
-      <a:lnRef idx="2">
-        <a:scrgbClr r="0" g="0" b="0"/>
-      </a:lnRef>
-      <a:fillRef idx="0">
-        <a:scrgbClr r="0" g="0" b="0"/>
-      </a:fillRef>
-      <a:effectRef idx="0">
-        <a:scrgbClr r="0" g="0" b="0"/>
-      </a:effectRef>
-      <a:fontRef idx="minor"/>
-    </dgm:style>
-  </dgm:styleLbl>
-  <dgm:styleLbl name="parChTrans1D2">
-    <dgm:scene3d>
-      <a:camera prst="orthographicFront"/>
-      <a:lightRig rig="threePt" dir="t"/>
-    </dgm:scene3d>
-    <dgm:sp3d/>
-    <dgm:txPr/>
-    <dgm:style>
-      <a:lnRef idx="2">
-        <a:scrgbClr r="0" g="0" b="0"/>
-      </a:lnRef>
-      <a:fillRef idx="0">
-        <a:scrgbClr r="0" g="0" b="0"/>
-      </a:fillRef>
-      <a:effectRef idx="0">
-        <a:scrgbClr r="0" g="0" b="0"/>
-      </a:effectRef>
-      <a:fontRef idx="minor"/>
-    </dgm:style>
-  </dgm:styleLbl>
-  <dgm:styleLbl name="parChTrans1D3">
-    <dgm:scene3d>
-      <a:camera prst="orthographicFront"/>
-      <a:lightRig rig="threePt" dir="t"/>
-    </dgm:scene3d>
-    <dgm:sp3d/>
-    <dgm:txPr/>
-    <dgm:style>
-      <a:lnRef idx="2">
-        <a:scrgbClr r="0" g="0" b="0"/>
-      </a:lnRef>
-      <a:fillRef idx="0">
-        <a:scrgbClr r="0" g="0" b="0"/>
-      </a:fillRef>
-      <a:effectRef idx="0">
-        <a:scrgbClr r="0" g="0" b="0"/>
-      </a:effectRef>
-      <a:fontRef idx="minor"/>
-    </dgm:style>
-  </dgm:styleLbl>
-  <dgm:styleLbl name="parChTrans1D4">
-    <dgm:scene3d>
-      <a:camera prst="orthographicFront"/>
-      <a:lightRig rig="threePt" dir="t"/>
-    </dgm:scene3d>
-    <dgm:sp3d/>
-    <dgm:txPr/>
-    <dgm:style>
-      <a:lnRef idx="2">
-        <a:scrgbClr r="0" g="0" b="0"/>
-      </a:lnRef>
-      <a:fillRef idx="0">
-        <a:scrgbClr r="0" g="0" b="0"/>
-      </a:fillRef>
-      <a:effectRef idx="0">
-        <a:scrgbClr r="0" g="0" b="0"/>
-      </a:effectRef>
-      <a:fontRef idx="minor"/>
-    </dgm:style>
-  </dgm:styleLbl>
-  <dgm:styleLbl name="fgAcc1">
-    <dgm:scene3d>
-      <a:camera prst="orthographicFront"/>
-      <a:lightRig rig="threePt" dir="t"/>
-    </dgm:scene3d>
-    <dgm:sp3d/>
-    <dgm:txPr/>
-    <dgm:style>
-      <a:lnRef idx="2">
-        <a:scrgbClr r="0" g="0" b="0"/>
-      </a:lnRef>
-      <a:fillRef idx="1">
-        <a:scrgbClr r="0" g="0" b="0"/>
-      </a:fillRef>
-      <a:effectRef idx="0">
-        <a:scrgbClr r="0" g="0" b="0"/>
-      </a:effectRef>
-      <a:fontRef idx="minor"/>
-    </dgm:style>
-  </dgm:styleLbl>
-  <dgm:styleLbl name="conFgAcc1">
-    <dgm:scene3d>
-      <a:camera prst="orthographicFront"/>
-      <a:lightRig rig="threePt" dir="t"/>
-    </dgm:scene3d>
-    <dgm:sp3d/>
-    <dgm:txPr/>
-    <dgm:style>
-      <a:lnRef idx="2">
-        <a:scrgbClr r="0" g="0" b="0"/>
-      </a:lnRef>
-      <a:fillRef idx="1">
-        <a:scrgbClr r="0" g="0" b="0"/>
-      </a:fillRef>
-      <a:effectRef idx="0">
-        <a:scrgbClr r="0" g="0" b="0"/>
-      </a:effectRef>
-      <a:fontRef idx="minor"/>
-    </dgm:style>
-  </dgm:styleLbl>
-  <dgm:styleLbl name="alignAcc1">
-    <dgm:scene3d>
-      <a:camera prst="orthographicFront"/>
-      <a:lightRig rig="threePt" dir="t"/>
-    </dgm:scene3d>
-    <dgm:sp3d/>
-    <dgm:txPr/>
-    <dgm:style>
-      <a:lnRef idx="2">
-        <a:scrgbClr r="0" g="0" b="0"/>
-      </a:lnRef>
-      <a:fillRef idx="1">
-        <a:scrgbClr r="0" g="0" b="0"/>
-      </a:fillRef>
-      <a:effectRef idx="0">
-        <a:scrgbClr r="0" g="0" b="0"/>
-      </a:effectRef>
-      <a:fontRef idx="minor"/>
-    </dgm:style>
-  </dgm:styleLbl>
-  <dgm:styleLbl name="trAlignAcc1">
-    <dgm:scene3d>
-      <a:camera prst="orthographicFront"/>
-      <a:lightRig rig="threePt" dir="t"/>
-    </dgm:scene3d>
-    <dgm:sp3d/>
-    <dgm:txPr/>
-    <dgm:style>
-      <a:lnRef idx="1">
-        <a:scrgbClr r="0" g="0" b="0"/>
-      </a:lnRef>
-      <a:fillRef idx="1">
-        <a:scrgbClr r="0" g="0" b="0"/>
-      </a:fillRef>
-      <a:effectRef idx="0">
-        <a:scrgbClr r="0" g="0" b="0"/>
-      </a:effectRef>
-      <a:fontRef idx="minor"/>
-    </dgm:style>
-  </dgm:styleLbl>
-  <dgm:styleLbl name="bgAcc1">
-    <dgm:scene3d>
-      <a:camera prst="orthographicFront"/>
-      <a:lightRig rig="threePt" dir="t"/>
-    </dgm:scene3d>
-    <dgm:sp3d/>
-    <dgm:txPr/>
-    <dgm:style>
-      <a:lnRef idx="2">
-        <a:scrgbClr r="0" g="0" b="0"/>
-      </a:lnRef>
-      <a:fillRef idx="1">
-        <a:scrgbClr r="0" g="0" b="0"/>
-      </a:fillRef>
-      <a:effectRef idx="0">
-        <a:scrgbClr r="0" g="0" b="0"/>
-      </a:effectRef>
-      <a:fontRef idx="minor"/>
-    </dgm:style>
-  </dgm:styleLbl>
-  <dgm:styleLbl name="solidFgAcc1">
-    <dgm:scene3d>
-      <a:camera prst="orthographicFront"/>
-      <a:lightRig rig="threePt" dir="t"/>
-    </dgm:scene3d>
-    <dgm:sp3d/>
-    <dgm:txPr/>
-    <dgm:style>
-      <a:lnRef idx="2">
-        <a:scrgbClr r="0" g="0" b="0"/>
-      </a:lnRef>
-      <a:fillRef idx="1">
-        <a:scrgbClr r="0" g="0" b="0"/>
-      </a:fillRef>
-      <a:effectRef idx="0">
-        <a:scrgbClr r="0" g="0" b="0"/>
-      </a:effectRef>
-      <a:fontRef idx="minor"/>
-    </dgm:style>
-  </dgm:styleLbl>
-  <dgm:styleLbl name="solidAlignAcc1">
-    <dgm:scene3d>
-      <a:camera prst="orthographicFront"/>
-      <a:lightRig rig="threePt" dir="t"/>
-    </dgm:scene3d>
-    <dgm:sp3d/>
-    <dgm:txPr/>
-    <dgm:style>
-      <a:lnRef idx="2">
-        <a:scrgbClr r="0" g="0" b="0"/>
-      </a:lnRef>
-      <a:fillRef idx="1">
-        <a:scrgbClr r="0" g="0" b="0"/>
-      </a:fillRef>
-      <a:effectRef idx="0">
-        <a:scrgbClr r="0" g="0" b="0"/>
-      </a:effectRef>
-      <a:fontRef idx="minor"/>
-    </dgm:style>
-  </dgm:styleLbl>
-  <dgm:styleLbl name="solidBgAcc1">
-    <dgm:scene3d>
-      <a:camera prst="orthographicFront"/>
-      <a:lightRig rig="threePt" dir="t"/>
-    </dgm:scene3d>
-    <dgm:sp3d/>
-    <dgm:txPr/>
-    <dgm:style>
-      <a:lnRef idx="2">
-        <a:scrgbClr r="0" g="0" b="0"/>
-      </a:lnRef>
-      <a:fillRef idx="1">
-        <a:scrgbClr r="0" g="0" b="0"/>
-      </a:fillRef>
-      <a:effectRef idx="0">
-        <a:scrgbClr r="0" g="0" b="0"/>
-      </a:effectRef>
-      <a:fontRef idx="minor"/>
-    </dgm:style>
-  </dgm:styleLbl>
-  <dgm:styleLbl name="fgAccFollowNode1">
-    <dgm:scene3d>
-      <a:camera prst="orthographicFront"/>
-      <a:lightRig rig="threePt" dir="t"/>
-    </dgm:scene3d>
-    <dgm:sp3d/>
-    <dgm:txPr/>
-    <dgm:style>
-      <a:lnRef idx="2">
-        <a:scrgbClr r="0" g="0" b="0"/>
-      </a:lnRef>
-      <a:fillRef idx="1">
-        <a:scrgbClr r="0" g="0" b="0"/>
-      </a:fillRef>
-      <a:effectRef idx="0">
-        <a:scrgbClr r="0" g="0" b="0"/>
-      </a:effectRef>
-      <a:fontRef idx="minor"/>
-    </dgm:style>
-  </dgm:styleLbl>
-  <dgm:styleLbl name="alignAccFollowNode1">
-    <dgm:scene3d>
-      <a:camera prst="orthographicFront"/>
-      <a:lightRig rig="threePt" dir="t"/>
-    </dgm:scene3d>
-    <dgm:sp3d/>
-    <dgm:txPr/>
-    <dgm:style>
-      <a:lnRef idx="2">
-        <a:scrgbClr r="0" g="0" b="0"/>
-      </a:lnRef>
-      <a:fillRef idx="1">
-        <a:scrgbClr r="0" g="0" b="0"/>
-      </a:fillRef>
-      <a:effectRef idx="0">
-        <a:scrgbClr r="0" g="0" b="0"/>
-      </a:effectRef>
-      <a:fontRef idx="minor"/>
-    </dgm:style>
-  </dgm:styleLbl>
-  <dgm:styleLbl name="bgAccFollowNode1">
-    <dgm:scene3d>
-      <a:camera prst="orthographicFront"/>
-      <a:lightRig rig="threePt" dir="t"/>
-    </dgm:scene3d>
-    <dgm:sp3d/>
-    <dgm:txPr/>
-    <dgm:style>
-      <a:lnRef idx="2">
-        <a:scrgbClr r="0" g="0" b="0"/>
-      </a:lnRef>
-      <a:fillRef idx="1">
-        <a:scrgbClr r="0" g="0" b="0"/>
-      </a:fillRef>
-      <a:effectRef idx="0">
-        <a:scrgbClr r="0" g="0" b="0"/>
-      </a:effectRef>
-      <a:fontRef idx="minor"/>
-    </dgm:style>
-  </dgm:styleLbl>
-  <dgm:styleLbl name="fgAcc0">
-    <dgm:scene3d>
-      <a:camera prst="orthographicFront"/>
-      <a:lightRig rig="threePt" dir="t"/>
-    </dgm:scene3d>
-    <dgm:sp3d/>
-    <dgm:txPr/>
-    <dgm:style>
-      <a:lnRef idx="2">
-        <a:scrgbClr r="0" g="0" b="0"/>
-      </a:lnRef>
-      <a:fillRef idx="1">
-        <a:scrgbClr r="0" g="0" b="0"/>
-      </a:fillRef>
-      <a:effectRef idx="0">
-        <a:scrgbClr r="0" g="0" b="0"/>
-      </a:effectRef>
-      <a:fontRef idx="minor"/>
-    </dgm:style>
-  </dgm:styleLbl>
-  <dgm:styleLbl name="fgAcc2">
-    <dgm:scene3d>
-      <a:camera prst="orthographicFront"/>
-      <a:lightRig rig="threePt" dir="t"/>
-    </dgm:scene3d>
-    <dgm:sp3d/>
-    <dgm:txPr/>
-    <dgm:style>
-      <a:lnRef idx="2">
-        <a:scrgbClr r="0" g="0" b="0"/>
-      </a:lnRef>
-      <a:fillRef idx="1">
-        <a:scrgbClr r="0" g="0" b="0"/>
-      </a:fillRef>
-      <a:effectRef idx="0">
-        <a:scrgbClr r="0" g="0" b="0"/>
-      </a:effectRef>
-      <a:fontRef idx="minor"/>
-    </dgm:style>
-  </dgm:styleLbl>
-  <dgm:styleLbl name="fgAcc3">
-    <dgm:scene3d>
-      <a:camera prst="orthographicFront"/>
-      <a:lightRig rig="threePt" dir="t"/>
-    </dgm:scene3d>
-    <dgm:sp3d/>
-    <dgm:txPr/>
-    <dgm:style>
-      <a:lnRef idx="2">
-        <a:scrgbClr r="0" g="0" b="0"/>
-      </a:lnRef>
-      <a:fillRef idx="1">
-        <a:scrgbClr r="0" g="0" b="0"/>
-      </a:fillRef>
-      <a:effectRef idx="0">
-        <a:scrgbClr r="0" g="0" b="0"/>
-      </a:effectRef>
-      <a:fontRef idx="minor"/>
-    </dgm:style>
-  </dgm:styleLbl>
-  <dgm:styleLbl name="fgAcc4">
-    <dgm:scene3d>
-      <a:camera prst="orthographicFront"/>
-      <a:lightRig rig="threePt" dir="t"/>
-    </dgm:scene3d>
-    <dgm:sp3d/>
-    <dgm:txPr/>
-    <dgm:style>
-      <a:lnRef idx="2">
-        <a:scrgbClr r="0" g="0" b="0"/>
-      </a:lnRef>
-      <a:fillRef idx="1">
-        <a:scrgbClr r="0" g="0" b="0"/>
-      </a:fillRef>
-      <a:effectRef idx="0">
-        <a:scrgbClr r="0" g="0" b="0"/>
-      </a:effectRef>
-      <a:fontRef idx="minor"/>
-    </dgm:style>
-  </dgm:styleLbl>
-  <dgm:styleLbl name="bgShp">
-    <dgm:scene3d>
-      <a:camera prst="orthographicFront"/>
-      <a:lightRig rig="threePt" dir="t"/>
-    </dgm:scene3d>
-    <dgm:sp3d/>
-    <dgm:txPr/>
-    <dgm:style>
-      <a:lnRef idx="0">
-        <a:scrgbClr r="0" g="0" b="0"/>
-      </a:lnRef>
-      <a:fillRef idx="1">
-        <a:scrgbClr r="0" g="0" b="0"/>
-      </a:fillRef>
-      <a:effectRef idx="0">
-        <a:scrgbClr r="0" g="0" b="0"/>
-      </a:effectRef>
-      <a:fontRef idx="minor"/>
-    </dgm:style>
-  </dgm:styleLbl>
-  <dgm:styleLbl name="dkBgShp">
-    <dgm:scene3d>
-      <a:camera prst="orthographicFront"/>
-      <a:lightRig rig="threePt" dir="t"/>
-    </dgm:scene3d>
-    <dgm:sp3d/>
-    <dgm:txPr/>
-    <dgm:style>
-      <a:lnRef idx="0">
-        <a:scrgbClr r="0" g="0" b="0"/>
-      </a:lnRef>
-      <a:fillRef idx="1">
-        <a:scrgbClr r="0" g="0" b="0"/>
-      </a:fillRef>
-      <a:effectRef idx="0">
-        <a:scrgbClr r="0" g="0" b="0"/>
-      </a:effectRef>
-      <a:fontRef idx="minor"/>
-    </dgm:style>
-  </dgm:styleLbl>
-  <dgm:styleLbl name="trBgShp">
-    <dgm:scene3d>
-      <a:camera prst="orthographicFront"/>
-      <a:lightRig rig="threePt" dir="t"/>
-    </dgm:scene3d>
-    <dgm:sp3d/>
-    <dgm:txPr/>
-    <dgm:style>
-      <a:lnRef idx="0">
-        <a:scrgbClr r="0" g="0" b="0"/>
-      </a:lnRef>
-      <a:fillRef idx="1">
-        <a:scrgbClr r="0" g="0" b="0"/>
-      </a:fillRef>
-      <a:effectRef idx="0">
-        <a:scrgbClr r="0" g="0" b="0"/>
-      </a:effectRef>
-      <a:fontRef idx="minor"/>
-    </dgm:style>
-  </dgm:styleLbl>
-  <dgm:styleLbl name="fgShp">
-    <dgm:scene3d>
-      <a:camera prst="orthographicFront"/>
-      <a:lightRig rig="threePt" dir="t"/>
-    </dgm:scene3d>
-    <dgm:sp3d/>
-    <dgm:txPr/>
-    <dgm:style>
-      <a:lnRef idx="2">
-        <a:scrgbClr r="0" g="0" b="0"/>
-      </a:lnRef>
-      <a:fillRef idx="1">
-        <a:scrgbClr r="0" g="0" b="0"/>
-      </a:fillRef>
-      <a:effectRef idx="0">
-        <a:scrgbClr r="0" g="0" b="0"/>
-      </a:effectRef>
-      <a:fontRef idx="minor"/>
-    </dgm:style>
-  </dgm:styleLbl>
-  <dgm:styleLbl name="revTx">
-    <dgm:scene3d>
-      <a:camera prst="orthographicFront"/>
-      <a:lightRig rig="threePt" dir="t"/>
-    </dgm:scene3d>
-    <dgm:sp3d/>
-    <dgm:txPr/>
-    <dgm:style>
-      <a:lnRef idx="0">
-        <a:scrgbClr r="0" g="0" b="0"/>
-      </a:lnRef>
-      <a:fillRef idx="0">
-        <a:scrgbClr r="0" g="0" b="0"/>
-      </a:fillRef>
-      <a:effectRef idx="0">
-        <a:scrgbClr r="0" g="0" b="0"/>
-      </a:effectRef>
-      <a:fontRef idx="minor"/>
-    </dgm:style>
-  </dgm:styleLbl>
-</dgm:styleDef>
-</file>
-
-<file path=ppt/diagrams/quickStyle2.xml><?xml version="1.0" encoding="utf-8"?>
 <dgm:styleDef xmlns:dgm="http://schemas.openxmlformats.org/drawingml/2006/diagram" xmlns:a="http://schemas.openxmlformats.org/drawingml/2006/main" uniqueId="urn:microsoft.com/office/officeart/2005/8/quickstyle/simple1">
   <dgm:title val=""/>
   <dgm:desc val=""/>
@@ -16886,7 +14024,7 @@
                 <a:ea typeface="+mj-ea"/>
                 <a:cs typeface="+mj-cs"/>
               </a:rPr>
-              <a:t>Learning from Examples:</a:t>
+              <a:t>Machine Learning:</a:t>
             </a:r>
             <a:br>
               <a:rPr lang="en-US" sz="3200" b="1" kern="1200" dirty="0">
@@ -16907,7 +14045,7 @@
                 <a:ea typeface="+mj-ea"/>
                 <a:cs typeface="+mj-cs"/>
               </a:rPr>
-              <a:t>Supervised Machine Learning</a:t>
+              <a:t>Learning from Examples and Statistical Learning</a:t>
             </a:r>
             <a:br>
               <a:rPr lang="en-US" sz="3200" b="1" kern="1200" dirty="0">
@@ -16938,7 +14076,7 @@
                 <a:ea typeface="+mj-ea"/>
                 <a:cs typeface="+mj-cs"/>
               </a:rPr>
-              <a:t>AIMA Chapter 19</a:t>
+              <a:t>AIMA Chapters 19-21</a:t>
             </a:r>
             <a:br>
               <a:rPr lang="en-US" sz="3200" kern="1200" dirty="0">
@@ -18249,7 +15387,7 @@
             </a:ln>
             <a:extLst>
               <a:ext uri="{AF507438-7753-43e0-B8FC-AC1667EBCBE1}">
-                <a14:hiddenEffects xmlns:a14="http://schemas.microsoft.com/office/drawing/2010/main" xmlns="">
+                <a14:hiddenEffects xmlns="" xmlns:a14="http://schemas.microsoft.com/office/drawing/2010/main">
                   <a:effectLst>
                     <a:outerShdw dist="35921" dir="2700000" algn="ctr" rotWithShape="0">
                       <a:schemeClr val="bg2"/>
@@ -18317,7 +15455,7 @@
             <a:effectLst/>
             <a:extLst>
               <a:ext uri="{AF507438-7753-43e0-B8FC-AC1667EBCBE1}">
-                <a14:hiddenEffects xmlns:a14="http://schemas.microsoft.com/office/drawing/2010/main" xmlns="">
+                <a14:hiddenEffects xmlns="" xmlns:a14="http://schemas.microsoft.com/office/drawing/2010/main">
                   <a:effectLst>
                     <a:outerShdw dist="35921" dir="2700000" algn="ctr" rotWithShape="0">
                       <a:schemeClr val="bg2"/>
@@ -18371,7 +15509,7 @@
             <a:effectLst/>
             <a:extLst>
               <a:ext uri="{AF507438-7753-43e0-B8FC-AC1667EBCBE1}">
-                <a14:hiddenEffects xmlns:a14="http://schemas.microsoft.com/office/drawing/2010/main" xmlns="">
+                <a14:hiddenEffects xmlns="" xmlns:a14="http://schemas.microsoft.com/office/drawing/2010/main">
                   <a:effectLst>
                     <a:outerShdw dist="35921" dir="2700000" algn="ctr" rotWithShape="0">
                       <a:schemeClr val="bg2"/>
@@ -18424,12 +15562,12 @@
             <a:effectLst/>
             <a:extLst>
               <a:ext uri="{909E8E84-426E-40dd-AFC4-6F175D3DCCD1}">
-                <a14:hiddenFill xmlns:a14="http://schemas.microsoft.com/office/drawing/2010/main" xmlns="">
+                <a14:hiddenFill xmlns="" xmlns:a14="http://schemas.microsoft.com/office/drawing/2010/main">
                   <a:noFill/>
                 </a14:hiddenFill>
               </a:ext>
               <a:ext uri="{AF507438-7753-43e0-B8FC-AC1667EBCBE1}">
-                <a14:hiddenEffects xmlns:a14="http://schemas.microsoft.com/office/drawing/2010/main" xmlns="">
+                <a14:hiddenEffects xmlns="" xmlns:a14="http://schemas.microsoft.com/office/drawing/2010/main">
                   <a:effectLst>
                     <a:outerShdw dist="35921" dir="2700000" algn="ctr" rotWithShape="0">
                       <a:schemeClr val="bg2"/>
@@ -18503,14 +15641,14 @@
             <a:effectLst/>
             <a:extLst>
               <a:ext uri="{909E8E84-426E-40dd-AFC4-6F175D3DCCD1}">
-                <a14:hiddenFill xmlns:a14="http://schemas.microsoft.com/office/drawing/2010/main" xmlns="">
+                <a14:hiddenFill xmlns="" xmlns:a14="http://schemas.microsoft.com/office/drawing/2010/main">
                   <a:solidFill>
                     <a:schemeClr val="accent1"/>
                   </a:solidFill>
                 </a14:hiddenFill>
               </a:ext>
               <a:ext uri="{91240B29-F687-4f45-9708-019B960494DF}">
-                <a14:hiddenLine xmlns:a14="http://schemas.microsoft.com/office/drawing/2010/main" xmlns="" w="9525">
+                <a14:hiddenLine xmlns="" xmlns:a14="http://schemas.microsoft.com/office/drawing/2010/main" w="9525">
                   <a:solidFill>
                     <a:schemeClr val="tx1"/>
                   </a:solidFill>
@@ -18520,7 +15658,7 @@
                 </a14:hiddenLine>
               </a:ext>
               <a:ext uri="{AF507438-7753-43e0-B8FC-AC1667EBCBE1}">
-                <a14:hiddenEffects xmlns:a14="http://schemas.microsoft.com/office/drawing/2010/main" xmlns="">
+                <a14:hiddenEffects xmlns="" xmlns:a14="http://schemas.microsoft.com/office/drawing/2010/main">
                   <a:effectLst>
                     <a:outerShdw dist="35921" dir="2700000" algn="ctr" rotWithShape="0">
                       <a:schemeClr val="bg2"/>
@@ -19216,8 +16354,8 @@
           </a:p>
         </p:txBody>
       </p:sp>
-      <mc:AlternateContent xmlns:mc="http://schemas.openxmlformats.org/markup-compatibility/2006" xmlns:a14="http://schemas.microsoft.com/office/drawing/2010/main">
-        <mc:Choice Requires="a14">
+      <mc:AlternateContent xmlns:mc="http://schemas.openxmlformats.org/markup-compatibility/2006">
+        <mc:Choice xmlns:a14="http://schemas.microsoft.com/office/drawing/2010/main" Requires="a14">
           <p:sp>
             <p:nvSpPr>
               <p:cNvPr id="3" name="Content Placeholder 2">
@@ -19254,6 +16392,14 @@
                 </a:pPr>
                 <a:r>
                   <a:rPr lang="en-US" b="1" dirty="0"/>
+                  <a:t>Statistical Learning: </a:t>
+                </a:r>
+                <a:r>
+                  <a:rPr lang="en-US" b="1" dirty="0">
+                    <a:solidFill>
+                      <a:srgbClr val="FF0000"/>
+                    </a:solidFill>
+                  </a:rPr>
                   <a:t>For 0/1 loss</a:t>
                 </a:r>
                 <a:r>
@@ -20008,7 +17154,7 @@
             </p:txBody>
           </p:sp>
         </mc:Choice>
-        <mc:Fallback xmlns="">
+        <mc:Fallback>
           <p:sp>
             <p:nvSpPr>
               <p:cNvPr id="3" name="Content Placeholder 2">
@@ -24312,8 +21458,8 @@
           </a:p>
         </p:txBody>
       </p:sp>
-      <mc:AlternateContent xmlns:mc="http://schemas.openxmlformats.org/markup-compatibility/2006">
-        <mc:Choice xmlns:a14="http://schemas.microsoft.com/office/drawing/2010/main" Requires="a14">
+      <mc:AlternateContent xmlns:mc="http://schemas.openxmlformats.org/markup-compatibility/2006" xmlns:a14="http://schemas.microsoft.com/office/drawing/2010/main">
+        <mc:Choice Requires="a14">
           <p:sp>
             <p:nvSpPr>
               <p:cNvPr id="33795" name="Rectangle 3"/>
@@ -24571,7 +21717,7 @@
             </p:txBody>
           </p:sp>
         </mc:Choice>
-        <mc:Fallback>
+        <mc:Fallback xmlns="">
           <p:sp>
             <p:nvSpPr>
               <p:cNvPr id="33795" name="Rectangle 3"/>
@@ -30206,8 +27352,8 @@
           </a:p>
         </p:txBody>
       </p:sp>
-      <mc:AlternateContent xmlns:mc="http://schemas.openxmlformats.org/markup-compatibility/2006">
-        <mc:Choice xmlns:a14="http://schemas.microsoft.com/office/drawing/2010/main" Requires="a14">
+      <mc:AlternateContent xmlns:mc="http://schemas.openxmlformats.org/markup-compatibility/2006" xmlns:a14="http://schemas.microsoft.com/office/drawing/2010/main">
+        <mc:Choice Requires="a14">
           <p:sp>
             <p:nvSpPr>
               <p:cNvPr id="10" name="Content Placeholder 9">
@@ -30899,7 +28045,6 @@
                 <a:endParaRPr lang="en-US" dirty="0"/>
               </a:p>
               <a:p>
-                <a:pPr/>
                 <a:r>
                   <a:rPr lang="en-US" b="1" dirty="0"/>
                   <a:t>Alternative</a:t>
@@ -31149,7 +28294,7 @@
             </p:txBody>
           </p:sp>
         </mc:Choice>
-        <mc:Fallback>
+        <mc:Fallback xmlns="">
           <p:sp>
             <p:nvSpPr>
               <p:cNvPr id="10" name="Content Placeholder 9">
@@ -36139,8 +33284,8 @@
         </p:nvSpPr>
         <p:spPr>
           <a:xfrm>
-            <a:off x="477981" y="1122363"/>
-            <a:ext cx="4023360" cy="3204134"/>
+            <a:off x="477980" y="1122363"/>
+            <a:ext cx="4932220" cy="3204134"/>
           </a:xfrm>
         </p:spPr>
         <p:txBody>
@@ -36158,7 +33303,7 @@
                 <a:ea typeface="+mj-ea"/>
                 <a:cs typeface="+mj-cs"/>
               </a:rPr>
-              <a:t>Agents and ML</a:t>
+              <a:t>Agents and Machine Learning</a:t>
             </a:r>
           </a:p>
         </p:txBody>
@@ -36303,13 +33448,13 @@
         </p:spPr>
         <p:txBody>
           <a:bodyPr>
-            <a:normAutofit fontScale="90000"/>
+            <a:normAutofit/>
           </a:bodyPr>
           <a:lstStyle/>
           <a:p>
             <a:r>
               <a:rPr lang="en-US" dirty="0"/>
-              <a:t>Most Used in AI: Artificial Neural Networks</a:t>
+              <a:t>Artificial Neural Networks (ANNs)</a:t>
             </a:r>
           </a:p>
         </p:txBody>
@@ -36996,8 +34141,8 @@
           </p:style>
         </p:cxnSp>
       </p:grpSp>
-      <mc:AlternateContent xmlns:mc="http://schemas.openxmlformats.org/markup-compatibility/2006" xmlns:a14="http://schemas.microsoft.com/office/drawing/2010/main">
-        <mc:Choice Requires="a14">
+      <mc:AlternateContent xmlns:mc="http://schemas.openxmlformats.org/markup-compatibility/2006">
+        <mc:Choice xmlns:a14="http://schemas.microsoft.com/office/drawing/2010/main" Requires="a14">
           <p:sp>
             <p:nvSpPr>
               <p:cNvPr id="3" name="Content Placeholder 2">
@@ -37027,8 +34172,23 @@
               <a:lstStyle/>
               <a:p>
                 <a:r>
+                  <a:rPr lang="en-US" sz="1500" b="1" dirty="0"/>
+                  <a:t>MLP</a:t>
+                </a:r>
+                <a:r>
                   <a:rPr lang="en-US" sz="1500" dirty="0"/>
-                  <a:t>Represent </a:t>
+                  <a:t>: A “standard” ANN is called a Multilayer Perceptron (MLP) and has an input layer, an output layer, and a single fully connected hidden layer.</a:t>
+                </a:r>
+                <a:endParaRPr lang="en-US" sz="1500" b="1" dirty="0"/>
+              </a:p>
+              <a:p>
+                <a:r>
+                  <a:rPr lang="en-US" sz="1500" b="1" dirty="0"/>
+                  <a:t>Representation</a:t>
+                </a:r>
+                <a:r>
+                  <a:rPr lang="en-US" sz="1500" dirty="0"/>
+                  <a:t>:</a:t>
                 </a:r>
                 <a:br>
                   <a:rPr lang="en-US" sz="1500" dirty="0"/>
@@ -37261,7 +34421,7 @@
                 </a:br>
                 <a:r>
                   <a:rPr lang="en-US" sz="1500" dirty="0"/>
-                  <a:t>as a network of weighted sums with non-linear </a:t>
+                  <a:t>= a network of weighted sums with non-linear </a:t>
                 </a:r>
                 <a:r>
                   <a:rPr lang="en-US" sz="1500" b="1" dirty="0"/>
@@ -37298,8 +34458,12 @@
               </a:p>
               <a:p>
                 <a:r>
+                  <a:rPr lang="en-US" sz="1500" b="1" dirty="0"/>
+                  <a:t>Backpropagation</a:t>
+                </a:r>
+                <a:r>
                   <a:rPr lang="en-US" sz="1500" dirty="0"/>
-                  <a:t>Learn weight matrices </a:t>
+                  <a:t>: Learn weight matrices </a:t>
                 </a:r>
                 <a14:m>
                   <m:oMath xmlns:m="http://schemas.openxmlformats.org/officeDocument/2006/math">
@@ -37313,15 +34477,7 @@
                 </a14:m>
                 <a:r>
                   <a:rPr lang="en-US" sz="1500" dirty="0"/>
-                  <a:t> from examples using gradient descent. The gradient is calculated with </a:t>
-                </a:r>
-                <a:r>
-                  <a:rPr lang="en-US" sz="1500" b="1" dirty="0"/>
-                  <a:t>backpropagation</a:t>
-                </a:r>
-                <a:r>
-                  <a:rPr lang="en-US" sz="1500" dirty="0"/>
-                  <a:t> of prediction errors </a:t>
+                  <a:t> from examples using gradient descent. The gradient is calculated with backpropagation of prediction errors </a:t>
                 </a:r>
                 <a14:m>
                   <m:oMath xmlns:m="http://schemas.openxmlformats.org/officeDocument/2006/math">
@@ -37382,16 +34538,12 @@
               </a:p>
               <a:p>
                 <a:r>
-                  <a:rPr lang="en-US" sz="1500" dirty="0"/>
-                  <a:t>ANNs are </a:t>
-                </a:r>
-                <a:r>
                   <a:rPr lang="en-US" sz="1500" b="1" dirty="0"/>
-                  <a:t>universal approximators</a:t>
+                  <a:t>Universal Approximator</a:t>
                 </a:r>
                 <a:r>
                   <a:rPr lang="en-US" sz="1500" dirty="0"/>
-                  <a:t>. Large networks can approximate any function (have no bias). </a:t>
+                  <a:t>: MLPs with non-linear activation function for the hidden layer are universal approximators (large networks can approximate any function, i.e., have no bias). </a:t>
                 </a:r>
                 <a:r>
                   <a:rPr lang="en-US" sz="1500" b="1" dirty="0"/>
@@ -37402,30 +34554,10 @@
                   <a:t> is typically needed to avoid overfitting.</a:t>
                 </a:r>
               </a:p>
-              <a:p>
-                <a:r>
-                  <a:rPr lang="en-US" sz="1500" b="1" dirty="0"/>
-                  <a:t>End-to-end learning</a:t>
-                </a:r>
-                <a:r>
-                  <a:rPr lang="en-US" sz="1500" dirty="0"/>
-                  <a:t>: The hidden layer performs “automatic feature engineering.”</a:t>
-                </a:r>
-              </a:p>
-              <a:p>
-                <a:r>
-                  <a:rPr lang="en-US" sz="1500" b="1" dirty="0"/>
-                  <a:t>Deep learning </a:t>
-                </a:r>
-                <a:r>
-                  <a:rPr lang="en-US" sz="1500" dirty="0"/>
-                  <a:t>adds more hidden layers and layer types (e.g., convolution layers) for more efficient learning and transfer learning.</a:t>
-                </a:r>
-              </a:p>
             </p:txBody>
           </p:sp>
         </mc:Choice>
-        <mc:Fallback xmlns="">
+        <mc:Fallback>
           <p:sp>
             <p:nvSpPr>
               <p:cNvPr id="3" name="Content Placeholder 2">
@@ -37450,7 +34582,7 @@
               <a:blipFill>
                 <a:blip r:embed="rId4"/>
                 <a:stretch>
-                  <a:fillRect l="-528" t="-592" r="-1585"/>
+                  <a:fillRect l="-528" t="-592" r="-704"/>
                 </a:stretch>
               </a:blipFill>
             </p:spPr>
@@ -37505,8 +34637,8 @@
           </a:p>
         </p:txBody>
       </p:sp>
-      <mc:AlternateContent xmlns:mc="http://schemas.openxmlformats.org/markup-compatibility/2006" xmlns:a14="http://schemas.microsoft.com/office/drawing/2010/main">
-        <mc:Choice Requires="a14">
+      <mc:AlternateContent xmlns:mc="http://schemas.openxmlformats.org/markup-compatibility/2006">
+        <mc:Choice xmlns:a14="http://schemas.microsoft.com/office/drawing/2010/main" Requires="a14">
           <p:sp>
             <p:nvSpPr>
               <p:cNvPr id="14" name="Speech Bubble: Rectangle 13">
@@ -37521,13 +34653,13 @@
             </p:nvSpPr>
             <p:spPr>
               <a:xfrm>
-                <a:off x="10080047" y="533400"/>
+                <a:off x="6629400" y="1841112"/>
                 <a:ext cx="1600200" cy="553868"/>
               </a:xfrm>
               <a:prstGeom prst="wedgeRectCallout">
                 <a:avLst>
-                  <a:gd name="adj1" fmla="val -38838"/>
-                  <a:gd name="adj2" fmla="val 163956"/>
+                  <a:gd name="adj1" fmla="val 73497"/>
+                  <a:gd name="adj2" fmla="val 126105"/>
                 </a:avLst>
               </a:prstGeom>
             </p:spPr>
@@ -37586,7 +34718,7 @@
             </p:txBody>
           </p:sp>
         </mc:Choice>
-        <mc:Fallback xmlns="">
+        <mc:Fallback>
           <p:sp>
             <p:nvSpPr>
               <p:cNvPr id="14" name="Speech Bubble: Rectangle 13">
@@ -37603,19 +34735,19 @@
             </p:nvSpPr>
             <p:spPr>
               <a:xfrm>
-                <a:off x="10080047" y="533400"/>
+                <a:off x="6629400" y="1841112"/>
                 <a:ext cx="1600200" cy="553868"/>
               </a:xfrm>
               <a:prstGeom prst="wedgeRectCallout">
                 <a:avLst>
-                  <a:gd name="adj1" fmla="val -38838"/>
-                  <a:gd name="adj2" fmla="val 163956"/>
+                  <a:gd name="adj1" fmla="val 73497"/>
+                  <a:gd name="adj2" fmla="val 126105"/>
                 </a:avLst>
               </a:prstGeom>
               <a:blipFill>
                 <a:blip r:embed="rId5"/>
                 <a:stretch>
-                  <a:fillRect t="-1515"/>
+                  <a:fillRect t="-1205"/>
                 </a:stretch>
               </a:blipFill>
             </p:spPr>
@@ -37695,21 +34827,43 @@
                                   </p:childTnLst>
                                 </p:cTn>
                               </p:par>
+                            </p:childTnLst>
+                          </p:cTn>
+                        </p:par>
+                      </p:childTnLst>
+                    </p:cTn>
+                  </p:par>
+                  <p:par>
+                    <p:cTn id="7" fill="hold">
+                      <p:stCondLst>
+                        <p:cond delay="indefinite"/>
+                      </p:stCondLst>
+                      <p:childTnLst>
+                        <p:par>
+                          <p:cTn id="8" fill="hold">
+                            <p:stCondLst>
+                              <p:cond delay="0"/>
+                            </p:stCondLst>
+                            <p:childTnLst>
                               <p:par>
-                                <p:cTn id="7" presetID="1" presetClass="entr" presetSubtype="0" fill="hold" grpId="0" nodeType="withEffect">
+                                <p:cTn id="9" presetID="1" presetClass="entr" presetSubtype="0" fill="hold" grpId="0" nodeType="clickEffect">
                                   <p:stCondLst>
                                     <p:cond delay="0"/>
                                   </p:stCondLst>
                                   <p:childTnLst>
                                     <p:set>
                                       <p:cBhvr>
-                                        <p:cTn id="8" dur="1" fill="hold">
+                                        <p:cTn id="10" dur="1" fill="hold">
                                           <p:stCondLst>
                                             <p:cond delay="0"/>
                                           </p:stCondLst>
                                         </p:cTn>
                                         <p:tgtEl>
-                                          <p:spTgt spid="14"/>
+                                          <p:spTgt spid="3">
+                                            <p:txEl>
+                                              <p:pRg st="1" end="1"/>
+                                            </p:txEl>
+                                          </p:spTgt>
                                         </p:tgtEl>
                                         <p:attrNameLst>
                                           <p:attrName>style.visibility</p:attrName>
@@ -37722,26 +34876,8 @@
                                   </p:childTnLst>
                                 </p:cTn>
                               </p:par>
-                            </p:childTnLst>
-                          </p:cTn>
-                        </p:par>
-                      </p:childTnLst>
-                    </p:cTn>
-                  </p:par>
-                  <p:par>
-                    <p:cTn id="9" fill="hold">
-                      <p:stCondLst>
-                        <p:cond delay="indefinite"/>
-                      </p:stCondLst>
-                      <p:childTnLst>
-                        <p:par>
-                          <p:cTn id="10" fill="hold">
-                            <p:stCondLst>
-                              <p:cond delay="0"/>
-                            </p:stCondLst>
-                            <p:childTnLst>
                               <p:par>
-                                <p:cTn id="11" presetID="1" presetClass="entr" presetSubtype="0" fill="hold" grpId="0" nodeType="clickEffect">
+                                <p:cTn id="11" presetID="1" presetClass="entr" presetSubtype="0" fill="hold" grpId="0" nodeType="withEffect">
                                   <p:stCondLst>
                                     <p:cond delay="0"/>
                                   </p:stCondLst>
@@ -37754,11 +34890,7 @@
                                           </p:stCondLst>
                                         </p:cTn>
                                         <p:tgtEl>
-                                          <p:spTgt spid="3">
-                                            <p:txEl>
-                                              <p:pRg st="1" end="1"/>
-                                            </p:txEl>
-                                          </p:spTgt>
+                                          <p:spTgt spid="14"/>
                                         </p:tgtEl>
                                         <p:attrNameLst>
                                           <p:attrName>style.visibility</p:attrName>
@@ -37875,55 +35007,6 @@
                       </p:childTnLst>
                     </p:cTn>
                   </p:par>
-                  <p:par>
-                    <p:cTn id="21" fill="hold">
-                      <p:stCondLst>
-                        <p:cond delay="indefinite"/>
-                      </p:stCondLst>
-                      <p:childTnLst>
-                        <p:par>
-                          <p:cTn id="22" fill="hold">
-                            <p:stCondLst>
-                              <p:cond delay="0"/>
-                            </p:stCondLst>
-                            <p:childTnLst>
-                              <p:par>
-                                <p:cTn id="23" presetID="1" presetClass="entr" presetSubtype="0" fill="hold" nodeType="clickEffect">
-                                  <p:stCondLst>
-                                    <p:cond delay="0"/>
-                                  </p:stCondLst>
-                                  <p:childTnLst>
-                                    <p:set>
-                                      <p:cBhvr>
-                                        <p:cTn id="24" dur="1" fill="hold">
-                                          <p:stCondLst>
-                                            <p:cond delay="0"/>
-                                          </p:stCondLst>
-                                        </p:cTn>
-                                        <p:tgtEl>
-                                          <p:spTgt spid="3">
-                                            <p:txEl>
-                                              <p:pRg st="4" end="4"/>
-                                            </p:txEl>
-                                          </p:spTgt>
-                                        </p:tgtEl>
-                                        <p:attrNameLst>
-                                          <p:attrName>style.visibility</p:attrName>
-                                        </p:attrNameLst>
-                                      </p:cBhvr>
-                                      <p:to>
-                                        <p:strVal val="visible"/>
-                                      </p:to>
-                                    </p:set>
-                                  </p:childTnLst>
-                                </p:cTn>
-                              </p:par>
-                            </p:childTnLst>
-                          </p:cTn>
-                        </p:par>
-                      </p:childTnLst>
-                    </p:cTn>
-                  </p:par>
                 </p:childTnLst>
               </p:cTn>
               <p:prevCondLst>
@@ -37954,16 +35037,8 @@
 </file>
 
 <file path=ppt/slides/slide31.xml><?xml version="1.0" encoding="utf-8"?>
-<p:sld xmlns:a="http://schemas.openxmlformats.org/drawingml/2006/main" xmlns:r="http://schemas.openxmlformats.org/officeDocument/2006/relationships" xmlns:p="http://schemas.openxmlformats.org/presentationml/2006/main" show="0">
+<p:sld xmlns:a="http://schemas.openxmlformats.org/drawingml/2006/main" xmlns:r="http://schemas.openxmlformats.org/officeDocument/2006/relationships" xmlns:p="http://schemas.openxmlformats.org/presentationml/2006/main">
   <p:cSld>
-    <p:bg>
-      <p:bgPr>
-        <a:solidFill>
-          <a:schemeClr val="bg1"/>
-        </a:solidFill>
-        <a:effectLst/>
-      </p:bgPr>
-    </p:bg>
     <p:spTree>
       <p:nvGrpSpPr>
         <p:cNvPr id="1" name=""/>
@@ -37980,73 +35055,10 @@
       </p:grpSpPr>
       <p:sp>
         <p:nvSpPr>
-          <p:cNvPr id="9" name="Rectangle 8">
-            <a:extLst>
-              <a:ext uri="{FF2B5EF4-FFF2-40B4-BE49-F238E27FC236}">
-                <a16:creationId xmlns:a16="http://schemas.microsoft.com/office/drawing/2014/main" id="{B819A166-7571-4003-A6B8-B62034C3ED30}"/>
-              </a:ext>
-              <a:ext uri="{C183D7F6-B498-43B3-948B-1728B52AA6E4}">
-                <adec:decorative xmlns:adec="http://schemas.microsoft.com/office/drawing/2017/decorative" val="1"/>
-              </a:ext>
-            </a:extLst>
-          </p:cNvPr>
-          <p:cNvSpPr>
-            <a:spLocks noGrp="1" noRot="1" noChangeAspect="1" noMove="1" noResize="1" noEditPoints="1" noAdjustHandles="1" noChangeArrowheads="1" noChangeShapeType="1" noTextEdit="1"/>
-          </p:cNvSpPr>
-          <p:nvPr>
-            <p:extLst>
-              <p:ext uri="{386F3935-93C4-4BCD-93E2-E3B085C9AB24}">
-                <p16:designElem xmlns:p16="http://schemas.microsoft.com/office/powerpoint/2015/main" val="1"/>
-              </p:ext>
-            </p:extLst>
-          </p:nvPr>
-        </p:nvSpPr>
-        <p:spPr>
-          <a:xfrm>
-            <a:off x="-1" y="0"/>
-            <a:ext cx="5093209" cy="6858000"/>
-          </a:xfrm>
-          <a:prstGeom prst="rect">
-            <a:avLst/>
-          </a:prstGeom>
-          <a:solidFill>
-            <a:schemeClr val="accent1"/>
-          </a:solidFill>
-          <a:ln>
-            <a:noFill/>
-          </a:ln>
-        </p:spPr>
-        <p:style>
-          <a:lnRef idx="2">
-            <a:schemeClr val="accent1">
-              <a:shade val="50000"/>
-            </a:schemeClr>
-          </a:lnRef>
-          <a:fillRef idx="1">
-            <a:schemeClr val="accent1"/>
-          </a:fillRef>
-          <a:effectRef idx="0">
-            <a:schemeClr val="accent1"/>
-          </a:effectRef>
-          <a:fontRef idx="minor">
-            <a:schemeClr val="lt1"/>
-          </a:fontRef>
-        </p:style>
-        <p:txBody>
-          <a:bodyPr rtlCol="0" anchor="ctr"/>
-          <a:lstStyle/>
-          <a:p>
-            <a:pPr algn="ctr"/>
-            <a:endParaRPr lang="en-US" dirty="0"/>
-          </a:p>
-        </p:txBody>
-      </p:sp>
-      <p:sp>
-        <p:nvSpPr>
           <p:cNvPr id="2" name="Title 1">
             <a:extLst>
               <a:ext uri="{FF2B5EF4-FFF2-40B4-BE49-F238E27FC236}">
-                <a16:creationId xmlns:a16="http://schemas.microsoft.com/office/drawing/2014/main" id="{2B24CCA2-CD25-4318-A32D-11D515970BB0}"/>
+                <a16:creationId xmlns:a16="http://schemas.microsoft.com/office/drawing/2014/main" id="{F219B699-4770-F2A9-8F3F-E04785848215}"/>
               </a:ext>
             </a:extLst>
           </p:cNvPr>
@@ -38057,64 +35069,489 @@
             <p:ph type="title"/>
           </p:nvPr>
         </p:nvSpPr>
+        <p:spPr/>
+        <p:txBody>
+          <a:bodyPr/>
+          <a:lstStyle/>
+          <a:p>
+            <a:r>
+              <a:rPr lang="en-US" dirty="0"/>
+              <a:t>Deep Learning</a:t>
+            </a:r>
+          </a:p>
+        </p:txBody>
+      </p:sp>
+      <p:sp>
+        <p:nvSpPr>
+          <p:cNvPr id="3" name="Content Placeholder 2">
+            <a:extLst>
+              <a:ext uri="{FF2B5EF4-FFF2-40B4-BE49-F238E27FC236}">
+                <a16:creationId xmlns:a16="http://schemas.microsoft.com/office/drawing/2014/main" id="{5E1AD9EF-A989-3ECB-4C9E-4FB8F0327ACF}"/>
+              </a:ext>
+            </a:extLst>
+          </p:cNvPr>
+          <p:cNvSpPr>
+            <a:spLocks noGrp="1"/>
+          </p:cNvSpPr>
+          <p:nvPr>
+            <p:ph idx="1"/>
+          </p:nvPr>
+        </p:nvSpPr>
         <p:spPr>
           <a:xfrm>
-            <a:off x="524741" y="620392"/>
-            <a:ext cx="3808268" cy="5504688"/>
+            <a:off x="838200" y="1475545"/>
+            <a:ext cx="10515600" cy="1325562"/>
           </a:xfrm>
         </p:spPr>
         <p:txBody>
           <a:bodyPr>
-            <a:normAutofit/>
+            <a:normAutofit fontScale="47500" lnSpcReduction="20000"/>
           </a:bodyPr>
           <a:lstStyle/>
           <a:p>
             <a:r>
-              <a:rPr lang="en-US" sz="6000" dirty="0">
-                <a:solidFill>
-                  <a:schemeClr val="bg1"/>
-                </a:solidFill>
-              </a:rPr>
-              <a:t>Other Popular Models and Methods</a:t>
+              <a:rPr lang="en-US" dirty="0"/>
+              <a:t>Extends MLPs with </a:t>
             </a:r>
+            <a:r>
+              <a:rPr lang="en-US" b="1" dirty="0"/>
+              <a:t>several hidden layers.</a:t>
+            </a:r>
+          </a:p>
+          <a:p>
+            <a:r>
+              <a:rPr lang="en-US" dirty="0"/>
+              <a:t>Introduces </a:t>
+            </a:r>
+            <a:r>
+              <a:rPr lang="en-US" b="1" dirty="0"/>
+              <a:t>layer types </a:t>
+            </a:r>
+            <a:r>
+              <a:rPr lang="en-US" dirty="0"/>
+              <a:t>(e.g., convolution layers) for more efficient learning.</a:t>
+            </a:r>
+          </a:p>
+          <a:p>
+            <a:r>
+              <a:rPr lang="en-US" b="1" dirty="0"/>
+              <a:t>End-to-end learning</a:t>
+            </a:r>
+            <a:r>
+              <a:rPr lang="en-US" dirty="0"/>
+              <a:t>: The hidden layers perform “automatic feature engineering” and support transfer learning.</a:t>
+            </a:r>
+          </a:p>
+          <a:p>
+            <a:pPr marL="0" indent="0">
+              <a:buNone/>
+            </a:pPr>
+            <a:endParaRPr lang="en-US" dirty="0"/>
+          </a:p>
+          <a:p>
+            <a:pPr marL="0" indent="0">
+              <a:buNone/>
+            </a:pPr>
+            <a:r>
+              <a:rPr lang="en-US" b="1" dirty="0"/>
+              <a:t>Example</a:t>
+            </a:r>
+            <a:r>
+              <a:rPr lang="en-US" dirty="0"/>
+              <a:t>: A deep ANN to play Classic Atari Breakout (1978)</a:t>
+            </a:r>
+          </a:p>
+          <a:p>
+            <a:pPr marL="0" indent="0">
+              <a:buNone/>
+            </a:pPr>
+            <a:endParaRPr lang="en-US" dirty="0"/>
           </a:p>
         </p:txBody>
       </p:sp>
-      <p:graphicFrame>
-        <p:nvGraphicFramePr>
-          <p:cNvPr id="5" name="Content Placeholder 2" descr="A popular class of models is called generalized linear models. This class includes linear and logistic regression. Other methods often used are regularization, the kernel trick, ensemble learning and embedding of data.">
+      <p:grpSp>
+        <p:nvGrpSpPr>
+          <p:cNvPr id="10" name="Group 9">
             <a:extLst>
               <a:ext uri="{FF2B5EF4-FFF2-40B4-BE49-F238E27FC236}">
-                <a16:creationId xmlns:a16="http://schemas.microsoft.com/office/drawing/2014/main" id="{0E17A239-0BAB-C414-09F4-BB525FA255C3}"/>
+                <a16:creationId xmlns:a16="http://schemas.microsoft.com/office/drawing/2014/main" id="{611305A4-B3E5-F322-0538-62DD4F093355}"/>
               </a:ext>
             </a:extLst>
           </p:cNvPr>
-          <p:cNvGraphicFramePr>
-            <a:graphicFrameLocks noGrp="1"/>
-          </p:cNvGraphicFramePr>
-          <p:nvPr>
-            <p:ph idx="1"/>
-            <p:extLst>
-              <p:ext uri="{D42A27DB-BD31-4B8C-83A1-F6EECF244321}">
-                <p14:modId xmlns:p14="http://schemas.microsoft.com/office/powerpoint/2010/main" val="3139728670"/>
-              </p:ext>
-            </p:extLst>
-          </p:nvPr>
-        </p:nvGraphicFramePr>
-        <p:xfrm>
-          <a:off x="5468389" y="620392"/>
-          <a:ext cx="6263640" cy="5504688"/>
-        </p:xfrm>
-        <a:graphic>
-          <a:graphicData uri="http://schemas.openxmlformats.org/drawingml/2006/diagram">
-            <dgm:relIds xmlns:dgm="http://schemas.openxmlformats.org/drawingml/2006/diagram" xmlns:r="http://schemas.openxmlformats.org/officeDocument/2006/relationships" r:dm="rId2" r:lo="rId3" r:qs="rId4" r:cs="rId5"/>
-          </a:graphicData>
-        </a:graphic>
-      </p:graphicFrame>
+          <p:cNvGrpSpPr/>
+          <p:nvPr/>
+        </p:nvGrpSpPr>
+        <p:grpSpPr>
+          <a:xfrm>
+            <a:off x="990600" y="2875847"/>
+            <a:ext cx="9942319" cy="3677353"/>
+            <a:chOff x="990600" y="2987854"/>
+            <a:chExt cx="9942319" cy="3677353"/>
+          </a:xfrm>
+        </p:grpSpPr>
+        <p:pic>
+          <p:nvPicPr>
+            <p:cNvPr id="1026" name="Picture 2" descr="Convolutional_NN 3">
+              <a:extLst>
+                <a:ext uri="{FF2B5EF4-FFF2-40B4-BE49-F238E27FC236}">
+                  <a16:creationId xmlns:a16="http://schemas.microsoft.com/office/drawing/2014/main" id="{5ADCBD79-8DAD-479E-37E5-5F3FB611FB32}"/>
+                </a:ext>
+              </a:extLst>
+            </p:cNvPr>
+            <p:cNvPicPr>
+              <a:picLocks noChangeAspect="1" noChangeArrowheads="1"/>
+            </p:cNvPicPr>
+            <p:nvPr/>
+          </p:nvPicPr>
+          <p:blipFill>
+            <a:blip r:embed="rId2">
+              <a:extLst>
+                <a:ext uri="{28A0092B-C50C-407E-A947-70E740481C1C}">
+                  <a14:useLocalDpi xmlns:a14="http://schemas.microsoft.com/office/drawing/2010/main" val="0"/>
+                </a:ext>
+              </a:extLst>
+            </a:blip>
+            <a:srcRect/>
+            <a:stretch>
+              <a:fillRect/>
+            </a:stretch>
+          </p:blipFill>
+          <p:spPr bwMode="auto">
+            <a:xfrm>
+              <a:off x="4114800" y="2987854"/>
+              <a:ext cx="4491038" cy="3417203"/>
+            </a:xfrm>
+            <a:prstGeom prst="rect">
+              <a:avLst/>
+            </a:prstGeom>
+            <a:noFill/>
+            <a:extLst>
+              <a:ext uri="{909E8E84-426E-40DD-AFC4-6F175D3DCCD1}">
+                <a14:hiddenFill xmlns:a14="http://schemas.microsoft.com/office/drawing/2010/main">
+                  <a:solidFill>
+                    <a:srgbClr val="FFFFFF"/>
+                  </a:solidFill>
+                </a14:hiddenFill>
+              </a:ext>
+            </a:extLst>
+          </p:spPr>
+        </p:pic>
+        <p:sp>
+          <p:nvSpPr>
+            <p:cNvPr id="5" name="TextBox 4">
+              <a:extLst>
+                <a:ext uri="{FF2B5EF4-FFF2-40B4-BE49-F238E27FC236}">
+                  <a16:creationId xmlns:a16="http://schemas.microsoft.com/office/drawing/2014/main" id="{B9453A1E-6BB2-1E5B-5D32-BDD6CEFC3125}"/>
+                </a:ext>
+              </a:extLst>
+            </p:cNvPr>
+            <p:cNvSpPr txBox="1"/>
+            <p:nvPr/>
+          </p:nvSpPr>
+          <p:spPr>
+            <a:xfrm>
+              <a:off x="2607730" y="6403597"/>
+              <a:ext cx="7391807" cy="261610"/>
+            </a:xfrm>
+            <a:prstGeom prst="rect">
+              <a:avLst/>
+            </a:prstGeom>
+            <a:noFill/>
+          </p:spPr>
+          <p:txBody>
+            <a:bodyPr wrap="square">
+              <a:spAutoFit/>
+            </a:bodyPr>
+            <a:lstStyle/>
+            <a:p>
+              <a:pPr algn="ctr"/>
+              <a:r>
+                <a:rPr lang="en-US" sz="1100" dirty="0"/>
+                <a:t>Source: </a:t>
+              </a:r>
+              <a:r>
+                <a:rPr lang="en-US" sz="1100" dirty="0">
+                  <a:hlinkClick r:id="rId3"/>
+                </a:rPr>
+                <a:t>https://robohub.org/artificial-general-intelligence-that-plays-atari-video-games-how-did-deepmind-do-it/</a:t>
+              </a:r>
+              <a:r>
+                <a:rPr lang="en-US" sz="1100" dirty="0"/>
+                <a:t> </a:t>
+              </a:r>
+            </a:p>
+          </p:txBody>
+        </p:sp>
+        <p:pic>
+          <p:nvPicPr>
+            <p:cNvPr id="1030" name="Picture 6" descr="Atari CX40 joystick - Wikipedia">
+              <a:extLst>
+                <a:ext uri="{FF2B5EF4-FFF2-40B4-BE49-F238E27FC236}">
+                  <a16:creationId xmlns:a16="http://schemas.microsoft.com/office/drawing/2014/main" id="{CDA4C143-D957-2586-E284-8E018FAED359}"/>
+                </a:ext>
+              </a:extLst>
+            </p:cNvPr>
+            <p:cNvPicPr>
+              <a:picLocks noChangeAspect="1" noChangeArrowheads="1"/>
+            </p:cNvPicPr>
+            <p:nvPr/>
+          </p:nvPicPr>
+          <p:blipFill>
+            <a:blip r:embed="rId4" cstate="print">
+              <a:extLst>
+                <a:ext uri="{28A0092B-C50C-407E-A947-70E740481C1C}">
+                  <a14:useLocalDpi xmlns:a14="http://schemas.microsoft.com/office/drawing/2010/main" val="0"/>
+                </a:ext>
+              </a:extLst>
+            </a:blip>
+            <a:srcRect/>
+            <a:stretch>
+              <a:fillRect/>
+            </a:stretch>
+          </p:blipFill>
+          <p:spPr bwMode="auto">
+            <a:xfrm>
+              <a:off x="9445635" y="4163055"/>
+              <a:ext cx="1033462" cy="1066800"/>
+            </a:xfrm>
+            <a:prstGeom prst="rect">
+              <a:avLst/>
+            </a:prstGeom>
+            <a:noFill/>
+            <a:extLst>
+              <a:ext uri="{909E8E84-426E-40DD-AFC4-6F175D3DCCD1}">
+                <a14:hiddenFill xmlns:a14="http://schemas.microsoft.com/office/drawing/2010/main">
+                  <a:solidFill>
+                    <a:srgbClr val="FFFFFF"/>
+                  </a:solidFill>
+                </a14:hiddenFill>
+              </a:ext>
+            </a:extLst>
+          </p:spPr>
+        </p:pic>
+        <p:sp>
+          <p:nvSpPr>
+            <p:cNvPr id="6" name="Arrow: Right 5">
+              <a:extLst>
+                <a:ext uri="{FF2B5EF4-FFF2-40B4-BE49-F238E27FC236}">
+                  <a16:creationId xmlns:a16="http://schemas.microsoft.com/office/drawing/2014/main" id="{DECDA8BF-D112-8C0D-6B8C-3A2F41631A39}"/>
+                </a:ext>
+              </a:extLst>
+            </p:cNvPr>
+            <p:cNvSpPr/>
+            <p:nvPr/>
+          </p:nvSpPr>
+          <p:spPr>
+            <a:xfrm>
+              <a:off x="3386138" y="4239255"/>
+              <a:ext cx="762000" cy="914400"/>
+            </a:xfrm>
+            <a:prstGeom prst="rightArrow">
+              <a:avLst/>
+            </a:prstGeom>
+          </p:spPr>
+          <p:style>
+            <a:lnRef idx="2">
+              <a:schemeClr val="accent1">
+                <a:shade val="15000"/>
+              </a:schemeClr>
+            </a:lnRef>
+            <a:fillRef idx="1">
+              <a:schemeClr val="accent1"/>
+            </a:fillRef>
+            <a:effectRef idx="0">
+              <a:schemeClr val="accent1"/>
+            </a:effectRef>
+            <a:fontRef idx="minor">
+              <a:schemeClr val="lt1"/>
+            </a:fontRef>
+          </p:style>
+          <p:txBody>
+            <a:bodyPr rtlCol="0" anchor="ctr"/>
+            <a:lstStyle/>
+            <a:p>
+              <a:pPr algn="ctr"/>
+              <a:endParaRPr lang="en-US"/>
+            </a:p>
+          </p:txBody>
+        </p:sp>
+        <p:sp>
+          <p:nvSpPr>
+            <p:cNvPr id="7" name="Arrow: Right 6">
+              <a:extLst>
+                <a:ext uri="{FF2B5EF4-FFF2-40B4-BE49-F238E27FC236}">
+                  <a16:creationId xmlns:a16="http://schemas.microsoft.com/office/drawing/2014/main" id="{15260B91-9AE5-8437-9B3F-58C23833A0F1}"/>
+                </a:ext>
+              </a:extLst>
+            </p:cNvPr>
+            <p:cNvSpPr/>
+            <p:nvPr/>
+          </p:nvSpPr>
+          <p:spPr>
+            <a:xfrm>
+              <a:off x="8382000" y="4239255"/>
+              <a:ext cx="762000" cy="914400"/>
+            </a:xfrm>
+            <a:prstGeom prst="rightArrow">
+              <a:avLst/>
+            </a:prstGeom>
+          </p:spPr>
+          <p:style>
+            <a:lnRef idx="2">
+              <a:schemeClr val="accent1">
+                <a:shade val="15000"/>
+              </a:schemeClr>
+            </a:lnRef>
+            <a:fillRef idx="1">
+              <a:schemeClr val="accent1"/>
+            </a:fillRef>
+            <a:effectRef idx="0">
+              <a:schemeClr val="accent1"/>
+            </a:effectRef>
+            <a:fontRef idx="minor">
+              <a:schemeClr val="lt1"/>
+            </a:fontRef>
+          </p:style>
+          <p:txBody>
+            <a:bodyPr rtlCol="0" anchor="ctr"/>
+            <a:lstStyle/>
+            <a:p>
+              <a:pPr algn="ctr"/>
+              <a:endParaRPr lang="en-US"/>
+            </a:p>
+          </p:txBody>
+        </p:sp>
+        <p:pic>
+          <p:nvPicPr>
+            <p:cNvPr id="1032" name="Picture 8" descr="Breakout (Breakaway IV) – October 1978 | Atari Archive">
+              <a:extLst>
+                <a:ext uri="{FF2B5EF4-FFF2-40B4-BE49-F238E27FC236}">
+                  <a16:creationId xmlns:a16="http://schemas.microsoft.com/office/drawing/2014/main" id="{71FDAB80-A12D-088D-8E38-AD218A9A5D3F}"/>
+                </a:ext>
+              </a:extLst>
+            </p:cNvPr>
+            <p:cNvPicPr>
+              <a:picLocks noChangeAspect="1" noChangeArrowheads="1"/>
+            </p:cNvPicPr>
+            <p:nvPr/>
+          </p:nvPicPr>
+          <p:blipFill>
+            <a:blip r:embed="rId5" cstate="print">
+              <a:extLst>
+                <a:ext uri="{BEBA8EAE-BF5A-486C-A8C5-ECC9F3942E4B}">
+                  <a14:imgProps xmlns:a14="http://schemas.microsoft.com/office/drawing/2010/main">
+                    <a14:imgLayer r:embed="rId6">
+                      <a14:imgEffect>
+                        <a14:brightnessContrast contrast="-40000"/>
+                      </a14:imgEffect>
+                    </a14:imgLayer>
+                  </a14:imgProps>
+                </a:ext>
+                <a:ext uri="{28A0092B-C50C-407E-A947-70E740481C1C}">
+                  <a14:useLocalDpi xmlns:a14="http://schemas.microsoft.com/office/drawing/2010/main" val="0"/>
+                </a:ext>
+              </a:extLst>
+            </a:blip>
+            <a:srcRect/>
+            <a:stretch>
+              <a:fillRect/>
+            </a:stretch>
+          </p:blipFill>
+          <p:spPr bwMode="auto">
+            <a:xfrm>
+              <a:off x="1232690" y="3983564"/>
+              <a:ext cx="1733550" cy="1425782"/>
+            </a:xfrm>
+            <a:prstGeom prst="rect">
+              <a:avLst/>
+            </a:prstGeom>
+            <a:noFill/>
+            <a:extLst>
+              <a:ext uri="{909E8E84-426E-40DD-AFC4-6F175D3DCCD1}">
+                <a14:hiddenFill xmlns:a14="http://schemas.microsoft.com/office/drawing/2010/main">
+                  <a:solidFill>
+                    <a:srgbClr val="FFFFFF"/>
+                  </a:solidFill>
+                </a14:hiddenFill>
+              </a:ext>
+            </a:extLst>
+          </p:spPr>
+        </p:pic>
+        <p:sp>
+          <p:nvSpPr>
+            <p:cNvPr id="8" name="TextBox 7">
+              <a:extLst>
+                <a:ext uri="{FF2B5EF4-FFF2-40B4-BE49-F238E27FC236}">
+                  <a16:creationId xmlns:a16="http://schemas.microsoft.com/office/drawing/2014/main" id="{4503707F-E44A-F38A-2A8F-0F489817CB73}"/>
+                </a:ext>
+              </a:extLst>
+            </p:cNvPr>
+            <p:cNvSpPr txBox="1"/>
+            <p:nvPr/>
+          </p:nvSpPr>
+          <p:spPr>
+            <a:xfrm>
+              <a:off x="990600" y="5426660"/>
+              <a:ext cx="2133600" cy="369332"/>
+            </a:xfrm>
+            <a:prstGeom prst="rect">
+              <a:avLst/>
+            </a:prstGeom>
+            <a:noFill/>
+          </p:spPr>
+          <p:txBody>
+            <a:bodyPr wrap="square" rtlCol="0">
+              <a:spAutoFit/>
+            </a:bodyPr>
+            <a:lstStyle/>
+            <a:p>
+              <a:r>
+                <a:rPr lang="en-US" dirty="0"/>
+                <a:t>Input features: Pixels</a:t>
+              </a:r>
+            </a:p>
+          </p:txBody>
+        </p:sp>
+        <p:sp>
+          <p:nvSpPr>
+            <p:cNvPr id="9" name="TextBox 8">
+              <a:extLst>
+                <a:ext uri="{FF2B5EF4-FFF2-40B4-BE49-F238E27FC236}">
+                  <a16:creationId xmlns:a16="http://schemas.microsoft.com/office/drawing/2014/main" id="{1A020909-1ED5-0C5F-9D03-CA9B28106AE8}"/>
+                </a:ext>
+              </a:extLst>
+            </p:cNvPr>
+            <p:cNvSpPr txBox="1"/>
+            <p:nvPr/>
+          </p:nvSpPr>
+          <p:spPr>
+            <a:xfrm>
+              <a:off x="9218419" y="5218438"/>
+              <a:ext cx="1714500" cy="369332"/>
+            </a:xfrm>
+            <a:prstGeom prst="rect">
+              <a:avLst/>
+            </a:prstGeom>
+            <a:noFill/>
+          </p:spPr>
+          <p:txBody>
+            <a:bodyPr wrap="square" rtlCol="0">
+              <a:spAutoFit/>
+            </a:bodyPr>
+            <a:lstStyle/>
+            <a:p>
+              <a:r>
+                <a:rPr lang="en-US" dirty="0"/>
+                <a:t>Output: Actions</a:t>
+              </a:r>
+            </a:p>
+          </p:txBody>
+        </p:sp>
+      </p:grpSp>
     </p:spTree>
     <p:extLst>
       <p:ext uri="{BB962C8B-B14F-4D97-AF65-F5344CB8AC3E}">
-        <p14:creationId xmlns:p14="http://schemas.microsoft.com/office/powerpoint/2010/main" val="2182240887"/>
+        <p14:creationId xmlns:p14="http://schemas.microsoft.com/office/powerpoint/2010/main" val="1668925761"/>
       </p:ext>
     </p:extLst>
   </p:cSld>
@@ -44902,7 +42339,7 @@
               </a:ln>
               <a:extLst>
                 <a:ext uri="{AF507438-7753-43e0-B8FC-AC1667EBCBE1}">
-                  <a14:hiddenEffects xmlns:a14="http://schemas.microsoft.com/office/drawing/2010/main" xmlns="">
+                  <a14:hiddenEffects xmlns="" xmlns:a14="http://schemas.microsoft.com/office/drawing/2010/main">
                     <a:effectLst>
                       <a:outerShdw dist="35921" dir="2700000" algn="ctr" rotWithShape="0">
                         <a:schemeClr val="bg2"/>
@@ -44984,14 +42421,14 @@
               <a:effectLst/>
               <a:extLst>
                 <a:ext uri="{909E8E84-426E-40dd-AFC4-6F175D3DCCD1}">
-                  <a14:hiddenFill xmlns:a14="http://schemas.microsoft.com/office/drawing/2010/main" xmlns="">
+                  <a14:hiddenFill xmlns="" xmlns:a14="http://schemas.microsoft.com/office/drawing/2010/main">
                     <a:solidFill>
                       <a:schemeClr val="accent1"/>
                     </a:solidFill>
                   </a14:hiddenFill>
                 </a:ext>
                 <a:ext uri="{91240B29-F687-4f45-9708-019B960494DF}">
-                  <a14:hiddenLine xmlns:a14="http://schemas.microsoft.com/office/drawing/2010/main" xmlns="" w="9525">
+                  <a14:hiddenLine xmlns="" xmlns:a14="http://schemas.microsoft.com/office/drawing/2010/main" w="9525">
                     <a:solidFill>
                       <a:schemeClr val="tx1"/>
                     </a:solidFill>
@@ -45001,7 +42438,7 @@
                   </a14:hiddenLine>
                 </a:ext>
                 <a:ext uri="{AF507438-7753-43e0-B8FC-AC1667EBCBE1}">
-                  <a14:hiddenEffects xmlns:a14="http://schemas.microsoft.com/office/drawing/2010/main" xmlns="">
+                  <a14:hiddenEffects xmlns="" xmlns:a14="http://schemas.microsoft.com/office/drawing/2010/main">
                     <a:effectLst>
                       <a:outerShdw dist="35921" dir="2700000" algn="ctr" rotWithShape="0">
                         <a:schemeClr val="bg2"/>
@@ -45042,7 +42479,7 @@
               <a:effectLst/>
               <a:extLst>
                 <a:ext uri="{AF507438-7753-43e0-B8FC-AC1667EBCBE1}">
-                  <a14:hiddenEffects xmlns:a14="http://schemas.microsoft.com/office/drawing/2010/main" xmlns="">
+                  <a14:hiddenEffects xmlns="" xmlns:a14="http://schemas.microsoft.com/office/drawing/2010/main">
                     <a:effectLst>
                       <a:outerShdw dist="35921" dir="2700000" algn="ctr" rotWithShape="0">
                         <a:schemeClr val="bg2"/>
@@ -45090,7 +42527,7 @@
               <a:effectLst/>
               <a:extLst>
                 <a:ext uri="{AF507438-7753-43e0-B8FC-AC1667EBCBE1}">
-                  <a14:hiddenEffects xmlns:a14="http://schemas.microsoft.com/office/drawing/2010/main" xmlns="">
+                  <a14:hiddenEffects xmlns="" xmlns:a14="http://schemas.microsoft.com/office/drawing/2010/main">
                     <a:effectLst>
                       <a:outerShdw dist="35921" dir="2700000" algn="ctr" rotWithShape="0">
                         <a:schemeClr val="bg2"/>
@@ -45158,14 +42595,14 @@
               <a:effectLst/>
               <a:extLst>
                 <a:ext uri="{909E8E84-426E-40dd-AFC4-6F175D3DCCD1}">
-                  <a14:hiddenFill xmlns:a14="http://schemas.microsoft.com/office/drawing/2010/main" xmlns="">
+                  <a14:hiddenFill xmlns="" xmlns:a14="http://schemas.microsoft.com/office/drawing/2010/main">
                     <a:solidFill>
                       <a:schemeClr val="accent1"/>
                     </a:solidFill>
                   </a14:hiddenFill>
                 </a:ext>
                 <a:ext uri="{91240B29-F687-4f45-9708-019B960494DF}">
-                  <a14:hiddenLine xmlns:a14="http://schemas.microsoft.com/office/drawing/2010/main" xmlns="" w="9525">
+                  <a14:hiddenLine xmlns="" xmlns:a14="http://schemas.microsoft.com/office/drawing/2010/main" w="9525">
                     <a:solidFill>
                       <a:schemeClr val="tx1"/>
                     </a:solidFill>
@@ -45175,7 +42612,7 @@
                   </a14:hiddenLine>
                 </a:ext>
                 <a:ext uri="{AF507438-7753-43e0-B8FC-AC1667EBCBE1}">
-                  <a14:hiddenEffects xmlns:a14="http://schemas.microsoft.com/office/drawing/2010/main" xmlns="">
+                  <a14:hiddenEffects xmlns="" xmlns:a14="http://schemas.microsoft.com/office/drawing/2010/main">
                     <a:effectLst>
                       <a:outerShdw dist="35921" dir="2700000" algn="ctr" rotWithShape="0">
                         <a:schemeClr val="bg2"/>
@@ -48165,7 +45602,7 @@
             </a:ln>
             <a:extLst>
               <a:ext uri="{AF507438-7753-43e0-B8FC-AC1667EBCBE1}">
-                <a14:hiddenEffects xmlns:a14="http://schemas.microsoft.com/office/drawing/2010/main" xmlns="">
+                <a14:hiddenEffects xmlns="" xmlns:a14="http://schemas.microsoft.com/office/drawing/2010/main">
                   <a:effectLst>
                     <a:outerShdw dist="35921" dir="2700000" algn="ctr" rotWithShape="0">
                       <a:schemeClr val="bg2"/>
@@ -48233,7 +45670,7 @@
             <a:effectLst/>
             <a:extLst>
               <a:ext uri="{AF507438-7753-43e0-B8FC-AC1667EBCBE1}">
-                <a14:hiddenEffects xmlns:a14="http://schemas.microsoft.com/office/drawing/2010/main" xmlns="">
+                <a14:hiddenEffects xmlns="" xmlns:a14="http://schemas.microsoft.com/office/drawing/2010/main">
                   <a:effectLst>
                     <a:outerShdw dist="35921" dir="2700000" algn="ctr" rotWithShape="0">
                       <a:schemeClr val="bg2"/>
@@ -48287,7 +45724,7 @@
             <a:effectLst/>
             <a:extLst>
               <a:ext uri="{AF507438-7753-43e0-B8FC-AC1667EBCBE1}">
-                <a14:hiddenEffects xmlns:a14="http://schemas.microsoft.com/office/drawing/2010/main" xmlns="">
+                <a14:hiddenEffects xmlns="" xmlns:a14="http://schemas.microsoft.com/office/drawing/2010/main">
                   <a:effectLst>
                     <a:outerShdw dist="35921" dir="2700000" algn="ctr" rotWithShape="0">
                       <a:schemeClr val="bg2"/>
@@ -48340,12 +45777,12 @@
             <a:effectLst/>
             <a:extLst>
               <a:ext uri="{909E8E84-426E-40dd-AFC4-6F175D3DCCD1}">
-                <a14:hiddenFill xmlns:a14="http://schemas.microsoft.com/office/drawing/2010/main" xmlns="">
+                <a14:hiddenFill xmlns="" xmlns:a14="http://schemas.microsoft.com/office/drawing/2010/main">
                   <a:noFill/>
                 </a14:hiddenFill>
               </a:ext>
               <a:ext uri="{AF507438-7753-43e0-B8FC-AC1667EBCBE1}">
-                <a14:hiddenEffects xmlns:a14="http://schemas.microsoft.com/office/drawing/2010/main" xmlns="">
+                <a14:hiddenEffects xmlns="" xmlns:a14="http://schemas.microsoft.com/office/drawing/2010/main">
                   <a:effectLst>
                     <a:outerShdw dist="35921" dir="2700000" algn="ctr" rotWithShape="0">
                       <a:schemeClr val="bg2"/>
@@ -48419,14 +45856,14 @@
             <a:effectLst/>
             <a:extLst>
               <a:ext uri="{909E8E84-426E-40dd-AFC4-6F175D3DCCD1}">
-                <a14:hiddenFill xmlns:a14="http://schemas.microsoft.com/office/drawing/2010/main" xmlns="">
+                <a14:hiddenFill xmlns="" xmlns:a14="http://schemas.microsoft.com/office/drawing/2010/main">
                   <a:solidFill>
                     <a:schemeClr val="accent1"/>
                   </a:solidFill>
                 </a14:hiddenFill>
               </a:ext>
               <a:ext uri="{91240B29-F687-4f45-9708-019B960494DF}">
-                <a14:hiddenLine xmlns:a14="http://schemas.microsoft.com/office/drawing/2010/main" xmlns="" w="9525">
+                <a14:hiddenLine xmlns="" xmlns:a14="http://schemas.microsoft.com/office/drawing/2010/main" w="9525">
                   <a:solidFill>
                     <a:schemeClr val="tx1"/>
                   </a:solidFill>
@@ -48436,7 +45873,7 @@
                 </a14:hiddenLine>
               </a:ext>
               <a:ext uri="{AF507438-7753-43e0-B8FC-AC1667EBCBE1}">
-                <a14:hiddenEffects xmlns:a14="http://schemas.microsoft.com/office/drawing/2010/main" xmlns="">
+                <a14:hiddenEffects xmlns="" xmlns:a14="http://schemas.microsoft.com/office/drawing/2010/main">
                   <a:effectLst>
                     <a:outerShdw dist="35921" dir="2700000" algn="ctr" rotWithShape="0">
                       <a:schemeClr val="bg2"/>

--- a/slides/19_ML_intro.pptx
+++ b/slides/19_ML_intro.pptx
@@ -25,9 +25,9 @@
     <p:sldId id="485" r:id="rId13"/>
     <p:sldId id="479" r:id="rId14"/>
     <p:sldId id="498" r:id="rId15"/>
-    <p:sldId id="486" r:id="rId16"/>
-    <p:sldId id="432" r:id="rId17"/>
-    <p:sldId id="512" r:id="rId18"/>
+    <p:sldId id="512" r:id="rId16"/>
+    <p:sldId id="486" r:id="rId17"/>
+    <p:sldId id="432" r:id="rId18"/>
     <p:sldId id="499" r:id="rId19"/>
     <p:sldId id="500" r:id="rId20"/>
     <p:sldId id="487" r:id="rId21"/>
@@ -41,7 +41,7 @@
     <p:sldId id="490" r:id="rId29"/>
     <p:sldId id="491" r:id="rId30"/>
     <p:sldId id="506" r:id="rId31"/>
-    <p:sldId id="516" r:id="rId32"/>
+    <p:sldId id="517" r:id="rId32"/>
     <p:sldId id="508" r:id="rId33"/>
     <p:sldId id="515" r:id="rId34"/>
   </p:sldIdLst>
@@ -172,9 +172,9 @@
         <p14:section name="Data" id="{16F72C8D-4EB9-41F6-B741-77F6A0986143}">
           <p14:sldIdLst>
             <p14:sldId id="498"/>
+            <p14:sldId id="512"/>
             <p14:sldId id="486"/>
             <p14:sldId id="432"/>
-            <p14:sldId id="512"/>
           </p14:sldIdLst>
         </p14:section>
         <p14:section name="Training and Testing" id="{C04CA568-4756-4F1A-A0CF-F0BB46D2F97A}">
@@ -196,7 +196,7 @@
             <p14:sldId id="490"/>
             <p14:sldId id="491"/>
             <p14:sldId id="506"/>
-            <p14:sldId id="516"/>
+            <p14:sldId id="517"/>
           </p14:sldIdLst>
         </p14:section>
         <p14:section name="How are models used in AI" id="{C564B212-4CB4-4076-B86F-55C18B0F30DD}">
@@ -6565,8 +6565,8 @@
       </dsp:nvSpPr>
       <dsp:spPr>
         <a:xfrm>
-          <a:off x="706" y="1051559"/>
-          <a:ext cx="1679197" cy="1402080"/>
+          <a:off x="233" y="1051559"/>
+          <a:ext cx="1679247" cy="1402080"/>
         </a:xfrm>
         <a:prstGeom prst="roundRect">
           <a:avLst/>
@@ -6632,8 +6632,8 @@
         </a:p>
       </dsp:txBody>
       <dsp:txXfrm>
-        <a:off x="69150" y="1120003"/>
-        <a:ext cx="1542309" cy="1265192"/>
+        <a:off x="68677" y="1120003"/>
+        <a:ext cx="1542359" cy="1265192"/>
       </dsp:txXfrm>
     </dsp:sp>
     <dsp:sp modelId="{0AB9704D-A203-4650-92A1-56E17AD50F58}">
@@ -6643,8 +6643,8 @@
       </dsp:nvSpPr>
       <dsp:spPr>
         <a:xfrm>
-          <a:off x="1767704" y="1051559"/>
-          <a:ext cx="1679197" cy="1402080"/>
+          <a:off x="1767410" y="1051559"/>
+          <a:ext cx="1679247" cy="1402080"/>
         </a:xfrm>
         <a:prstGeom prst="roundRect">
           <a:avLst/>
@@ -6710,8 +6710,8 @@
         </a:p>
       </dsp:txBody>
       <dsp:txXfrm>
-        <a:off x="1836148" y="1120003"/>
-        <a:ext cx="1542309" cy="1265192"/>
+        <a:off x="1835854" y="1120003"/>
+        <a:ext cx="1542359" cy="1265192"/>
       </dsp:txXfrm>
     </dsp:sp>
     <dsp:sp modelId="{5FE25C4C-2BC5-4F54-BE1F-F3BEC29E749D}">
@@ -6721,8 +6721,8 @@
       </dsp:nvSpPr>
       <dsp:spPr>
         <a:xfrm>
-          <a:off x="3534702" y="1051559"/>
-          <a:ext cx="1679197" cy="1402080"/>
+          <a:off x="3534587" y="1051559"/>
+          <a:ext cx="1679247" cy="1402080"/>
         </a:xfrm>
         <a:prstGeom prst="roundRect">
           <a:avLst/>
@@ -6788,8 +6788,8 @@
         </a:p>
       </dsp:txBody>
       <dsp:txXfrm>
-        <a:off x="3603146" y="1120003"/>
-        <a:ext cx="1542309" cy="1265192"/>
+        <a:off x="3603031" y="1120003"/>
+        <a:ext cx="1542359" cy="1265192"/>
       </dsp:txXfrm>
     </dsp:sp>
     <dsp:sp modelId="{754C964E-78AB-4328-868B-C63F78DDBC38}">
@@ -6799,8 +6799,8 @@
       </dsp:nvSpPr>
       <dsp:spPr>
         <a:xfrm>
-          <a:off x="5301700" y="1051559"/>
-          <a:ext cx="1679197" cy="1402080"/>
+          <a:off x="5301764" y="1051559"/>
+          <a:ext cx="1679247" cy="1402080"/>
         </a:xfrm>
         <a:prstGeom prst="roundRect">
           <a:avLst/>
@@ -6866,8 +6866,8 @@
         </a:p>
       </dsp:txBody>
       <dsp:txXfrm>
-        <a:off x="5370144" y="1120003"/>
-        <a:ext cx="1542309" cy="1265192"/>
+        <a:off x="5370208" y="1120003"/>
+        <a:ext cx="1542359" cy="1265192"/>
       </dsp:txXfrm>
     </dsp:sp>
     <dsp:sp modelId="{98799300-0DD4-4960-A025-4ADACB2CE7BB}">
@@ -6877,8 +6877,8 @@
       </dsp:nvSpPr>
       <dsp:spPr>
         <a:xfrm>
-          <a:off x="7068698" y="1051559"/>
-          <a:ext cx="1679197" cy="1402080"/>
+          <a:off x="7068941" y="1051559"/>
+          <a:ext cx="1679247" cy="1402080"/>
         </a:xfrm>
         <a:prstGeom prst="roundRect">
           <a:avLst/>
@@ -6944,8 +6944,8 @@
         </a:p>
       </dsp:txBody>
       <dsp:txXfrm>
-        <a:off x="7137142" y="1120003"/>
-        <a:ext cx="1542309" cy="1265192"/>
+        <a:off x="7137385" y="1120003"/>
+        <a:ext cx="1542359" cy="1265192"/>
       </dsp:txXfrm>
     </dsp:sp>
     <dsp:sp modelId="{054AE80D-D322-4C7E-8CAE-447DBCBB2AA6}">
@@ -6955,8 +6955,8 @@
       </dsp:nvSpPr>
       <dsp:spPr>
         <a:xfrm>
-          <a:off x="8835696" y="1051559"/>
-          <a:ext cx="1679197" cy="1402080"/>
+          <a:off x="8836119" y="1051559"/>
+          <a:ext cx="1679247" cy="1402080"/>
         </a:xfrm>
         <a:prstGeom prst="roundRect">
           <a:avLst/>
@@ -7022,8 +7022,8 @@
         </a:p>
       </dsp:txBody>
       <dsp:txXfrm>
-        <a:off x="8904140" y="1120003"/>
-        <a:ext cx="1542309" cy="1265192"/>
+        <a:off x="8904563" y="1120003"/>
+        <a:ext cx="1542359" cy="1265192"/>
       </dsp:txXfrm>
     </dsp:sp>
   </dsp:spTree>
@@ -15387,7 +15387,7 @@
             </a:ln>
             <a:extLst>
               <a:ext uri="{AF507438-7753-43e0-B8FC-AC1667EBCBE1}">
-                <a14:hiddenEffects xmlns="" xmlns:a14="http://schemas.microsoft.com/office/drawing/2010/main">
+                <a14:hiddenEffects xmlns:a14="http://schemas.microsoft.com/office/drawing/2010/main" xmlns="">
                   <a:effectLst>
                     <a:outerShdw dist="35921" dir="2700000" algn="ctr" rotWithShape="0">
                       <a:schemeClr val="bg2"/>
@@ -15455,7 +15455,7 @@
             <a:effectLst/>
             <a:extLst>
               <a:ext uri="{AF507438-7753-43e0-B8FC-AC1667EBCBE1}">
-                <a14:hiddenEffects xmlns="" xmlns:a14="http://schemas.microsoft.com/office/drawing/2010/main">
+                <a14:hiddenEffects xmlns:a14="http://schemas.microsoft.com/office/drawing/2010/main" xmlns="">
                   <a:effectLst>
                     <a:outerShdw dist="35921" dir="2700000" algn="ctr" rotWithShape="0">
                       <a:schemeClr val="bg2"/>
@@ -15509,7 +15509,7 @@
             <a:effectLst/>
             <a:extLst>
               <a:ext uri="{AF507438-7753-43e0-B8FC-AC1667EBCBE1}">
-                <a14:hiddenEffects xmlns="" xmlns:a14="http://schemas.microsoft.com/office/drawing/2010/main">
+                <a14:hiddenEffects xmlns:a14="http://schemas.microsoft.com/office/drawing/2010/main" xmlns="">
                   <a:effectLst>
                     <a:outerShdw dist="35921" dir="2700000" algn="ctr" rotWithShape="0">
                       <a:schemeClr val="bg2"/>
@@ -15562,12 +15562,12 @@
             <a:effectLst/>
             <a:extLst>
               <a:ext uri="{909E8E84-426E-40dd-AFC4-6F175D3DCCD1}">
-                <a14:hiddenFill xmlns="" xmlns:a14="http://schemas.microsoft.com/office/drawing/2010/main">
+                <a14:hiddenFill xmlns:a14="http://schemas.microsoft.com/office/drawing/2010/main" xmlns="">
                   <a:noFill/>
                 </a14:hiddenFill>
               </a:ext>
               <a:ext uri="{AF507438-7753-43e0-B8FC-AC1667EBCBE1}">
-                <a14:hiddenEffects xmlns="" xmlns:a14="http://schemas.microsoft.com/office/drawing/2010/main">
+                <a14:hiddenEffects xmlns:a14="http://schemas.microsoft.com/office/drawing/2010/main" xmlns="">
                   <a:effectLst>
                     <a:outerShdw dist="35921" dir="2700000" algn="ctr" rotWithShape="0">
                       <a:schemeClr val="bg2"/>
@@ -15641,14 +15641,14 @@
             <a:effectLst/>
             <a:extLst>
               <a:ext uri="{909E8E84-426E-40dd-AFC4-6F175D3DCCD1}">
-                <a14:hiddenFill xmlns="" xmlns:a14="http://schemas.microsoft.com/office/drawing/2010/main">
+                <a14:hiddenFill xmlns:a14="http://schemas.microsoft.com/office/drawing/2010/main" xmlns="">
                   <a:solidFill>
                     <a:schemeClr val="accent1"/>
                   </a:solidFill>
                 </a14:hiddenFill>
               </a:ext>
               <a:ext uri="{91240B29-F687-4f45-9708-019B960494DF}">
-                <a14:hiddenLine xmlns="" xmlns:a14="http://schemas.microsoft.com/office/drawing/2010/main" w="9525">
+                <a14:hiddenLine xmlns:a14="http://schemas.microsoft.com/office/drawing/2010/main" xmlns="" w="9525">
                   <a:solidFill>
                     <a:schemeClr val="tx1"/>
                   </a:solidFill>
@@ -15658,7 +15658,7 @@
                 </a14:hiddenLine>
               </a:ext>
               <a:ext uri="{AF507438-7753-43e0-B8FC-AC1667EBCBE1}">
-                <a14:hiddenEffects xmlns="" xmlns:a14="http://schemas.microsoft.com/office/drawing/2010/main">
+                <a14:hiddenEffects xmlns:a14="http://schemas.microsoft.com/office/drawing/2010/main" xmlns="">
                   <a:effectLst>
                     <a:outerShdw dist="35921" dir="2700000" algn="ctr" rotWithShape="0">
                       <a:schemeClr val="bg2"/>
@@ -16354,8 +16354,8 @@
           </a:p>
         </p:txBody>
       </p:sp>
-      <mc:AlternateContent xmlns:mc="http://schemas.openxmlformats.org/markup-compatibility/2006">
-        <mc:Choice xmlns:a14="http://schemas.microsoft.com/office/drawing/2010/main" Requires="a14">
+      <mc:AlternateContent xmlns:mc="http://schemas.openxmlformats.org/markup-compatibility/2006" xmlns:a14="http://schemas.microsoft.com/office/drawing/2010/main">
+        <mc:Choice Requires="a14">
           <p:sp>
             <p:nvSpPr>
               <p:cNvPr id="3" name="Content Placeholder 2">
@@ -16695,7 +16695,7 @@
                             <m:rPr>
                               <m:nor/>
                             </m:rPr>
-                            <a:rPr lang="en-US" dirty="0"/>
+                            <a:rPr lang="en-US" i="0" dirty="0"/>
                             <m:t> </m:t>
                           </m:r>
                           <m:r>
@@ -16847,7 +16847,7 @@
                             <m:rPr>
                               <m:nor/>
                             </m:rPr>
-                            <a:rPr lang="en-US" dirty="0"/>
+                            <a:rPr lang="en-US" i="0" dirty="0"/>
                             <m:t> </m:t>
                           </m:r>
                           <m:r>
@@ -17008,7 +17008,7 @@
                       <m:rPr>
                         <m:nor/>
                       </m:rPr>
-                      <a:rPr lang="en-US" dirty="0"/>
+                      <a:rPr lang="en-US" i="0" dirty="0"/>
                       <m:t> </m:t>
                     </m:r>
                     <m:r>
@@ -17154,7 +17154,7 @@
             </p:txBody>
           </p:sp>
         </mc:Choice>
-        <mc:Fallback>
+        <mc:Fallback xmlns="">
           <p:sp>
             <p:nvSpPr>
               <p:cNvPr id="3" name="Content Placeholder 2">
@@ -20037,6 +20037,709 @@
 <file path=ppt/slides/slide15.xml><?xml version="1.0" encoding="utf-8"?>
 <p:sld xmlns:a="http://schemas.openxmlformats.org/drawingml/2006/main" xmlns:r="http://schemas.openxmlformats.org/officeDocument/2006/relationships" xmlns:p="http://schemas.openxmlformats.org/presentationml/2006/main">
   <p:cSld>
+    <p:bg>
+      <p:bgPr>
+        <a:solidFill>
+          <a:schemeClr val="bg1"/>
+        </a:solidFill>
+        <a:effectLst/>
+      </p:bgPr>
+    </p:bg>
+    <p:spTree>
+      <p:nvGrpSpPr>
+        <p:cNvPr id="1" name=""/>
+        <p:cNvGrpSpPr/>
+        <p:nvPr/>
+      </p:nvGrpSpPr>
+      <p:grpSpPr>
+        <a:xfrm>
+          <a:off x="0" y="0"/>
+          <a:ext cx="0" cy="0"/>
+          <a:chOff x="0" y="0"/>
+          <a:chExt cx="0" cy="0"/>
+        </a:xfrm>
+      </p:grpSpPr>
+      <p:sp useBgFill="1">
+        <p:nvSpPr>
+          <p:cNvPr id="9" name="Rectangle 8">
+            <a:extLst>
+              <a:ext uri="{FF2B5EF4-FFF2-40B4-BE49-F238E27FC236}">
+                <a16:creationId xmlns:a16="http://schemas.microsoft.com/office/drawing/2014/main" id="{2C61293E-6EBE-43EF-A52C-9BEBFD7679D4}"/>
+              </a:ext>
+              <a:ext uri="{C183D7F6-B498-43B3-948B-1728B52AA6E4}">
+                <adec:decorative xmlns:adec="http://schemas.microsoft.com/office/drawing/2017/decorative" val="1"/>
+              </a:ext>
+            </a:extLst>
+          </p:cNvPr>
+          <p:cNvSpPr>
+            <a:spLocks noGrp="1" noRot="1" noChangeAspect="1" noMove="1" noResize="1" noEditPoints="1" noAdjustHandles="1" noChangeArrowheads="1" noChangeShapeType="1" noTextEdit="1"/>
+          </p:cNvSpPr>
+          <p:nvPr>
+            <p:extLst>
+              <p:ext uri="{386F3935-93C4-4BCD-93E2-E3B085C9AB24}">
+                <p16:designElem xmlns:p16="http://schemas.microsoft.com/office/powerpoint/2015/main" val="1"/>
+              </p:ext>
+            </p:extLst>
+          </p:nvPr>
+        </p:nvSpPr>
+        <p:spPr>
+          <a:xfrm>
+            <a:off x="0" y="0"/>
+            <a:ext cx="12188952" cy="6858000"/>
+          </a:xfrm>
+          <a:prstGeom prst="rect">
+            <a:avLst/>
+          </a:prstGeom>
+          <a:ln>
+            <a:noFill/>
+          </a:ln>
+        </p:spPr>
+        <p:style>
+          <a:lnRef idx="2">
+            <a:schemeClr val="accent1">
+              <a:shade val="50000"/>
+            </a:schemeClr>
+          </a:lnRef>
+          <a:fillRef idx="1">
+            <a:schemeClr val="accent1"/>
+          </a:fillRef>
+          <a:effectRef idx="0">
+            <a:schemeClr val="accent1"/>
+          </a:effectRef>
+          <a:fontRef idx="minor">
+            <a:schemeClr val="lt1"/>
+          </a:fontRef>
+        </p:style>
+        <p:txBody>
+          <a:bodyPr rtlCol="0" anchor="ctr"/>
+          <a:lstStyle/>
+          <a:p>
+            <a:pPr algn="ctr"/>
+            <a:endParaRPr lang="en-US"/>
+          </a:p>
+        </p:txBody>
+      </p:sp>
+      <p:sp>
+        <p:nvSpPr>
+          <p:cNvPr id="2" name="Title 1">
+            <a:extLst>
+              <a:ext uri="{FF2B5EF4-FFF2-40B4-BE49-F238E27FC236}">
+                <a16:creationId xmlns:a16="http://schemas.microsoft.com/office/drawing/2014/main" id="{B9ECC4B4-B349-0940-ED3F-4F1162E4E4B8}"/>
+              </a:ext>
+            </a:extLst>
+          </p:cNvPr>
+          <p:cNvSpPr>
+            <a:spLocks noGrp="1"/>
+          </p:cNvSpPr>
+          <p:nvPr>
+            <p:ph type="title"/>
+          </p:nvPr>
+        </p:nvSpPr>
+        <p:spPr>
+          <a:xfrm>
+            <a:off x="5297762" y="329184"/>
+            <a:ext cx="6251110" cy="1783080"/>
+          </a:xfrm>
+        </p:spPr>
+        <p:txBody>
+          <a:bodyPr anchor="b">
+            <a:normAutofit/>
+          </a:bodyPr>
+          <a:lstStyle/>
+          <a:p>
+            <a:r>
+              <a:rPr lang="en-US" sz="5400" dirty="0"/>
+              <a:t>Training Data in AI</a:t>
+            </a:r>
+          </a:p>
+        </p:txBody>
+      </p:sp>
+      <p:pic>
+        <p:nvPicPr>
+          <p:cNvPr id="5" name="Picture 4">
+            <a:extLst>
+              <a:ext uri="{FF2B5EF4-FFF2-40B4-BE49-F238E27FC236}">
+                <a16:creationId xmlns:a16="http://schemas.microsoft.com/office/drawing/2014/main" id="{ABAF83C4-D9A0-8275-81E7-14DF099D6D1E}"/>
+              </a:ext>
+              <a:ext uri="{C183D7F6-B498-43B3-948B-1728B52AA6E4}">
+                <adec:decorative xmlns:adec="http://schemas.microsoft.com/office/drawing/2017/decorative" val="1"/>
+              </a:ext>
+            </a:extLst>
+          </p:cNvPr>
+          <p:cNvPicPr>
+            <a:picLocks noChangeAspect="1"/>
+          </p:cNvPicPr>
+          <p:nvPr/>
+        </p:nvPicPr>
+        <p:blipFill>
+          <a:blip r:embed="rId2"/>
+          <a:srcRect l="14335" r="47465"/>
+          <a:stretch/>
+        </p:blipFill>
+        <p:spPr>
+          <a:xfrm>
+            <a:off x="1" y="10"/>
+            <a:ext cx="4657344" cy="6857990"/>
+          </a:xfrm>
+          <a:custGeom>
+            <a:avLst/>
+            <a:gdLst/>
+            <a:ahLst/>
+            <a:cxnLst/>
+            <a:rect l="l" t="t" r="r" b="b"/>
+            <a:pathLst>
+              <a:path w="4657344" h="6858000">
+                <a:moveTo>
+                  <a:pt x="0" y="0"/>
+                </a:moveTo>
+                <a:lnTo>
+                  <a:pt x="3429755" y="0"/>
+                </a:lnTo>
+                <a:lnTo>
+                  <a:pt x="3526016" y="148742"/>
+                </a:lnTo>
+                <a:cubicBezTo>
+                  <a:pt x="3657740" y="365513"/>
+                  <a:pt x="3777402" y="589569"/>
+                  <a:pt x="3886489" y="819975"/>
+                </a:cubicBezTo>
+                <a:cubicBezTo>
+                  <a:pt x="3891856" y="833492"/>
+                  <a:pt x="3900663" y="845393"/>
+                  <a:pt x="3912049" y="854514"/>
+                </a:cubicBezTo>
+                <a:cubicBezTo>
+                  <a:pt x="3897352" y="819849"/>
+                  <a:pt x="3883037" y="784928"/>
+                  <a:pt x="3868083" y="750263"/>
+                </a:cubicBezTo>
+                <a:cubicBezTo>
+                  <a:pt x="3806989" y="608712"/>
+                  <a:pt x="3742478" y="469145"/>
+                  <a:pt x="3674155" y="331786"/>
+                </a:cubicBezTo>
+                <a:lnTo>
+                  <a:pt x="3496656" y="0"/>
+                </a:lnTo>
+                <a:lnTo>
+                  <a:pt x="3554371" y="0"/>
+                </a:lnTo>
+                <a:lnTo>
+                  <a:pt x="3661621" y="196614"/>
+                </a:lnTo>
+                <a:cubicBezTo>
+                  <a:pt x="3856899" y="573253"/>
+                  <a:pt x="4021071" y="966066"/>
+                  <a:pt x="4161279" y="1371196"/>
+                </a:cubicBezTo>
+                <a:cubicBezTo>
+                  <a:pt x="4379525" y="2007265"/>
+                  <a:pt x="4530141" y="2664286"/>
+                  <a:pt x="4610660" y="3331516"/>
+                </a:cubicBezTo>
+                <a:cubicBezTo>
+                  <a:pt x="4652837" y="3672965"/>
+                  <a:pt x="4671625" y="4013908"/>
+                  <a:pt x="4645040" y="4357388"/>
+                </a:cubicBezTo>
+                <a:cubicBezTo>
+                  <a:pt x="4613599" y="4758899"/>
+                  <a:pt x="4566181" y="5157998"/>
+                  <a:pt x="4485789" y="5552906"/>
+                </a:cubicBezTo>
+                <a:cubicBezTo>
+                  <a:pt x="4397121" y="5988893"/>
+                  <a:pt x="4276748" y="6414594"/>
+                  <a:pt x="4117769" y="6828295"/>
+                </a:cubicBezTo>
+                <a:lnTo>
+                  <a:pt x="4105288" y="6858000"/>
+                </a:lnTo>
+                <a:lnTo>
+                  <a:pt x="4052520" y="6858000"/>
+                </a:lnTo>
+                <a:lnTo>
+                  <a:pt x="4059369" y="6841549"/>
+                </a:lnTo>
+                <a:cubicBezTo>
+                  <a:pt x="4147276" y="6614016"/>
+                  <a:pt x="4224193" y="6380817"/>
+                  <a:pt x="4291518" y="6142729"/>
+                </a:cubicBezTo>
+                <a:cubicBezTo>
+                  <a:pt x="4350055" y="5935370"/>
+                  <a:pt x="4393256" y="5723695"/>
+                  <a:pt x="4443357" y="5513923"/>
+                </a:cubicBezTo>
+                <a:cubicBezTo>
+                  <a:pt x="4444541" y="5502788"/>
+                  <a:pt x="4445137" y="5491601"/>
+                  <a:pt x="4445146" y="5480401"/>
+                </a:cubicBezTo>
+                <a:cubicBezTo>
+                  <a:pt x="4408465" y="5607635"/>
+                  <a:pt x="4379196" y="5719759"/>
+                  <a:pt x="4344559" y="5830359"/>
+                </a:cubicBezTo>
+                <a:cubicBezTo>
+                  <a:pt x="4254261" y="6118381"/>
+                  <a:pt x="4150112" y="6398531"/>
+                  <a:pt x="4031702" y="6670527"/>
+                </a:cubicBezTo>
+                <a:lnTo>
+                  <a:pt x="3943824" y="6858000"/>
+                </a:lnTo>
+                <a:lnTo>
+                  <a:pt x="0" y="6858000"/>
+                </a:lnTo>
+                <a:close/>
+              </a:path>
+            </a:pathLst>
+          </a:custGeom>
+        </p:spPr>
+      </p:pic>
+      <p:sp>
+        <p:nvSpPr>
+          <p:cNvPr id="11" name="sketchy line">
+            <a:extLst>
+              <a:ext uri="{FF2B5EF4-FFF2-40B4-BE49-F238E27FC236}">
+                <a16:creationId xmlns:a16="http://schemas.microsoft.com/office/drawing/2014/main" id="{21540236-BFD5-4A9D-8840-4703E7F76825}"/>
+              </a:ext>
+              <a:ext uri="{C183D7F6-B498-43B3-948B-1728B52AA6E4}">
+                <adec:decorative xmlns:adec="http://schemas.microsoft.com/office/drawing/2017/decorative" val="1"/>
+              </a:ext>
+            </a:extLst>
+          </p:cNvPr>
+          <p:cNvSpPr>
+            <a:spLocks noGrp="1" noRot="1" noChangeAspect="1" noMove="1" noResize="1" noEditPoints="1" noAdjustHandles="1" noChangeArrowheads="1" noChangeShapeType="1" noTextEdit="1"/>
+          </p:cNvSpPr>
+          <p:nvPr>
+            <p:extLst>
+              <p:ext uri="{386F3935-93C4-4BCD-93E2-E3B085C9AB24}">
+                <p16:designElem xmlns:p16="http://schemas.microsoft.com/office/powerpoint/2015/main" val="1"/>
+              </p:ext>
+            </p:extLst>
+          </p:nvPr>
+        </p:nvSpPr>
+        <p:spPr>
+          <a:xfrm>
+            <a:off x="5297762" y="2374947"/>
+            <a:ext cx="4243589" cy="18288"/>
+          </a:xfrm>
+          <a:custGeom>
+            <a:avLst/>
+            <a:gdLst>
+              <a:gd name="csX0" fmla="*/ 0 w 4243589"/>
+              <a:gd name="csY0" fmla="*/ 0 h 18288"/>
+              <a:gd name="csX1" fmla="*/ 478919 w 4243589"/>
+              <a:gd name="csY1" fmla="*/ 0 h 18288"/>
+              <a:gd name="csX2" fmla="*/ 957839 w 4243589"/>
+              <a:gd name="csY2" fmla="*/ 0 h 18288"/>
+              <a:gd name="csX3" fmla="*/ 1521630 w 4243589"/>
+              <a:gd name="csY3" fmla="*/ 0 h 18288"/>
+              <a:gd name="csX4" fmla="*/ 2212729 w 4243589"/>
+              <a:gd name="csY4" fmla="*/ 0 h 18288"/>
+              <a:gd name="csX5" fmla="*/ 2734084 w 4243589"/>
+              <a:gd name="csY5" fmla="*/ 0 h 18288"/>
+              <a:gd name="csX6" fmla="*/ 3255439 w 4243589"/>
+              <a:gd name="csY6" fmla="*/ 0 h 18288"/>
+              <a:gd name="csX7" fmla="*/ 4243589 w 4243589"/>
+              <a:gd name="csY7" fmla="*/ 0 h 18288"/>
+              <a:gd name="csX8" fmla="*/ 4243589 w 4243589"/>
+              <a:gd name="csY8" fmla="*/ 18288 h 18288"/>
+              <a:gd name="csX9" fmla="*/ 3594926 w 4243589"/>
+              <a:gd name="csY9" fmla="*/ 18288 h 18288"/>
+              <a:gd name="csX10" fmla="*/ 3073571 w 4243589"/>
+              <a:gd name="csY10" fmla="*/ 18288 h 18288"/>
+              <a:gd name="csX11" fmla="*/ 2552216 w 4243589"/>
+              <a:gd name="csY11" fmla="*/ 18288 h 18288"/>
+              <a:gd name="csX12" fmla="*/ 1903553 w 4243589"/>
+              <a:gd name="csY12" fmla="*/ 18288 h 18288"/>
+              <a:gd name="csX13" fmla="*/ 1212454 w 4243589"/>
+              <a:gd name="csY13" fmla="*/ 18288 h 18288"/>
+              <a:gd name="csX14" fmla="*/ 733535 w 4243589"/>
+              <a:gd name="csY14" fmla="*/ 18288 h 18288"/>
+              <a:gd name="csX15" fmla="*/ 0 w 4243589"/>
+              <a:gd name="csY15" fmla="*/ 18288 h 18288"/>
+              <a:gd name="csX16" fmla="*/ 0 w 4243589"/>
+              <a:gd name="csY16" fmla="*/ 0 h 18288"/>
+            </a:gdLst>
+            <a:ahLst/>
+            <a:cxnLst>
+              <a:cxn ang="0">
+                <a:pos x="csX0" y="csY0"/>
+              </a:cxn>
+              <a:cxn ang="0">
+                <a:pos x="csX1" y="csY1"/>
+              </a:cxn>
+              <a:cxn ang="0">
+                <a:pos x="csX2" y="csY2"/>
+              </a:cxn>
+              <a:cxn ang="0">
+                <a:pos x="csX3" y="csY3"/>
+              </a:cxn>
+              <a:cxn ang="0">
+                <a:pos x="csX4" y="csY4"/>
+              </a:cxn>
+              <a:cxn ang="0">
+                <a:pos x="csX5" y="csY5"/>
+              </a:cxn>
+              <a:cxn ang="0">
+                <a:pos x="csX6" y="csY6"/>
+              </a:cxn>
+              <a:cxn ang="0">
+                <a:pos x="csX7" y="csY7"/>
+              </a:cxn>
+              <a:cxn ang="0">
+                <a:pos x="csX8" y="csY8"/>
+              </a:cxn>
+              <a:cxn ang="0">
+                <a:pos x="csX9" y="csY9"/>
+              </a:cxn>
+              <a:cxn ang="0">
+                <a:pos x="csX10" y="csY10"/>
+              </a:cxn>
+              <a:cxn ang="0">
+                <a:pos x="csX11" y="csY11"/>
+              </a:cxn>
+              <a:cxn ang="0">
+                <a:pos x="csX12" y="csY12"/>
+              </a:cxn>
+              <a:cxn ang="0">
+                <a:pos x="csX13" y="csY13"/>
+              </a:cxn>
+              <a:cxn ang="0">
+                <a:pos x="csX14" y="csY14"/>
+              </a:cxn>
+              <a:cxn ang="0">
+                <a:pos x="csX15" y="csY15"/>
+              </a:cxn>
+              <a:cxn ang="0">
+                <a:pos x="csX16" y="csY16"/>
+              </a:cxn>
+            </a:cxnLst>
+            <a:rect l="l" t="t" r="r" b="b"/>
+            <a:pathLst>
+              <a:path w="4243589" h="18288" fill="none" extrusionOk="0">
+                <a:moveTo>
+                  <a:pt x="0" y="0"/>
+                </a:moveTo>
+                <a:cubicBezTo>
+                  <a:pt x="213395" y="-21006"/>
+                  <a:pt x="307421" y="-18116"/>
+                  <a:pt x="478919" y="0"/>
+                </a:cubicBezTo>
+                <a:cubicBezTo>
+                  <a:pt x="650417" y="18116"/>
+                  <a:pt x="831092" y="-21237"/>
+                  <a:pt x="957839" y="0"/>
+                </a:cubicBezTo>
+                <a:cubicBezTo>
+                  <a:pt x="1084586" y="21237"/>
+                  <a:pt x="1301682" y="25124"/>
+                  <a:pt x="1521630" y="0"/>
+                </a:cubicBezTo>
+                <a:cubicBezTo>
+                  <a:pt x="1741578" y="-25124"/>
+                  <a:pt x="1970269" y="-29139"/>
+                  <a:pt x="2212729" y="0"/>
+                </a:cubicBezTo>
+                <a:cubicBezTo>
+                  <a:pt x="2455189" y="29139"/>
+                  <a:pt x="2558847" y="-4796"/>
+                  <a:pt x="2734084" y="0"/>
+                </a:cubicBezTo>
+                <a:cubicBezTo>
+                  <a:pt x="2909321" y="4796"/>
+                  <a:pt x="3097217" y="-13409"/>
+                  <a:pt x="3255439" y="0"/>
+                </a:cubicBezTo>
+                <a:cubicBezTo>
+                  <a:pt x="3413662" y="13409"/>
+                  <a:pt x="3979999" y="-10121"/>
+                  <a:pt x="4243589" y="0"/>
+                </a:cubicBezTo>
+                <a:cubicBezTo>
+                  <a:pt x="4244484" y="8974"/>
+                  <a:pt x="4243043" y="9359"/>
+                  <a:pt x="4243589" y="18288"/>
+                </a:cubicBezTo>
+                <a:cubicBezTo>
+                  <a:pt x="4058777" y="31246"/>
+                  <a:pt x="3910348" y="3158"/>
+                  <a:pt x="3594926" y="18288"/>
+                </a:cubicBezTo>
+                <a:cubicBezTo>
+                  <a:pt x="3279504" y="33418"/>
+                  <a:pt x="3319955" y="-3977"/>
+                  <a:pt x="3073571" y="18288"/>
+                </a:cubicBezTo>
+                <a:cubicBezTo>
+                  <a:pt x="2827187" y="40553"/>
+                  <a:pt x="2767387" y="1863"/>
+                  <a:pt x="2552216" y="18288"/>
+                </a:cubicBezTo>
+                <a:cubicBezTo>
+                  <a:pt x="2337046" y="34713"/>
+                  <a:pt x="2181871" y="19527"/>
+                  <a:pt x="1903553" y="18288"/>
+                </a:cubicBezTo>
+                <a:cubicBezTo>
+                  <a:pt x="1625235" y="17049"/>
+                  <a:pt x="1557672" y="24174"/>
+                  <a:pt x="1212454" y="18288"/>
+                </a:cubicBezTo>
+                <a:cubicBezTo>
+                  <a:pt x="867236" y="12402"/>
+                  <a:pt x="874382" y="15627"/>
+                  <a:pt x="733535" y="18288"/>
+                </a:cubicBezTo>
+                <a:cubicBezTo>
+                  <a:pt x="592688" y="20949"/>
+                  <a:pt x="183477" y="14753"/>
+                  <a:pt x="0" y="18288"/>
+                </a:cubicBezTo>
+                <a:cubicBezTo>
+                  <a:pt x="-229" y="14222"/>
+                  <a:pt x="509" y="5816"/>
+                  <a:pt x="0" y="0"/>
+                </a:cubicBezTo>
+                <a:close/>
+              </a:path>
+              <a:path w="4243589" h="18288" stroke="0" extrusionOk="0">
+                <a:moveTo>
+                  <a:pt x="0" y="0"/>
+                </a:moveTo>
+                <a:cubicBezTo>
+                  <a:pt x="143690" y="16630"/>
+                  <a:pt x="266667" y="14847"/>
+                  <a:pt x="521355" y="0"/>
+                </a:cubicBezTo>
+                <a:cubicBezTo>
+                  <a:pt x="776043" y="-14847"/>
+                  <a:pt x="814491" y="-17363"/>
+                  <a:pt x="1000275" y="0"/>
+                </a:cubicBezTo>
+                <a:cubicBezTo>
+                  <a:pt x="1186059" y="17363"/>
+                  <a:pt x="1352504" y="-23507"/>
+                  <a:pt x="1521630" y="0"/>
+                </a:cubicBezTo>
+                <a:cubicBezTo>
+                  <a:pt x="1690756" y="23507"/>
+                  <a:pt x="1889525" y="5871"/>
+                  <a:pt x="2127857" y="0"/>
+                </a:cubicBezTo>
+                <a:cubicBezTo>
+                  <a:pt x="2366189" y="-5871"/>
+                  <a:pt x="2620628" y="-27997"/>
+                  <a:pt x="2776520" y="0"/>
+                </a:cubicBezTo>
+                <a:cubicBezTo>
+                  <a:pt x="2932412" y="27997"/>
+                  <a:pt x="3131683" y="-25073"/>
+                  <a:pt x="3467618" y="0"/>
+                </a:cubicBezTo>
+                <a:cubicBezTo>
+                  <a:pt x="3803553" y="25073"/>
+                  <a:pt x="4017371" y="3071"/>
+                  <a:pt x="4243589" y="0"/>
+                </a:cubicBezTo>
+                <a:cubicBezTo>
+                  <a:pt x="4243134" y="6162"/>
+                  <a:pt x="4243492" y="11775"/>
+                  <a:pt x="4243589" y="18288"/>
+                </a:cubicBezTo>
+                <a:cubicBezTo>
+                  <a:pt x="4017834" y="-5779"/>
+                  <a:pt x="3834586" y="13376"/>
+                  <a:pt x="3594926" y="18288"/>
+                </a:cubicBezTo>
+                <a:cubicBezTo>
+                  <a:pt x="3355266" y="23200"/>
+                  <a:pt x="3204179" y="2869"/>
+                  <a:pt x="2903827" y="18288"/>
+                </a:cubicBezTo>
+                <a:cubicBezTo>
+                  <a:pt x="2603475" y="33707"/>
+                  <a:pt x="2526187" y="46187"/>
+                  <a:pt x="2212729" y="18288"/>
+                </a:cubicBezTo>
+                <a:cubicBezTo>
+                  <a:pt x="1899271" y="-9611"/>
+                  <a:pt x="1966289" y="29692"/>
+                  <a:pt x="1733809" y="18288"/>
+                </a:cubicBezTo>
+                <a:cubicBezTo>
+                  <a:pt x="1501329" y="6884"/>
+                  <a:pt x="1343612" y="12492"/>
+                  <a:pt x="1085146" y="18288"/>
+                </a:cubicBezTo>
+                <a:cubicBezTo>
+                  <a:pt x="826680" y="24084"/>
+                  <a:pt x="778184" y="35607"/>
+                  <a:pt x="521355" y="18288"/>
+                </a:cubicBezTo>
+                <a:cubicBezTo>
+                  <a:pt x="264526" y="969"/>
+                  <a:pt x="120277" y="4268"/>
+                  <a:pt x="0" y="18288"/>
+                </a:cubicBezTo>
+                <a:cubicBezTo>
+                  <a:pt x="766" y="10800"/>
+                  <a:pt x="-457" y="8180"/>
+                  <a:pt x="0" y="0"/>
+                </a:cubicBezTo>
+                <a:close/>
+              </a:path>
+            </a:pathLst>
+          </a:custGeom>
+          <a:solidFill>
+            <a:schemeClr val="accent2"/>
+          </a:solidFill>
+          <a:ln w="44450" cap="rnd">
+            <a:solidFill>
+              <a:schemeClr val="accent2"/>
+            </a:solidFill>
+            <a:round/>
+            <a:extLst>
+              <a:ext uri="{C807C97D-BFC1-408E-A445-0C87EB9F89A2}">
+                <ask:lineSketchStyleProps xmlns:ask="http://schemas.microsoft.com/office/drawing/2018/sketchyshapes" sd="2727557108">
+                  <a:prstGeom prst="rect">
+                    <a:avLst/>
+                  </a:prstGeom>
+                  <ask:type>
+                    <ask:lineSketchFreehand/>
+                  </ask:type>
+                </ask:lineSketchStyleProps>
+              </a:ext>
+            </a:extLst>
+          </a:ln>
+        </p:spPr>
+        <p:style>
+          <a:lnRef idx="2">
+            <a:schemeClr val="accent1">
+              <a:shade val="50000"/>
+            </a:schemeClr>
+          </a:lnRef>
+          <a:fillRef idx="1">
+            <a:schemeClr val="accent1"/>
+          </a:fillRef>
+          <a:effectRef idx="0">
+            <a:schemeClr val="accent1"/>
+          </a:effectRef>
+          <a:fontRef idx="minor">
+            <a:schemeClr val="lt1"/>
+          </a:fontRef>
+        </p:style>
+        <p:txBody>
+          <a:bodyPr rtlCol="0" anchor="ctr"/>
+          <a:lstStyle/>
+          <a:p>
+            <a:pPr algn="ctr"/>
+            <a:endParaRPr lang="en-US"/>
+          </a:p>
+        </p:txBody>
+      </p:sp>
+      <p:sp>
+        <p:nvSpPr>
+          <p:cNvPr id="3" name="Content Placeholder 2">
+            <a:extLst>
+              <a:ext uri="{FF2B5EF4-FFF2-40B4-BE49-F238E27FC236}">
+                <a16:creationId xmlns:a16="http://schemas.microsoft.com/office/drawing/2014/main" id="{21627FF9-F1F5-F20E-2166-F2493FEEC0D0}"/>
+              </a:ext>
+            </a:extLst>
+          </p:cNvPr>
+          <p:cNvSpPr>
+            <a:spLocks noGrp="1"/>
+          </p:cNvSpPr>
+          <p:nvPr>
+            <p:ph idx="1"/>
+          </p:nvPr>
+        </p:nvSpPr>
+        <p:spPr>
+          <a:xfrm>
+            <a:off x="5297762" y="2706624"/>
+            <a:ext cx="6251110" cy="3483864"/>
+          </a:xfrm>
+        </p:spPr>
+        <p:txBody>
+          <a:bodyPr>
+            <a:normAutofit lnSpcReduction="10000"/>
+          </a:bodyPr>
+          <a:lstStyle/>
+          <a:p>
+            <a:r>
+              <a:rPr lang="en-US" sz="2200" dirty="0"/>
+              <a:t>Training Data in AI can come from many sources</a:t>
+            </a:r>
+          </a:p>
+          <a:p>
+            <a:endParaRPr lang="en-US" sz="2200" dirty="0"/>
+          </a:p>
+          <a:p>
+            <a:pPr lvl="1"/>
+            <a:r>
+              <a:rPr lang="en-US" sz="2200" b="1" dirty="0"/>
+              <a:t>Existing Data</a:t>
+            </a:r>
+            <a:r>
+              <a:rPr lang="en-US" sz="2200" dirty="0"/>
+              <a:t>: Download documents from the internet to train Large Language Models.</a:t>
+            </a:r>
+            <a:endParaRPr lang="en-US" sz="2200" b="1" dirty="0"/>
+          </a:p>
+          <a:p>
+            <a:pPr lvl="1"/>
+            <a:r>
+              <a:rPr lang="en-US" sz="2200" b="1" dirty="0"/>
+              <a:t>Observation</a:t>
+            </a:r>
+            <a:r>
+              <a:rPr lang="en-US" sz="2200" dirty="0"/>
+              <a:t>: Record video of a task being performed (e.g., for self-driving cars).</a:t>
+            </a:r>
+          </a:p>
+          <a:p>
+            <a:pPr lvl="1"/>
+            <a:r>
+              <a:rPr lang="en-US" sz="2200" b="1" dirty="0"/>
+              <a:t>Simulation</a:t>
+            </a:r>
+            <a:r>
+              <a:rPr lang="en-US" sz="2200" dirty="0"/>
+              <a:t>: E.g., simulated games using a playout strategy.</a:t>
+            </a:r>
+          </a:p>
+          <a:p>
+            <a:pPr lvl="1"/>
+            <a:r>
+              <a:rPr lang="en-US" sz="2200" b="1" dirty="0"/>
+              <a:t>Expert feedback </a:t>
+            </a:r>
+            <a:r>
+              <a:rPr lang="en-US" sz="2200" dirty="0"/>
+              <a:t>on how well a task was performed.</a:t>
+            </a:r>
+          </a:p>
+        </p:txBody>
+      </p:sp>
+    </p:spTree>
+    <p:extLst>
+      <p:ext uri="{BB962C8B-B14F-4D97-AF65-F5344CB8AC3E}">
+        <p14:creationId xmlns:p14="http://schemas.microsoft.com/office/powerpoint/2010/main" val="971790270"/>
+      </p:ext>
+    </p:extLst>
+  </p:cSld>
+  <p:clrMapOvr>
+    <a:masterClrMapping/>
+  </p:clrMapOvr>
+</p:sld>
+</file>
+
+<file path=ppt/slides/slide16.xml><?xml version="1.0" encoding="utf-8"?>
+<p:sld xmlns:a="http://schemas.openxmlformats.org/drawingml/2006/main" xmlns:r="http://schemas.openxmlformats.org/officeDocument/2006/relationships" xmlns:p="http://schemas.openxmlformats.org/presentationml/2006/main">
+  <p:cSld>
     <p:spTree>
       <p:nvGrpSpPr>
         <p:cNvPr id="1" name=""/>
@@ -20780,7 +21483,7 @@
 </p:sld>
 </file>
 
-<file path=ppt/slides/slide16.xml><?xml version="1.0" encoding="utf-8"?>
+<file path=ppt/slides/slide17.xml><?xml version="1.0" encoding="utf-8"?>
 <p:sld xmlns:a="http://schemas.openxmlformats.org/drawingml/2006/main" xmlns:r="http://schemas.openxmlformats.org/officeDocument/2006/relationships" xmlns:p="http://schemas.openxmlformats.org/presentationml/2006/main">
   <p:cSld>
     <p:bg>
@@ -21756,709 +22459,6 @@
         </mc:Fallback>
       </mc:AlternateContent>
     </p:spTree>
-  </p:cSld>
-  <p:clrMapOvr>
-    <a:masterClrMapping/>
-  </p:clrMapOvr>
-</p:sld>
-</file>
-
-<file path=ppt/slides/slide17.xml><?xml version="1.0" encoding="utf-8"?>
-<p:sld xmlns:a="http://schemas.openxmlformats.org/drawingml/2006/main" xmlns:r="http://schemas.openxmlformats.org/officeDocument/2006/relationships" xmlns:p="http://schemas.openxmlformats.org/presentationml/2006/main">
-  <p:cSld>
-    <p:bg>
-      <p:bgPr>
-        <a:solidFill>
-          <a:schemeClr val="bg1"/>
-        </a:solidFill>
-        <a:effectLst/>
-      </p:bgPr>
-    </p:bg>
-    <p:spTree>
-      <p:nvGrpSpPr>
-        <p:cNvPr id="1" name=""/>
-        <p:cNvGrpSpPr/>
-        <p:nvPr/>
-      </p:nvGrpSpPr>
-      <p:grpSpPr>
-        <a:xfrm>
-          <a:off x="0" y="0"/>
-          <a:ext cx="0" cy="0"/>
-          <a:chOff x="0" y="0"/>
-          <a:chExt cx="0" cy="0"/>
-        </a:xfrm>
-      </p:grpSpPr>
-      <p:sp useBgFill="1">
-        <p:nvSpPr>
-          <p:cNvPr id="9" name="Rectangle 8">
-            <a:extLst>
-              <a:ext uri="{FF2B5EF4-FFF2-40B4-BE49-F238E27FC236}">
-                <a16:creationId xmlns:a16="http://schemas.microsoft.com/office/drawing/2014/main" id="{2C61293E-6EBE-43EF-A52C-9BEBFD7679D4}"/>
-              </a:ext>
-              <a:ext uri="{C183D7F6-B498-43B3-948B-1728B52AA6E4}">
-                <adec:decorative xmlns:adec="http://schemas.microsoft.com/office/drawing/2017/decorative" val="1"/>
-              </a:ext>
-            </a:extLst>
-          </p:cNvPr>
-          <p:cNvSpPr>
-            <a:spLocks noGrp="1" noRot="1" noChangeAspect="1" noMove="1" noResize="1" noEditPoints="1" noAdjustHandles="1" noChangeArrowheads="1" noChangeShapeType="1" noTextEdit="1"/>
-          </p:cNvSpPr>
-          <p:nvPr>
-            <p:extLst>
-              <p:ext uri="{386F3935-93C4-4BCD-93E2-E3B085C9AB24}">
-                <p16:designElem xmlns:p16="http://schemas.microsoft.com/office/powerpoint/2015/main" val="1"/>
-              </p:ext>
-            </p:extLst>
-          </p:nvPr>
-        </p:nvSpPr>
-        <p:spPr>
-          <a:xfrm>
-            <a:off x="0" y="0"/>
-            <a:ext cx="12188952" cy="6858000"/>
-          </a:xfrm>
-          <a:prstGeom prst="rect">
-            <a:avLst/>
-          </a:prstGeom>
-          <a:ln>
-            <a:noFill/>
-          </a:ln>
-        </p:spPr>
-        <p:style>
-          <a:lnRef idx="2">
-            <a:schemeClr val="accent1">
-              <a:shade val="50000"/>
-            </a:schemeClr>
-          </a:lnRef>
-          <a:fillRef idx="1">
-            <a:schemeClr val="accent1"/>
-          </a:fillRef>
-          <a:effectRef idx="0">
-            <a:schemeClr val="accent1"/>
-          </a:effectRef>
-          <a:fontRef idx="minor">
-            <a:schemeClr val="lt1"/>
-          </a:fontRef>
-        </p:style>
-        <p:txBody>
-          <a:bodyPr rtlCol="0" anchor="ctr"/>
-          <a:lstStyle/>
-          <a:p>
-            <a:pPr algn="ctr"/>
-            <a:endParaRPr lang="en-US"/>
-          </a:p>
-        </p:txBody>
-      </p:sp>
-      <p:sp>
-        <p:nvSpPr>
-          <p:cNvPr id="2" name="Title 1">
-            <a:extLst>
-              <a:ext uri="{FF2B5EF4-FFF2-40B4-BE49-F238E27FC236}">
-                <a16:creationId xmlns:a16="http://schemas.microsoft.com/office/drawing/2014/main" id="{B9ECC4B4-B349-0940-ED3F-4F1162E4E4B8}"/>
-              </a:ext>
-            </a:extLst>
-          </p:cNvPr>
-          <p:cNvSpPr>
-            <a:spLocks noGrp="1"/>
-          </p:cNvSpPr>
-          <p:nvPr>
-            <p:ph type="title"/>
-          </p:nvPr>
-        </p:nvSpPr>
-        <p:spPr>
-          <a:xfrm>
-            <a:off x="5297762" y="329184"/>
-            <a:ext cx="6251110" cy="1783080"/>
-          </a:xfrm>
-        </p:spPr>
-        <p:txBody>
-          <a:bodyPr anchor="b">
-            <a:normAutofit/>
-          </a:bodyPr>
-          <a:lstStyle/>
-          <a:p>
-            <a:r>
-              <a:rPr lang="en-US" sz="5400" dirty="0"/>
-              <a:t>Training Data in AI</a:t>
-            </a:r>
-          </a:p>
-        </p:txBody>
-      </p:sp>
-      <p:pic>
-        <p:nvPicPr>
-          <p:cNvPr id="5" name="Picture 4">
-            <a:extLst>
-              <a:ext uri="{FF2B5EF4-FFF2-40B4-BE49-F238E27FC236}">
-                <a16:creationId xmlns:a16="http://schemas.microsoft.com/office/drawing/2014/main" id="{ABAF83C4-D9A0-8275-81E7-14DF099D6D1E}"/>
-              </a:ext>
-              <a:ext uri="{C183D7F6-B498-43B3-948B-1728B52AA6E4}">
-                <adec:decorative xmlns:adec="http://schemas.microsoft.com/office/drawing/2017/decorative" val="1"/>
-              </a:ext>
-            </a:extLst>
-          </p:cNvPr>
-          <p:cNvPicPr>
-            <a:picLocks noChangeAspect="1"/>
-          </p:cNvPicPr>
-          <p:nvPr/>
-        </p:nvPicPr>
-        <p:blipFill>
-          <a:blip r:embed="rId2"/>
-          <a:srcRect l="14335" r="47465"/>
-          <a:stretch/>
-        </p:blipFill>
-        <p:spPr>
-          <a:xfrm>
-            <a:off x="1" y="10"/>
-            <a:ext cx="4657344" cy="6857990"/>
-          </a:xfrm>
-          <a:custGeom>
-            <a:avLst/>
-            <a:gdLst/>
-            <a:ahLst/>
-            <a:cxnLst/>
-            <a:rect l="l" t="t" r="r" b="b"/>
-            <a:pathLst>
-              <a:path w="4657344" h="6858000">
-                <a:moveTo>
-                  <a:pt x="0" y="0"/>
-                </a:moveTo>
-                <a:lnTo>
-                  <a:pt x="3429755" y="0"/>
-                </a:lnTo>
-                <a:lnTo>
-                  <a:pt x="3526016" y="148742"/>
-                </a:lnTo>
-                <a:cubicBezTo>
-                  <a:pt x="3657740" y="365513"/>
-                  <a:pt x="3777402" y="589569"/>
-                  <a:pt x="3886489" y="819975"/>
-                </a:cubicBezTo>
-                <a:cubicBezTo>
-                  <a:pt x="3891856" y="833492"/>
-                  <a:pt x="3900663" y="845393"/>
-                  <a:pt x="3912049" y="854514"/>
-                </a:cubicBezTo>
-                <a:cubicBezTo>
-                  <a:pt x="3897352" y="819849"/>
-                  <a:pt x="3883037" y="784928"/>
-                  <a:pt x="3868083" y="750263"/>
-                </a:cubicBezTo>
-                <a:cubicBezTo>
-                  <a:pt x="3806989" y="608712"/>
-                  <a:pt x="3742478" y="469145"/>
-                  <a:pt x="3674155" y="331786"/>
-                </a:cubicBezTo>
-                <a:lnTo>
-                  <a:pt x="3496656" y="0"/>
-                </a:lnTo>
-                <a:lnTo>
-                  <a:pt x="3554371" y="0"/>
-                </a:lnTo>
-                <a:lnTo>
-                  <a:pt x="3661621" y="196614"/>
-                </a:lnTo>
-                <a:cubicBezTo>
-                  <a:pt x="3856899" y="573253"/>
-                  <a:pt x="4021071" y="966066"/>
-                  <a:pt x="4161279" y="1371196"/>
-                </a:cubicBezTo>
-                <a:cubicBezTo>
-                  <a:pt x="4379525" y="2007265"/>
-                  <a:pt x="4530141" y="2664286"/>
-                  <a:pt x="4610660" y="3331516"/>
-                </a:cubicBezTo>
-                <a:cubicBezTo>
-                  <a:pt x="4652837" y="3672965"/>
-                  <a:pt x="4671625" y="4013908"/>
-                  <a:pt x="4645040" y="4357388"/>
-                </a:cubicBezTo>
-                <a:cubicBezTo>
-                  <a:pt x="4613599" y="4758899"/>
-                  <a:pt x="4566181" y="5157998"/>
-                  <a:pt x="4485789" y="5552906"/>
-                </a:cubicBezTo>
-                <a:cubicBezTo>
-                  <a:pt x="4397121" y="5988893"/>
-                  <a:pt x="4276748" y="6414594"/>
-                  <a:pt x="4117769" y="6828295"/>
-                </a:cubicBezTo>
-                <a:lnTo>
-                  <a:pt x="4105288" y="6858000"/>
-                </a:lnTo>
-                <a:lnTo>
-                  <a:pt x="4052520" y="6858000"/>
-                </a:lnTo>
-                <a:lnTo>
-                  <a:pt x="4059369" y="6841549"/>
-                </a:lnTo>
-                <a:cubicBezTo>
-                  <a:pt x="4147276" y="6614016"/>
-                  <a:pt x="4224193" y="6380817"/>
-                  <a:pt x="4291518" y="6142729"/>
-                </a:cubicBezTo>
-                <a:cubicBezTo>
-                  <a:pt x="4350055" y="5935370"/>
-                  <a:pt x="4393256" y="5723695"/>
-                  <a:pt x="4443357" y="5513923"/>
-                </a:cubicBezTo>
-                <a:cubicBezTo>
-                  <a:pt x="4444541" y="5502788"/>
-                  <a:pt x="4445137" y="5491601"/>
-                  <a:pt x="4445146" y="5480401"/>
-                </a:cubicBezTo>
-                <a:cubicBezTo>
-                  <a:pt x="4408465" y="5607635"/>
-                  <a:pt x="4379196" y="5719759"/>
-                  <a:pt x="4344559" y="5830359"/>
-                </a:cubicBezTo>
-                <a:cubicBezTo>
-                  <a:pt x="4254261" y="6118381"/>
-                  <a:pt x="4150112" y="6398531"/>
-                  <a:pt x="4031702" y="6670527"/>
-                </a:cubicBezTo>
-                <a:lnTo>
-                  <a:pt x="3943824" y="6858000"/>
-                </a:lnTo>
-                <a:lnTo>
-                  <a:pt x="0" y="6858000"/>
-                </a:lnTo>
-                <a:close/>
-              </a:path>
-            </a:pathLst>
-          </a:custGeom>
-        </p:spPr>
-      </p:pic>
-      <p:sp>
-        <p:nvSpPr>
-          <p:cNvPr id="11" name="sketchy line">
-            <a:extLst>
-              <a:ext uri="{FF2B5EF4-FFF2-40B4-BE49-F238E27FC236}">
-                <a16:creationId xmlns:a16="http://schemas.microsoft.com/office/drawing/2014/main" id="{21540236-BFD5-4A9D-8840-4703E7F76825}"/>
-              </a:ext>
-              <a:ext uri="{C183D7F6-B498-43B3-948B-1728B52AA6E4}">
-                <adec:decorative xmlns:adec="http://schemas.microsoft.com/office/drawing/2017/decorative" val="1"/>
-              </a:ext>
-            </a:extLst>
-          </p:cNvPr>
-          <p:cNvSpPr>
-            <a:spLocks noGrp="1" noRot="1" noChangeAspect="1" noMove="1" noResize="1" noEditPoints="1" noAdjustHandles="1" noChangeArrowheads="1" noChangeShapeType="1" noTextEdit="1"/>
-          </p:cNvSpPr>
-          <p:nvPr>
-            <p:extLst>
-              <p:ext uri="{386F3935-93C4-4BCD-93E2-E3B085C9AB24}">
-                <p16:designElem xmlns:p16="http://schemas.microsoft.com/office/powerpoint/2015/main" val="1"/>
-              </p:ext>
-            </p:extLst>
-          </p:nvPr>
-        </p:nvSpPr>
-        <p:spPr>
-          <a:xfrm>
-            <a:off x="5297762" y="2374947"/>
-            <a:ext cx="4243589" cy="18288"/>
-          </a:xfrm>
-          <a:custGeom>
-            <a:avLst/>
-            <a:gdLst>
-              <a:gd name="csX0" fmla="*/ 0 w 4243589"/>
-              <a:gd name="csY0" fmla="*/ 0 h 18288"/>
-              <a:gd name="csX1" fmla="*/ 478919 w 4243589"/>
-              <a:gd name="csY1" fmla="*/ 0 h 18288"/>
-              <a:gd name="csX2" fmla="*/ 957839 w 4243589"/>
-              <a:gd name="csY2" fmla="*/ 0 h 18288"/>
-              <a:gd name="csX3" fmla="*/ 1521630 w 4243589"/>
-              <a:gd name="csY3" fmla="*/ 0 h 18288"/>
-              <a:gd name="csX4" fmla="*/ 2212729 w 4243589"/>
-              <a:gd name="csY4" fmla="*/ 0 h 18288"/>
-              <a:gd name="csX5" fmla="*/ 2734084 w 4243589"/>
-              <a:gd name="csY5" fmla="*/ 0 h 18288"/>
-              <a:gd name="csX6" fmla="*/ 3255439 w 4243589"/>
-              <a:gd name="csY6" fmla="*/ 0 h 18288"/>
-              <a:gd name="csX7" fmla="*/ 4243589 w 4243589"/>
-              <a:gd name="csY7" fmla="*/ 0 h 18288"/>
-              <a:gd name="csX8" fmla="*/ 4243589 w 4243589"/>
-              <a:gd name="csY8" fmla="*/ 18288 h 18288"/>
-              <a:gd name="csX9" fmla="*/ 3594926 w 4243589"/>
-              <a:gd name="csY9" fmla="*/ 18288 h 18288"/>
-              <a:gd name="csX10" fmla="*/ 3073571 w 4243589"/>
-              <a:gd name="csY10" fmla="*/ 18288 h 18288"/>
-              <a:gd name="csX11" fmla="*/ 2552216 w 4243589"/>
-              <a:gd name="csY11" fmla="*/ 18288 h 18288"/>
-              <a:gd name="csX12" fmla="*/ 1903553 w 4243589"/>
-              <a:gd name="csY12" fmla="*/ 18288 h 18288"/>
-              <a:gd name="csX13" fmla="*/ 1212454 w 4243589"/>
-              <a:gd name="csY13" fmla="*/ 18288 h 18288"/>
-              <a:gd name="csX14" fmla="*/ 733535 w 4243589"/>
-              <a:gd name="csY14" fmla="*/ 18288 h 18288"/>
-              <a:gd name="csX15" fmla="*/ 0 w 4243589"/>
-              <a:gd name="csY15" fmla="*/ 18288 h 18288"/>
-              <a:gd name="csX16" fmla="*/ 0 w 4243589"/>
-              <a:gd name="csY16" fmla="*/ 0 h 18288"/>
-            </a:gdLst>
-            <a:ahLst/>
-            <a:cxnLst>
-              <a:cxn ang="0">
-                <a:pos x="csX0" y="csY0"/>
-              </a:cxn>
-              <a:cxn ang="0">
-                <a:pos x="csX1" y="csY1"/>
-              </a:cxn>
-              <a:cxn ang="0">
-                <a:pos x="csX2" y="csY2"/>
-              </a:cxn>
-              <a:cxn ang="0">
-                <a:pos x="csX3" y="csY3"/>
-              </a:cxn>
-              <a:cxn ang="0">
-                <a:pos x="csX4" y="csY4"/>
-              </a:cxn>
-              <a:cxn ang="0">
-                <a:pos x="csX5" y="csY5"/>
-              </a:cxn>
-              <a:cxn ang="0">
-                <a:pos x="csX6" y="csY6"/>
-              </a:cxn>
-              <a:cxn ang="0">
-                <a:pos x="csX7" y="csY7"/>
-              </a:cxn>
-              <a:cxn ang="0">
-                <a:pos x="csX8" y="csY8"/>
-              </a:cxn>
-              <a:cxn ang="0">
-                <a:pos x="csX9" y="csY9"/>
-              </a:cxn>
-              <a:cxn ang="0">
-                <a:pos x="csX10" y="csY10"/>
-              </a:cxn>
-              <a:cxn ang="0">
-                <a:pos x="csX11" y="csY11"/>
-              </a:cxn>
-              <a:cxn ang="0">
-                <a:pos x="csX12" y="csY12"/>
-              </a:cxn>
-              <a:cxn ang="0">
-                <a:pos x="csX13" y="csY13"/>
-              </a:cxn>
-              <a:cxn ang="0">
-                <a:pos x="csX14" y="csY14"/>
-              </a:cxn>
-              <a:cxn ang="0">
-                <a:pos x="csX15" y="csY15"/>
-              </a:cxn>
-              <a:cxn ang="0">
-                <a:pos x="csX16" y="csY16"/>
-              </a:cxn>
-            </a:cxnLst>
-            <a:rect l="l" t="t" r="r" b="b"/>
-            <a:pathLst>
-              <a:path w="4243589" h="18288" fill="none" extrusionOk="0">
-                <a:moveTo>
-                  <a:pt x="0" y="0"/>
-                </a:moveTo>
-                <a:cubicBezTo>
-                  <a:pt x="213395" y="-21006"/>
-                  <a:pt x="307421" y="-18116"/>
-                  <a:pt x="478919" y="0"/>
-                </a:cubicBezTo>
-                <a:cubicBezTo>
-                  <a:pt x="650417" y="18116"/>
-                  <a:pt x="831092" y="-21237"/>
-                  <a:pt x="957839" y="0"/>
-                </a:cubicBezTo>
-                <a:cubicBezTo>
-                  <a:pt x="1084586" y="21237"/>
-                  <a:pt x="1301682" y="25124"/>
-                  <a:pt x="1521630" y="0"/>
-                </a:cubicBezTo>
-                <a:cubicBezTo>
-                  <a:pt x="1741578" y="-25124"/>
-                  <a:pt x="1970269" y="-29139"/>
-                  <a:pt x="2212729" y="0"/>
-                </a:cubicBezTo>
-                <a:cubicBezTo>
-                  <a:pt x="2455189" y="29139"/>
-                  <a:pt x="2558847" y="-4796"/>
-                  <a:pt x="2734084" y="0"/>
-                </a:cubicBezTo>
-                <a:cubicBezTo>
-                  <a:pt x="2909321" y="4796"/>
-                  <a:pt x="3097217" y="-13409"/>
-                  <a:pt x="3255439" y="0"/>
-                </a:cubicBezTo>
-                <a:cubicBezTo>
-                  <a:pt x="3413662" y="13409"/>
-                  <a:pt x="3979999" y="-10121"/>
-                  <a:pt x="4243589" y="0"/>
-                </a:cubicBezTo>
-                <a:cubicBezTo>
-                  <a:pt x="4244484" y="8974"/>
-                  <a:pt x="4243043" y="9359"/>
-                  <a:pt x="4243589" y="18288"/>
-                </a:cubicBezTo>
-                <a:cubicBezTo>
-                  <a:pt x="4058777" y="31246"/>
-                  <a:pt x="3910348" y="3158"/>
-                  <a:pt x="3594926" y="18288"/>
-                </a:cubicBezTo>
-                <a:cubicBezTo>
-                  <a:pt x="3279504" y="33418"/>
-                  <a:pt x="3319955" y="-3977"/>
-                  <a:pt x="3073571" y="18288"/>
-                </a:cubicBezTo>
-                <a:cubicBezTo>
-                  <a:pt x="2827187" y="40553"/>
-                  <a:pt x="2767387" y="1863"/>
-                  <a:pt x="2552216" y="18288"/>
-                </a:cubicBezTo>
-                <a:cubicBezTo>
-                  <a:pt x="2337046" y="34713"/>
-                  <a:pt x="2181871" y="19527"/>
-                  <a:pt x="1903553" y="18288"/>
-                </a:cubicBezTo>
-                <a:cubicBezTo>
-                  <a:pt x="1625235" y="17049"/>
-                  <a:pt x="1557672" y="24174"/>
-                  <a:pt x="1212454" y="18288"/>
-                </a:cubicBezTo>
-                <a:cubicBezTo>
-                  <a:pt x="867236" y="12402"/>
-                  <a:pt x="874382" y="15627"/>
-                  <a:pt x="733535" y="18288"/>
-                </a:cubicBezTo>
-                <a:cubicBezTo>
-                  <a:pt x="592688" y="20949"/>
-                  <a:pt x="183477" y="14753"/>
-                  <a:pt x="0" y="18288"/>
-                </a:cubicBezTo>
-                <a:cubicBezTo>
-                  <a:pt x="-229" y="14222"/>
-                  <a:pt x="509" y="5816"/>
-                  <a:pt x="0" y="0"/>
-                </a:cubicBezTo>
-                <a:close/>
-              </a:path>
-              <a:path w="4243589" h="18288" stroke="0" extrusionOk="0">
-                <a:moveTo>
-                  <a:pt x="0" y="0"/>
-                </a:moveTo>
-                <a:cubicBezTo>
-                  <a:pt x="143690" y="16630"/>
-                  <a:pt x="266667" y="14847"/>
-                  <a:pt x="521355" y="0"/>
-                </a:cubicBezTo>
-                <a:cubicBezTo>
-                  <a:pt x="776043" y="-14847"/>
-                  <a:pt x="814491" y="-17363"/>
-                  <a:pt x="1000275" y="0"/>
-                </a:cubicBezTo>
-                <a:cubicBezTo>
-                  <a:pt x="1186059" y="17363"/>
-                  <a:pt x="1352504" y="-23507"/>
-                  <a:pt x="1521630" y="0"/>
-                </a:cubicBezTo>
-                <a:cubicBezTo>
-                  <a:pt x="1690756" y="23507"/>
-                  <a:pt x="1889525" y="5871"/>
-                  <a:pt x="2127857" y="0"/>
-                </a:cubicBezTo>
-                <a:cubicBezTo>
-                  <a:pt x="2366189" y="-5871"/>
-                  <a:pt x="2620628" y="-27997"/>
-                  <a:pt x="2776520" y="0"/>
-                </a:cubicBezTo>
-                <a:cubicBezTo>
-                  <a:pt x="2932412" y="27997"/>
-                  <a:pt x="3131683" y="-25073"/>
-                  <a:pt x="3467618" y="0"/>
-                </a:cubicBezTo>
-                <a:cubicBezTo>
-                  <a:pt x="3803553" y="25073"/>
-                  <a:pt x="4017371" y="3071"/>
-                  <a:pt x="4243589" y="0"/>
-                </a:cubicBezTo>
-                <a:cubicBezTo>
-                  <a:pt x="4243134" y="6162"/>
-                  <a:pt x="4243492" y="11775"/>
-                  <a:pt x="4243589" y="18288"/>
-                </a:cubicBezTo>
-                <a:cubicBezTo>
-                  <a:pt x="4017834" y="-5779"/>
-                  <a:pt x="3834586" y="13376"/>
-                  <a:pt x="3594926" y="18288"/>
-                </a:cubicBezTo>
-                <a:cubicBezTo>
-                  <a:pt x="3355266" y="23200"/>
-                  <a:pt x="3204179" y="2869"/>
-                  <a:pt x="2903827" y="18288"/>
-                </a:cubicBezTo>
-                <a:cubicBezTo>
-                  <a:pt x="2603475" y="33707"/>
-                  <a:pt x="2526187" y="46187"/>
-                  <a:pt x="2212729" y="18288"/>
-                </a:cubicBezTo>
-                <a:cubicBezTo>
-                  <a:pt x="1899271" y="-9611"/>
-                  <a:pt x="1966289" y="29692"/>
-                  <a:pt x="1733809" y="18288"/>
-                </a:cubicBezTo>
-                <a:cubicBezTo>
-                  <a:pt x="1501329" y="6884"/>
-                  <a:pt x="1343612" y="12492"/>
-                  <a:pt x="1085146" y="18288"/>
-                </a:cubicBezTo>
-                <a:cubicBezTo>
-                  <a:pt x="826680" y="24084"/>
-                  <a:pt x="778184" y="35607"/>
-                  <a:pt x="521355" y="18288"/>
-                </a:cubicBezTo>
-                <a:cubicBezTo>
-                  <a:pt x="264526" y="969"/>
-                  <a:pt x="120277" y="4268"/>
-                  <a:pt x="0" y="18288"/>
-                </a:cubicBezTo>
-                <a:cubicBezTo>
-                  <a:pt x="766" y="10800"/>
-                  <a:pt x="-457" y="8180"/>
-                  <a:pt x="0" y="0"/>
-                </a:cubicBezTo>
-                <a:close/>
-              </a:path>
-            </a:pathLst>
-          </a:custGeom>
-          <a:solidFill>
-            <a:schemeClr val="accent2"/>
-          </a:solidFill>
-          <a:ln w="44450" cap="rnd">
-            <a:solidFill>
-              <a:schemeClr val="accent2"/>
-            </a:solidFill>
-            <a:round/>
-            <a:extLst>
-              <a:ext uri="{C807C97D-BFC1-408E-A445-0C87EB9F89A2}">
-                <ask:lineSketchStyleProps xmlns:ask="http://schemas.microsoft.com/office/drawing/2018/sketchyshapes" sd="2727557108">
-                  <a:prstGeom prst="rect">
-                    <a:avLst/>
-                  </a:prstGeom>
-                  <ask:type>
-                    <ask:lineSketchFreehand/>
-                  </ask:type>
-                </ask:lineSketchStyleProps>
-              </a:ext>
-            </a:extLst>
-          </a:ln>
-        </p:spPr>
-        <p:style>
-          <a:lnRef idx="2">
-            <a:schemeClr val="accent1">
-              <a:shade val="50000"/>
-            </a:schemeClr>
-          </a:lnRef>
-          <a:fillRef idx="1">
-            <a:schemeClr val="accent1"/>
-          </a:fillRef>
-          <a:effectRef idx="0">
-            <a:schemeClr val="accent1"/>
-          </a:effectRef>
-          <a:fontRef idx="minor">
-            <a:schemeClr val="lt1"/>
-          </a:fontRef>
-        </p:style>
-        <p:txBody>
-          <a:bodyPr rtlCol="0" anchor="ctr"/>
-          <a:lstStyle/>
-          <a:p>
-            <a:pPr algn="ctr"/>
-            <a:endParaRPr lang="en-US"/>
-          </a:p>
-        </p:txBody>
-      </p:sp>
-      <p:sp>
-        <p:nvSpPr>
-          <p:cNvPr id="3" name="Content Placeholder 2">
-            <a:extLst>
-              <a:ext uri="{FF2B5EF4-FFF2-40B4-BE49-F238E27FC236}">
-                <a16:creationId xmlns:a16="http://schemas.microsoft.com/office/drawing/2014/main" id="{21627FF9-F1F5-F20E-2166-F2493FEEC0D0}"/>
-              </a:ext>
-            </a:extLst>
-          </p:cNvPr>
-          <p:cNvSpPr>
-            <a:spLocks noGrp="1"/>
-          </p:cNvSpPr>
-          <p:nvPr>
-            <p:ph idx="1"/>
-          </p:nvPr>
-        </p:nvSpPr>
-        <p:spPr>
-          <a:xfrm>
-            <a:off x="5297762" y="2706624"/>
-            <a:ext cx="6251110" cy="3483864"/>
-          </a:xfrm>
-        </p:spPr>
-        <p:txBody>
-          <a:bodyPr>
-            <a:normAutofit lnSpcReduction="10000"/>
-          </a:bodyPr>
-          <a:lstStyle/>
-          <a:p>
-            <a:r>
-              <a:rPr lang="en-US" sz="2200" dirty="0"/>
-              <a:t>Training Data in AI can come from many sources</a:t>
-            </a:r>
-          </a:p>
-          <a:p>
-            <a:endParaRPr lang="en-US" sz="2200" dirty="0"/>
-          </a:p>
-          <a:p>
-            <a:pPr lvl="1"/>
-            <a:r>
-              <a:rPr lang="en-US" sz="2200" b="1" dirty="0"/>
-              <a:t>Existing Data</a:t>
-            </a:r>
-            <a:r>
-              <a:rPr lang="en-US" sz="2200" dirty="0"/>
-              <a:t>: Download documents from the internet to train Large Language Models.</a:t>
-            </a:r>
-            <a:endParaRPr lang="en-US" sz="2200" b="1" dirty="0"/>
-          </a:p>
-          <a:p>
-            <a:pPr lvl="1"/>
-            <a:r>
-              <a:rPr lang="en-US" sz="2200" b="1" dirty="0"/>
-              <a:t>Observation</a:t>
-            </a:r>
-            <a:r>
-              <a:rPr lang="en-US" sz="2200" dirty="0"/>
-              <a:t>: Record video of a task being performed (e.g., for self-driving cars).</a:t>
-            </a:r>
-          </a:p>
-          <a:p>
-            <a:pPr lvl="1"/>
-            <a:r>
-              <a:rPr lang="en-US" sz="2200" b="1" dirty="0"/>
-              <a:t>Simulation</a:t>
-            </a:r>
-            <a:r>
-              <a:rPr lang="en-US" sz="2200" dirty="0"/>
-              <a:t>: E.g., simulated games using a playout strategy.</a:t>
-            </a:r>
-          </a:p>
-          <a:p>
-            <a:pPr lvl="1"/>
-            <a:r>
-              <a:rPr lang="en-US" sz="2200" b="1" dirty="0"/>
-              <a:t>Expert feedback </a:t>
-            </a:r>
-            <a:r>
-              <a:rPr lang="en-US" sz="2200" dirty="0"/>
-              <a:t>on how well a task was performed.</a:t>
-            </a:r>
-          </a:p>
-        </p:txBody>
-      </p:sp>
-    </p:spTree>
-    <p:extLst>
-      <p:ext uri="{BB962C8B-B14F-4D97-AF65-F5344CB8AC3E}">
-        <p14:creationId xmlns:p14="http://schemas.microsoft.com/office/powerpoint/2010/main" val="971790270"/>
-      </p:ext>
-    </p:extLst>
   </p:cSld>
   <p:clrMapOvr>
     <a:masterClrMapping/>
@@ -31067,7 +31067,7 @@
           <a:p>
             <a:r>
               <a:rPr lang="en-US" dirty="0"/>
-              <a:t>Decision Trees</a:t>
+              <a:t>Decision Tree</a:t>
             </a:r>
           </a:p>
         </p:txBody>
@@ -31313,7 +31313,7 @@
                           <m:rPr>
                             <m:nor/>
                           </m:rPr>
-                          <a:rPr lang="en-US" dirty="0"/>
+                          <a:rPr lang="en-US" i="0" dirty="0"/>
                           <m:t> </m:t>
                         </m:r>
                       </m:e>
@@ -32402,7 +32402,7 @@
                           <m:rPr>
                             <m:nor/>
                           </m:rPr>
-                          <a:rPr lang="en-US" dirty="0"/>
+                          <a:rPr lang="en-US" i="0" dirty="0"/>
                           <m:t> </m:t>
                         </m:r>
                       </m:e>
@@ -33454,7 +33454,7 @@
           <a:p>
             <a:r>
               <a:rPr lang="en-US" dirty="0"/>
-              <a:t>Artificial Neural Networks (ANNs)</a:t>
+              <a:t>MLP: Artificial Neural Network (ANN)</a:t>
             </a:r>
           </a:p>
         </p:txBody>
@@ -33843,12 +33843,24 @@
                   </a:r>
                   <a14:m>
                     <m:oMath xmlns:m="http://schemas.openxmlformats.org/officeDocument/2006/math">
-                      <m:r>
-                        <a:rPr lang="en-US" sz="1400" b="1" i="1" smtClean="0">
-                          <a:latin typeface="Cambria Math" panose="02040503050406030204" pitchFamily="18" charset="0"/>
-                        </a:rPr>
-                        <m:t>𝑷</m:t>
-                      </m:r>
+                      <m:acc>
+                        <m:accPr>
+                          <m:chr m:val="̂"/>
+                          <m:ctrlPr>
+                            <a:rPr lang="en-US" sz="1400" b="1" i="1" smtClean="0">
+                              <a:latin typeface="Cambria Math" panose="02040503050406030204" pitchFamily="18" charset="0"/>
+                            </a:rPr>
+                          </m:ctrlPr>
+                        </m:accPr>
+                        <m:e>
+                          <m:r>
+                            <a:rPr lang="en-US" sz="1400" b="1" i="1" smtClean="0">
+                              <a:latin typeface="Cambria Math" panose="02040503050406030204" pitchFamily="18" charset="0"/>
+                            </a:rPr>
+                            <m:t>𝑷</m:t>
+                          </m:r>
+                        </m:e>
+                      </m:acc>
                       <m:r>
                         <a:rPr lang="en-US" sz="1400" b="0" i="1" smtClean="0">
                           <a:latin typeface="Cambria Math" panose="02040503050406030204" pitchFamily="18" charset="0"/>
@@ -33915,7 +33927,7 @@
                 <a:blipFill>
                   <a:blip r:embed="rId3"/>
                   <a:stretch>
-                    <a:fillRect l="-697" r="-348" b="-1683"/>
+                    <a:fillRect l="-697" r="-348" b="-1923"/>
                   </a:stretch>
                 </a:blipFill>
               </p:spPr>
@@ -34141,8 +34153,8 @@
           </p:style>
         </p:cxnSp>
       </p:grpSp>
-      <mc:AlternateContent xmlns:mc="http://schemas.openxmlformats.org/markup-compatibility/2006">
-        <mc:Choice xmlns:a14="http://schemas.microsoft.com/office/drawing/2010/main" Requires="a14">
+      <mc:AlternateContent xmlns:mc="http://schemas.openxmlformats.org/markup-compatibility/2006" xmlns:a14="http://schemas.microsoft.com/office/drawing/2010/main">
+        <mc:Choice Requires="a14">
           <p:sp>
             <p:nvSpPr>
               <p:cNvPr id="3" name="Content Placeholder 2">
@@ -34557,7 +34569,7 @@
             </p:txBody>
           </p:sp>
         </mc:Choice>
-        <mc:Fallback>
+        <mc:Fallback xmlns="">
           <p:sp>
             <p:nvSpPr>
               <p:cNvPr id="3" name="Content Placeholder 2">
@@ -34637,8 +34649,8 @@
           </a:p>
         </p:txBody>
       </p:sp>
-      <mc:AlternateContent xmlns:mc="http://schemas.openxmlformats.org/markup-compatibility/2006">
-        <mc:Choice xmlns:a14="http://schemas.microsoft.com/office/drawing/2010/main" Requires="a14">
+      <mc:AlternateContent xmlns:mc="http://schemas.openxmlformats.org/markup-compatibility/2006" xmlns:a14="http://schemas.microsoft.com/office/drawing/2010/main">
+        <mc:Choice Requires="a14">
           <p:sp>
             <p:nvSpPr>
               <p:cNvPr id="14" name="Speech Bubble: Rectangle 13">
@@ -34718,7 +34730,7 @@
             </p:txBody>
           </p:sp>
         </mc:Choice>
-        <mc:Fallback>
+        <mc:Fallback xmlns="">
           <p:sp>
             <p:nvSpPr>
               <p:cNvPr id="14" name="Speech Bubble: Rectangle 13">
@@ -35076,7 +35088,7 @@
           <a:p>
             <a:r>
               <a:rPr lang="en-US" dirty="0"/>
-              <a:t>Deep Learning</a:t>
+              <a:t>Deep Learning: Foundation of Moden AI</a:t>
             </a:r>
           </a:p>
         </p:txBody>
@@ -35099,13 +35111,13 @@
         </p:nvSpPr>
         <p:spPr>
           <a:xfrm>
-            <a:off x="838200" y="1475545"/>
-            <a:ext cx="10515600" cy="1325562"/>
+            <a:off x="838200" y="1401002"/>
+            <a:ext cx="10515600" cy="1220613"/>
           </a:xfrm>
         </p:spPr>
         <p:txBody>
           <a:bodyPr>
-            <a:normAutofit fontScale="47500" lnSpcReduction="20000"/>
+            <a:normAutofit fontScale="55000" lnSpcReduction="20000"/>
           </a:bodyPr>
           <a:lstStyle/>
           <a:p>
@@ -35129,7 +35141,7 @@
             </a:r>
             <a:r>
               <a:rPr lang="en-US" dirty="0"/>
-              <a:t>(e.g., convolution layers) for more efficient learning.</a:t>
+              <a:t>(e.g., convolution layers for image processing) for more efficient learning.</a:t>
             </a:r>
           </a:p>
           <a:p>
@@ -35143,22 +35155,21 @@
             </a:r>
           </a:p>
           <a:p>
-            <a:pPr marL="0" indent="0">
-              <a:buNone/>
-            </a:pPr>
-            <a:endParaRPr lang="en-US" dirty="0"/>
-          </a:p>
-          <a:p>
-            <a:pPr marL="0" indent="0">
-              <a:buNone/>
-            </a:pPr>
+            <a:r>
+              <a:rPr lang="en-US" dirty="0"/>
+              <a:t>Called </a:t>
+            </a:r>
+            <a:r>
+              <a:rPr lang="en-US" b="1" dirty="0" err="1"/>
+              <a:t>subsymbolic</a:t>
+            </a:r>
             <a:r>
               <a:rPr lang="en-US" b="1" dirty="0"/>
-              <a:t>Example</a:t>
+              <a:t> AI </a:t>
             </a:r>
             <a:r>
               <a:rPr lang="en-US" dirty="0"/>
-              <a:t>: A deep ANN to play Classic Atari Breakout (1978)</a:t>
+              <a:t>because it is not built on rules about humanly readable symbols, but on patterns stored as weights.</a:t>
             </a:r>
           </a:p>
           <a:p>
@@ -35171,10 +35182,10 @@
       </p:sp>
       <p:grpSp>
         <p:nvGrpSpPr>
-          <p:cNvPr id="10" name="Group 9">
+          <p:cNvPr id="25" name="Group 24">
             <a:extLst>
               <a:ext uri="{FF2B5EF4-FFF2-40B4-BE49-F238E27FC236}">
-                <a16:creationId xmlns:a16="http://schemas.microsoft.com/office/drawing/2014/main" id="{611305A4-B3E5-F322-0538-62DD4F093355}"/>
+                <a16:creationId xmlns:a16="http://schemas.microsoft.com/office/drawing/2014/main" id="{F1CB3619-AD97-A9A9-FFC0-462E7E824ACF}"/>
               </a:ext>
             </a:extLst>
           </p:cNvPr>
@@ -35183,65 +35194,460 @@
         </p:nvGrpSpPr>
         <p:grpSpPr>
           <a:xfrm>
-            <a:off x="990600" y="2875847"/>
-            <a:ext cx="9942319" cy="3677353"/>
-            <a:chOff x="990600" y="2987854"/>
-            <a:chExt cx="9942319" cy="3677353"/>
+            <a:off x="838200" y="2667875"/>
+            <a:ext cx="10287000" cy="3741885"/>
+            <a:chOff x="838200" y="2667875"/>
+            <a:chExt cx="10287000" cy="3741885"/>
           </a:xfrm>
         </p:grpSpPr>
-        <p:pic>
-          <p:nvPicPr>
-            <p:cNvPr id="1026" name="Picture 2" descr="Convolutional_NN 3">
+        <p:grpSp>
+          <p:nvGrpSpPr>
+            <p:cNvPr id="12" name="Group 11">
               <a:extLst>
                 <a:ext uri="{FF2B5EF4-FFF2-40B4-BE49-F238E27FC236}">
-                  <a16:creationId xmlns:a16="http://schemas.microsoft.com/office/drawing/2014/main" id="{5ADCBD79-8DAD-479E-37E5-5F3FB611FB32}"/>
+                  <a16:creationId xmlns:a16="http://schemas.microsoft.com/office/drawing/2014/main" id="{7C5A5B02-A3A9-61AC-E79B-879FBF717B64}"/>
                 </a:ext>
               </a:extLst>
             </p:cNvPr>
-            <p:cNvPicPr>
-              <a:picLocks noChangeAspect="1" noChangeArrowheads="1"/>
-            </p:cNvPicPr>
+            <p:cNvGrpSpPr/>
             <p:nvPr/>
-          </p:nvPicPr>
-          <p:blipFill>
-            <a:blip r:embed="rId2">
-              <a:extLst>
-                <a:ext uri="{28A0092B-C50C-407E-A947-70E740481C1C}">
-                  <a14:useLocalDpi xmlns:a14="http://schemas.microsoft.com/office/drawing/2010/main" val="0"/>
-                </a:ext>
-              </a:extLst>
-            </a:blip>
-            <a:srcRect/>
-            <a:stretch>
-              <a:fillRect/>
-            </a:stretch>
-          </p:blipFill>
-          <p:spPr bwMode="auto">
+          </p:nvGrpSpPr>
+          <p:grpSpPr>
             <a:xfrm>
-              <a:off x="4114800" y="2987854"/>
-              <a:ext cx="4491038" cy="3417203"/>
+              <a:off x="838200" y="2667875"/>
+              <a:ext cx="10287000" cy="3741885"/>
+              <a:chOff x="838200" y="2667875"/>
+              <a:chExt cx="10287000" cy="3741885"/>
             </a:xfrm>
-            <a:prstGeom prst="rect">
-              <a:avLst/>
-            </a:prstGeom>
-            <a:noFill/>
-            <a:extLst>
-              <a:ext uri="{909E8E84-426E-40DD-AFC4-6F175D3DCCD1}">
-                <a14:hiddenFill xmlns:a14="http://schemas.microsoft.com/office/drawing/2010/main">
-                  <a:solidFill>
-                    <a:srgbClr val="FFFFFF"/>
-                  </a:solidFill>
-                </a14:hiddenFill>
-              </a:ext>
-            </a:extLst>
-          </p:spPr>
-        </p:pic>
+          </p:grpSpPr>
+          <p:grpSp>
+            <p:nvGrpSpPr>
+              <p:cNvPr id="10" name="Group 9">
+                <a:extLst>
+                  <a:ext uri="{FF2B5EF4-FFF2-40B4-BE49-F238E27FC236}">
+                    <a16:creationId xmlns:a16="http://schemas.microsoft.com/office/drawing/2014/main" id="{611305A4-B3E5-F322-0538-62DD4F093355}"/>
+                  </a:ext>
+                </a:extLst>
+              </p:cNvPr>
+              <p:cNvGrpSpPr/>
+              <p:nvPr/>
+            </p:nvGrpSpPr>
+            <p:grpSpPr>
+              <a:xfrm>
+                <a:off x="1371600" y="3037207"/>
+                <a:ext cx="9753600" cy="3372553"/>
+                <a:chOff x="990600" y="2987854"/>
+                <a:chExt cx="9942319" cy="3677353"/>
+              </a:xfrm>
+            </p:grpSpPr>
+            <p:pic>
+              <p:nvPicPr>
+                <p:cNvPr id="1026" name="Picture 2" descr="Convolutional_NN 3">
+                  <a:extLst>
+                    <a:ext uri="{FF2B5EF4-FFF2-40B4-BE49-F238E27FC236}">
+                      <a16:creationId xmlns:a16="http://schemas.microsoft.com/office/drawing/2014/main" id="{5ADCBD79-8DAD-479E-37E5-5F3FB611FB32}"/>
+                    </a:ext>
+                  </a:extLst>
+                </p:cNvPr>
+                <p:cNvPicPr>
+                  <a:picLocks noChangeAspect="1" noChangeArrowheads="1"/>
+                </p:cNvPicPr>
+                <p:nvPr/>
+              </p:nvPicPr>
+              <p:blipFill>
+                <a:blip r:embed="rId2">
+                  <a:extLst>
+                    <a:ext uri="{28A0092B-C50C-407E-A947-70E740481C1C}">
+                      <a14:useLocalDpi xmlns:a14="http://schemas.microsoft.com/office/drawing/2010/main" val="0"/>
+                    </a:ext>
+                  </a:extLst>
+                </a:blip>
+                <a:srcRect/>
+                <a:stretch>
+                  <a:fillRect/>
+                </a:stretch>
+              </p:blipFill>
+              <p:spPr bwMode="auto">
+                <a:xfrm>
+                  <a:off x="4114800" y="2987854"/>
+                  <a:ext cx="4491038" cy="3417203"/>
+                </a:xfrm>
+                <a:prstGeom prst="rect">
+                  <a:avLst/>
+                </a:prstGeom>
+                <a:noFill/>
+                <a:extLst>
+                  <a:ext uri="{909E8E84-426E-40DD-AFC4-6F175D3DCCD1}">
+                    <a14:hiddenFill xmlns:a14="http://schemas.microsoft.com/office/drawing/2010/main">
+                      <a:solidFill>
+                        <a:srgbClr val="FFFFFF"/>
+                      </a:solidFill>
+                    </a14:hiddenFill>
+                  </a:ext>
+                </a:extLst>
+              </p:spPr>
+            </p:pic>
+            <p:sp>
+              <p:nvSpPr>
+                <p:cNvPr id="5" name="TextBox 4">
+                  <a:extLst>
+                    <a:ext uri="{FF2B5EF4-FFF2-40B4-BE49-F238E27FC236}">
+                      <a16:creationId xmlns:a16="http://schemas.microsoft.com/office/drawing/2014/main" id="{B9453A1E-6BB2-1E5B-5D32-BDD6CEFC3125}"/>
+                    </a:ext>
+                  </a:extLst>
+                </p:cNvPr>
+                <p:cNvSpPr txBox="1"/>
+                <p:nvPr/>
+              </p:nvSpPr>
+              <p:spPr>
+                <a:xfrm>
+                  <a:off x="2607730" y="6403597"/>
+                  <a:ext cx="7391807" cy="261610"/>
+                </a:xfrm>
+                <a:prstGeom prst="rect">
+                  <a:avLst/>
+                </a:prstGeom>
+                <a:noFill/>
+              </p:spPr>
+              <p:txBody>
+                <a:bodyPr wrap="square">
+                  <a:spAutoFit/>
+                </a:bodyPr>
+                <a:lstStyle/>
+                <a:p>
+                  <a:pPr algn="ctr"/>
+                  <a:r>
+                    <a:rPr lang="en-US" sz="1100" dirty="0"/>
+                    <a:t>Source: </a:t>
+                  </a:r>
+                  <a:r>
+                    <a:rPr lang="en-US" sz="1100" dirty="0">
+                      <a:hlinkClick r:id="rId3"/>
+                    </a:rPr>
+                    <a:t>https://robohub.org/artificial-general-intelligence-that-plays-atari-video-games-how-did-deepmind-do-it/</a:t>
+                  </a:r>
+                  <a:r>
+                    <a:rPr lang="en-US" sz="1100" dirty="0"/>
+                    <a:t> </a:t>
+                  </a:r>
+                </a:p>
+              </p:txBody>
+            </p:sp>
+            <p:pic>
+              <p:nvPicPr>
+                <p:cNvPr id="1030" name="Picture 6" descr="Atari CX40 joystick - Wikipedia">
+                  <a:extLst>
+                    <a:ext uri="{FF2B5EF4-FFF2-40B4-BE49-F238E27FC236}">
+                      <a16:creationId xmlns:a16="http://schemas.microsoft.com/office/drawing/2014/main" id="{CDA4C143-D957-2586-E284-8E018FAED359}"/>
+                    </a:ext>
+                  </a:extLst>
+                </p:cNvPr>
+                <p:cNvPicPr>
+                  <a:picLocks noChangeAspect="1" noChangeArrowheads="1"/>
+                </p:cNvPicPr>
+                <p:nvPr/>
+              </p:nvPicPr>
+              <p:blipFill>
+                <a:blip r:embed="rId4" cstate="print">
+                  <a:extLst>
+                    <a:ext uri="{28A0092B-C50C-407E-A947-70E740481C1C}">
+                      <a14:useLocalDpi xmlns:a14="http://schemas.microsoft.com/office/drawing/2010/main" val="0"/>
+                    </a:ext>
+                  </a:extLst>
+                </a:blip>
+                <a:srcRect/>
+                <a:stretch>
+                  <a:fillRect/>
+                </a:stretch>
+              </p:blipFill>
+              <p:spPr bwMode="auto">
+                <a:xfrm>
+                  <a:off x="9445635" y="4163055"/>
+                  <a:ext cx="1033462" cy="1066800"/>
+                </a:xfrm>
+                <a:prstGeom prst="rect">
+                  <a:avLst/>
+                </a:prstGeom>
+                <a:noFill/>
+                <a:extLst>
+                  <a:ext uri="{909E8E84-426E-40DD-AFC4-6F175D3DCCD1}">
+                    <a14:hiddenFill xmlns:a14="http://schemas.microsoft.com/office/drawing/2010/main">
+                      <a:solidFill>
+                        <a:srgbClr val="FFFFFF"/>
+                      </a:solidFill>
+                    </a14:hiddenFill>
+                  </a:ext>
+                </a:extLst>
+              </p:spPr>
+            </p:pic>
+            <p:sp>
+              <p:nvSpPr>
+                <p:cNvPr id="6" name="Arrow: Right 5">
+                  <a:extLst>
+                    <a:ext uri="{FF2B5EF4-FFF2-40B4-BE49-F238E27FC236}">
+                      <a16:creationId xmlns:a16="http://schemas.microsoft.com/office/drawing/2014/main" id="{DECDA8BF-D112-8C0D-6B8C-3A2F41631A39}"/>
+                    </a:ext>
+                  </a:extLst>
+                </p:cNvPr>
+                <p:cNvSpPr/>
+                <p:nvPr/>
+              </p:nvSpPr>
+              <p:spPr>
+                <a:xfrm>
+                  <a:off x="3386138" y="4239255"/>
+                  <a:ext cx="762000" cy="914400"/>
+                </a:xfrm>
+                <a:prstGeom prst="rightArrow">
+                  <a:avLst/>
+                </a:prstGeom>
+              </p:spPr>
+              <p:style>
+                <a:lnRef idx="2">
+                  <a:schemeClr val="accent1">
+                    <a:shade val="15000"/>
+                  </a:schemeClr>
+                </a:lnRef>
+                <a:fillRef idx="1">
+                  <a:schemeClr val="accent1"/>
+                </a:fillRef>
+                <a:effectRef idx="0">
+                  <a:schemeClr val="accent1"/>
+                </a:effectRef>
+                <a:fontRef idx="minor">
+                  <a:schemeClr val="lt1"/>
+                </a:fontRef>
+              </p:style>
+              <p:txBody>
+                <a:bodyPr rtlCol="0" anchor="ctr"/>
+                <a:lstStyle/>
+                <a:p>
+                  <a:pPr algn="ctr"/>
+                  <a:endParaRPr lang="en-US"/>
+                </a:p>
+              </p:txBody>
+            </p:sp>
+            <p:sp>
+              <p:nvSpPr>
+                <p:cNvPr id="7" name="Arrow: Right 6">
+                  <a:extLst>
+                    <a:ext uri="{FF2B5EF4-FFF2-40B4-BE49-F238E27FC236}">
+                      <a16:creationId xmlns:a16="http://schemas.microsoft.com/office/drawing/2014/main" id="{15260B91-9AE5-8437-9B3F-58C23833A0F1}"/>
+                    </a:ext>
+                  </a:extLst>
+                </p:cNvPr>
+                <p:cNvSpPr/>
+                <p:nvPr/>
+              </p:nvSpPr>
+              <p:spPr>
+                <a:xfrm>
+                  <a:off x="8382000" y="4239255"/>
+                  <a:ext cx="762000" cy="914400"/>
+                </a:xfrm>
+                <a:prstGeom prst="rightArrow">
+                  <a:avLst/>
+                </a:prstGeom>
+              </p:spPr>
+              <p:style>
+                <a:lnRef idx="2">
+                  <a:schemeClr val="accent1">
+                    <a:shade val="15000"/>
+                  </a:schemeClr>
+                </a:lnRef>
+                <a:fillRef idx="1">
+                  <a:schemeClr val="accent1"/>
+                </a:fillRef>
+                <a:effectRef idx="0">
+                  <a:schemeClr val="accent1"/>
+                </a:effectRef>
+                <a:fontRef idx="minor">
+                  <a:schemeClr val="lt1"/>
+                </a:fontRef>
+              </p:style>
+              <p:txBody>
+                <a:bodyPr rtlCol="0" anchor="ctr"/>
+                <a:lstStyle/>
+                <a:p>
+                  <a:pPr algn="ctr"/>
+                  <a:endParaRPr lang="en-US"/>
+                </a:p>
+              </p:txBody>
+            </p:sp>
+            <p:pic>
+              <p:nvPicPr>
+                <p:cNvPr id="1032" name="Picture 8" descr="Breakout (Breakaway IV) – October 1978 | Atari Archive">
+                  <a:extLst>
+                    <a:ext uri="{FF2B5EF4-FFF2-40B4-BE49-F238E27FC236}">
+                      <a16:creationId xmlns:a16="http://schemas.microsoft.com/office/drawing/2014/main" id="{71FDAB80-A12D-088D-8E38-AD218A9A5D3F}"/>
+                    </a:ext>
+                  </a:extLst>
+                </p:cNvPr>
+                <p:cNvPicPr>
+                  <a:picLocks noChangeAspect="1" noChangeArrowheads="1"/>
+                </p:cNvPicPr>
+                <p:nvPr/>
+              </p:nvPicPr>
+              <p:blipFill>
+                <a:blip r:embed="rId5" cstate="print">
+                  <a:extLst>
+                    <a:ext uri="{BEBA8EAE-BF5A-486C-A8C5-ECC9F3942E4B}">
+                      <a14:imgProps xmlns:a14="http://schemas.microsoft.com/office/drawing/2010/main">
+                        <a14:imgLayer r:embed="rId6">
+                          <a14:imgEffect>
+                            <a14:brightnessContrast contrast="-40000"/>
+                          </a14:imgEffect>
+                        </a14:imgLayer>
+                      </a14:imgProps>
+                    </a:ext>
+                    <a:ext uri="{28A0092B-C50C-407E-A947-70E740481C1C}">
+                      <a14:useLocalDpi xmlns:a14="http://schemas.microsoft.com/office/drawing/2010/main" val="0"/>
+                    </a:ext>
+                  </a:extLst>
+                </a:blip>
+                <a:srcRect/>
+                <a:stretch>
+                  <a:fillRect/>
+                </a:stretch>
+              </p:blipFill>
+              <p:spPr bwMode="auto">
+                <a:xfrm>
+                  <a:off x="1232690" y="3983564"/>
+                  <a:ext cx="1733550" cy="1425782"/>
+                </a:xfrm>
+                <a:prstGeom prst="rect">
+                  <a:avLst/>
+                </a:prstGeom>
+                <a:noFill/>
+                <a:extLst>
+                  <a:ext uri="{909E8E84-426E-40DD-AFC4-6F175D3DCCD1}">
+                    <a14:hiddenFill xmlns:a14="http://schemas.microsoft.com/office/drawing/2010/main">
+                      <a:solidFill>
+                        <a:srgbClr val="FFFFFF"/>
+                      </a:solidFill>
+                    </a14:hiddenFill>
+                  </a:ext>
+                </a:extLst>
+              </p:spPr>
+            </p:pic>
+            <p:sp>
+              <p:nvSpPr>
+                <p:cNvPr id="8" name="TextBox 7">
+                  <a:extLst>
+                    <a:ext uri="{FF2B5EF4-FFF2-40B4-BE49-F238E27FC236}">
+                      <a16:creationId xmlns:a16="http://schemas.microsoft.com/office/drawing/2014/main" id="{4503707F-E44A-F38A-2A8F-0F489817CB73}"/>
+                    </a:ext>
+                  </a:extLst>
+                </p:cNvPr>
+                <p:cNvSpPr txBox="1"/>
+                <p:nvPr/>
+              </p:nvSpPr>
+              <p:spPr>
+                <a:xfrm>
+                  <a:off x="990600" y="5426660"/>
+                  <a:ext cx="2133600" cy="704744"/>
+                </a:xfrm>
+                <a:prstGeom prst="rect">
+                  <a:avLst/>
+                </a:prstGeom>
+                <a:noFill/>
+              </p:spPr>
+              <p:txBody>
+                <a:bodyPr wrap="square" rtlCol="0">
+                  <a:spAutoFit/>
+                </a:bodyPr>
+                <a:lstStyle/>
+                <a:p>
+                  <a:r>
+                    <a:rPr lang="en-US" dirty="0"/>
+                    <a:t>Input features: Frame with Pixels</a:t>
+                  </a:r>
+                </a:p>
+              </p:txBody>
+            </p:sp>
+            <p:sp>
+              <p:nvSpPr>
+                <p:cNvPr id="9" name="TextBox 8">
+                  <a:extLst>
+                    <a:ext uri="{FF2B5EF4-FFF2-40B4-BE49-F238E27FC236}">
+                      <a16:creationId xmlns:a16="http://schemas.microsoft.com/office/drawing/2014/main" id="{1A020909-1ED5-0C5F-9D03-CA9B28106AE8}"/>
+                    </a:ext>
+                  </a:extLst>
+                </p:cNvPr>
+                <p:cNvSpPr txBox="1"/>
+                <p:nvPr/>
+              </p:nvSpPr>
+              <p:spPr>
+                <a:xfrm>
+                  <a:off x="9218419" y="5218438"/>
+                  <a:ext cx="1714500" cy="369332"/>
+                </a:xfrm>
+                <a:prstGeom prst="rect">
+                  <a:avLst/>
+                </a:prstGeom>
+                <a:noFill/>
+              </p:spPr>
+              <p:txBody>
+                <a:bodyPr wrap="square" rtlCol="0">
+                  <a:spAutoFit/>
+                </a:bodyPr>
+                <a:lstStyle/>
+                <a:p>
+                  <a:r>
+                    <a:rPr lang="en-US" dirty="0"/>
+                    <a:t>Output: Actions</a:t>
+                  </a:r>
+                </a:p>
+              </p:txBody>
+            </p:sp>
+          </p:grpSp>
+          <p:sp>
+            <p:nvSpPr>
+              <p:cNvPr id="11" name="TextBox 10">
+                <a:extLst>
+                  <a:ext uri="{FF2B5EF4-FFF2-40B4-BE49-F238E27FC236}">
+                    <a16:creationId xmlns:a16="http://schemas.microsoft.com/office/drawing/2014/main" id="{BF231605-DE63-0502-89EA-4982AD627732}"/>
+                  </a:ext>
+                </a:extLst>
+              </p:cNvPr>
+              <p:cNvSpPr txBox="1"/>
+              <p:nvPr/>
+            </p:nvSpPr>
+            <p:spPr>
+              <a:xfrm>
+                <a:off x="838200" y="2667875"/>
+                <a:ext cx="6097248" cy="369332"/>
+              </a:xfrm>
+              <a:prstGeom prst="rect">
+                <a:avLst/>
+              </a:prstGeom>
+              <a:noFill/>
+            </p:spPr>
+            <p:txBody>
+              <a:bodyPr wrap="square">
+                <a:spAutoFit/>
+              </a:bodyPr>
+              <a:lstStyle/>
+              <a:p>
+                <a:pPr marL="0" indent="0">
+                  <a:buNone/>
+                </a:pPr>
+                <a:r>
+                  <a:rPr lang="en-US" b="1" dirty="0"/>
+                  <a:t>Example</a:t>
+                </a:r>
+                <a:r>
+                  <a:rPr lang="en-US" dirty="0"/>
+                  <a:t>: A deep ANN to play Classic Atari Breakout (1978)</a:t>
+                </a:r>
+              </a:p>
+            </p:txBody>
+          </p:sp>
+        </p:grpSp>
         <p:sp>
           <p:nvSpPr>
-            <p:cNvPr id="5" name="TextBox 4">
+            <p:cNvPr id="4" name="TextBox 3">
               <a:extLst>
                 <a:ext uri="{FF2B5EF4-FFF2-40B4-BE49-F238E27FC236}">
-                  <a16:creationId xmlns:a16="http://schemas.microsoft.com/office/drawing/2014/main" id="{B9453A1E-6BB2-1E5B-5D32-BDD6CEFC3125}"/>
+                  <a16:creationId xmlns:a16="http://schemas.microsoft.com/office/drawing/2014/main" id="{2E53EC8A-8D9C-DE76-C433-D125DD11B7E4}"/>
                 </a:ext>
               </a:extLst>
             </p:cNvPr>
@@ -35250,8 +35656,8 @@
           </p:nvSpPr>
           <p:spPr>
             <a:xfrm>
-              <a:off x="2607730" y="6403597"/>
-              <a:ext cx="7391807" cy="261610"/>
+              <a:off x="8070318" y="3840211"/>
+              <a:ext cx="344966" cy="276999"/>
             </a:xfrm>
             <a:prstGeom prst="rect">
               <a:avLst/>
@@ -35259,174 +35665,164 @@
             <a:noFill/>
           </p:spPr>
           <p:txBody>
-            <a:bodyPr wrap="square">
+            <a:bodyPr wrap="none" rtlCol="0">
               <a:spAutoFit/>
             </a:bodyPr>
             <a:lstStyle/>
             <a:p>
-              <a:pPr algn="ctr"/>
               <a:r>
-                <a:rPr lang="en-US" sz="1100" dirty="0"/>
-                <a:t>Source: </a:t>
+                <a:rPr lang="en-US" sz="1200" dirty="0"/>
+                <a:t>up</a:t>
               </a:r>
+            </a:p>
+          </p:txBody>
+        </p:sp>
+        <p:sp>
+          <p:nvSpPr>
+            <p:cNvPr id="14" name="TextBox 13">
+              <a:extLst>
+                <a:ext uri="{FF2B5EF4-FFF2-40B4-BE49-F238E27FC236}">
+                  <a16:creationId xmlns:a16="http://schemas.microsoft.com/office/drawing/2014/main" id="{7C5CB063-EDAC-1B09-3216-EA8A661CD724}"/>
+                </a:ext>
+              </a:extLst>
+            </p:cNvPr>
+            <p:cNvSpPr txBox="1"/>
+            <p:nvPr/>
+          </p:nvSpPr>
+          <p:spPr>
+            <a:xfrm>
+              <a:off x="8038602" y="4152218"/>
+              <a:ext cx="536750" cy="276999"/>
+            </a:xfrm>
+            <a:prstGeom prst="rect">
+              <a:avLst/>
+            </a:prstGeom>
+            <a:noFill/>
+          </p:spPr>
+          <p:txBody>
+            <a:bodyPr wrap="none" rtlCol="0">
+              <a:spAutoFit/>
+            </a:bodyPr>
+            <a:lstStyle/>
+            <a:p>
               <a:r>
-                <a:rPr lang="en-US" sz="1100" dirty="0">
-                  <a:hlinkClick r:id="rId3"/>
-                </a:rPr>
-                <a:t>https://robohub.org/artificial-general-intelligence-that-plays-atari-video-games-how-did-deepmind-do-it/</a:t>
+                <a:rPr lang="en-US" sz="1200" dirty="0"/>
+                <a:t>down</a:t>
               </a:r>
+            </a:p>
+          </p:txBody>
+        </p:sp>
+        <p:sp>
+          <p:nvSpPr>
+            <p:cNvPr id="16" name="TextBox 15">
+              <a:extLst>
+                <a:ext uri="{FF2B5EF4-FFF2-40B4-BE49-F238E27FC236}">
+                  <a16:creationId xmlns:a16="http://schemas.microsoft.com/office/drawing/2014/main" id="{CE2E31AF-18A1-3B87-17D4-6610C18520C4}"/>
+                </a:ext>
+              </a:extLst>
+            </p:cNvPr>
+            <p:cNvSpPr txBox="1"/>
+            <p:nvPr/>
+          </p:nvSpPr>
+          <p:spPr>
+            <a:xfrm>
+              <a:off x="8053000" y="4413947"/>
+              <a:ext cx="475002" cy="276999"/>
+            </a:xfrm>
+            <a:prstGeom prst="rect">
+              <a:avLst/>
+            </a:prstGeom>
+            <a:noFill/>
+          </p:spPr>
+          <p:txBody>
+            <a:bodyPr wrap="none" rtlCol="0">
+              <a:spAutoFit/>
+            </a:bodyPr>
+            <a:lstStyle/>
+            <a:p>
               <a:r>
-                <a:rPr lang="en-US" sz="1100" dirty="0"/>
-                <a:t> </a:t>
+                <a:rPr lang="en-US" sz="1200" dirty="0"/>
+                <a:t>right</a:t>
+              </a:r>
+            </a:p>
+          </p:txBody>
+        </p:sp>
+        <p:sp>
+          <p:nvSpPr>
+            <p:cNvPr id="18" name="TextBox 17">
+              <a:extLst>
+                <a:ext uri="{FF2B5EF4-FFF2-40B4-BE49-F238E27FC236}">
+                  <a16:creationId xmlns:a16="http://schemas.microsoft.com/office/drawing/2014/main" id="{8735E323-16BB-8367-89AD-CA375E451187}"/>
+                </a:ext>
+              </a:extLst>
+            </p:cNvPr>
+            <p:cNvSpPr txBox="1"/>
+            <p:nvPr/>
+          </p:nvSpPr>
+          <p:spPr>
+            <a:xfrm>
+              <a:off x="8058416" y="4643215"/>
+              <a:ext cx="393313" cy="276999"/>
+            </a:xfrm>
+            <a:prstGeom prst="rect">
+              <a:avLst/>
+            </a:prstGeom>
+            <a:noFill/>
+          </p:spPr>
+          <p:txBody>
+            <a:bodyPr wrap="none" rtlCol="0">
+              <a:spAutoFit/>
+            </a:bodyPr>
+            <a:lstStyle/>
+            <a:p>
+              <a:r>
+                <a:rPr lang="en-US" sz="1200" dirty="0"/>
+                <a:t>left</a:t>
+              </a:r>
+            </a:p>
+          </p:txBody>
+        </p:sp>
+        <p:sp>
+          <p:nvSpPr>
+            <p:cNvPr id="20" name="TextBox 19">
+              <a:extLst>
+                <a:ext uri="{FF2B5EF4-FFF2-40B4-BE49-F238E27FC236}">
+                  <a16:creationId xmlns:a16="http://schemas.microsoft.com/office/drawing/2014/main" id="{764BCBC0-2FDC-F1C0-754B-B77DE13A42D8}"/>
+                </a:ext>
+              </a:extLst>
+            </p:cNvPr>
+            <p:cNvSpPr txBox="1"/>
+            <p:nvPr/>
+          </p:nvSpPr>
+          <p:spPr>
+            <a:xfrm>
+              <a:off x="8058416" y="4900257"/>
+              <a:ext cx="605807" cy="276999"/>
+            </a:xfrm>
+            <a:prstGeom prst="rect">
+              <a:avLst/>
+            </a:prstGeom>
+            <a:noFill/>
+          </p:spPr>
+          <p:txBody>
+            <a:bodyPr wrap="none" rtlCol="0">
+              <a:spAutoFit/>
+            </a:bodyPr>
+            <a:lstStyle/>
+            <a:p>
+              <a:r>
+                <a:rPr lang="en-US" sz="1200" dirty="0"/>
+                <a:t>button</a:t>
               </a:r>
             </a:p>
           </p:txBody>
         </p:sp>
         <p:pic>
           <p:nvPicPr>
-            <p:cNvPr id="1030" name="Picture 6" descr="Atari CX40 joystick - Wikipedia">
+            <p:cNvPr id="22" name="Picture 8" descr="Breakout (Breakaway IV) – October 1978 | Atari Archive">
               <a:extLst>
                 <a:ext uri="{FF2B5EF4-FFF2-40B4-BE49-F238E27FC236}">
-                  <a16:creationId xmlns:a16="http://schemas.microsoft.com/office/drawing/2014/main" id="{CDA4C143-D957-2586-E284-8E018FAED359}"/>
-                </a:ext>
-              </a:extLst>
-            </p:cNvPr>
-            <p:cNvPicPr>
-              <a:picLocks noChangeAspect="1" noChangeArrowheads="1"/>
-            </p:cNvPicPr>
-            <p:nvPr/>
-          </p:nvPicPr>
-          <p:blipFill>
-            <a:blip r:embed="rId4" cstate="print">
-              <a:extLst>
-                <a:ext uri="{28A0092B-C50C-407E-A947-70E740481C1C}">
-                  <a14:useLocalDpi xmlns:a14="http://schemas.microsoft.com/office/drawing/2010/main" val="0"/>
-                </a:ext>
-              </a:extLst>
-            </a:blip>
-            <a:srcRect/>
-            <a:stretch>
-              <a:fillRect/>
-            </a:stretch>
-          </p:blipFill>
-          <p:spPr bwMode="auto">
-            <a:xfrm>
-              <a:off x="9445635" y="4163055"/>
-              <a:ext cx="1033462" cy="1066800"/>
-            </a:xfrm>
-            <a:prstGeom prst="rect">
-              <a:avLst/>
-            </a:prstGeom>
-            <a:noFill/>
-            <a:extLst>
-              <a:ext uri="{909E8E84-426E-40DD-AFC4-6F175D3DCCD1}">
-                <a14:hiddenFill xmlns:a14="http://schemas.microsoft.com/office/drawing/2010/main">
-                  <a:solidFill>
-                    <a:srgbClr val="FFFFFF"/>
-                  </a:solidFill>
-                </a14:hiddenFill>
-              </a:ext>
-            </a:extLst>
-          </p:spPr>
-        </p:pic>
-        <p:sp>
-          <p:nvSpPr>
-            <p:cNvPr id="6" name="Arrow: Right 5">
-              <a:extLst>
-                <a:ext uri="{FF2B5EF4-FFF2-40B4-BE49-F238E27FC236}">
-                  <a16:creationId xmlns:a16="http://schemas.microsoft.com/office/drawing/2014/main" id="{DECDA8BF-D112-8C0D-6B8C-3A2F41631A39}"/>
-                </a:ext>
-              </a:extLst>
-            </p:cNvPr>
-            <p:cNvSpPr/>
-            <p:nvPr/>
-          </p:nvSpPr>
-          <p:spPr>
-            <a:xfrm>
-              <a:off x="3386138" y="4239255"/>
-              <a:ext cx="762000" cy="914400"/>
-            </a:xfrm>
-            <a:prstGeom prst="rightArrow">
-              <a:avLst/>
-            </a:prstGeom>
-          </p:spPr>
-          <p:style>
-            <a:lnRef idx="2">
-              <a:schemeClr val="accent1">
-                <a:shade val="15000"/>
-              </a:schemeClr>
-            </a:lnRef>
-            <a:fillRef idx="1">
-              <a:schemeClr val="accent1"/>
-            </a:fillRef>
-            <a:effectRef idx="0">
-              <a:schemeClr val="accent1"/>
-            </a:effectRef>
-            <a:fontRef idx="minor">
-              <a:schemeClr val="lt1"/>
-            </a:fontRef>
-          </p:style>
-          <p:txBody>
-            <a:bodyPr rtlCol="0" anchor="ctr"/>
-            <a:lstStyle/>
-            <a:p>
-              <a:pPr algn="ctr"/>
-              <a:endParaRPr lang="en-US"/>
-            </a:p>
-          </p:txBody>
-        </p:sp>
-        <p:sp>
-          <p:nvSpPr>
-            <p:cNvPr id="7" name="Arrow: Right 6">
-              <a:extLst>
-                <a:ext uri="{FF2B5EF4-FFF2-40B4-BE49-F238E27FC236}">
-                  <a16:creationId xmlns:a16="http://schemas.microsoft.com/office/drawing/2014/main" id="{15260B91-9AE5-8437-9B3F-58C23833A0F1}"/>
-                </a:ext>
-              </a:extLst>
-            </p:cNvPr>
-            <p:cNvSpPr/>
-            <p:nvPr/>
-          </p:nvSpPr>
-          <p:spPr>
-            <a:xfrm>
-              <a:off x="8382000" y="4239255"/>
-              <a:ext cx="762000" cy="914400"/>
-            </a:xfrm>
-            <a:prstGeom prst="rightArrow">
-              <a:avLst/>
-            </a:prstGeom>
-          </p:spPr>
-          <p:style>
-            <a:lnRef idx="2">
-              <a:schemeClr val="accent1">
-                <a:shade val="15000"/>
-              </a:schemeClr>
-            </a:lnRef>
-            <a:fillRef idx="1">
-              <a:schemeClr val="accent1"/>
-            </a:fillRef>
-            <a:effectRef idx="0">
-              <a:schemeClr val="accent1"/>
-            </a:effectRef>
-            <a:fontRef idx="minor">
-              <a:schemeClr val="lt1"/>
-            </a:fontRef>
-          </p:style>
-          <p:txBody>
-            <a:bodyPr rtlCol="0" anchor="ctr"/>
-            <a:lstStyle/>
-            <a:p>
-              <a:pPr algn="ctr"/>
-              <a:endParaRPr lang="en-US"/>
-            </a:p>
-          </p:txBody>
-        </p:sp>
-        <p:pic>
-          <p:nvPicPr>
-            <p:cNvPr id="1032" name="Picture 8" descr="Breakout (Breakaway IV) – October 1978 | Atari Archive">
-              <a:extLst>
-                <a:ext uri="{FF2B5EF4-FFF2-40B4-BE49-F238E27FC236}">
-                  <a16:creationId xmlns:a16="http://schemas.microsoft.com/office/drawing/2014/main" id="{71FDAB80-A12D-088D-8E38-AD218A9A5D3F}"/>
+                  <a16:creationId xmlns:a16="http://schemas.microsoft.com/office/drawing/2014/main" id="{78F2B5C7-4A39-6216-4A24-A2A9D5F676AB}"/>
                 </a:ext>
               </a:extLst>
             </p:cNvPr>
@@ -35437,6 +35833,7 @@
           </p:nvPicPr>
           <p:blipFill>
             <a:blip r:embed="rId5" cstate="print">
+              <a:alphaModFix amt="20000"/>
               <a:extLst>
                 <a:ext uri="{BEBA8EAE-BF5A-486C-A8C5-ECC9F3942E4B}">
                   <a14:imgProps xmlns:a14="http://schemas.microsoft.com/office/drawing/2010/main">
@@ -35459,8 +35856,8 @@
           </p:blipFill>
           <p:spPr bwMode="auto">
             <a:xfrm>
-              <a:off x="1232690" y="3983564"/>
-              <a:ext cx="1733550" cy="1425782"/>
+              <a:off x="4679503" y="3659990"/>
+              <a:ext cx="856515" cy="658564"/>
             </a:xfrm>
             <a:prstGeom prst="rect">
               <a:avLst/>
@@ -35477,81 +35874,68 @@
             </a:extLst>
           </p:spPr>
         </p:pic>
-        <p:sp>
-          <p:nvSpPr>
-            <p:cNvPr id="8" name="TextBox 7">
+        <p:pic>
+          <p:nvPicPr>
+            <p:cNvPr id="24" name="Picture 8" descr="Breakout (Breakaway IV) – October 1978 | Atari Archive">
               <a:extLst>
                 <a:ext uri="{FF2B5EF4-FFF2-40B4-BE49-F238E27FC236}">
-                  <a16:creationId xmlns:a16="http://schemas.microsoft.com/office/drawing/2014/main" id="{4503707F-E44A-F38A-2A8F-0F489817CB73}"/>
+                  <a16:creationId xmlns:a16="http://schemas.microsoft.com/office/drawing/2014/main" id="{2C4C1F12-9B81-076E-BBDB-BFEE850D6005}"/>
                 </a:ext>
               </a:extLst>
             </p:cNvPr>
-            <p:cNvSpPr txBox="1"/>
+            <p:cNvPicPr>
+              <a:picLocks noChangeAspect="1" noChangeArrowheads="1"/>
+            </p:cNvPicPr>
             <p:nvPr/>
-          </p:nvSpPr>
-          <p:spPr>
+          </p:nvPicPr>
+          <p:blipFill>
+            <a:blip r:embed="rId5" cstate="print">
+              <a:alphaModFix amt="20000"/>
+              <a:extLst>
+                <a:ext uri="{BEBA8EAE-BF5A-486C-A8C5-ECC9F3942E4B}">
+                  <a14:imgProps xmlns:a14="http://schemas.microsoft.com/office/drawing/2010/main">
+                    <a14:imgLayer r:embed="rId6">
+                      <a14:imgEffect>
+                        <a14:brightnessContrast contrast="-40000"/>
+                      </a14:imgEffect>
+                    </a14:imgLayer>
+                  </a14:imgProps>
+                </a:ext>
+                <a:ext uri="{28A0092B-C50C-407E-A947-70E740481C1C}">
+                  <a14:useLocalDpi xmlns:a14="http://schemas.microsoft.com/office/drawing/2010/main" val="0"/>
+                </a:ext>
+              </a:extLst>
+            </a:blip>
+            <a:srcRect/>
+            <a:stretch>
+              <a:fillRect/>
+            </a:stretch>
+          </p:blipFill>
+          <p:spPr bwMode="auto">
             <a:xfrm>
-              <a:off x="990600" y="5426660"/>
-              <a:ext cx="2133600" cy="369332"/>
+              <a:off x="4673381" y="4876126"/>
+              <a:ext cx="856515" cy="658564"/>
             </a:xfrm>
             <a:prstGeom prst="rect">
               <a:avLst/>
             </a:prstGeom>
             <a:noFill/>
+            <a:extLst>
+              <a:ext uri="{909E8E84-426E-40DD-AFC4-6F175D3DCCD1}">
+                <a14:hiddenFill xmlns:a14="http://schemas.microsoft.com/office/drawing/2010/main">
+                  <a:solidFill>
+                    <a:srgbClr val="FFFFFF"/>
+                  </a:solidFill>
+                </a14:hiddenFill>
+              </a:ext>
+            </a:extLst>
           </p:spPr>
-          <p:txBody>
-            <a:bodyPr wrap="square" rtlCol="0">
-              <a:spAutoFit/>
-            </a:bodyPr>
-            <a:lstStyle/>
-            <a:p>
-              <a:r>
-                <a:rPr lang="en-US" dirty="0"/>
-                <a:t>Input features: Pixels</a:t>
-              </a:r>
-            </a:p>
-          </p:txBody>
-        </p:sp>
-        <p:sp>
-          <p:nvSpPr>
-            <p:cNvPr id="9" name="TextBox 8">
-              <a:extLst>
-                <a:ext uri="{FF2B5EF4-FFF2-40B4-BE49-F238E27FC236}">
-                  <a16:creationId xmlns:a16="http://schemas.microsoft.com/office/drawing/2014/main" id="{1A020909-1ED5-0C5F-9D03-CA9B28106AE8}"/>
-                </a:ext>
-              </a:extLst>
-            </p:cNvPr>
-            <p:cNvSpPr txBox="1"/>
-            <p:nvPr/>
-          </p:nvSpPr>
-          <p:spPr>
-            <a:xfrm>
-              <a:off x="9218419" y="5218438"/>
-              <a:ext cx="1714500" cy="369332"/>
-            </a:xfrm>
-            <a:prstGeom prst="rect">
-              <a:avLst/>
-            </a:prstGeom>
-            <a:noFill/>
-          </p:spPr>
-          <p:txBody>
-            <a:bodyPr wrap="square" rtlCol="0">
-              <a:spAutoFit/>
-            </a:bodyPr>
-            <a:lstStyle/>
-            <a:p>
-              <a:r>
-                <a:rPr lang="en-US" dirty="0"/>
-                <a:t>Output: Actions</a:t>
-              </a:r>
-            </a:p>
-          </p:txBody>
-        </p:sp>
+        </p:pic>
       </p:grpSp>
     </p:spTree>
     <p:extLst>
       <p:ext uri="{BB962C8B-B14F-4D97-AF65-F5344CB8AC3E}">
-        <p14:creationId xmlns:p14="http://schemas.microsoft.com/office/powerpoint/2010/main" val="1668925761"/>
+        <p14:creationId xmlns:p14="http://schemas.microsoft.com/office/powerpoint/2010/main" val="4093877161"/>
       </p:ext>
     </p:extLst>
   </p:cSld>
@@ -36579,7 +36963,7 @@
                         <a:rPr lang="en-US" sz="1400" i="1" kern="1200" dirty="0" err="1" smtClean="0">
                           <a:latin typeface="Cambria Math" panose="02040503050406030204" pitchFamily="18" charset="0"/>
                         </a:rPr>
-                        <m:t>,</m:t>
+                        <m:t>, </m:t>
                       </m:r>
                       <m:r>
                         <a:rPr lang="en-US" sz="1400" i="1" kern="1200" dirty="0" err="1" smtClean="0">
@@ -37403,6 +37787,57 @@
           </p:txBody>
         </p:sp>
       </p:grpSp>
+      <p:sp>
+        <p:nvSpPr>
+          <p:cNvPr id="4" name="TextBox 3">
+            <a:extLst>
+              <a:ext uri="{FF2B5EF4-FFF2-40B4-BE49-F238E27FC236}">
+                <a16:creationId xmlns:a16="http://schemas.microsoft.com/office/drawing/2014/main" id="{58DF1805-A227-A014-E656-CA585A157D4A}"/>
+              </a:ext>
+            </a:extLst>
+          </p:cNvPr>
+          <p:cNvSpPr txBox="1"/>
+          <p:nvPr/>
+        </p:nvSpPr>
+        <p:spPr>
+          <a:xfrm>
+            <a:off x="286190" y="5994732"/>
+            <a:ext cx="6532184" cy="461665"/>
+          </a:xfrm>
+          <a:prstGeom prst="rect">
+            <a:avLst/>
+          </a:prstGeom>
+        </p:spPr>
+        <p:style>
+          <a:lnRef idx="2">
+            <a:schemeClr val="accent1">
+              <a:shade val="15000"/>
+            </a:schemeClr>
+          </a:lnRef>
+          <a:fillRef idx="1">
+            <a:schemeClr val="accent1"/>
+          </a:fillRef>
+          <a:effectRef idx="0">
+            <a:schemeClr val="accent1"/>
+          </a:effectRef>
+          <a:fontRef idx="minor">
+            <a:schemeClr val="lt1"/>
+          </a:fontRef>
+        </p:style>
+        <p:txBody>
+          <a:bodyPr wrap="square" rtlCol="0">
+            <a:spAutoFit/>
+          </a:bodyPr>
+          <a:lstStyle/>
+          <a:p>
+            <a:pPr algn="ctr"/>
+            <a:r>
+              <a:rPr lang="en-US" sz="2400" dirty="0"/>
+              <a:t>Deep learning + symbolic AI = Neuro-symbolic AI  </a:t>
+            </a:r>
+          </a:p>
+        </p:txBody>
+      </p:sp>
     </p:spTree>
     <p:extLst>
       <p:ext uri="{BB962C8B-B14F-4D97-AF65-F5344CB8AC3E}">
@@ -37524,7 +37959,7 @@
                             </p:stCondLst>
                             <p:childTnLst>
                               <p:par>
-                                <p:cTn id="13" presetID="1" presetClass="entr" presetSubtype="0" fill="hold" nodeType="clickEffect">
+                                <p:cTn id="13" presetID="1" presetClass="entr" presetSubtype="0" fill="hold" grpId="0" nodeType="clickEffect">
                                   <p:stCondLst>
                                     <p:cond delay="0"/>
                                   </p:stCondLst>
@@ -37537,7 +37972,7 @@
                                           </p:stCondLst>
                                         </p:cTn>
                                         <p:tgtEl>
-                                          <p:spTgt spid="16"/>
+                                          <p:spTgt spid="4"/>
                                         </p:tgtEl>
                                         <p:attrNameLst>
                                           <p:attrName>style.visibility</p:attrName>
@@ -37577,6 +38012,51 @@
                                     <p:set>
                                       <p:cBhvr>
                                         <p:cTn id="18" dur="1" fill="hold">
+                                          <p:stCondLst>
+                                            <p:cond delay="0"/>
+                                          </p:stCondLst>
+                                        </p:cTn>
+                                        <p:tgtEl>
+                                          <p:spTgt spid="16"/>
+                                        </p:tgtEl>
+                                        <p:attrNameLst>
+                                          <p:attrName>style.visibility</p:attrName>
+                                        </p:attrNameLst>
+                                      </p:cBhvr>
+                                      <p:to>
+                                        <p:strVal val="visible"/>
+                                      </p:to>
+                                    </p:set>
+                                  </p:childTnLst>
+                                </p:cTn>
+                              </p:par>
+                            </p:childTnLst>
+                          </p:cTn>
+                        </p:par>
+                      </p:childTnLst>
+                    </p:cTn>
+                  </p:par>
+                  <p:par>
+                    <p:cTn id="19" fill="hold">
+                      <p:stCondLst>
+                        <p:cond delay="indefinite"/>
+                      </p:stCondLst>
+                      <p:childTnLst>
+                        <p:par>
+                          <p:cTn id="20" fill="hold">
+                            <p:stCondLst>
+                              <p:cond delay="0"/>
+                            </p:stCondLst>
+                            <p:childTnLst>
+                              <p:par>
+                                <p:cTn id="21" presetID="1" presetClass="entr" presetSubtype="0" fill="hold" nodeType="clickEffect">
+                                  <p:stCondLst>
+                                    <p:cond delay="0"/>
+                                  </p:stCondLst>
+                                  <p:childTnLst>
+                                    <p:set>
+                                      <p:cBhvr>
+                                        <p:cTn id="22" dur="1" fill="hold">
                                           <p:stCondLst>
                                             <p:cond delay="0"/>
                                           </p:stCondLst>
@@ -37622,6 +38102,9 @@
         </p:cTn>
       </p:par>
     </p:tnLst>
+    <p:bldLst>
+      <p:bldP spid="4" grpId="0" animBg="1"/>
+    </p:bldLst>
   </p:timing>
 </p:sld>
 </file>
@@ -42339,7 +42822,7 @@
               </a:ln>
               <a:extLst>
                 <a:ext uri="{AF507438-7753-43e0-B8FC-AC1667EBCBE1}">
-                  <a14:hiddenEffects xmlns="" xmlns:a14="http://schemas.microsoft.com/office/drawing/2010/main">
+                  <a14:hiddenEffects xmlns:a14="http://schemas.microsoft.com/office/drawing/2010/main" xmlns="">
                     <a:effectLst>
                       <a:outerShdw dist="35921" dir="2700000" algn="ctr" rotWithShape="0">
                         <a:schemeClr val="bg2"/>
@@ -42421,14 +42904,14 @@
               <a:effectLst/>
               <a:extLst>
                 <a:ext uri="{909E8E84-426E-40dd-AFC4-6F175D3DCCD1}">
-                  <a14:hiddenFill xmlns="" xmlns:a14="http://schemas.microsoft.com/office/drawing/2010/main">
+                  <a14:hiddenFill xmlns:a14="http://schemas.microsoft.com/office/drawing/2010/main" xmlns="">
                     <a:solidFill>
                       <a:schemeClr val="accent1"/>
                     </a:solidFill>
                   </a14:hiddenFill>
                 </a:ext>
                 <a:ext uri="{91240B29-F687-4f45-9708-019B960494DF}">
-                  <a14:hiddenLine xmlns="" xmlns:a14="http://schemas.microsoft.com/office/drawing/2010/main" w="9525">
+                  <a14:hiddenLine xmlns:a14="http://schemas.microsoft.com/office/drawing/2010/main" xmlns="" w="9525">
                     <a:solidFill>
                       <a:schemeClr val="tx1"/>
                     </a:solidFill>
@@ -42438,7 +42921,7 @@
                   </a14:hiddenLine>
                 </a:ext>
                 <a:ext uri="{AF507438-7753-43e0-B8FC-AC1667EBCBE1}">
-                  <a14:hiddenEffects xmlns="" xmlns:a14="http://schemas.microsoft.com/office/drawing/2010/main">
+                  <a14:hiddenEffects xmlns:a14="http://schemas.microsoft.com/office/drawing/2010/main" xmlns="">
                     <a:effectLst>
                       <a:outerShdw dist="35921" dir="2700000" algn="ctr" rotWithShape="0">
                         <a:schemeClr val="bg2"/>
@@ -42479,7 +42962,7 @@
               <a:effectLst/>
               <a:extLst>
                 <a:ext uri="{AF507438-7753-43e0-B8FC-AC1667EBCBE1}">
-                  <a14:hiddenEffects xmlns="" xmlns:a14="http://schemas.microsoft.com/office/drawing/2010/main">
+                  <a14:hiddenEffects xmlns:a14="http://schemas.microsoft.com/office/drawing/2010/main" xmlns="">
                     <a:effectLst>
                       <a:outerShdw dist="35921" dir="2700000" algn="ctr" rotWithShape="0">
                         <a:schemeClr val="bg2"/>
@@ -42527,7 +43010,7 @@
               <a:effectLst/>
               <a:extLst>
                 <a:ext uri="{AF507438-7753-43e0-B8FC-AC1667EBCBE1}">
-                  <a14:hiddenEffects xmlns="" xmlns:a14="http://schemas.microsoft.com/office/drawing/2010/main">
+                  <a14:hiddenEffects xmlns:a14="http://schemas.microsoft.com/office/drawing/2010/main" xmlns="">
                     <a:effectLst>
                       <a:outerShdw dist="35921" dir="2700000" algn="ctr" rotWithShape="0">
                         <a:schemeClr val="bg2"/>
@@ -42595,14 +43078,14 @@
               <a:effectLst/>
               <a:extLst>
                 <a:ext uri="{909E8E84-426E-40dd-AFC4-6F175D3DCCD1}">
-                  <a14:hiddenFill xmlns="" xmlns:a14="http://schemas.microsoft.com/office/drawing/2010/main">
+                  <a14:hiddenFill xmlns:a14="http://schemas.microsoft.com/office/drawing/2010/main" xmlns="">
                     <a:solidFill>
                       <a:schemeClr val="accent1"/>
                     </a:solidFill>
                   </a14:hiddenFill>
                 </a:ext>
                 <a:ext uri="{91240B29-F687-4f45-9708-019B960494DF}">
-                  <a14:hiddenLine xmlns="" xmlns:a14="http://schemas.microsoft.com/office/drawing/2010/main" w="9525">
+                  <a14:hiddenLine xmlns:a14="http://schemas.microsoft.com/office/drawing/2010/main" xmlns="" w="9525">
                     <a:solidFill>
                       <a:schemeClr val="tx1"/>
                     </a:solidFill>
@@ -42612,7 +43095,7 @@
                   </a14:hiddenLine>
                 </a:ext>
                 <a:ext uri="{AF507438-7753-43e0-B8FC-AC1667EBCBE1}">
-                  <a14:hiddenEffects xmlns="" xmlns:a14="http://schemas.microsoft.com/office/drawing/2010/main">
+                  <a14:hiddenEffects xmlns:a14="http://schemas.microsoft.com/office/drawing/2010/main" xmlns="">
                     <a:effectLst>
                       <a:outerShdw dist="35921" dir="2700000" algn="ctr" rotWithShape="0">
                         <a:schemeClr val="bg2"/>
@@ -45602,7 +46085,7 @@
             </a:ln>
             <a:extLst>
               <a:ext uri="{AF507438-7753-43e0-B8FC-AC1667EBCBE1}">
-                <a14:hiddenEffects xmlns="" xmlns:a14="http://schemas.microsoft.com/office/drawing/2010/main">
+                <a14:hiddenEffects xmlns:a14="http://schemas.microsoft.com/office/drawing/2010/main" xmlns="">
                   <a:effectLst>
                     <a:outerShdw dist="35921" dir="2700000" algn="ctr" rotWithShape="0">
                       <a:schemeClr val="bg2"/>
@@ -45670,7 +46153,7 @@
             <a:effectLst/>
             <a:extLst>
               <a:ext uri="{AF507438-7753-43e0-B8FC-AC1667EBCBE1}">
-                <a14:hiddenEffects xmlns="" xmlns:a14="http://schemas.microsoft.com/office/drawing/2010/main">
+                <a14:hiddenEffects xmlns:a14="http://schemas.microsoft.com/office/drawing/2010/main" xmlns="">
                   <a:effectLst>
                     <a:outerShdw dist="35921" dir="2700000" algn="ctr" rotWithShape="0">
                       <a:schemeClr val="bg2"/>
@@ -45724,7 +46207,7 @@
             <a:effectLst/>
             <a:extLst>
               <a:ext uri="{AF507438-7753-43e0-B8FC-AC1667EBCBE1}">
-                <a14:hiddenEffects xmlns="" xmlns:a14="http://schemas.microsoft.com/office/drawing/2010/main">
+                <a14:hiddenEffects xmlns:a14="http://schemas.microsoft.com/office/drawing/2010/main" xmlns="">
                   <a:effectLst>
                     <a:outerShdw dist="35921" dir="2700000" algn="ctr" rotWithShape="0">
                       <a:schemeClr val="bg2"/>
@@ -45777,12 +46260,12 @@
             <a:effectLst/>
             <a:extLst>
               <a:ext uri="{909E8E84-426E-40dd-AFC4-6F175D3DCCD1}">
-                <a14:hiddenFill xmlns="" xmlns:a14="http://schemas.microsoft.com/office/drawing/2010/main">
+                <a14:hiddenFill xmlns:a14="http://schemas.microsoft.com/office/drawing/2010/main" xmlns="">
                   <a:noFill/>
                 </a14:hiddenFill>
               </a:ext>
               <a:ext uri="{AF507438-7753-43e0-B8FC-AC1667EBCBE1}">
-                <a14:hiddenEffects xmlns="" xmlns:a14="http://schemas.microsoft.com/office/drawing/2010/main">
+                <a14:hiddenEffects xmlns:a14="http://schemas.microsoft.com/office/drawing/2010/main" xmlns="">
                   <a:effectLst>
                     <a:outerShdw dist="35921" dir="2700000" algn="ctr" rotWithShape="0">
                       <a:schemeClr val="bg2"/>
@@ -45856,14 +46339,14 @@
             <a:effectLst/>
             <a:extLst>
               <a:ext uri="{909E8E84-426E-40dd-AFC4-6F175D3DCCD1}">
-                <a14:hiddenFill xmlns="" xmlns:a14="http://schemas.microsoft.com/office/drawing/2010/main">
+                <a14:hiddenFill xmlns:a14="http://schemas.microsoft.com/office/drawing/2010/main" xmlns="">
                   <a:solidFill>
                     <a:schemeClr val="accent1"/>
                   </a:solidFill>
                 </a14:hiddenFill>
               </a:ext>
               <a:ext uri="{91240B29-F687-4f45-9708-019B960494DF}">
-                <a14:hiddenLine xmlns="" xmlns:a14="http://schemas.microsoft.com/office/drawing/2010/main" w="9525">
+                <a14:hiddenLine xmlns:a14="http://schemas.microsoft.com/office/drawing/2010/main" xmlns="" w="9525">
                   <a:solidFill>
                     <a:schemeClr val="tx1"/>
                   </a:solidFill>
@@ -45873,7 +46356,7 @@
                 </a14:hiddenLine>
               </a:ext>
               <a:ext uri="{AF507438-7753-43e0-B8FC-AC1667EBCBE1}">
-                <a14:hiddenEffects xmlns="" xmlns:a14="http://schemas.microsoft.com/office/drawing/2010/main">
+                <a14:hiddenEffects xmlns:a14="http://schemas.microsoft.com/office/drawing/2010/main" xmlns="">
                   <a:effectLst>
                     <a:outerShdw dist="35921" dir="2700000" algn="ctr" rotWithShape="0">
                       <a:schemeClr val="bg2"/>
